--- a/UI/Unreal Engine Lecture - UI.pptx
+++ b/UI/Unreal Engine Lecture - UI.pptx
@@ -1,28 +1,30 @@
 
 <file path=ppt/presentation.xml><?xml version="1.0" encoding="utf-8"?>
-<p:presentation xmlns:a="http://schemas.openxmlformats.org/drawingml/2006/main" xmlns:r="http://schemas.openxmlformats.org/officeDocument/2006/relationships" xmlns:mc="http://schemas.openxmlformats.org/markup-compatibility/2006" xmlns:mv="urn:schemas-microsoft-com:mac:vml" xmlns:p="http://schemas.openxmlformats.org/presentationml/2006/main" xmlns:c="http://schemas.openxmlformats.org/drawingml/2006/chart" xmlns:dgm="http://schemas.openxmlformats.org/drawingml/2006/diagram" xmlns:o="urn:schemas-microsoft-com:office:office" xmlns:v="urn:schemas-microsoft-com:vml" xmlns:pvml="urn:schemas-microsoft-com:office:powerpoint" xmlns:com="http://schemas.openxmlformats.org/drawingml/2006/compatibility" xmlns:p14="http://schemas.microsoft.com/office/powerpoint/2010/main" xmlns:p15="http://schemas.microsoft.com/office/powerpoint/2012/main" xmlns:ahyp="http://schemas.microsoft.com/office/drawing/2018/hyperlinkcolor" autoCompressPictures="0" strictFirstAndLastChars="0" saveSubsetFonts="1">
+<p:presentation xmlns:a="http://schemas.openxmlformats.org/drawingml/2006/main" xmlns:r="http://schemas.openxmlformats.org/officeDocument/2006/relationships" xmlns:p="http://schemas.openxmlformats.org/presentationml/2006/main" strictFirstAndLastChars="0" saveSubsetFonts="1" autoCompressPictures="0">
   <p:sldMasterIdLst>
-    <p:sldMasterId id="2147483659" r:id="rId4"/>
+    <p:sldMasterId id="2147483659" r:id="rId1"/>
   </p:sldMasterIdLst>
   <p:notesMasterIdLst>
-    <p:notesMasterId r:id="rId5"/>
+    <p:notesMasterId r:id="rId14"/>
   </p:notesMasterIdLst>
   <p:sldIdLst>
-    <p:sldId id="256" r:id="rId6"/>
-    <p:sldId id="257" r:id="rId7"/>
-    <p:sldId id="258" r:id="rId8"/>
-    <p:sldId id="259" r:id="rId9"/>
-    <p:sldId id="260" r:id="rId10"/>
-    <p:sldId id="261" r:id="rId11"/>
-    <p:sldId id="262" r:id="rId12"/>
-    <p:sldId id="263" r:id="rId13"/>
-    <p:sldId id="264" r:id="rId14"/>
-    <p:sldId id="265" r:id="rId15"/>
+    <p:sldId id="256" r:id="rId2"/>
+    <p:sldId id="257" r:id="rId3"/>
+    <p:sldId id="258" r:id="rId4"/>
+    <p:sldId id="260" r:id="rId5"/>
+    <p:sldId id="259" r:id="rId6"/>
+    <p:sldId id="261" r:id="rId7"/>
+    <p:sldId id="263" r:id="rId8"/>
+    <p:sldId id="266" r:id="rId9"/>
+    <p:sldId id="264" r:id="rId10"/>
+    <p:sldId id="267" r:id="rId11"/>
+    <p:sldId id="268" r:id="rId12"/>
+    <p:sldId id="265" r:id="rId13"/>
   </p:sldIdLst>
-  <p:sldSz cy="5143500" cx="9144000"/>
+  <p:sldSz cx="9144000" cy="5143500" type="screen16x9"/>
   <p:notesSz cx="6858000" cy="9144000"/>
   <p:defaultTextStyle>
-    <a:defPPr lvl="0" marR="0" rtl="0" algn="l">
+    <a:defPPr marR="0" lvl="0" algn="l" rtl="0">
       <a:lnSpc>
         <a:spcPct val="100000"/>
       </a:lnSpc>
@@ -33,7 +35,7 @@
         <a:spcPts val="0"/>
       </a:spcAft>
     </a:defPPr>
-    <a:lvl1pPr lvl="0" marR="0" rtl="0" algn="l">
+    <a:lvl1pPr marR="0" lvl="0" algn="l" rtl="0">
       <a:lnSpc>
         <a:spcPct val="100000"/>
       </a:lnSpc>
@@ -47,7 +49,7 @@
         <a:srgbClr val="000000"/>
       </a:buClr>
       <a:buFont typeface="Arial"/>
-      <a:defRPr b="0" i="0" sz="1400" u="none" cap="none" strike="noStrike">
+      <a:defRPr sz="1400" b="0" i="0" u="none" strike="noStrike" cap="none">
         <a:solidFill>
           <a:srgbClr val="000000"/>
         </a:solidFill>
@@ -57,7 +59,7 @@
         <a:sym typeface="Arial"/>
       </a:defRPr>
     </a:lvl1pPr>
-    <a:lvl2pPr lvl="1" marR="0" rtl="0" algn="l">
+    <a:lvl2pPr marR="0" lvl="1" algn="l" rtl="0">
       <a:lnSpc>
         <a:spcPct val="100000"/>
       </a:lnSpc>
@@ -71,7 +73,7 @@
         <a:srgbClr val="000000"/>
       </a:buClr>
       <a:buFont typeface="Arial"/>
-      <a:defRPr b="0" i="0" sz="1400" u="none" cap="none" strike="noStrike">
+      <a:defRPr sz="1400" b="0" i="0" u="none" strike="noStrike" cap="none">
         <a:solidFill>
           <a:srgbClr val="000000"/>
         </a:solidFill>
@@ -81,7 +83,7 @@
         <a:sym typeface="Arial"/>
       </a:defRPr>
     </a:lvl2pPr>
-    <a:lvl3pPr lvl="2" marR="0" rtl="0" algn="l">
+    <a:lvl3pPr marR="0" lvl="2" algn="l" rtl="0">
       <a:lnSpc>
         <a:spcPct val="100000"/>
       </a:lnSpc>
@@ -95,7 +97,7 @@
         <a:srgbClr val="000000"/>
       </a:buClr>
       <a:buFont typeface="Arial"/>
-      <a:defRPr b="0" i="0" sz="1400" u="none" cap="none" strike="noStrike">
+      <a:defRPr sz="1400" b="0" i="0" u="none" strike="noStrike" cap="none">
         <a:solidFill>
           <a:srgbClr val="000000"/>
         </a:solidFill>
@@ -105,7 +107,7 @@
         <a:sym typeface="Arial"/>
       </a:defRPr>
     </a:lvl3pPr>
-    <a:lvl4pPr lvl="3" marR="0" rtl="0" algn="l">
+    <a:lvl4pPr marR="0" lvl="3" algn="l" rtl="0">
       <a:lnSpc>
         <a:spcPct val="100000"/>
       </a:lnSpc>
@@ -119,7 +121,7 @@
         <a:srgbClr val="000000"/>
       </a:buClr>
       <a:buFont typeface="Arial"/>
-      <a:defRPr b="0" i="0" sz="1400" u="none" cap="none" strike="noStrike">
+      <a:defRPr sz="1400" b="0" i="0" u="none" strike="noStrike" cap="none">
         <a:solidFill>
           <a:srgbClr val="000000"/>
         </a:solidFill>
@@ -129,7 +131,7 @@
         <a:sym typeface="Arial"/>
       </a:defRPr>
     </a:lvl4pPr>
-    <a:lvl5pPr lvl="4" marR="0" rtl="0" algn="l">
+    <a:lvl5pPr marR="0" lvl="4" algn="l" rtl="0">
       <a:lnSpc>
         <a:spcPct val="100000"/>
       </a:lnSpc>
@@ -143,7 +145,7 @@
         <a:srgbClr val="000000"/>
       </a:buClr>
       <a:buFont typeface="Arial"/>
-      <a:defRPr b="0" i="0" sz="1400" u="none" cap="none" strike="noStrike">
+      <a:defRPr sz="1400" b="0" i="0" u="none" strike="noStrike" cap="none">
         <a:solidFill>
           <a:srgbClr val="000000"/>
         </a:solidFill>
@@ -153,7 +155,7 @@
         <a:sym typeface="Arial"/>
       </a:defRPr>
     </a:lvl5pPr>
-    <a:lvl6pPr lvl="5" marR="0" rtl="0" algn="l">
+    <a:lvl6pPr marR="0" lvl="5" algn="l" rtl="0">
       <a:lnSpc>
         <a:spcPct val="100000"/>
       </a:lnSpc>
@@ -167,7 +169,7 @@
         <a:srgbClr val="000000"/>
       </a:buClr>
       <a:buFont typeface="Arial"/>
-      <a:defRPr b="0" i="0" sz="1400" u="none" cap="none" strike="noStrike">
+      <a:defRPr sz="1400" b="0" i="0" u="none" strike="noStrike" cap="none">
         <a:solidFill>
           <a:srgbClr val="000000"/>
         </a:solidFill>
@@ -177,7 +179,7 @@
         <a:sym typeface="Arial"/>
       </a:defRPr>
     </a:lvl6pPr>
-    <a:lvl7pPr lvl="6" marR="0" rtl="0" algn="l">
+    <a:lvl7pPr marR="0" lvl="6" algn="l" rtl="0">
       <a:lnSpc>
         <a:spcPct val="100000"/>
       </a:lnSpc>
@@ -191,7 +193,7 @@
         <a:srgbClr val="000000"/>
       </a:buClr>
       <a:buFont typeface="Arial"/>
-      <a:defRPr b="0" i="0" sz="1400" u="none" cap="none" strike="noStrike">
+      <a:defRPr sz="1400" b="0" i="0" u="none" strike="noStrike" cap="none">
         <a:solidFill>
           <a:srgbClr val="000000"/>
         </a:solidFill>
@@ -201,7 +203,7 @@
         <a:sym typeface="Arial"/>
       </a:defRPr>
     </a:lvl7pPr>
-    <a:lvl8pPr lvl="7" marR="0" rtl="0" algn="l">
+    <a:lvl8pPr marR="0" lvl="7" algn="l" rtl="0">
       <a:lnSpc>
         <a:spcPct val="100000"/>
       </a:lnSpc>
@@ -215,7 +217,7 @@
         <a:srgbClr val="000000"/>
       </a:buClr>
       <a:buFont typeface="Arial"/>
-      <a:defRPr b="0" i="0" sz="1400" u="none" cap="none" strike="noStrike">
+      <a:defRPr sz="1400" b="0" i="0" u="none" strike="noStrike" cap="none">
         <a:solidFill>
           <a:srgbClr val="000000"/>
         </a:solidFill>
@@ -225,7 +227,7 @@
         <a:sym typeface="Arial"/>
       </a:defRPr>
     </a:lvl8pPr>
-    <a:lvl9pPr lvl="8" marR="0" rtl="0" algn="l">
+    <a:lvl9pPr marR="0" lvl="8" algn="l" rtl="0">
       <a:lnSpc>
         <a:spcPct val="100000"/>
       </a:lnSpc>
@@ -239,7 +241,7 @@
         <a:srgbClr val="000000"/>
       </a:buClr>
       <a:buFont typeface="Arial"/>
-      <a:defRPr b="0" i="0" sz="1400" u="none" cap="none" strike="noStrike">
+      <a:defRPr sz="1400" b="0" i="0" u="none" strike="noStrike" cap="none">
         <a:solidFill>
           <a:srgbClr val="000000"/>
         </a:solidFill>
@@ -252,7 +254,7 @@
   </p:defaultTextStyle>
   <p:extLst>
     <p:ext uri="{EFAFB233-063F-42B5-8137-9DF3F51BA10A}">
-      <p15:sldGuideLst>
+      <p15:sldGuideLst xmlns:p15="http://schemas.microsoft.com/office/powerpoint/2012/main">
         <p15:guide id="1" orient="horz" pos="1620">
           <p15:clr>
             <a:srgbClr val="747775"/>
@@ -269,12 +271,29 @@
 </p:presentation>
 </file>
 
+<file path=ppt/commentAuthors.xml><?xml version="1.0" encoding="utf-8"?>
+<p:cmAuthorLst xmlns:a="http://schemas.openxmlformats.org/drawingml/2006/main" xmlns:r="http://schemas.openxmlformats.org/officeDocument/2006/relationships" xmlns:p="http://schemas.openxmlformats.org/presentationml/2006/main">
+  <p:cmAuthor id="1" name="Daniel Janak" initials="DJ" lastIdx="2" clrIdx="0">
+    <p:extLst>
+      <p:ext uri="{19B8F6BF-5375-455C-9EA6-DF929625EA0E}">
+        <p15:presenceInfo xmlns:p15="http://schemas.microsoft.com/office/powerpoint/2012/main" userId="S::djanak_a@virtuosgames.com::c433d9f9-364a-4ce6-8ac2-e546a8f4372e" providerId="AD"/>
+      </p:ext>
+    </p:extLst>
+  </p:cmAuthor>
+</p:cmAuthorLst>
+</file>
+
 <file path=ppt/notesMasters/notesMaster1.xml><?xml version="1.0" encoding="utf-8"?>
-<p:notesMaster xmlns:a="http://schemas.openxmlformats.org/drawingml/2006/main" xmlns:r="http://schemas.openxmlformats.org/officeDocument/2006/relationships" xmlns:mc="http://schemas.openxmlformats.org/markup-compatibility/2006" xmlns:mv="urn:schemas-microsoft-com:mac:vml" xmlns:p="http://schemas.openxmlformats.org/presentationml/2006/main" xmlns:c="http://schemas.openxmlformats.org/drawingml/2006/chart" xmlns:dgm="http://schemas.openxmlformats.org/drawingml/2006/diagram" xmlns:o="urn:schemas-microsoft-com:office:office" xmlns:v="urn:schemas-microsoft-com:vml" xmlns:pvml="urn:schemas-microsoft-com:office:powerpoint" xmlns:com="http://schemas.openxmlformats.org/drawingml/2006/compatibility" xmlns:p14="http://schemas.microsoft.com/office/powerpoint/2010/main" xmlns:p15="http://schemas.microsoft.com/office/powerpoint/2012/main" xmlns:ahyp="http://schemas.microsoft.com/office/drawing/2018/hyperlinkcolor">
+<p:notesMaster xmlns:a="http://schemas.openxmlformats.org/drawingml/2006/main" xmlns:r="http://schemas.openxmlformats.org/officeDocument/2006/relationships" xmlns:p="http://schemas.openxmlformats.org/presentationml/2006/main">
   <p:cSld>
+    <p:bg>
+      <p:bgRef idx="1001">
+        <a:schemeClr val="bg1"/>
+      </p:bgRef>
+    </p:bg>
     <p:spTree>
       <p:nvGrpSpPr>
-        <p:cNvPr id="2" name="Shape 2"/>
+        <p:cNvPr id="1" name="Shape 2"/>
         <p:cNvGrpSpPr/>
         <p:nvPr/>
       </p:nvGrpSpPr>
@@ -289,9 +308,11 @@
       <p:sp>
         <p:nvSpPr>
           <p:cNvPr id="3" name="Google Shape;3;n"/>
-          <p:cNvSpPr/>
+          <p:cNvSpPr>
+            <a:spLocks noGrp="1" noRot="1" noChangeAspect="1"/>
+          </p:cNvSpPr>
           <p:nvPr>
-            <p:ph idx="2" type="sldImg"/>
+            <p:ph type="sldImg" idx="2"/>
           </p:nvPr>
         </p:nvSpPr>
         <p:spPr>
@@ -300,9 +321,13 @@
             <a:ext cx="6096075" cy="3429000"/>
           </a:xfrm>
           <a:custGeom>
-            <a:rect b="b" l="l" r="r" t="t"/>
+            <a:avLst/>
+            <a:gdLst/>
+            <a:ahLst/>
+            <a:cxnLst/>
+            <a:rect l="l" t="t" r="r" b="b"/>
             <a:pathLst>
-              <a:path extrusionOk="0" h="120000" w="120000">
+              <a:path w="120000" h="120000" extrusionOk="0">
                 <a:moveTo>
                   <a:pt x="0" y="0"/>
                 </a:moveTo>
@@ -320,23 +345,25 @@
             </a:pathLst>
           </a:custGeom>
           <a:noFill/>
-          <a:ln cap="flat" cmpd="sng" w="9525">
+          <a:ln w="9525" cap="flat" cmpd="sng">
             <a:solidFill>
               <a:srgbClr val="000000"/>
             </a:solidFill>
             <a:prstDash val="solid"/>
             <a:round/>
-            <a:headEnd len="sm" w="sm" type="none"/>
-            <a:tailEnd len="sm" w="sm" type="none"/>
+            <a:headEnd type="none" w="sm" len="sm"/>
+            <a:tailEnd type="none" w="sm" len="sm"/>
           </a:ln>
         </p:spPr>
       </p:sp>
       <p:sp>
         <p:nvSpPr>
           <p:cNvPr id="4" name="Google Shape;4;n"/>
-          <p:cNvSpPr txBox="1"/>
+          <p:cNvSpPr txBox="1">
+            <a:spLocks noGrp="1"/>
+          </p:cNvSpPr>
           <p:nvPr>
-            <p:ph idx="1" type="body"/>
+            <p:ph type="body" idx="1"/>
           </p:nvPr>
         </p:nvSpPr>
         <p:spPr>
@@ -353,11 +380,11 @@
           </a:ln>
         </p:spPr>
         <p:txBody>
-          <a:bodyPr anchorCtr="0" anchor="t" bIns="91425" lIns="91425" spcFirstLastPara="1" rIns="91425" wrap="square" tIns="91425">
+          <a:bodyPr spcFirstLastPara="1" wrap="square" lIns="91425" tIns="91425" rIns="91425" bIns="91425" anchor="t" anchorCtr="0">
             <a:noAutofit/>
           </a:bodyPr>
           <a:lstStyle>
-            <a:lvl1pPr indent="-298450" lvl="0" marL="457200">
+            <a:lvl1pPr marL="457200" lvl="0" indent="-298450">
               <a:spcBef>
                 <a:spcPts val="0"/>
               </a:spcBef>
@@ -368,7 +395,7 @@
               <a:buChar char="●"/>
               <a:defRPr sz="1100"/>
             </a:lvl1pPr>
-            <a:lvl2pPr indent="-298450" lvl="1" marL="914400">
+            <a:lvl2pPr marL="914400" lvl="1" indent="-298450">
               <a:spcBef>
                 <a:spcPts val="0"/>
               </a:spcBef>
@@ -379,7 +406,7 @@
               <a:buChar char="○"/>
               <a:defRPr sz="1100"/>
             </a:lvl2pPr>
-            <a:lvl3pPr indent="-298450" lvl="2" marL="1371600">
+            <a:lvl3pPr marL="1371600" lvl="2" indent="-298450">
               <a:spcBef>
                 <a:spcPts val="0"/>
               </a:spcBef>
@@ -390,7 +417,7 @@
               <a:buChar char="■"/>
               <a:defRPr sz="1100"/>
             </a:lvl3pPr>
-            <a:lvl4pPr indent="-298450" lvl="3" marL="1828800">
+            <a:lvl4pPr marL="1828800" lvl="3" indent="-298450">
               <a:spcBef>
                 <a:spcPts val="0"/>
               </a:spcBef>
@@ -401,7 +428,7 @@
               <a:buChar char="●"/>
               <a:defRPr sz="1100"/>
             </a:lvl4pPr>
-            <a:lvl5pPr indent="-298450" lvl="4" marL="2286000">
+            <a:lvl5pPr marL="2286000" lvl="4" indent="-298450">
               <a:spcBef>
                 <a:spcPts val="0"/>
               </a:spcBef>
@@ -412,7 +439,7 @@
               <a:buChar char="○"/>
               <a:defRPr sz="1100"/>
             </a:lvl5pPr>
-            <a:lvl6pPr indent="-298450" lvl="5" marL="2743200">
+            <a:lvl6pPr marL="2743200" lvl="5" indent="-298450">
               <a:spcBef>
                 <a:spcPts val="0"/>
               </a:spcBef>
@@ -423,7 +450,7 @@
               <a:buChar char="■"/>
               <a:defRPr sz="1100"/>
             </a:lvl6pPr>
-            <a:lvl7pPr indent="-298450" lvl="6" marL="3200400">
+            <a:lvl7pPr marL="3200400" lvl="6" indent="-298450">
               <a:spcBef>
                 <a:spcPts val="0"/>
               </a:spcBef>
@@ -434,7 +461,7 @@
               <a:buChar char="●"/>
               <a:defRPr sz="1100"/>
             </a:lvl7pPr>
-            <a:lvl8pPr indent="-298450" lvl="7" marL="3657600">
+            <a:lvl8pPr marL="3657600" lvl="7" indent="-298450">
               <a:spcBef>
                 <a:spcPts val="0"/>
               </a:spcBef>
@@ -445,7 +472,7 @@
               <a:buChar char="○"/>
               <a:defRPr sz="1100"/>
             </a:lvl8pPr>
-            <a:lvl9pPr indent="-298450" lvl="8" marL="4114800">
+            <a:lvl9pPr marL="4114800" lvl="8" indent="-298450">
               <a:spcBef>
                 <a:spcPts val="0"/>
               </a:spcBef>
@@ -457,14 +484,16 @@
               <a:defRPr sz="1100"/>
             </a:lvl9pPr>
           </a:lstStyle>
-          <a:p/>
+          <a:p>
+            <a:endParaRPr/>
+          </a:p>
         </p:txBody>
       </p:sp>
     </p:spTree>
   </p:cSld>
-  <p:clrMap accent1="accent1" accent2="accent2" accent3="accent3" accent4="accent4" accent5="accent5" accent6="accent6" bg1="lt1" bg2="dk2" tx1="dk1" tx2="lt2" folHlink="folHlink" hlink="hlink"/>
+  <p:clrMap bg1="lt1" tx1="dk1" bg2="dk2" tx2="lt2" accent1="accent1" accent2="accent2" accent3="accent3" accent4="accent4" accent5="accent5" accent6="accent6" hlink="hlink" folHlink="folHlink"/>
   <p:notesStyle>
-    <a:defPPr lvl="0" marR="0" rtl="0" algn="l">
+    <a:defPPr marR="0" lvl="0" algn="l" rtl="0">
       <a:lnSpc>
         <a:spcPct val="100000"/>
       </a:lnSpc>
@@ -475,7 +504,7 @@
         <a:spcPts val="0"/>
       </a:spcAft>
     </a:defPPr>
-    <a:lvl1pPr lvl="0" marR="0" rtl="0" algn="l">
+    <a:lvl1pPr marR="0" lvl="0" algn="l" rtl="0">
       <a:lnSpc>
         <a:spcPct val="100000"/>
       </a:lnSpc>
@@ -489,7 +518,7 @@
         <a:srgbClr val="000000"/>
       </a:buClr>
       <a:buFont typeface="Arial"/>
-      <a:defRPr b="0" i="0" sz="1400" u="none" cap="none" strike="noStrike">
+      <a:defRPr sz="1400" b="0" i="0" u="none" strike="noStrike" cap="none">
         <a:solidFill>
           <a:srgbClr val="000000"/>
         </a:solidFill>
@@ -499,7 +528,7 @@
         <a:sym typeface="Arial"/>
       </a:defRPr>
     </a:lvl1pPr>
-    <a:lvl2pPr lvl="1" marR="0" rtl="0" algn="l">
+    <a:lvl2pPr marR="0" lvl="1" algn="l" rtl="0">
       <a:lnSpc>
         <a:spcPct val="100000"/>
       </a:lnSpc>
@@ -513,7 +542,7 @@
         <a:srgbClr val="000000"/>
       </a:buClr>
       <a:buFont typeface="Arial"/>
-      <a:defRPr b="0" i="0" sz="1400" u="none" cap="none" strike="noStrike">
+      <a:defRPr sz="1400" b="0" i="0" u="none" strike="noStrike" cap="none">
         <a:solidFill>
           <a:srgbClr val="000000"/>
         </a:solidFill>
@@ -523,7 +552,7 @@
         <a:sym typeface="Arial"/>
       </a:defRPr>
     </a:lvl2pPr>
-    <a:lvl3pPr lvl="2" marR="0" rtl="0" algn="l">
+    <a:lvl3pPr marR="0" lvl="2" algn="l" rtl="0">
       <a:lnSpc>
         <a:spcPct val="100000"/>
       </a:lnSpc>
@@ -537,7 +566,7 @@
         <a:srgbClr val="000000"/>
       </a:buClr>
       <a:buFont typeface="Arial"/>
-      <a:defRPr b="0" i="0" sz="1400" u="none" cap="none" strike="noStrike">
+      <a:defRPr sz="1400" b="0" i="0" u="none" strike="noStrike" cap="none">
         <a:solidFill>
           <a:srgbClr val="000000"/>
         </a:solidFill>
@@ -547,7 +576,7 @@
         <a:sym typeface="Arial"/>
       </a:defRPr>
     </a:lvl3pPr>
-    <a:lvl4pPr lvl="3" marR="0" rtl="0" algn="l">
+    <a:lvl4pPr marR="0" lvl="3" algn="l" rtl="0">
       <a:lnSpc>
         <a:spcPct val="100000"/>
       </a:lnSpc>
@@ -561,7 +590,7 @@
         <a:srgbClr val="000000"/>
       </a:buClr>
       <a:buFont typeface="Arial"/>
-      <a:defRPr b="0" i="0" sz="1400" u="none" cap="none" strike="noStrike">
+      <a:defRPr sz="1400" b="0" i="0" u="none" strike="noStrike" cap="none">
         <a:solidFill>
           <a:srgbClr val="000000"/>
         </a:solidFill>
@@ -571,7 +600,7 @@
         <a:sym typeface="Arial"/>
       </a:defRPr>
     </a:lvl4pPr>
-    <a:lvl5pPr lvl="4" marR="0" rtl="0" algn="l">
+    <a:lvl5pPr marR="0" lvl="4" algn="l" rtl="0">
       <a:lnSpc>
         <a:spcPct val="100000"/>
       </a:lnSpc>
@@ -585,7 +614,7 @@
         <a:srgbClr val="000000"/>
       </a:buClr>
       <a:buFont typeface="Arial"/>
-      <a:defRPr b="0" i="0" sz="1400" u="none" cap="none" strike="noStrike">
+      <a:defRPr sz="1400" b="0" i="0" u="none" strike="noStrike" cap="none">
         <a:solidFill>
           <a:srgbClr val="000000"/>
         </a:solidFill>
@@ -595,7 +624,7 @@
         <a:sym typeface="Arial"/>
       </a:defRPr>
     </a:lvl5pPr>
-    <a:lvl6pPr lvl="5" marR="0" rtl="0" algn="l">
+    <a:lvl6pPr marR="0" lvl="5" algn="l" rtl="0">
       <a:lnSpc>
         <a:spcPct val="100000"/>
       </a:lnSpc>
@@ -609,7 +638,7 @@
         <a:srgbClr val="000000"/>
       </a:buClr>
       <a:buFont typeface="Arial"/>
-      <a:defRPr b="0" i="0" sz="1400" u="none" cap="none" strike="noStrike">
+      <a:defRPr sz="1400" b="0" i="0" u="none" strike="noStrike" cap="none">
         <a:solidFill>
           <a:srgbClr val="000000"/>
         </a:solidFill>
@@ -619,7 +648,7 @@
         <a:sym typeface="Arial"/>
       </a:defRPr>
     </a:lvl6pPr>
-    <a:lvl7pPr lvl="6" marR="0" rtl="0" algn="l">
+    <a:lvl7pPr marR="0" lvl="6" algn="l" rtl="0">
       <a:lnSpc>
         <a:spcPct val="100000"/>
       </a:lnSpc>
@@ -633,7 +662,7 @@
         <a:srgbClr val="000000"/>
       </a:buClr>
       <a:buFont typeface="Arial"/>
-      <a:defRPr b="0" i="0" sz="1400" u="none" cap="none" strike="noStrike">
+      <a:defRPr sz="1400" b="0" i="0" u="none" strike="noStrike" cap="none">
         <a:solidFill>
           <a:srgbClr val="000000"/>
         </a:solidFill>
@@ -643,7 +672,7 @@
         <a:sym typeface="Arial"/>
       </a:defRPr>
     </a:lvl7pPr>
-    <a:lvl8pPr lvl="7" marR="0" rtl="0" algn="l">
+    <a:lvl8pPr marR="0" lvl="7" algn="l" rtl="0">
       <a:lnSpc>
         <a:spcPct val="100000"/>
       </a:lnSpc>
@@ -657,7 +686,7 @@
         <a:srgbClr val="000000"/>
       </a:buClr>
       <a:buFont typeface="Arial"/>
-      <a:defRPr b="0" i="0" sz="1400" u="none" cap="none" strike="noStrike">
+      <a:defRPr sz="1400" b="0" i="0" u="none" strike="noStrike" cap="none">
         <a:solidFill>
           <a:srgbClr val="000000"/>
         </a:solidFill>
@@ -667,7 +696,7 @@
         <a:sym typeface="Arial"/>
       </a:defRPr>
     </a:lvl8pPr>
-    <a:lvl9pPr lvl="8" marR="0" rtl="0" algn="l">
+    <a:lvl9pPr marR="0" lvl="8" algn="l" rtl="0">
       <a:lnSpc>
         <a:spcPct val="100000"/>
       </a:lnSpc>
@@ -681,7 +710,7 @@
         <a:srgbClr val="000000"/>
       </a:buClr>
       <a:buFont typeface="Arial"/>
-      <a:defRPr b="0" i="0" sz="1400" u="none" cap="none" strike="noStrike">
+      <a:defRPr sz="1400" b="0" i="0" u="none" strike="noStrike" cap="none">
         <a:solidFill>
           <a:srgbClr val="000000"/>
         </a:solidFill>
@@ -696,11 +725,11 @@
 </file>
 
 <file path=ppt/notesSlides/notesSlide1.xml><?xml version="1.0" encoding="utf-8"?>
-<p:notes xmlns:a="http://schemas.openxmlformats.org/drawingml/2006/main" xmlns:r="http://schemas.openxmlformats.org/officeDocument/2006/relationships" xmlns:mc="http://schemas.openxmlformats.org/markup-compatibility/2006" xmlns:mv="urn:schemas-microsoft-com:mac:vml" xmlns:p="http://schemas.openxmlformats.org/presentationml/2006/main" xmlns:c="http://schemas.openxmlformats.org/drawingml/2006/chart" xmlns:dgm="http://schemas.openxmlformats.org/drawingml/2006/diagram" xmlns:o="urn:schemas-microsoft-com:office:office" xmlns:v="urn:schemas-microsoft-com:vml" xmlns:pvml="urn:schemas-microsoft-com:office:powerpoint" xmlns:com="http://schemas.openxmlformats.org/drawingml/2006/compatibility" xmlns:p14="http://schemas.microsoft.com/office/powerpoint/2010/main" xmlns:p15="http://schemas.microsoft.com/office/powerpoint/2012/main" xmlns:ahyp="http://schemas.microsoft.com/office/drawing/2018/hyperlinkcolor" showMasterPhAnim="0" showMasterSp="0">
+<p:notes xmlns:a="http://schemas.openxmlformats.org/drawingml/2006/main" xmlns:r="http://schemas.openxmlformats.org/officeDocument/2006/relationships" xmlns:p="http://schemas.openxmlformats.org/presentationml/2006/main" showMasterSp="0" showMasterPhAnim="0">
   <p:cSld>
     <p:spTree>
       <p:nvGrpSpPr>
-        <p:cNvPr id="52" name="Shape 52"/>
+        <p:cNvPr id="1" name="Shape 52"/>
         <p:cNvGrpSpPr/>
         <p:nvPr/>
       </p:nvGrpSpPr>
@@ -715,20 +744,26 @@
       <p:sp>
         <p:nvSpPr>
           <p:cNvPr id="53" name="Google Shape;53;g27b3fe96102_1_86:notes"/>
-          <p:cNvSpPr/>
+          <p:cNvSpPr>
+            <a:spLocks noGrp="1" noRot="1" noChangeAspect="1"/>
+          </p:cNvSpPr>
           <p:nvPr>
-            <p:ph idx="2" type="sldImg"/>
+            <p:ph type="sldImg" idx="2"/>
           </p:nvPr>
         </p:nvSpPr>
         <p:spPr>
           <a:xfrm>
-            <a:off x="381300" y="685800"/>
+            <a:off x="381000" y="685800"/>
             <a:ext cx="6096000" cy="3429000"/>
           </a:xfrm>
           <a:custGeom>
-            <a:rect b="b" l="l" r="r" t="t"/>
+            <a:avLst/>
+            <a:gdLst/>
+            <a:ahLst/>
+            <a:cxnLst/>
+            <a:rect l="l" t="t" r="r" b="b"/>
             <a:pathLst>
-              <a:path extrusionOk="0" h="120000" w="120000">
+              <a:path w="120000" h="120000" extrusionOk="0">
                 <a:moveTo>
                   <a:pt x="0" y="0"/>
                 </a:moveTo>
@@ -750,9 +785,11 @@
       <p:sp>
         <p:nvSpPr>
           <p:cNvPr id="54" name="Google Shape;54;g27b3fe96102_1_86:notes"/>
-          <p:cNvSpPr txBox="1"/>
+          <p:cNvSpPr txBox="1">
+            <a:spLocks noGrp="1"/>
+          </p:cNvSpPr>
           <p:nvPr>
-            <p:ph idx="1" type="body"/>
+            <p:ph type="body" idx="1"/>
           </p:nvPr>
         </p:nvSpPr>
         <p:spPr>
@@ -765,12 +802,12 @@
           </a:prstGeom>
         </p:spPr>
         <p:txBody>
-          <a:bodyPr anchorCtr="0" anchor="t" bIns="91425" lIns="91425" spcFirstLastPara="1" rIns="91425" wrap="square" tIns="91425">
+          <a:bodyPr spcFirstLastPara="1" wrap="square" lIns="91425" tIns="91425" rIns="91425" bIns="91425" anchor="t" anchorCtr="0">
             <a:noAutofit/>
           </a:bodyPr>
           <a:lstStyle/>
           <a:p>
-            <a:pPr indent="0" lvl="0" marL="0" rtl="0" algn="l">
+            <a:pPr marL="0" lvl="0" indent="0" algn="l" rtl="0">
               <a:spcBef>
                 <a:spcPts val="0"/>
               </a:spcBef>
@@ -779,9 +816,6 @@
               </a:spcAft>
               <a:buNone/>
             </a:pPr>
-            <a:r>
-              <a:t/>
-            </a:r>
             <a:endParaRPr/>
           </a:p>
         </p:txBody>
@@ -794,12 +828,740 @@
 </p:notes>
 </file>
 
-<file path=ppt/notesSlides/notesSlide10.xml><?xml version="1.0" encoding="utf-8"?>
-<p:notes xmlns:a="http://schemas.openxmlformats.org/drawingml/2006/main" xmlns:r="http://schemas.openxmlformats.org/officeDocument/2006/relationships" xmlns:mc="http://schemas.openxmlformats.org/markup-compatibility/2006" xmlns:mv="urn:schemas-microsoft-com:mac:vml" xmlns:p="http://schemas.openxmlformats.org/presentationml/2006/main" xmlns:c="http://schemas.openxmlformats.org/drawingml/2006/chart" xmlns:dgm="http://schemas.openxmlformats.org/drawingml/2006/diagram" xmlns:o="urn:schemas-microsoft-com:office:office" xmlns:v="urn:schemas-microsoft-com:vml" xmlns:pvml="urn:schemas-microsoft-com:office:powerpoint" xmlns:com="http://schemas.openxmlformats.org/drawingml/2006/compatibility" xmlns:p14="http://schemas.microsoft.com/office/powerpoint/2010/main" xmlns:p15="http://schemas.microsoft.com/office/powerpoint/2012/main" xmlns:ahyp="http://schemas.microsoft.com/office/drawing/2018/hyperlinkcolor" showMasterPhAnim="0" showMasterSp="0">
+<file path=ppt/notesSlides/notesSlide2.xml><?xml version="1.0" encoding="utf-8"?>
+<p:notes xmlns:a="http://schemas.openxmlformats.org/drawingml/2006/main" xmlns:r="http://schemas.openxmlformats.org/officeDocument/2006/relationships" xmlns:p="http://schemas.openxmlformats.org/presentationml/2006/main" showMasterSp="0" showMasterPhAnim="0">
   <p:cSld>
     <p:spTree>
       <p:nvGrpSpPr>
-        <p:cNvPr id="134" name="Shape 134"/>
+        <p:cNvPr id="1" name="Shape 59"/>
+        <p:cNvGrpSpPr/>
+        <p:nvPr/>
+      </p:nvGrpSpPr>
+      <p:grpSpPr>
+        <a:xfrm>
+          <a:off x="0" y="0"/>
+          <a:ext cx="0" cy="0"/>
+          <a:chOff x="0" y="0"/>
+          <a:chExt cx="0" cy="0"/>
+        </a:xfrm>
+      </p:grpSpPr>
+      <p:sp>
+        <p:nvSpPr>
+          <p:cNvPr id="60" name="Google Shape;60;g27b3fe96102_1_92:notes"/>
+          <p:cNvSpPr>
+            <a:spLocks noGrp="1" noRot="1" noChangeAspect="1"/>
+          </p:cNvSpPr>
+          <p:nvPr>
+            <p:ph type="sldImg" idx="2"/>
+          </p:nvPr>
+        </p:nvSpPr>
+        <p:spPr>
+          <a:xfrm>
+            <a:off x="381000" y="685800"/>
+            <a:ext cx="6096000" cy="3429000"/>
+          </a:xfrm>
+          <a:custGeom>
+            <a:avLst/>
+            <a:gdLst/>
+            <a:ahLst/>
+            <a:cxnLst/>
+            <a:rect l="l" t="t" r="r" b="b"/>
+            <a:pathLst>
+              <a:path w="120000" h="120000" extrusionOk="0">
+                <a:moveTo>
+                  <a:pt x="0" y="0"/>
+                </a:moveTo>
+                <a:lnTo>
+                  <a:pt x="120000" y="0"/>
+                </a:lnTo>
+                <a:lnTo>
+                  <a:pt x="120000" y="120000"/>
+                </a:lnTo>
+                <a:lnTo>
+                  <a:pt x="0" y="120000"/>
+                </a:lnTo>
+                <a:close/>
+              </a:path>
+            </a:pathLst>
+          </a:custGeom>
+        </p:spPr>
+      </p:sp>
+      <p:sp>
+        <p:nvSpPr>
+          <p:cNvPr id="61" name="Google Shape;61;g27b3fe96102_1_92:notes"/>
+          <p:cNvSpPr txBox="1">
+            <a:spLocks noGrp="1"/>
+          </p:cNvSpPr>
+          <p:nvPr>
+            <p:ph type="body" idx="1"/>
+          </p:nvPr>
+        </p:nvSpPr>
+        <p:spPr>
+          <a:xfrm>
+            <a:off x="685800" y="4343400"/>
+            <a:ext cx="5486400" cy="4114800"/>
+          </a:xfrm>
+          <a:prstGeom prst="rect">
+            <a:avLst/>
+          </a:prstGeom>
+        </p:spPr>
+        <p:txBody>
+          <a:bodyPr spcFirstLastPara="1" wrap="square" lIns="91425" tIns="91425" rIns="91425" bIns="91425" anchor="t" anchorCtr="0">
+            <a:noAutofit/>
+          </a:bodyPr>
+          <a:lstStyle/>
+          <a:p>
+            <a:pPr marL="0" lvl="0" indent="0" algn="l" rtl="0">
+              <a:spcBef>
+                <a:spcPts val="0"/>
+              </a:spcBef>
+              <a:spcAft>
+                <a:spcPts val="0"/>
+              </a:spcAft>
+              <a:buNone/>
+            </a:pPr>
+            <a:endParaRPr/>
+          </a:p>
+        </p:txBody>
+      </p:sp>
+    </p:spTree>
+  </p:cSld>
+  <p:clrMapOvr>
+    <a:masterClrMapping/>
+  </p:clrMapOvr>
+</p:notes>
+</file>
+
+<file path=ppt/notesSlides/notesSlide3.xml><?xml version="1.0" encoding="utf-8"?>
+<p:notes xmlns:a="http://schemas.openxmlformats.org/drawingml/2006/main" xmlns:r="http://schemas.openxmlformats.org/officeDocument/2006/relationships" xmlns:p="http://schemas.openxmlformats.org/presentationml/2006/main" showMasterSp="0" showMasterPhAnim="0">
+  <p:cSld>
+    <p:spTree>
+      <p:nvGrpSpPr>
+        <p:cNvPr id="1" name="Shape 66"/>
+        <p:cNvGrpSpPr/>
+        <p:nvPr/>
+      </p:nvGrpSpPr>
+      <p:grpSpPr>
+        <a:xfrm>
+          <a:off x="0" y="0"/>
+          <a:ext cx="0" cy="0"/>
+          <a:chOff x="0" y="0"/>
+          <a:chExt cx="0" cy="0"/>
+        </a:xfrm>
+      </p:grpSpPr>
+      <p:sp>
+        <p:nvSpPr>
+          <p:cNvPr id="67" name="Google Shape;67;g2a5809dcb51_0_11:notes"/>
+          <p:cNvSpPr>
+            <a:spLocks noGrp="1" noRot="1" noChangeAspect="1"/>
+          </p:cNvSpPr>
+          <p:nvPr>
+            <p:ph type="sldImg" idx="2"/>
+          </p:nvPr>
+        </p:nvSpPr>
+        <p:spPr>
+          <a:xfrm>
+            <a:off x="381000" y="685800"/>
+            <a:ext cx="6096000" cy="3429000"/>
+          </a:xfrm>
+          <a:custGeom>
+            <a:avLst/>
+            <a:gdLst/>
+            <a:ahLst/>
+            <a:cxnLst/>
+            <a:rect l="l" t="t" r="r" b="b"/>
+            <a:pathLst>
+              <a:path w="120000" h="120000" extrusionOk="0">
+                <a:moveTo>
+                  <a:pt x="0" y="0"/>
+                </a:moveTo>
+                <a:lnTo>
+                  <a:pt x="120000" y="0"/>
+                </a:lnTo>
+                <a:lnTo>
+                  <a:pt x="120000" y="120000"/>
+                </a:lnTo>
+                <a:lnTo>
+                  <a:pt x="0" y="120000"/>
+                </a:lnTo>
+                <a:close/>
+              </a:path>
+            </a:pathLst>
+          </a:custGeom>
+        </p:spPr>
+      </p:sp>
+      <p:sp>
+        <p:nvSpPr>
+          <p:cNvPr id="68" name="Google Shape;68;g2a5809dcb51_0_11:notes"/>
+          <p:cNvSpPr txBox="1">
+            <a:spLocks noGrp="1"/>
+          </p:cNvSpPr>
+          <p:nvPr>
+            <p:ph type="body" idx="1"/>
+          </p:nvPr>
+        </p:nvSpPr>
+        <p:spPr>
+          <a:xfrm>
+            <a:off x="685800" y="4343400"/>
+            <a:ext cx="5486400" cy="4114800"/>
+          </a:xfrm>
+          <a:prstGeom prst="rect">
+            <a:avLst/>
+          </a:prstGeom>
+        </p:spPr>
+        <p:txBody>
+          <a:bodyPr spcFirstLastPara="1" wrap="square" lIns="91425" tIns="91425" rIns="91425" bIns="91425" anchor="t" anchorCtr="0">
+            <a:noAutofit/>
+          </a:bodyPr>
+          <a:lstStyle/>
+          <a:p>
+            <a:pPr marL="0" lvl="0" indent="0" algn="l" rtl="0">
+              <a:spcBef>
+                <a:spcPts val="0"/>
+              </a:spcBef>
+              <a:spcAft>
+                <a:spcPts val="0"/>
+              </a:spcAft>
+              <a:buNone/>
+            </a:pPr>
+            <a:endParaRPr/>
+          </a:p>
+        </p:txBody>
+      </p:sp>
+    </p:spTree>
+  </p:cSld>
+  <p:clrMapOvr>
+    <a:masterClrMapping/>
+  </p:clrMapOvr>
+</p:notes>
+</file>
+
+<file path=ppt/notesSlides/notesSlide4.xml><?xml version="1.0" encoding="utf-8"?>
+<p:notes xmlns:a="http://schemas.openxmlformats.org/drawingml/2006/main" xmlns:r="http://schemas.openxmlformats.org/officeDocument/2006/relationships" xmlns:p="http://schemas.openxmlformats.org/presentationml/2006/main" showMasterSp="0" showMasterPhAnim="0">
+  <p:cSld>
+    <p:spTree>
+      <p:nvGrpSpPr>
+        <p:cNvPr id="1" name="Shape 82"/>
+        <p:cNvGrpSpPr/>
+        <p:nvPr/>
+      </p:nvGrpSpPr>
+      <p:grpSpPr>
+        <a:xfrm>
+          <a:off x="0" y="0"/>
+          <a:ext cx="0" cy="0"/>
+          <a:chOff x="0" y="0"/>
+          <a:chExt cx="0" cy="0"/>
+        </a:xfrm>
+      </p:grpSpPr>
+      <p:sp>
+        <p:nvSpPr>
+          <p:cNvPr id="83" name="Google Shape;83;g2a5809dcb51_0_38:notes"/>
+          <p:cNvSpPr>
+            <a:spLocks noGrp="1" noRot="1" noChangeAspect="1"/>
+          </p:cNvSpPr>
+          <p:nvPr>
+            <p:ph type="sldImg" idx="2"/>
+          </p:nvPr>
+        </p:nvSpPr>
+        <p:spPr>
+          <a:xfrm>
+            <a:off x="381000" y="685800"/>
+            <a:ext cx="6096000" cy="3429000"/>
+          </a:xfrm>
+          <a:custGeom>
+            <a:avLst/>
+            <a:gdLst/>
+            <a:ahLst/>
+            <a:cxnLst/>
+            <a:rect l="l" t="t" r="r" b="b"/>
+            <a:pathLst>
+              <a:path w="120000" h="120000" extrusionOk="0">
+                <a:moveTo>
+                  <a:pt x="0" y="0"/>
+                </a:moveTo>
+                <a:lnTo>
+                  <a:pt x="120000" y="0"/>
+                </a:lnTo>
+                <a:lnTo>
+                  <a:pt x="120000" y="120000"/>
+                </a:lnTo>
+                <a:lnTo>
+                  <a:pt x="0" y="120000"/>
+                </a:lnTo>
+                <a:close/>
+              </a:path>
+            </a:pathLst>
+          </a:custGeom>
+        </p:spPr>
+      </p:sp>
+      <p:sp>
+        <p:nvSpPr>
+          <p:cNvPr id="84" name="Google Shape;84;g2a5809dcb51_0_38:notes"/>
+          <p:cNvSpPr txBox="1">
+            <a:spLocks noGrp="1"/>
+          </p:cNvSpPr>
+          <p:nvPr>
+            <p:ph type="body" idx="1"/>
+          </p:nvPr>
+        </p:nvSpPr>
+        <p:spPr>
+          <a:xfrm>
+            <a:off x="685800" y="4343400"/>
+            <a:ext cx="5486400" cy="4114800"/>
+          </a:xfrm>
+          <a:prstGeom prst="rect">
+            <a:avLst/>
+          </a:prstGeom>
+        </p:spPr>
+        <p:txBody>
+          <a:bodyPr spcFirstLastPara="1" wrap="square" lIns="91425" tIns="91425" rIns="91425" bIns="91425" anchor="t" anchorCtr="0">
+            <a:noAutofit/>
+          </a:bodyPr>
+          <a:lstStyle/>
+          <a:p>
+            <a:pPr marL="0" lvl="0" indent="0" algn="l" rtl="0">
+              <a:spcBef>
+                <a:spcPts val="0"/>
+              </a:spcBef>
+              <a:spcAft>
+                <a:spcPts val="0"/>
+              </a:spcAft>
+              <a:buNone/>
+            </a:pPr>
+            <a:endParaRPr/>
+          </a:p>
+        </p:txBody>
+      </p:sp>
+    </p:spTree>
+  </p:cSld>
+  <p:clrMapOvr>
+    <a:masterClrMapping/>
+  </p:clrMapOvr>
+</p:notes>
+</file>
+
+<file path=ppt/notesSlides/notesSlide5.xml><?xml version="1.0" encoding="utf-8"?>
+<p:notes xmlns:a="http://schemas.openxmlformats.org/drawingml/2006/main" xmlns:r="http://schemas.openxmlformats.org/officeDocument/2006/relationships" xmlns:p="http://schemas.openxmlformats.org/presentationml/2006/main" showMasterSp="0" showMasterPhAnim="0">
+  <p:cSld>
+    <p:spTree>
+      <p:nvGrpSpPr>
+        <p:cNvPr id="1" name="Shape 75"/>
+        <p:cNvGrpSpPr/>
+        <p:nvPr/>
+      </p:nvGrpSpPr>
+      <p:grpSpPr>
+        <a:xfrm>
+          <a:off x="0" y="0"/>
+          <a:ext cx="0" cy="0"/>
+          <a:chOff x="0" y="0"/>
+          <a:chExt cx="0" cy="0"/>
+        </a:xfrm>
+      </p:grpSpPr>
+      <p:sp>
+        <p:nvSpPr>
+          <p:cNvPr id="76" name="Google Shape;76;g2a5809dcb51_0_1:notes"/>
+          <p:cNvSpPr>
+            <a:spLocks noGrp="1" noRot="1" noChangeAspect="1"/>
+          </p:cNvSpPr>
+          <p:nvPr>
+            <p:ph type="sldImg" idx="2"/>
+          </p:nvPr>
+        </p:nvSpPr>
+        <p:spPr>
+          <a:xfrm>
+            <a:off x="381000" y="685800"/>
+            <a:ext cx="6096000" cy="3429000"/>
+          </a:xfrm>
+          <a:custGeom>
+            <a:avLst/>
+            <a:gdLst/>
+            <a:ahLst/>
+            <a:cxnLst/>
+            <a:rect l="l" t="t" r="r" b="b"/>
+            <a:pathLst>
+              <a:path w="120000" h="120000" extrusionOk="0">
+                <a:moveTo>
+                  <a:pt x="0" y="0"/>
+                </a:moveTo>
+                <a:lnTo>
+                  <a:pt x="120000" y="0"/>
+                </a:lnTo>
+                <a:lnTo>
+                  <a:pt x="120000" y="120000"/>
+                </a:lnTo>
+                <a:lnTo>
+                  <a:pt x="0" y="120000"/>
+                </a:lnTo>
+                <a:close/>
+              </a:path>
+            </a:pathLst>
+          </a:custGeom>
+        </p:spPr>
+      </p:sp>
+      <p:sp>
+        <p:nvSpPr>
+          <p:cNvPr id="77" name="Google Shape;77;g2a5809dcb51_0_1:notes"/>
+          <p:cNvSpPr txBox="1">
+            <a:spLocks noGrp="1"/>
+          </p:cNvSpPr>
+          <p:nvPr>
+            <p:ph type="body" idx="1"/>
+          </p:nvPr>
+        </p:nvSpPr>
+        <p:spPr>
+          <a:xfrm>
+            <a:off x="685800" y="4343400"/>
+            <a:ext cx="5486400" cy="4114800"/>
+          </a:xfrm>
+          <a:prstGeom prst="rect">
+            <a:avLst/>
+          </a:prstGeom>
+        </p:spPr>
+        <p:txBody>
+          <a:bodyPr spcFirstLastPara="1" wrap="square" lIns="91425" tIns="91425" rIns="91425" bIns="91425" anchor="t" anchorCtr="0">
+            <a:noAutofit/>
+          </a:bodyPr>
+          <a:lstStyle/>
+          <a:p>
+            <a:pPr marL="0" lvl="0" indent="0" algn="l" rtl="0">
+              <a:spcBef>
+                <a:spcPts val="0"/>
+              </a:spcBef>
+              <a:spcAft>
+                <a:spcPts val="0"/>
+              </a:spcAft>
+              <a:buNone/>
+            </a:pPr>
+            <a:endParaRPr/>
+          </a:p>
+        </p:txBody>
+      </p:sp>
+    </p:spTree>
+  </p:cSld>
+  <p:clrMapOvr>
+    <a:masterClrMapping/>
+  </p:clrMapOvr>
+</p:notes>
+</file>
+
+<file path=ppt/notesSlides/notesSlide6.xml><?xml version="1.0" encoding="utf-8"?>
+<p:notes xmlns:a="http://schemas.openxmlformats.org/drawingml/2006/main" xmlns:r="http://schemas.openxmlformats.org/officeDocument/2006/relationships" xmlns:p="http://schemas.openxmlformats.org/presentationml/2006/main" showMasterSp="0" showMasterPhAnim="0">
+  <p:cSld>
+    <p:spTree>
+      <p:nvGrpSpPr>
+        <p:cNvPr id="1" name="Shape 89"/>
+        <p:cNvGrpSpPr/>
+        <p:nvPr/>
+      </p:nvGrpSpPr>
+      <p:grpSpPr>
+        <a:xfrm>
+          <a:off x="0" y="0"/>
+          <a:ext cx="0" cy="0"/>
+          <a:chOff x="0" y="0"/>
+          <a:chExt cx="0" cy="0"/>
+        </a:xfrm>
+      </p:grpSpPr>
+      <p:sp>
+        <p:nvSpPr>
+          <p:cNvPr id="90" name="Google Shape;90;g2a5809dcb51_0_45:notes"/>
+          <p:cNvSpPr>
+            <a:spLocks noGrp="1" noRot="1" noChangeAspect="1"/>
+          </p:cNvSpPr>
+          <p:nvPr>
+            <p:ph type="sldImg" idx="2"/>
+          </p:nvPr>
+        </p:nvSpPr>
+        <p:spPr>
+          <a:xfrm>
+            <a:off x="381000" y="685800"/>
+            <a:ext cx="6096000" cy="3429000"/>
+          </a:xfrm>
+          <a:custGeom>
+            <a:avLst/>
+            <a:gdLst/>
+            <a:ahLst/>
+            <a:cxnLst/>
+            <a:rect l="l" t="t" r="r" b="b"/>
+            <a:pathLst>
+              <a:path w="120000" h="120000" extrusionOk="0">
+                <a:moveTo>
+                  <a:pt x="0" y="0"/>
+                </a:moveTo>
+                <a:lnTo>
+                  <a:pt x="120000" y="0"/>
+                </a:lnTo>
+                <a:lnTo>
+                  <a:pt x="120000" y="120000"/>
+                </a:lnTo>
+                <a:lnTo>
+                  <a:pt x="0" y="120000"/>
+                </a:lnTo>
+                <a:close/>
+              </a:path>
+            </a:pathLst>
+          </a:custGeom>
+        </p:spPr>
+      </p:sp>
+      <p:sp>
+        <p:nvSpPr>
+          <p:cNvPr id="91" name="Google Shape;91;g2a5809dcb51_0_45:notes"/>
+          <p:cNvSpPr txBox="1">
+            <a:spLocks noGrp="1"/>
+          </p:cNvSpPr>
+          <p:nvPr>
+            <p:ph type="body" idx="1"/>
+          </p:nvPr>
+        </p:nvSpPr>
+        <p:spPr>
+          <a:xfrm>
+            <a:off x="685800" y="4343400"/>
+            <a:ext cx="5486400" cy="4114800"/>
+          </a:xfrm>
+          <a:prstGeom prst="rect">
+            <a:avLst/>
+          </a:prstGeom>
+        </p:spPr>
+        <p:txBody>
+          <a:bodyPr spcFirstLastPara="1" wrap="square" lIns="91425" tIns="91425" rIns="91425" bIns="91425" anchor="t" anchorCtr="0">
+            <a:noAutofit/>
+          </a:bodyPr>
+          <a:lstStyle/>
+          <a:p>
+            <a:pPr marL="0" lvl="0" indent="0" algn="l" rtl="0">
+              <a:spcBef>
+                <a:spcPts val="0"/>
+              </a:spcBef>
+              <a:spcAft>
+                <a:spcPts val="0"/>
+              </a:spcAft>
+              <a:buNone/>
+            </a:pPr>
+            <a:endParaRPr/>
+          </a:p>
+        </p:txBody>
+      </p:sp>
+    </p:spTree>
+  </p:cSld>
+  <p:clrMapOvr>
+    <a:masterClrMapping/>
+  </p:clrMapOvr>
+</p:notes>
+</file>
+
+<file path=ppt/notesSlides/notesSlide7.xml><?xml version="1.0" encoding="utf-8"?>
+<p:notes xmlns:a="http://schemas.openxmlformats.org/drawingml/2006/main" xmlns:r="http://schemas.openxmlformats.org/officeDocument/2006/relationships" xmlns:p="http://schemas.openxmlformats.org/presentationml/2006/main" showMasterSp="0" showMasterPhAnim="0">
+  <p:cSld>
+    <p:spTree>
+      <p:nvGrpSpPr>
+        <p:cNvPr id="1" name="Shape 121"/>
+        <p:cNvGrpSpPr/>
+        <p:nvPr/>
+      </p:nvGrpSpPr>
+      <p:grpSpPr>
+        <a:xfrm>
+          <a:off x="0" y="0"/>
+          <a:ext cx="0" cy="0"/>
+          <a:chOff x="0" y="0"/>
+          <a:chExt cx="0" cy="0"/>
+        </a:xfrm>
+      </p:grpSpPr>
+      <p:sp>
+        <p:nvSpPr>
+          <p:cNvPr id="122" name="Google Shape;122;g2a5809dcb51_0_30:notes"/>
+          <p:cNvSpPr>
+            <a:spLocks noGrp="1" noRot="1" noChangeAspect="1"/>
+          </p:cNvSpPr>
+          <p:nvPr>
+            <p:ph type="sldImg" idx="2"/>
+          </p:nvPr>
+        </p:nvSpPr>
+        <p:spPr>
+          <a:xfrm>
+            <a:off x="381000" y="685800"/>
+            <a:ext cx="6096000" cy="3429000"/>
+          </a:xfrm>
+          <a:custGeom>
+            <a:avLst/>
+            <a:gdLst/>
+            <a:ahLst/>
+            <a:cxnLst/>
+            <a:rect l="l" t="t" r="r" b="b"/>
+            <a:pathLst>
+              <a:path w="120000" h="120000" extrusionOk="0">
+                <a:moveTo>
+                  <a:pt x="0" y="0"/>
+                </a:moveTo>
+                <a:lnTo>
+                  <a:pt x="120000" y="0"/>
+                </a:lnTo>
+                <a:lnTo>
+                  <a:pt x="120000" y="120000"/>
+                </a:lnTo>
+                <a:lnTo>
+                  <a:pt x="0" y="120000"/>
+                </a:lnTo>
+                <a:close/>
+              </a:path>
+            </a:pathLst>
+          </a:custGeom>
+        </p:spPr>
+      </p:sp>
+      <p:sp>
+        <p:nvSpPr>
+          <p:cNvPr id="123" name="Google Shape;123;g2a5809dcb51_0_30:notes"/>
+          <p:cNvSpPr txBox="1">
+            <a:spLocks noGrp="1"/>
+          </p:cNvSpPr>
+          <p:nvPr>
+            <p:ph type="body" idx="1"/>
+          </p:nvPr>
+        </p:nvSpPr>
+        <p:spPr>
+          <a:xfrm>
+            <a:off x="685800" y="4343400"/>
+            <a:ext cx="5486400" cy="4114800"/>
+          </a:xfrm>
+          <a:prstGeom prst="rect">
+            <a:avLst/>
+          </a:prstGeom>
+        </p:spPr>
+        <p:txBody>
+          <a:bodyPr spcFirstLastPara="1" wrap="square" lIns="91425" tIns="91425" rIns="91425" bIns="91425" anchor="t" anchorCtr="0">
+            <a:noAutofit/>
+          </a:bodyPr>
+          <a:lstStyle/>
+          <a:p>
+            <a:pPr marL="0" lvl="0" indent="0" algn="l" rtl="0">
+              <a:spcBef>
+                <a:spcPts val="0"/>
+              </a:spcBef>
+              <a:spcAft>
+                <a:spcPts val="0"/>
+              </a:spcAft>
+              <a:buNone/>
+            </a:pPr>
+            <a:endParaRPr/>
+          </a:p>
+        </p:txBody>
+      </p:sp>
+    </p:spTree>
+  </p:cSld>
+  <p:clrMapOvr>
+    <a:masterClrMapping/>
+  </p:clrMapOvr>
+</p:notes>
+</file>
+
+<file path=ppt/notesSlides/notesSlide8.xml><?xml version="1.0" encoding="utf-8"?>
+<p:notes xmlns:a="http://schemas.openxmlformats.org/drawingml/2006/main" xmlns:r="http://schemas.openxmlformats.org/officeDocument/2006/relationships" xmlns:p="http://schemas.openxmlformats.org/presentationml/2006/main" showMasterSp="0" showMasterPhAnim="0">
+  <p:cSld>
+    <p:spTree>
+      <p:nvGrpSpPr>
+        <p:cNvPr id="1" name="Shape 128"/>
+        <p:cNvGrpSpPr/>
+        <p:nvPr/>
+      </p:nvGrpSpPr>
+      <p:grpSpPr>
+        <a:xfrm>
+          <a:off x="0" y="0"/>
+          <a:ext cx="0" cy="0"/>
+          <a:chOff x="0" y="0"/>
+          <a:chExt cx="0" cy="0"/>
+        </a:xfrm>
+      </p:grpSpPr>
+      <p:sp>
+        <p:nvSpPr>
+          <p:cNvPr id="129" name="Google Shape;129;g2a5809dcb51_0_51:notes"/>
+          <p:cNvSpPr>
+            <a:spLocks noGrp="1" noRot="1" noChangeAspect="1"/>
+          </p:cNvSpPr>
+          <p:nvPr>
+            <p:ph type="sldImg" idx="2"/>
+          </p:nvPr>
+        </p:nvSpPr>
+        <p:spPr>
+          <a:xfrm>
+            <a:off x="381000" y="685800"/>
+            <a:ext cx="6096000" cy="3429000"/>
+          </a:xfrm>
+          <a:custGeom>
+            <a:avLst/>
+            <a:gdLst/>
+            <a:ahLst/>
+            <a:cxnLst/>
+            <a:rect l="l" t="t" r="r" b="b"/>
+            <a:pathLst>
+              <a:path w="120000" h="120000" extrusionOk="0">
+                <a:moveTo>
+                  <a:pt x="0" y="0"/>
+                </a:moveTo>
+                <a:lnTo>
+                  <a:pt x="120000" y="0"/>
+                </a:lnTo>
+                <a:lnTo>
+                  <a:pt x="120000" y="120000"/>
+                </a:lnTo>
+                <a:lnTo>
+                  <a:pt x="0" y="120000"/>
+                </a:lnTo>
+                <a:close/>
+              </a:path>
+            </a:pathLst>
+          </a:custGeom>
+        </p:spPr>
+      </p:sp>
+      <p:sp>
+        <p:nvSpPr>
+          <p:cNvPr id="130" name="Google Shape;130;g2a5809dcb51_0_51:notes"/>
+          <p:cNvSpPr txBox="1">
+            <a:spLocks noGrp="1"/>
+          </p:cNvSpPr>
+          <p:nvPr>
+            <p:ph type="body" idx="1"/>
+          </p:nvPr>
+        </p:nvSpPr>
+        <p:spPr>
+          <a:xfrm>
+            <a:off x="685800" y="4343400"/>
+            <a:ext cx="5486400" cy="4114800"/>
+          </a:xfrm>
+          <a:prstGeom prst="rect">
+            <a:avLst/>
+          </a:prstGeom>
+        </p:spPr>
+        <p:txBody>
+          <a:bodyPr spcFirstLastPara="1" wrap="square" lIns="91425" tIns="91425" rIns="91425" bIns="91425" anchor="t" anchorCtr="0">
+            <a:noAutofit/>
+          </a:bodyPr>
+          <a:lstStyle/>
+          <a:p>
+            <a:pPr marL="0" lvl="0" indent="0" algn="l" rtl="0">
+              <a:spcBef>
+                <a:spcPts val="0"/>
+              </a:spcBef>
+              <a:spcAft>
+                <a:spcPts val="0"/>
+              </a:spcAft>
+              <a:buNone/>
+            </a:pPr>
+            <a:endParaRPr/>
+          </a:p>
+        </p:txBody>
+      </p:sp>
+    </p:spTree>
+  </p:cSld>
+  <p:clrMapOvr>
+    <a:masterClrMapping/>
+  </p:clrMapOvr>
+</p:notes>
+</file>
+
+<file path=ppt/notesSlides/notesSlide9.xml><?xml version="1.0" encoding="utf-8"?>
+<p:notes xmlns:a="http://schemas.openxmlformats.org/drawingml/2006/main" xmlns:r="http://schemas.openxmlformats.org/officeDocument/2006/relationships" xmlns:p="http://schemas.openxmlformats.org/presentationml/2006/main" showMasterSp="0" showMasterPhAnim="0">
+  <p:cSld>
+    <p:spTree>
+      <p:nvGrpSpPr>
+        <p:cNvPr id="1" name="Shape 134"/>
         <p:cNvGrpSpPr/>
         <p:nvPr/>
       </p:nvGrpSpPr>
@@ -814,9 +1576,11 @@
       <p:sp>
         <p:nvSpPr>
           <p:cNvPr id="135" name="Google Shape;135;g2a5809dcb51_0_56:notes"/>
-          <p:cNvSpPr/>
+          <p:cNvSpPr>
+            <a:spLocks noGrp="1" noRot="1" noChangeAspect="1"/>
+          </p:cNvSpPr>
           <p:nvPr>
-            <p:ph idx="2" type="sldImg"/>
+            <p:ph type="sldImg" idx="2"/>
           </p:nvPr>
         </p:nvSpPr>
         <p:spPr>
@@ -825,9 +1589,13 @@
             <a:ext cx="6096000" cy="3429000"/>
           </a:xfrm>
           <a:custGeom>
-            <a:rect b="b" l="l" r="r" t="t"/>
+            <a:avLst/>
+            <a:gdLst/>
+            <a:ahLst/>
+            <a:cxnLst/>
+            <a:rect l="l" t="t" r="r" b="b"/>
             <a:pathLst>
-              <a:path extrusionOk="0" h="120000" w="120000">
+              <a:path w="120000" h="120000" extrusionOk="0">
                 <a:moveTo>
                   <a:pt x="0" y="0"/>
                 </a:moveTo>
@@ -849,9 +1617,11 @@
       <p:sp>
         <p:nvSpPr>
           <p:cNvPr id="136" name="Google Shape;136;g2a5809dcb51_0_56:notes"/>
-          <p:cNvSpPr txBox="1"/>
+          <p:cNvSpPr txBox="1">
+            <a:spLocks noGrp="1"/>
+          </p:cNvSpPr>
           <p:nvPr>
-            <p:ph idx="1" type="body"/>
+            <p:ph type="body" idx="1"/>
           </p:nvPr>
         </p:nvSpPr>
         <p:spPr>
@@ -864,12 +1634,12 @@
           </a:prstGeom>
         </p:spPr>
         <p:txBody>
-          <a:bodyPr anchorCtr="0" anchor="t" bIns="91425" lIns="91425" spcFirstLastPara="1" rIns="91425" wrap="square" tIns="91425">
+          <a:bodyPr spcFirstLastPara="1" wrap="square" lIns="91425" tIns="91425" rIns="91425" bIns="91425" anchor="t" anchorCtr="0">
             <a:noAutofit/>
           </a:bodyPr>
           <a:lstStyle/>
           <a:p>
-            <a:pPr indent="0" lvl="0" marL="0" rtl="0" algn="l">
+            <a:pPr marL="0" lvl="0" indent="0" algn="l" rtl="0">
               <a:spcBef>
                 <a:spcPts val="0"/>
               </a:spcBef>
@@ -878,801 +1648,6 @@
               </a:spcAft>
               <a:buNone/>
             </a:pPr>
-            <a:r>
-              <a:t/>
-            </a:r>
-            <a:endParaRPr/>
-          </a:p>
-        </p:txBody>
-      </p:sp>
-    </p:spTree>
-  </p:cSld>
-  <p:clrMapOvr>
-    <a:masterClrMapping/>
-  </p:clrMapOvr>
-</p:notes>
-</file>
-
-<file path=ppt/notesSlides/notesSlide2.xml><?xml version="1.0" encoding="utf-8"?>
-<p:notes xmlns:a="http://schemas.openxmlformats.org/drawingml/2006/main" xmlns:r="http://schemas.openxmlformats.org/officeDocument/2006/relationships" xmlns:mc="http://schemas.openxmlformats.org/markup-compatibility/2006" xmlns:mv="urn:schemas-microsoft-com:mac:vml" xmlns:p="http://schemas.openxmlformats.org/presentationml/2006/main" xmlns:c="http://schemas.openxmlformats.org/drawingml/2006/chart" xmlns:dgm="http://schemas.openxmlformats.org/drawingml/2006/diagram" xmlns:o="urn:schemas-microsoft-com:office:office" xmlns:v="urn:schemas-microsoft-com:vml" xmlns:pvml="urn:schemas-microsoft-com:office:powerpoint" xmlns:com="http://schemas.openxmlformats.org/drawingml/2006/compatibility" xmlns:p14="http://schemas.microsoft.com/office/powerpoint/2010/main" xmlns:p15="http://schemas.microsoft.com/office/powerpoint/2012/main" xmlns:ahyp="http://schemas.microsoft.com/office/drawing/2018/hyperlinkcolor" showMasterPhAnim="0" showMasterSp="0">
-  <p:cSld>
-    <p:spTree>
-      <p:nvGrpSpPr>
-        <p:cNvPr id="59" name="Shape 59"/>
-        <p:cNvGrpSpPr/>
-        <p:nvPr/>
-      </p:nvGrpSpPr>
-      <p:grpSpPr>
-        <a:xfrm>
-          <a:off x="0" y="0"/>
-          <a:ext cx="0" cy="0"/>
-          <a:chOff x="0" y="0"/>
-          <a:chExt cx="0" cy="0"/>
-        </a:xfrm>
-      </p:grpSpPr>
-      <p:sp>
-        <p:nvSpPr>
-          <p:cNvPr id="60" name="Google Shape;60;g27b3fe96102_1_92:notes"/>
-          <p:cNvSpPr/>
-          <p:nvPr>
-            <p:ph idx="2" type="sldImg"/>
-          </p:nvPr>
-        </p:nvSpPr>
-        <p:spPr>
-          <a:xfrm>
-            <a:off x="381300" y="685800"/>
-            <a:ext cx="6096000" cy="3429000"/>
-          </a:xfrm>
-          <a:custGeom>
-            <a:rect b="b" l="l" r="r" t="t"/>
-            <a:pathLst>
-              <a:path extrusionOk="0" h="120000" w="120000">
-                <a:moveTo>
-                  <a:pt x="0" y="0"/>
-                </a:moveTo>
-                <a:lnTo>
-                  <a:pt x="120000" y="0"/>
-                </a:lnTo>
-                <a:lnTo>
-                  <a:pt x="120000" y="120000"/>
-                </a:lnTo>
-                <a:lnTo>
-                  <a:pt x="0" y="120000"/>
-                </a:lnTo>
-                <a:close/>
-              </a:path>
-            </a:pathLst>
-          </a:custGeom>
-        </p:spPr>
-      </p:sp>
-      <p:sp>
-        <p:nvSpPr>
-          <p:cNvPr id="61" name="Google Shape;61;g27b3fe96102_1_92:notes"/>
-          <p:cNvSpPr txBox="1"/>
-          <p:nvPr>
-            <p:ph idx="1" type="body"/>
-          </p:nvPr>
-        </p:nvSpPr>
-        <p:spPr>
-          <a:xfrm>
-            <a:off x="685800" y="4343400"/>
-            <a:ext cx="5486400" cy="4114800"/>
-          </a:xfrm>
-          <a:prstGeom prst="rect">
-            <a:avLst/>
-          </a:prstGeom>
-        </p:spPr>
-        <p:txBody>
-          <a:bodyPr anchorCtr="0" anchor="t" bIns="91425" lIns="91425" spcFirstLastPara="1" rIns="91425" wrap="square" tIns="91425">
-            <a:noAutofit/>
-          </a:bodyPr>
-          <a:lstStyle/>
-          <a:p>
-            <a:pPr indent="0" lvl="0" marL="0" rtl="0" algn="l">
-              <a:spcBef>
-                <a:spcPts val="0"/>
-              </a:spcBef>
-              <a:spcAft>
-                <a:spcPts val="0"/>
-              </a:spcAft>
-              <a:buNone/>
-            </a:pPr>
-            <a:r>
-              <a:t/>
-            </a:r>
-            <a:endParaRPr/>
-          </a:p>
-        </p:txBody>
-      </p:sp>
-    </p:spTree>
-  </p:cSld>
-  <p:clrMapOvr>
-    <a:masterClrMapping/>
-  </p:clrMapOvr>
-</p:notes>
-</file>
-
-<file path=ppt/notesSlides/notesSlide3.xml><?xml version="1.0" encoding="utf-8"?>
-<p:notes xmlns:a="http://schemas.openxmlformats.org/drawingml/2006/main" xmlns:r="http://schemas.openxmlformats.org/officeDocument/2006/relationships" xmlns:mc="http://schemas.openxmlformats.org/markup-compatibility/2006" xmlns:mv="urn:schemas-microsoft-com:mac:vml" xmlns:p="http://schemas.openxmlformats.org/presentationml/2006/main" xmlns:c="http://schemas.openxmlformats.org/drawingml/2006/chart" xmlns:dgm="http://schemas.openxmlformats.org/drawingml/2006/diagram" xmlns:o="urn:schemas-microsoft-com:office:office" xmlns:v="urn:schemas-microsoft-com:vml" xmlns:pvml="urn:schemas-microsoft-com:office:powerpoint" xmlns:com="http://schemas.openxmlformats.org/drawingml/2006/compatibility" xmlns:p14="http://schemas.microsoft.com/office/powerpoint/2010/main" xmlns:p15="http://schemas.microsoft.com/office/powerpoint/2012/main" xmlns:ahyp="http://schemas.microsoft.com/office/drawing/2018/hyperlinkcolor" showMasterPhAnim="0" showMasterSp="0">
-  <p:cSld>
-    <p:spTree>
-      <p:nvGrpSpPr>
-        <p:cNvPr id="66" name="Shape 66"/>
-        <p:cNvGrpSpPr/>
-        <p:nvPr/>
-      </p:nvGrpSpPr>
-      <p:grpSpPr>
-        <a:xfrm>
-          <a:off x="0" y="0"/>
-          <a:ext cx="0" cy="0"/>
-          <a:chOff x="0" y="0"/>
-          <a:chExt cx="0" cy="0"/>
-        </a:xfrm>
-      </p:grpSpPr>
-      <p:sp>
-        <p:nvSpPr>
-          <p:cNvPr id="67" name="Google Shape;67;g2a5809dcb51_0_11:notes"/>
-          <p:cNvSpPr/>
-          <p:nvPr>
-            <p:ph idx="2" type="sldImg"/>
-          </p:nvPr>
-        </p:nvSpPr>
-        <p:spPr>
-          <a:xfrm>
-            <a:off x="381300" y="685800"/>
-            <a:ext cx="6096000" cy="3429000"/>
-          </a:xfrm>
-          <a:custGeom>
-            <a:rect b="b" l="l" r="r" t="t"/>
-            <a:pathLst>
-              <a:path extrusionOk="0" h="120000" w="120000">
-                <a:moveTo>
-                  <a:pt x="0" y="0"/>
-                </a:moveTo>
-                <a:lnTo>
-                  <a:pt x="120000" y="0"/>
-                </a:lnTo>
-                <a:lnTo>
-                  <a:pt x="120000" y="120000"/>
-                </a:lnTo>
-                <a:lnTo>
-                  <a:pt x="0" y="120000"/>
-                </a:lnTo>
-                <a:close/>
-              </a:path>
-            </a:pathLst>
-          </a:custGeom>
-        </p:spPr>
-      </p:sp>
-      <p:sp>
-        <p:nvSpPr>
-          <p:cNvPr id="68" name="Google Shape;68;g2a5809dcb51_0_11:notes"/>
-          <p:cNvSpPr txBox="1"/>
-          <p:nvPr>
-            <p:ph idx="1" type="body"/>
-          </p:nvPr>
-        </p:nvSpPr>
-        <p:spPr>
-          <a:xfrm>
-            <a:off x="685800" y="4343400"/>
-            <a:ext cx="5486400" cy="4114800"/>
-          </a:xfrm>
-          <a:prstGeom prst="rect">
-            <a:avLst/>
-          </a:prstGeom>
-        </p:spPr>
-        <p:txBody>
-          <a:bodyPr anchorCtr="0" anchor="t" bIns="91425" lIns="91425" spcFirstLastPara="1" rIns="91425" wrap="square" tIns="91425">
-            <a:noAutofit/>
-          </a:bodyPr>
-          <a:lstStyle/>
-          <a:p>
-            <a:pPr indent="0" lvl="0" marL="0" rtl="0" algn="l">
-              <a:spcBef>
-                <a:spcPts val="0"/>
-              </a:spcBef>
-              <a:spcAft>
-                <a:spcPts val="0"/>
-              </a:spcAft>
-              <a:buNone/>
-            </a:pPr>
-            <a:r>
-              <a:t/>
-            </a:r>
-            <a:endParaRPr/>
-          </a:p>
-        </p:txBody>
-      </p:sp>
-    </p:spTree>
-  </p:cSld>
-  <p:clrMapOvr>
-    <a:masterClrMapping/>
-  </p:clrMapOvr>
-</p:notes>
-</file>
-
-<file path=ppt/notesSlides/notesSlide4.xml><?xml version="1.0" encoding="utf-8"?>
-<p:notes xmlns:a="http://schemas.openxmlformats.org/drawingml/2006/main" xmlns:r="http://schemas.openxmlformats.org/officeDocument/2006/relationships" xmlns:mc="http://schemas.openxmlformats.org/markup-compatibility/2006" xmlns:mv="urn:schemas-microsoft-com:mac:vml" xmlns:p="http://schemas.openxmlformats.org/presentationml/2006/main" xmlns:c="http://schemas.openxmlformats.org/drawingml/2006/chart" xmlns:dgm="http://schemas.openxmlformats.org/drawingml/2006/diagram" xmlns:o="urn:schemas-microsoft-com:office:office" xmlns:v="urn:schemas-microsoft-com:vml" xmlns:pvml="urn:schemas-microsoft-com:office:powerpoint" xmlns:com="http://schemas.openxmlformats.org/drawingml/2006/compatibility" xmlns:p14="http://schemas.microsoft.com/office/powerpoint/2010/main" xmlns:p15="http://schemas.microsoft.com/office/powerpoint/2012/main" xmlns:ahyp="http://schemas.microsoft.com/office/drawing/2018/hyperlinkcolor" showMasterPhAnim="0" showMasterSp="0">
-  <p:cSld>
-    <p:spTree>
-      <p:nvGrpSpPr>
-        <p:cNvPr id="75" name="Shape 75"/>
-        <p:cNvGrpSpPr/>
-        <p:nvPr/>
-      </p:nvGrpSpPr>
-      <p:grpSpPr>
-        <a:xfrm>
-          <a:off x="0" y="0"/>
-          <a:ext cx="0" cy="0"/>
-          <a:chOff x="0" y="0"/>
-          <a:chExt cx="0" cy="0"/>
-        </a:xfrm>
-      </p:grpSpPr>
-      <p:sp>
-        <p:nvSpPr>
-          <p:cNvPr id="76" name="Google Shape;76;g2a5809dcb51_0_1:notes"/>
-          <p:cNvSpPr/>
-          <p:nvPr>
-            <p:ph idx="2" type="sldImg"/>
-          </p:nvPr>
-        </p:nvSpPr>
-        <p:spPr>
-          <a:xfrm>
-            <a:off x="381300" y="685800"/>
-            <a:ext cx="6096000" cy="3429000"/>
-          </a:xfrm>
-          <a:custGeom>
-            <a:rect b="b" l="l" r="r" t="t"/>
-            <a:pathLst>
-              <a:path extrusionOk="0" h="120000" w="120000">
-                <a:moveTo>
-                  <a:pt x="0" y="0"/>
-                </a:moveTo>
-                <a:lnTo>
-                  <a:pt x="120000" y="0"/>
-                </a:lnTo>
-                <a:lnTo>
-                  <a:pt x="120000" y="120000"/>
-                </a:lnTo>
-                <a:lnTo>
-                  <a:pt x="0" y="120000"/>
-                </a:lnTo>
-                <a:close/>
-              </a:path>
-            </a:pathLst>
-          </a:custGeom>
-        </p:spPr>
-      </p:sp>
-      <p:sp>
-        <p:nvSpPr>
-          <p:cNvPr id="77" name="Google Shape;77;g2a5809dcb51_0_1:notes"/>
-          <p:cNvSpPr txBox="1"/>
-          <p:nvPr>
-            <p:ph idx="1" type="body"/>
-          </p:nvPr>
-        </p:nvSpPr>
-        <p:spPr>
-          <a:xfrm>
-            <a:off x="685800" y="4343400"/>
-            <a:ext cx="5486400" cy="4114800"/>
-          </a:xfrm>
-          <a:prstGeom prst="rect">
-            <a:avLst/>
-          </a:prstGeom>
-        </p:spPr>
-        <p:txBody>
-          <a:bodyPr anchorCtr="0" anchor="t" bIns="91425" lIns="91425" spcFirstLastPara="1" rIns="91425" wrap="square" tIns="91425">
-            <a:noAutofit/>
-          </a:bodyPr>
-          <a:lstStyle/>
-          <a:p>
-            <a:pPr indent="0" lvl="0" marL="0" rtl="0" algn="l">
-              <a:spcBef>
-                <a:spcPts val="0"/>
-              </a:spcBef>
-              <a:spcAft>
-                <a:spcPts val="0"/>
-              </a:spcAft>
-              <a:buNone/>
-            </a:pPr>
-            <a:r>
-              <a:t/>
-            </a:r>
-            <a:endParaRPr/>
-          </a:p>
-        </p:txBody>
-      </p:sp>
-    </p:spTree>
-  </p:cSld>
-  <p:clrMapOvr>
-    <a:masterClrMapping/>
-  </p:clrMapOvr>
-</p:notes>
-</file>
-
-<file path=ppt/notesSlides/notesSlide5.xml><?xml version="1.0" encoding="utf-8"?>
-<p:notes xmlns:a="http://schemas.openxmlformats.org/drawingml/2006/main" xmlns:r="http://schemas.openxmlformats.org/officeDocument/2006/relationships" xmlns:mc="http://schemas.openxmlformats.org/markup-compatibility/2006" xmlns:mv="urn:schemas-microsoft-com:mac:vml" xmlns:p="http://schemas.openxmlformats.org/presentationml/2006/main" xmlns:c="http://schemas.openxmlformats.org/drawingml/2006/chart" xmlns:dgm="http://schemas.openxmlformats.org/drawingml/2006/diagram" xmlns:o="urn:schemas-microsoft-com:office:office" xmlns:v="urn:schemas-microsoft-com:vml" xmlns:pvml="urn:schemas-microsoft-com:office:powerpoint" xmlns:com="http://schemas.openxmlformats.org/drawingml/2006/compatibility" xmlns:p14="http://schemas.microsoft.com/office/powerpoint/2010/main" xmlns:p15="http://schemas.microsoft.com/office/powerpoint/2012/main" xmlns:ahyp="http://schemas.microsoft.com/office/drawing/2018/hyperlinkcolor" showMasterPhAnim="0" showMasterSp="0">
-  <p:cSld>
-    <p:spTree>
-      <p:nvGrpSpPr>
-        <p:cNvPr id="82" name="Shape 82"/>
-        <p:cNvGrpSpPr/>
-        <p:nvPr/>
-      </p:nvGrpSpPr>
-      <p:grpSpPr>
-        <a:xfrm>
-          <a:off x="0" y="0"/>
-          <a:ext cx="0" cy="0"/>
-          <a:chOff x="0" y="0"/>
-          <a:chExt cx="0" cy="0"/>
-        </a:xfrm>
-      </p:grpSpPr>
-      <p:sp>
-        <p:nvSpPr>
-          <p:cNvPr id="83" name="Google Shape;83;g2a5809dcb51_0_38:notes"/>
-          <p:cNvSpPr/>
-          <p:nvPr>
-            <p:ph idx="2" type="sldImg"/>
-          </p:nvPr>
-        </p:nvSpPr>
-        <p:spPr>
-          <a:xfrm>
-            <a:off x="381300" y="685800"/>
-            <a:ext cx="6096000" cy="3429000"/>
-          </a:xfrm>
-          <a:custGeom>
-            <a:rect b="b" l="l" r="r" t="t"/>
-            <a:pathLst>
-              <a:path extrusionOk="0" h="120000" w="120000">
-                <a:moveTo>
-                  <a:pt x="0" y="0"/>
-                </a:moveTo>
-                <a:lnTo>
-                  <a:pt x="120000" y="0"/>
-                </a:lnTo>
-                <a:lnTo>
-                  <a:pt x="120000" y="120000"/>
-                </a:lnTo>
-                <a:lnTo>
-                  <a:pt x="0" y="120000"/>
-                </a:lnTo>
-                <a:close/>
-              </a:path>
-            </a:pathLst>
-          </a:custGeom>
-        </p:spPr>
-      </p:sp>
-      <p:sp>
-        <p:nvSpPr>
-          <p:cNvPr id="84" name="Google Shape;84;g2a5809dcb51_0_38:notes"/>
-          <p:cNvSpPr txBox="1"/>
-          <p:nvPr>
-            <p:ph idx="1" type="body"/>
-          </p:nvPr>
-        </p:nvSpPr>
-        <p:spPr>
-          <a:xfrm>
-            <a:off x="685800" y="4343400"/>
-            <a:ext cx="5486400" cy="4114800"/>
-          </a:xfrm>
-          <a:prstGeom prst="rect">
-            <a:avLst/>
-          </a:prstGeom>
-        </p:spPr>
-        <p:txBody>
-          <a:bodyPr anchorCtr="0" anchor="t" bIns="91425" lIns="91425" spcFirstLastPara="1" rIns="91425" wrap="square" tIns="91425">
-            <a:noAutofit/>
-          </a:bodyPr>
-          <a:lstStyle/>
-          <a:p>
-            <a:pPr indent="0" lvl="0" marL="0" rtl="0" algn="l">
-              <a:spcBef>
-                <a:spcPts val="0"/>
-              </a:spcBef>
-              <a:spcAft>
-                <a:spcPts val="0"/>
-              </a:spcAft>
-              <a:buNone/>
-            </a:pPr>
-            <a:r>
-              <a:t/>
-            </a:r>
-            <a:endParaRPr/>
-          </a:p>
-        </p:txBody>
-      </p:sp>
-    </p:spTree>
-  </p:cSld>
-  <p:clrMapOvr>
-    <a:masterClrMapping/>
-  </p:clrMapOvr>
-</p:notes>
-</file>
-
-<file path=ppt/notesSlides/notesSlide6.xml><?xml version="1.0" encoding="utf-8"?>
-<p:notes xmlns:a="http://schemas.openxmlformats.org/drawingml/2006/main" xmlns:r="http://schemas.openxmlformats.org/officeDocument/2006/relationships" xmlns:mc="http://schemas.openxmlformats.org/markup-compatibility/2006" xmlns:mv="urn:schemas-microsoft-com:mac:vml" xmlns:p="http://schemas.openxmlformats.org/presentationml/2006/main" xmlns:c="http://schemas.openxmlformats.org/drawingml/2006/chart" xmlns:dgm="http://schemas.openxmlformats.org/drawingml/2006/diagram" xmlns:o="urn:schemas-microsoft-com:office:office" xmlns:v="urn:schemas-microsoft-com:vml" xmlns:pvml="urn:schemas-microsoft-com:office:powerpoint" xmlns:com="http://schemas.openxmlformats.org/drawingml/2006/compatibility" xmlns:p14="http://schemas.microsoft.com/office/powerpoint/2010/main" xmlns:p15="http://schemas.microsoft.com/office/powerpoint/2012/main" xmlns:ahyp="http://schemas.microsoft.com/office/drawing/2018/hyperlinkcolor" showMasterPhAnim="0" showMasterSp="0">
-  <p:cSld>
-    <p:spTree>
-      <p:nvGrpSpPr>
-        <p:cNvPr id="89" name="Shape 89"/>
-        <p:cNvGrpSpPr/>
-        <p:nvPr/>
-      </p:nvGrpSpPr>
-      <p:grpSpPr>
-        <a:xfrm>
-          <a:off x="0" y="0"/>
-          <a:ext cx="0" cy="0"/>
-          <a:chOff x="0" y="0"/>
-          <a:chExt cx="0" cy="0"/>
-        </a:xfrm>
-      </p:grpSpPr>
-      <p:sp>
-        <p:nvSpPr>
-          <p:cNvPr id="90" name="Google Shape;90;g2a5809dcb51_0_45:notes"/>
-          <p:cNvSpPr/>
-          <p:nvPr>
-            <p:ph idx="2" type="sldImg"/>
-          </p:nvPr>
-        </p:nvSpPr>
-        <p:spPr>
-          <a:xfrm>
-            <a:off x="381300" y="685800"/>
-            <a:ext cx="6096000" cy="3429000"/>
-          </a:xfrm>
-          <a:custGeom>
-            <a:rect b="b" l="l" r="r" t="t"/>
-            <a:pathLst>
-              <a:path extrusionOk="0" h="120000" w="120000">
-                <a:moveTo>
-                  <a:pt x="0" y="0"/>
-                </a:moveTo>
-                <a:lnTo>
-                  <a:pt x="120000" y="0"/>
-                </a:lnTo>
-                <a:lnTo>
-                  <a:pt x="120000" y="120000"/>
-                </a:lnTo>
-                <a:lnTo>
-                  <a:pt x="0" y="120000"/>
-                </a:lnTo>
-                <a:close/>
-              </a:path>
-            </a:pathLst>
-          </a:custGeom>
-        </p:spPr>
-      </p:sp>
-      <p:sp>
-        <p:nvSpPr>
-          <p:cNvPr id="91" name="Google Shape;91;g2a5809dcb51_0_45:notes"/>
-          <p:cNvSpPr txBox="1"/>
-          <p:nvPr>
-            <p:ph idx="1" type="body"/>
-          </p:nvPr>
-        </p:nvSpPr>
-        <p:spPr>
-          <a:xfrm>
-            <a:off x="685800" y="4343400"/>
-            <a:ext cx="5486400" cy="4114800"/>
-          </a:xfrm>
-          <a:prstGeom prst="rect">
-            <a:avLst/>
-          </a:prstGeom>
-        </p:spPr>
-        <p:txBody>
-          <a:bodyPr anchorCtr="0" anchor="t" bIns="91425" lIns="91425" spcFirstLastPara="1" rIns="91425" wrap="square" tIns="91425">
-            <a:noAutofit/>
-          </a:bodyPr>
-          <a:lstStyle/>
-          <a:p>
-            <a:pPr indent="0" lvl="0" marL="0" rtl="0" algn="l">
-              <a:spcBef>
-                <a:spcPts val="0"/>
-              </a:spcBef>
-              <a:spcAft>
-                <a:spcPts val="0"/>
-              </a:spcAft>
-              <a:buNone/>
-            </a:pPr>
-            <a:r>
-              <a:t/>
-            </a:r>
-            <a:endParaRPr/>
-          </a:p>
-        </p:txBody>
-      </p:sp>
-    </p:spTree>
-  </p:cSld>
-  <p:clrMapOvr>
-    <a:masterClrMapping/>
-  </p:clrMapOvr>
-</p:notes>
-</file>
-
-<file path=ppt/notesSlides/notesSlide7.xml><?xml version="1.0" encoding="utf-8"?>
-<p:notes xmlns:a="http://schemas.openxmlformats.org/drawingml/2006/main" xmlns:r="http://schemas.openxmlformats.org/officeDocument/2006/relationships" xmlns:mc="http://schemas.openxmlformats.org/markup-compatibility/2006" xmlns:mv="urn:schemas-microsoft-com:mac:vml" xmlns:p="http://schemas.openxmlformats.org/presentationml/2006/main" xmlns:c="http://schemas.openxmlformats.org/drawingml/2006/chart" xmlns:dgm="http://schemas.openxmlformats.org/drawingml/2006/diagram" xmlns:o="urn:schemas-microsoft-com:office:office" xmlns:v="urn:schemas-microsoft-com:vml" xmlns:pvml="urn:schemas-microsoft-com:office:powerpoint" xmlns:com="http://schemas.openxmlformats.org/drawingml/2006/compatibility" xmlns:p14="http://schemas.microsoft.com/office/powerpoint/2010/main" xmlns:p15="http://schemas.microsoft.com/office/powerpoint/2012/main" xmlns:ahyp="http://schemas.microsoft.com/office/drawing/2018/hyperlinkcolor" showMasterPhAnim="0" showMasterSp="0">
-  <p:cSld>
-    <p:spTree>
-      <p:nvGrpSpPr>
-        <p:cNvPr id="96" name="Shape 96"/>
-        <p:cNvGrpSpPr/>
-        <p:nvPr/>
-      </p:nvGrpSpPr>
-      <p:grpSpPr>
-        <a:xfrm>
-          <a:off x="0" y="0"/>
-          <a:ext cx="0" cy="0"/>
-          <a:chOff x="0" y="0"/>
-          <a:chExt cx="0" cy="0"/>
-        </a:xfrm>
-      </p:grpSpPr>
-      <p:sp>
-        <p:nvSpPr>
-          <p:cNvPr id="97" name="Google Shape;97;g2a5809dcb51_0_81:notes"/>
-          <p:cNvSpPr/>
-          <p:nvPr>
-            <p:ph idx="2" type="sldImg"/>
-          </p:nvPr>
-        </p:nvSpPr>
-        <p:spPr>
-          <a:xfrm>
-            <a:off x="381300" y="685800"/>
-            <a:ext cx="6096000" cy="3429000"/>
-          </a:xfrm>
-          <a:custGeom>
-            <a:rect b="b" l="l" r="r" t="t"/>
-            <a:pathLst>
-              <a:path extrusionOk="0" h="120000" w="120000">
-                <a:moveTo>
-                  <a:pt x="0" y="0"/>
-                </a:moveTo>
-                <a:lnTo>
-                  <a:pt x="120000" y="0"/>
-                </a:lnTo>
-                <a:lnTo>
-                  <a:pt x="120000" y="120000"/>
-                </a:lnTo>
-                <a:lnTo>
-                  <a:pt x="0" y="120000"/>
-                </a:lnTo>
-                <a:close/>
-              </a:path>
-            </a:pathLst>
-          </a:custGeom>
-        </p:spPr>
-      </p:sp>
-      <p:sp>
-        <p:nvSpPr>
-          <p:cNvPr id="98" name="Google Shape;98;g2a5809dcb51_0_81:notes"/>
-          <p:cNvSpPr txBox="1"/>
-          <p:nvPr>
-            <p:ph idx="1" type="body"/>
-          </p:nvPr>
-        </p:nvSpPr>
-        <p:spPr>
-          <a:xfrm>
-            <a:off x="685800" y="4343400"/>
-            <a:ext cx="5486400" cy="4114800"/>
-          </a:xfrm>
-          <a:prstGeom prst="rect">
-            <a:avLst/>
-          </a:prstGeom>
-        </p:spPr>
-        <p:txBody>
-          <a:bodyPr anchorCtr="0" anchor="t" bIns="91425" lIns="91425" spcFirstLastPara="1" rIns="91425" wrap="square" tIns="91425">
-            <a:noAutofit/>
-          </a:bodyPr>
-          <a:lstStyle/>
-          <a:p>
-            <a:pPr indent="0" lvl="0" marL="0" rtl="0" algn="l">
-              <a:spcBef>
-                <a:spcPts val="0"/>
-              </a:spcBef>
-              <a:spcAft>
-                <a:spcPts val="0"/>
-              </a:spcAft>
-              <a:buNone/>
-            </a:pPr>
-            <a:r>
-              <a:t/>
-            </a:r>
-            <a:endParaRPr/>
-          </a:p>
-        </p:txBody>
-      </p:sp>
-    </p:spTree>
-  </p:cSld>
-  <p:clrMapOvr>
-    <a:masterClrMapping/>
-  </p:clrMapOvr>
-</p:notes>
-</file>
-
-<file path=ppt/notesSlides/notesSlide8.xml><?xml version="1.0" encoding="utf-8"?>
-<p:notes xmlns:a="http://schemas.openxmlformats.org/drawingml/2006/main" xmlns:r="http://schemas.openxmlformats.org/officeDocument/2006/relationships" xmlns:mc="http://schemas.openxmlformats.org/markup-compatibility/2006" xmlns:mv="urn:schemas-microsoft-com:mac:vml" xmlns:p="http://schemas.openxmlformats.org/presentationml/2006/main" xmlns:c="http://schemas.openxmlformats.org/drawingml/2006/chart" xmlns:dgm="http://schemas.openxmlformats.org/drawingml/2006/diagram" xmlns:o="urn:schemas-microsoft-com:office:office" xmlns:v="urn:schemas-microsoft-com:vml" xmlns:pvml="urn:schemas-microsoft-com:office:powerpoint" xmlns:com="http://schemas.openxmlformats.org/drawingml/2006/compatibility" xmlns:p14="http://schemas.microsoft.com/office/powerpoint/2010/main" xmlns:p15="http://schemas.microsoft.com/office/powerpoint/2012/main" xmlns:ahyp="http://schemas.microsoft.com/office/drawing/2018/hyperlinkcolor" showMasterPhAnim="0" showMasterSp="0">
-  <p:cSld>
-    <p:spTree>
-      <p:nvGrpSpPr>
-        <p:cNvPr id="121" name="Shape 121"/>
-        <p:cNvGrpSpPr/>
-        <p:nvPr/>
-      </p:nvGrpSpPr>
-      <p:grpSpPr>
-        <a:xfrm>
-          <a:off x="0" y="0"/>
-          <a:ext cx="0" cy="0"/>
-          <a:chOff x="0" y="0"/>
-          <a:chExt cx="0" cy="0"/>
-        </a:xfrm>
-      </p:grpSpPr>
-      <p:sp>
-        <p:nvSpPr>
-          <p:cNvPr id="122" name="Google Shape;122;g2a5809dcb51_0_30:notes"/>
-          <p:cNvSpPr/>
-          <p:nvPr>
-            <p:ph idx="2" type="sldImg"/>
-          </p:nvPr>
-        </p:nvSpPr>
-        <p:spPr>
-          <a:xfrm>
-            <a:off x="381300" y="685800"/>
-            <a:ext cx="6096000" cy="3429000"/>
-          </a:xfrm>
-          <a:custGeom>
-            <a:rect b="b" l="l" r="r" t="t"/>
-            <a:pathLst>
-              <a:path extrusionOk="0" h="120000" w="120000">
-                <a:moveTo>
-                  <a:pt x="0" y="0"/>
-                </a:moveTo>
-                <a:lnTo>
-                  <a:pt x="120000" y="0"/>
-                </a:lnTo>
-                <a:lnTo>
-                  <a:pt x="120000" y="120000"/>
-                </a:lnTo>
-                <a:lnTo>
-                  <a:pt x="0" y="120000"/>
-                </a:lnTo>
-                <a:close/>
-              </a:path>
-            </a:pathLst>
-          </a:custGeom>
-        </p:spPr>
-      </p:sp>
-      <p:sp>
-        <p:nvSpPr>
-          <p:cNvPr id="123" name="Google Shape;123;g2a5809dcb51_0_30:notes"/>
-          <p:cNvSpPr txBox="1"/>
-          <p:nvPr>
-            <p:ph idx="1" type="body"/>
-          </p:nvPr>
-        </p:nvSpPr>
-        <p:spPr>
-          <a:xfrm>
-            <a:off x="685800" y="4343400"/>
-            <a:ext cx="5486400" cy="4114800"/>
-          </a:xfrm>
-          <a:prstGeom prst="rect">
-            <a:avLst/>
-          </a:prstGeom>
-        </p:spPr>
-        <p:txBody>
-          <a:bodyPr anchorCtr="0" anchor="t" bIns="91425" lIns="91425" spcFirstLastPara="1" rIns="91425" wrap="square" tIns="91425">
-            <a:noAutofit/>
-          </a:bodyPr>
-          <a:lstStyle/>
-          <a:p>
-            <a:pPr indent="0" lvl="0" marL="0" rtl="0" algn="l">
-              <a:spcBef>
-                <a:spcPts val="0"/>
-              </a:spcBef>
-              <a:spcAft>
-                <a:spcPts val="0"/>
-              </a:spcAft>
-              <a:buNone/>
-            </a:pPr>
-            <a:r>
-              <a:t/>
-            </a:r>
-            <a:endParaRPr/>
-          </a:p>
-        </p:txBody>
-      </p:sp>
-    </p:spTree>
-  </p:cSld>
-  <p:clrMapOvr>
-    <a:masterClrMapping/>
-  </p:clrMapOvr>
-</p:notes>
-</file>
-
-<file path=ppt/notesSlides/notesSlide9.xml><?xml version="1.0" encoding="utf-8"?>
-<p:notes xmlns:a="http://schemas.openxmlformats.org/drawingml/2006/main" xmlns:r="http://schemas.openxmlformats.org/officeDocument/2006/relationships" xmlns:mc="http://schemas.openxmlformats.org/markup-compatibility/2006" xmlns:mv="urn:schemas-microsoft-com:mac:vml" xmlns:p="http://schemas.openxmlformats.org/presentationml/2006/main" xmlns:c="http://schemas.openxmlformats.org/drawingml/2006/chart" xmlns:dgm="http://schemas.openxmlformats.org/drawingml/2006/diagram" xmlns:o="urn:schemas-microsoft-com:office:office" xmlns:v="urn:schemas-microsoft-com:vml" xmlns:pvml="urn:schemas-microsoft-com:office:powerpoint" xmlns:com="http://schemas.openxmlformats.org/drawingml/2006/compatibility" xmlns:p14="http://schemas.microsoft.com/office/powerpoint/2010/main" xmlns:p15="http://schemas.microsoft.com/office/powerpoint/2012/main" xmlns:ahyp="http://schemas.microsoft.com/office/drawing/2018/hyperlinkcolor" showMasterPhAnim="0" showMasterSp="0">
-  <p:cSld>
-    <p:spTree>
-      <p:nvGrpSpPr>
-        <p:cNvPr id="128" name="Shape 128"/>
-        <p:cNvGrpSpPr/>
-        <p:nvPr/>
-      </p:nvGrpSpPr>
-      <p:grpSpPr>
-        <a:xfrm>
-          <a:off x="0" y="0"/>
-          <a:ext cx="0" cy="0"/>
-          <a:chOff x="0" y="0"/>
-          <a:chExt cx="0" cy="0"/>
-        </a:xfrm>
-      </p:grpSpPr>
-      <p:sp>
-        <p:nvSpPr>
-          <p:cNvPr id="129" name="Google Shape;129;g2a5809dcb51_0_51:notes"/>
-          <p:cNvSpPr/>
-          <p:nvPr>
-            <p:ph idx="2" type="sldImg"/>
-          </p:nvPr>
-        </p:nvSpPr>
-        <p:spPr>
-          <a:xfrm>
-            <a:off x="381300" y="685800"/>
-            <a:ext cx="6096000" cy="3429000"/>
-          </a:xfrm>
-          <a:custGeom>
-            <a:rect b="b" l="l" r="r" t="t"/>
-            <a:pathLst>
-              <a:path extrusionOk="0" h="120000" w="120000">
-                <a:moveTo>
-                  <a:pt x="0" y="0"/>
-                </a:moveTo>
-                <a:lnTo>
-                  <a:pt x="120000" y="0"/>
-                </a:lnTo>
-                <a:lnTo>
-                  <a:pt x="120000" y="120000"/>
-                </a:lnTo>
-                <a:lnTo>
-                  <a:pt x="0" y="120000"/>
-                </a:lnTo>
-                <a:close/>
-              </a:path>
-            </a:pathLst>
-          </a:custGeom>
-        </p:spPr>
-      </p:sp>
-      <p:sp>
-        <p:nvSpPr>
-          <p:cNvPr id="130" name="Google Shape;130;g2a5809dcb51_0_51:notes"/>
-          <p:cNvSpPr txBox="1"/>
-          <p:nvPr>
-            <p:ph idx="1" type="body"/>
-          </p:nvPr>
-        </p:nvSpPr>
-        <p:spPr>
-          <a:xfrm>
-            <a:off x="685800" y="4343400"/>
-            <a:ext cx="5486400" cy="4114800"/>
-          </a:xfrm>
-          <a:prstGeom prst="rect">
-            <a:avLst/>
-          </a:prstGeom>
-        </p:spPr>
-        <p:txBody>
-          <a:bodyPr anchorCtr="0" anchor="t" bIns="91425" lIns="91425" spcFirstLastPara="1" rIns="91425" wrap="square" tIns="91425">
-            <a:noAutofit/>
-          </a:bodyPr>
-          <a:lstStyle/>
-          <a:p>
-            <a:pPr indent="0" lvl="0" marL="0" rtl="0" algn="l">
-              <a:spcBef>
-                <a:spcPts val="0"/>
-              </a:spcBef>
-              <a:spcAft>
-                <a:spcPts val="0"/>
-              </a:spcAft>
-              <a:buNone/>
-            </a:pPr>
-            <a:r>
-              <a:t/>
-            </a:r>
             <a:endParaRPr/>
           </a:p>
         </p:txBody>
@@ -1686,11 +1661,11 @@
 </file>
 
 <file path=ppt/slideLayouts/slideLayout1.xml><?xml version="1.0" encoding="utf-8"?>
-<p:sldLayout xmlns:a="http://schemas.openxmlformats.org/drawingml/2006/main" xmlns:r="http://schemas.openxmlformats.org/officeDocument/2006/relationships" xmlns:mc="http://schemas.openxmlformats.org/markup-compatibility/2006" xmlns:mv="urn:schemas-microsoft-com:mac:vml" xmlns:p="http://schemas.openxmlformats.org/presentationml/2006/main" xmlns:c="http://schemas.openxmlformats.org/drawingml/2006/chart" xmlns:dgm="http://schemas.openxmlformats.org/drawingml/2006/diagram" xmlns:o="urn:schemas-microsoft-com:office:office" xmlns:v="urn:schemas-microsoft-com:vml" xmlns:pvml="urn:schemas-microsoft-com:office:powerpoint" xmlns:com="http://schemas.openxmlformats.org/drawingml/2006/compatibility" xmlns:p14="http://schemas.microsoft.com/office/powerpoint/2010/main" xmlns:p15="http://schemas.microsoft.com/office/powerpoint/2012/main" xmlns:ahyp="http://schemas.microsoft.com/office/drawing/2018/hyperlinkcolor" matchingName="Title slide" type="title">
+<p:sldLayout xmlns:a="http://schemas.openxmlformats.org/drawingml/2006/main" xmlns:r="http://schemas.openxmlformats.org/officeDocument/2006/relationships" xmlns:p="http://schemas.openxmlformats.org/presentationml/2006/main" matchingName="Title slide" type="title">
   <p:cSld name="TITLE">
     <p:spTree>
       <p:nvGrpSpPr>
-        <p:cNvPr id="10" name="Shape 10"/>
+        <p:cNvPr id="1" name="Shape 10"/>
         <p:cNvGrpSpPr/>
         <p:nvPr/>
       </p:nvGrpSpPr>
@@ -1705,7 +1680,9 @@
       <p:sp>
         <p:nvSpPr>
           <p:cNvPr id="11" name="Google Shape;11;p2"/>
-          <p:cNvSpPr txBox="1"/>
+          <p:cNvSpPr txBox="1">
+            <a:spLocks noGrp="1"/>
+          </p:cNvSpPr>
           <p:nvPr>
             <p:ph type="ctrTitle"/>
           </p:nvPr>
@@ -1720,7 +1697,7 @@
           </a:prstGeom>
         </p:spPr>
         <p:txBody>
-          <a:bodyPr anchorCtr="0" anchor="b" bIns="91425" lIns="91425" spcFirstLastPara="1" rIns="91425" wrap="square" tIns="91425">
+          <a:bodyPr spcFirstLastPara="1" wrap="square" lIns="91425" tIns="91425" rIns="91425" bIns="91425" anchor="b" anchorCtr="0">
             <a:normAutofit/>
           </a:bodyPr>
           <a:lstStyle>
@@ -1824,15 +1801,19 @@
               <a:defRPr sz="5200"/>
             </a:lvl9pPr>
           </a:lstStyle>
-          <a:p/>
+          <a:p>
+            <a:endParaRPr/>
+          </a:p>
         </p:txBody>
       </p:sp>
       <p:sp>
         <p:nvSpPr>
           <p:cNvPr id="12" name="Google Shape;12;p2"/>
-          <p:cNvSpPr txBox="1"/>
+          <p:cNvSpPr txBox="1">
+            <a:spLocks noGrp="1"/>
+          </p:cNvSpPr>
           <p:nvPr>
-            <p:ph idx="1" type="subTitle"/>
+            <p:ph type="subTitle" idx="1"/>
           </p:nvPr>
         </p:nvSpPr>
         <p:spPr>
@@ -1845,7 +1826,7 @@
           </a:prstGeom>
         </p:spPr>
         <p:txBody>
-          <a:bodyPr anchorCtr="0" anchor="t" bIns="91425" lIns="91425" spcFirstLastPara="1" rIns="91425" wrap="square" tIns="91425">
+          <a:bodyPr spcFirstLastPara="1" wrap="square" lIns="91425" tIns="91425" rIns="91425" bIns="91425" anchor="t" anchorCtr="0">
             <a:normAutofit/>
           </a:bodyPr>
           <a:lstStyle>
@@ -1976,15 +1957,19 @@
               <a:defRPr sz="2800"/>
             </a:lvl9pPr>
           </a:lstStyle>
-          <a:p/>
+          <a:p>
+            <a:endParaRPr/>
+          </a:p>
         </p:txBody>
       </p:sp>
       <p:sp>
         <p:nvSpPr>
           <p:cNvPr id="13" name="Google Shape;13;p2"/>
-          <p:cNvSpPr txBox="1"/>
+          <p:cNvSpPr txBox="1">
+            <a:spLocks noGrp="1"/>
+          </p:cNvSpPr>
           <p:nvPr>
-            <p:ph idx="12" type="sldNum"/>
+            <p:ph type="sldNum" idx="12"/>
           </p:nvPr>
         </p:nvSpPr>
         <p:spPr>
@@ -1997,7 +1982,7 @@
           </a:prstGeom>
         </p:spPr>
         <p:txBody>
-          <a:bodyPr anchorCtr="0" anchor="ctr" bIns="91425" lIns="91425" spcFirstLastPara="1" rIns="91425" wrap="square" tIns="91425">
+          <a:bodyPr spcFirstLastPara="1" wrap="square" lIns="91425" tIns="91425" rIns="91425" bIns="91425" anchor="ctr" anchorCtr="0">
             <a:normAutofit/>
           </a:bodyPr>
           <a:lstStyle>
@@ -2039,7 +2024,7 @@
             </a:lvl9pPr>
           </a:lstStyle>
           <a:p>
-            <a:pPr indent="0" lvl="0" marL="0" rtl="0" algn="r">
+            <a:pPr marL="0" lvl="0" indent="0" algn="r" rtl="0">
               <a:spcBef>
                 <a:spcPts val="0"/>
               </a:spcBef>
@@ -2065,11 +2050,11 @@
 </file>
 
 <file path=ppt/slideLayouts/slideLayout10.xml><?xml version="1.0" encoding="utf-8"?>
-<p:sldLayout xmlns:a="http://schemas.openxmlformats.org/drawingml/2006/main" xmlns:r="http://schemas.openxmlformats.org/officeDocument/2006/relationships" xmlns:mc="http://schemas.openxmlformats.org/markup-compatibility/2006" xmlns:mv="urn:schemas-microsoft-com:mac:vml" xmlns:p="http://schemas.openxmlformats.org/presentationml/2006/main" xmlns:c="http://schemas.openxmlformats.org/drawingml/2006/chart" xmlns:dgm="http://schemas.openxmlformats.org/drawingml/2006/diagram" xmlns:o="urn:schemas-microsoft-com:office:office" xmlns:v="urn:schemas-microsoft-com:vml" xmlns:pvml="urn:schemas-microsoft-com:office:powerpoint" xmlns:com="http://schemas.openxmlformats.org/drawingml/2006/compatibility" xmlns:p14="http://schemas.microsoft.com/office/powerpoint/2010/main" xmlns:p15="http://schemas.microsoft.com/office/powerpoint/2012/main" xmlns:ahyp="http://schemas.microsoft.com/office/drawing/2018/hyperlinkcolor" matchingName="Big number">
+<p:sldLayout xmlns:a="http://schemas.openxmlformats.org/drawingml/2006/main" xmlns:r="http://schemas.openxmlformats.org/officeDocument/2006/relationships" xmlns:p="http://schemas.openxmlformats.org/presentationml/2006/main" matchingName="Big number">
   <p:cSld name="BIG_NUMBER">
     <p:spTree>
       <p:nvGrpSpPr>
-        <p:cNvPr id="46" name="Shape 46"/>
+        <p:cNvPr id="1" name="Shape 46"/>
         <p:cNvGrpSpPr/>
         <p:nvPr/>
       </p:nvGrpSpPr>
@@ -2084,9 +2069,11 @@
       <p:sp>
         <p:nvSpPr>
           <p:cNvPr id="47" name="Google Shape;47;p11"/>
-          <p:cNvSpPr txBox="1"/>
+          <p:cNvSpPr txBox="1">
+            <a:spLocks noGrp="1"/>
+          </p:cNvSpPr>
           <p:nvPr>
-            <p:ph hasCustomPrompt="1" type="title"/>
+            <p:ph type="title" hasCustomPrompt="1"/>
           </p:nvPr>
         </p:nvSpPr>
         <p:spPr>
@@ -2099,7 +2086,7 @@
           </a:prstGeom>
         </p:spPr>
         <p:txBody>
-          <a:bodyPr anchorCtr="0" anchor="b" bIns="91425" lIns="91425" spcFirstLastPara="1" rIns="91425" wrap="square" tIns="91425">
+          <a:bodyPr spcFirstLastPara="1" wrap="square" lIns="91425" tIns="91425" rIns="91425" bIns="91425" anchor="b" anchorCtr="0">
             <a:normAutofit/>
           </a:bodyPr>
           <a:lstStyle>
@@ -2213,9 +2200,11 @@
       <p:sp>
         <p:nvSpPr>
           <p:cNvPr id="48" name="Google Shape;48;p11"/>
-          <p:cNvSpPr txBox="1"/>
+          <p:cNvSpPr txBox="1">
+            <a:spLocks noGrp="1"/>
+          </p:cNvSpPr>
           <p:nvPr>
-            <p:ph idx="1" type="body"/>
+            <p:ph type="body" idx="1"/>
           </p:nvPr>
         </p:nvSpPr>
         <p:spPr>
@@ -2228,11 +2217,11 @@
           </a:prstGeom>
         </p:spPr>
         <p:txBody>
-          <a:bodyPr anchorCtr="0" anchor="t" bIns="91425" lIns="91425" spcFirstLastPara="1" rIns="91425" wrap="square" tIns="91425">
+          <a:bodyPr spcFirstLastPara="1" wrap="square" lIns="91425" tIns="91425" rIns="91425" bIns="91425" anchor="t" anchorCtr="0">
             <a:normAutofit/>
           </a:bodyPr>
           <a:lstStyle>
-            <a:lvl1pPr indent="-342900" lvl="0" marL="457200" algn="ctr">
+            <a:lvl1pPr marL="457200" lvl="0" indent="-342900" algn="ctr">
               <a:spcBef>
                 <a:spcPts val="0"/>
               </a:spcBef>
@@ -2243,7 +2232,7 @@
               <a:buChar char="●"/>
               <a:defRPr/>
             </a:lvl1pPr>
-            <a:lvl2pPr indent="-317500" lvl="1" marL="914400" algn="ctr">
+            <a:lvl2pPr marL="914400" lvl="1" indent="-317500" algn="ctr">
               <a:spcBef>
                 <a:spcPts val="0"/>
               </a:spcBef>
@@ -2254,7 +2243,7 @@
               <a:buChar char="○"/>
               <a:defRPr/>
             </a:lvl2pPr>
-            <a:lvl3pPr indent="-317500" lvl="2" marL="1371600" algn="ctr">
+            <a:lvl3pPr marL="1371600" lvl="2" indent="-317500" algn="ctr">
               <a:spcBef>
                 <a:spcPts val="0"/>
               </a:spcBef>
@@ -2265,7 +2254,7 @@
               <a:buChar char="■"/>
               <a:defRPr/>
             </a:lvl3pPr>
-            <a:lvl4pPr indent="-317500" lvl="3" marL="1828800" algn="ctr">
+            <a:lvl4pPr marL="1828800" lvl="3" indent="-317500" algn="ctr">
               <a:spcBef>
                 <a:spcPts val="0"/>
               </a:spcBef>
@@ -2276,7 +2265,7 @@
               <a:buChar char="●"/>
               <a:defRPr/>
             </a:lvl4pPr>
-            <a:lvl5pPr indent="-317500" lvl="4" marL="2286000" algn="ctr">
+            <a:lvl5pPr marL="2286000" lvl="4" indent="-317500" algn="ctr">
               <a:spcBef>
                 <a:spcPts val="0"/>
               </a:spcBef>
@@ -2287,7 +2276,7 @@
               <a:buChar char="○"/>
               <a:defRPr/>
             </a:lvl5pPr>
-            <a:lvl6pPr indent="-317500" lvl="5" marL="2743200" algn="ctr">
+            <a:lvl6pPr marL="2743200" lvl="5" indent="-317500" algn="ctr">
               <a:spcBef>
                 <a:spcPts val="0"/>
               </a:spcBef>
@@ -2298,7 +2287,7 @@
               <a:buChar char="■"/>
               <a:defRPr/>
             </a:lvl6pPr>
-            <a:lvl7pPr indent="-317500" lvl="6" marL="3200400" algn="ctr">
+            <a:lvl7pPr marL="3200400" lvl="6" indent="-317500" algn="ctr">
               <a:spcBef>
                 <a:spcPts val="0"/>
               </a:spcBef>
@@ -2309,7 +2298,7 @@
               <a:buChar char="●"/>
               <a:defRPr/>
             </a:lvl7pPr>
-            <a:lvl8pPr indent="-317500" lvl="7" marL="3657600" algn="ctr">
+            <a:lvl8pPr marL="3657600" lvl="7" indent="-317500" algn="ctr">
               <a:spcBef>
                 <a:spcPts val="0"/>
               </a:spcBef>
@@ -2320,7 +2309,7 @@
               <a:buChar char="○"/>
               <a:defRPr/>
             </a:lvl8pPr>
-            <a:lvl9pPr indent="-317500" lvl="8" marL="4114800" algn="ctr">
+            <a:lvl9pPr marL="4114800" lvl="8" indent="-317500" algn="ctr">
               <a:spcBef>
                 <a:spcPts val="0"/>
               </a:spcBef>
@@ -2332,15 +2321,19 @@
               <a:defRPr/>
             </a:lvl9pPr>
           </a:lstStyle>
-          <a:p/>
+          <a:p>
+            <a:endParaRPr/>
+          </a:p>
         </p:txBody>
       </p:sp>
       <p:sp>
         <p:nvSpPr>
           <p:cNvPr id="49" name="Google Shape;49;p11"/>
-          <p:cNvSpPr txBox="1"/>
+          <p:cNvSpPr txBox="1">
+            <a:spLocks noGrp="1"/>
+          </p:cNvSpPr>
           <p:nvPr>
-            <p:ph idx="12" type="sldNum"/>
+            <p:ph type="sldNum" idx="12"/>
           </p:nvPr>
         </p:nvSpPr>
         <p:spPr>
@@ -2353,7 +2346,7 @@
           </a:prstGeom>
         </p:spPr>
         <p:txBody>
-          <a:bodyPr anchorCtr="0" anchor="ctr" bIns="91425" lIns="91425" spcFirstLastPara="1" rIns="91425" wrap="square" tIns="91425">
+          <a:bodyPr spcFirstLastPara="1" wrap="square" lIns="91425" tIns="91425" rIns="91425" bIns="91425" anchor="ctr" anchorCtr="0">
             <a:normAutofit/>
           </a:bodyPr>
           <a:lstStyle>
@@ -2395,7 +2388,7 @@
             </a:lvl9pPr>
           </a:lstStyle>
           <a:p>
-            <a:pPr indent="0" lvl="0" marL="0" rtl="0" algn="r">
+            <a:pPr marL="0" lvl="0" indent="0" algn="r" rtl="0">
               <a:spcBef>
                 <a:spcPts val="0"/>
               </a:spcBef>
@@ -2421,11 +2414,11 @@
 </file>
 
 <file path=ppt/slideLayouts/slideLayout11.xml><?xml version="1.0" encoding="utf-8"?>
-<p:sldLayout xmlns:a="http://schemas.openxmlformats.org/drawingml/2006/main" xmlns:r="http://schemas.openxmlformats.org/officeDocument/2006/relationships" xmlns:mc="http://schemas.openxmlformats.org/markup-compatibility/2006" xmlns:mv="urn:schemas-microsoft-com:mac:vml" xmlns:p="http://schemas.openxmlformats.org/presentationml/2006/main" xmlns:c="http://schemas.openxmlformats.org/drawingml/2006/chart" xmlns:dgm="http://schemas.openxmlformats.org/drawingml/2006/diagram" xmlns:o="urn:schemas-microsoft-com:office:office" xmlns:v="urn:schemas-microsoft-com:vml" xmlns:pvml="urn:schemas-microsoft-com:office:powerpoint" xmlns:com="http://schemas.openxmlformats.org/drawingml/2006/compatibility" xmlns:p14="http://schemas.microsoft.com/office/powerpoint/2010/main" xmlns:p15="http://schemas.microsoft.com/office/powerpoint/2012/main" xmlns:ahyp="http://schemas.microsoft.com/office/drawing/2018/hyperlinkcolor" matchingName="Blank" type="blank">
+<p:sldLayout xmlns:a="http://schemas.openxmlformats.org/drawingml/2006/main" xmlns:r="http://schemas.openxmlformats.org/officeDocument/2006/relationships" xmlns:p="http://schemas.openxmlformats.org/presentationml/2006/main" matchingName="Blank" type="blank">
   <p:cSld name="BLANK">
     <p:spTree>
       <p:nvGrpSpPr>
-        <p:cNvPr id="50" name="Shape 50"/>
+        <p:cNvPr id="1" name="Shape 50"/>
         <p:cNvGrpSpPr/>
         <p:nvPr/>
       </p:nvGrpSpPr>
@@ -2440,9 +2433,11 @@
       <p:sp>
         <p:nvSpPr>
           <p:cNvPr id="51" name="Google Shape;51;p12"/>
-          <p:cNvSpPr txBox="1"/>
+          <p:cNvSpPr txBox="1">
+            <a:spLocks noGrp="1"/>
+          </p:cNvSpPr>
           <p:nvPr>
-            <p:ph idx="12" type="sldNum"/>
+            <p:ph type="sldNum" idx="12"/>
           </p:nvPr>
         </p:nvSpPr>
         <p:spPr>
@@ -2455,7 +2450,7 @@
           </a:prstGeom>
         </p:spPr>
         <p:txBody>
-          <a:bodyPr anchorCtr="0" anchor="ctr" bIns="91425" lIns="91425" spcFirstLastPara="1" rIns="91425" wrap="square" tIns="91425">
+          <a:bodyPr spcFirstLastPara="1" wrap="square" lIns="91425" tIns="91425" rIns="91425" bIns="91425" anchor="ctr" anchorCtr="0">
             <a:normAutofit/>
           </a:bodyPr>
           <a:lstStyle>
@@ -2497,7 +2492,7 @@
             </a:lvl9pPr>
           </a:lstStyle>
           <a:p>
-            <a:pPr indent="0" lvl="0" marL="0" rtl="0" algn="r">
+            <a:pPr marL="0" lvl="0" indent="0" algn="r" rtl="0">
               <a:spcBef>
                 <a:spcPts val="0"/>
               </a:spcBef>
@@ -2523,11 +2518,11 @@
 </file>
 
 <file path=ppt/slideLayouts/slideLayout2.xml><?xml version="1.0" encoding="utf-8"?>
-<p:sldLayout xmlns:a="http://schemas.openxmlformats.org/drawingml/2006/main" xmlns:r="http://schemas.openxmlformats.org/officeDocument/2006/relationships" xmlns:mc="http://schemas.openxmlformats.org/markup-compatibility/2006" xmlns:mv="urn:schemas-microsoft-com:mac:vml" xmlns:p="http://schemas.openxmlformats.org/presentationml/2006/main" xmlns:c="http://schemas.openxmlformats.org/drawingml/2006/chart" xmlns:dgm="http://schemas.openxmlformats.org/drawingml/2006/diagram" xmlns:o="urn:schemas-microsoft-com:office:office" xmlns:v="urn:schemas-microsoft-com:vml" xmlns:pvml="urn:schemas-microsoft-com:office:powerpoint" xmlns:com="http://schemas.openxmlformats.org/drawingml/2006/compatibility" xmlns:p14="http://schemas.microsoft.com/office/powerpoint/2010/main" xmlns:p15="http://schemas.microsoft.com/office/powerpoint/2012/main" xmlns:ahyp="http://schemas.microsoft.com/office/drawing/2018/hyperlinkcolor" matchingName="Section header" type="secHead">
+<p:sldLayout xmlns:a="http://schemas.openxmlformats.org/drawingml/2006/main" xmlns:r="http://schemas.openxmlformats.org/officeDocument/2006/relationships" xmlns:p="http://schemas.openxmlformats.org/presentationml/2006/main" matchingName="Section header" type="secHead">
   <p:cSld name="SECTION_HEADER">
     <p:spTree>
       <p:nvGrpSpPr>
-        <p:cNvPr id="14" name="Shape 14"/>
+        <p:cNvPr id="1" name="Shape 14"/>
         <p:cNvGrpSpPr/>
         <p:nvPr/>
       </p:nvGrpSpPr>
@@ -2542,7 +2537,9 @@
       <p:sp>
         <p:nvSpPr>
           <p:cNvPr id="15" name="Google Shape;15;p3"/>
-          <p:cNvSpPr txBox="1"/>
+          <p:cNvSpPr txBox="1">
+            <a:spLocks noGrp="1"/>
+          </p:cNvSpPr>
           <p:nvPr>
             <p:ph type="title"/>
           </p:nvPr>
@@ -2557,7 +2554,7 @@
           </a:prstGeom>
         </p:spPr>
         <p:txBody>
-          <a:bodyPr anchorCtr="0" anchor="ctr" bIns="91425" lIns="91425" spcFirstLastPara="1" rIns="91425" wrap="square" tIns="91425">
+          <a:bodyPr spcFirstLastPara="1" wrap="square" lIns="91425" tIns="91425" rIns="91425" bIns="91425" anchor="ctr" anchorCtr="0">
             <a:normAutofit/>
           </a:bodyPr>
           <a:lstStyle>
@@ -2661,15 +2658,19 @@
               <a:defRPr sz="3600"/>
             </a:lvl9pPr>
           </a:lstStyle>
-          <a:p/>
+          <a:p>
+            <a:endParaRPr/>
+          </a:p>
         </p:txBody>
       </p:sp>
       <p:sp>
         <p:nvSpPr>
           <p:cNvPr id="16" name="Google Shape;16;p3"/>
-          <p:cNvSpPr txBox="1"/>
+          <p:cNvSpPr txBox="1">
+            <a:spLocks noGrp="1"/>
+          </p:cNvSpPr>
           <p:nvPr>
-            <p:ph idx="12" type="sldNum"/>
+            <p:ph type="sldNum" idx="12"/>
           </p:nvPr>
         </p:nvSpPr>
         <p:spPr>
@@ -2682,7 +2683,7 @@
           </a:prstGeom>
         </p:spPr>
         <p:txBody>
-          <a:bodyPr anchorCtr="0" anchor="ctr" bIns="91425" lIns="91425" spcFirstLastPara="1" rIns="91425" wrap="square" tIns="91425">
+          <a:bodyPr spcFirstLastPara="1" wrap="square" lIns="91425" tIns="91425" rIns="91425" bIns="91425" anchor="ctr" anchorCtr="0">
             <a:normAutofit/>
           </a:bodyPr>
           <a:lstStyle>
@@ -2724,7 +2725,7 @@
             </a:lvl9pPr>
           </a:lstStyle>
           <a:p>
-            <a:pPr indent="0" lvl="0" marL="0" rtl="0" algn="r">
+            <a:pPr marL="0" lvl="0" indent="0" algn="r" rtl="0">
               <a:spcBef>
                 <a:spcPts val="0"/>
               </a:spcBef>
@@ -2750,11 +2751,11 @@
 </file>
 
 <file path=ppt/slideLayouts/slideLayout3.xml><?xml version="1.0" encoding="utf-8"?>
-<p:sldLayout xmlns:a="http://schemas.openxmlformats.org/drawingml/2006/main" xmlns:r="http://schemas.openxmlformats.org/officeDocument/2006/relationships" xmlns:mc="http://schemas.openxmlformats.org/markup-compatibility/2006" xmlns:mv="urn:schemas-microsoft-com:mac:vml" xmlns:p="http://schemas.openxmlformats.org/presentationml/2006/main" xmlns:c="http://schemas.openxmlformats.org/drawingml/2006/chart" xmlns:dgm="http://schemas.openxmlformats.org/drawingml/2006/diagram" xmlns:o="urn:schemas-microsoft-com:office:office" xmlns:v="urn:schemas-microsoft-com:vml" xmlns:pvml="urn:schemas-microsoft-com:office:powerpoint" xmlns:com="http://schemas.openxmlformats.org/drawingml/2006/compatibility" xmlns:p14="http://schemas.microsoft.com/office/powerpoint/2010/main" xmlns:p15="http://schemas.microsoft.com/office/powerpoint/2012/main" xmlns:ahyp="http://schemas.microsoft.com/office/drawing/2018/hyperlinkcolor" matchingName="Title and body" type="tx">
+<p:sldLayout xmlns:a="http://schemas.openxmlformats.org/drawingml/2006/main" xmlns:r="http://schemas.openxmlformats.org/officeDocument/2006/relationships" xmlns:p="http://schemas.openxmlformats.org/presentationml/2006/main" matchingName="Title and body" type="tx">
   <p:cSld name="TITLE_AND_BODY">
     <p:spTree>
       <p:nvGrpSpPr>
-        <p:cNvPr id="17" name="Shape 17"/>
+        <p:cNvPr id="1" name="Shape 17"/>
         <p:cNvGrpSpPr/>
         <p:nvPr/>
       </p:nvGrpSpPr>
@@ -2769,7 +2770,9 @@
       <p:sp>
         <p:nvSpPr>
           <p:cNvPr id="18" name="Google Shape;18;p4"/>
-          <p:cNvSpPr txBox="1"/>
+          <p:cNvSpPr txBox="1">
+            <a:spLocks noGrp="1"/>
+          </p:cNvSpPr>
           <p:nvPr>
             <p:ph type="title"/>
           </p:nvPr>
@@ -2784,7 +2787,7 @@
           </a:prstGeom>
         </p:spPr>
         <p:txBody>
-          <a:bodyPr anchorCtr="0" anchor="t" bIns="91425" lIns="91425" spcFirstLastPara="1" rIns="91425" wrap="square" tIns="91425">
+          <a:bodyPr spcFirstLastPara="1" wrap="square" lIns="91425" tIns="91425" rIns="91425" bIns="91425" anchor="t" anchorCtr="0">
             <a:normAutofit/>
           </a:bodyPr>
           <a:lstStyle>
@@ -2888,15 +2891,19 @@
               <a:defRPr/>
             </a:lvl9pPr>
           </a:lstStyle>
-          <a:p/>
+          <a:p>
+            <a:endParaRPr/>
+          </a:p>
         </p:txBody>
       </p:sp>
       <p:sp>
         <p:nvSpPr>
           <p:cNvPr id="19" name="Google Shape;19;p4"/>
-          <p:cNvSpPr txBox="1"/>
+          <p:cNvSpPr txBox="1">
+            <a:spLocks noGrp="1"/>
+          </p:cNvSpPr>
           <p:nvPr>
-            <p:ph idx="1" type="body"/>
+            <p:ph type="body" idx="1"/>
           </p:nvPr>
         </p:nvSpPr>
         <p:spPr>
@@ -2909,11 +2916,11 @@
           </a:prstGeom>
         </p:spPr>
         <p:txBody>
-          <a:bodyPr anchorCtr="0" anchor="t" bIns="91425" lIns="91425" spcFirstLastPara="1" rIns="91425" wrap="square" tIns="91425">
+          <a:bodyPr spcFirstLastPara="1" wrap="square" lIns="91425" tIns="91425" rIns="91425" bIns="91425" anchor="t" anchorCtr="0">
             <a:normAutofit/>
           </a:bodyPr>
           <a:lstStyle>
-            <a:lvl1pPr indent="-342900" lvl="0" marL="457200">
+            <a:lvl1pPr marL="457200" lvl="0" indent="-342900">
               <a:spcBef>
                 <a:spcPts val="0"/>
               </a:spcBef>
@@ -2924,7 +2931,7 @@
               <a:buChar char="●"/>
               <a:defRPr/>
             </a:lvl1pPr>
-            <a:lvl2pPr indent="-317500" lvl="1" marL="914400">
+            <a:lvl2pPr marL="914400" lvl="1" indent="-317500">
               <a:spcBef>
                 <a:spcPts val="0"/>
               </a:spcBef>
@@ -2935,7 +2942,7 @@
               <a:buChar char="○"/>
               <a:defRPr/>
             </a:lvl2pPr>
-            <a:lvl3pPr indent="-317500" lvl="2" marL="1371600">
+            <a:lvl3pPr marL="1371600" lvl="2" indent="-317500">
               <a:spcBef>
                 <a:spcPts val="0"/>
               </a:spcBef>
@@ -2946,7 +2953,7 @@
               <a:buChar char="■"/>
               <a:defRPr/>
             </a:lvl3pPr>
-            <a:lvl4pPr indent="-317500" lvl="3" marL="1828800">
+            <a:lvl4pPr marL="1828800" lvl="3" indent="-317500">
               <a:spcBef>
                 <a:spcPts val="0"/>
               </a:spcBef>
@@ -2957,7 +2964,7 @@
               <a:buChar char="●"/>
               <a:defRPr/>
             </a:lvl4pPr>
-            <a:lvl5pPr indent="-317500" lvl="4" marL="2286000">
+            <a:lvl5pPr marL="2286000" lvl="4" indent="-317500">
               <a:spcBef>
                 <a:spcPts val="0"/>
               </a:spcBef>
@@ -2968,7 +2975,7 @@
               <a:buChar char="○"/>
               <a:defRPr/>
             </a:lvl5pPr>
-            <a:lvl6pPr indent="-317500" lvl="5" marL="2743200">
+            <a:lvl6pPr marL="2743200" lvl="5" indent="-317500">
               <a:spcBef>
                 <a:spcPts val="0"/>
               </a:spcBef>
@@ -2979,7 +2986,7 @@
               <a:buChar char="■"/>
               <a:defRPr/>
             </a:lvl6pPr>
-            <a:lvl7pPr indent="-317500" lvl="6" marL="3200400">
+            <a:lvl7pPr marL="3200400" lvl="6" indent="-317500">
               <a:spcBef>
                 <a:spcPts val="0"/>
               </a:spcBef>
@@ -2990,7 +2997,7 @@
               <a:buChar char="●"/>
               <a:defRPr/>
             </a:lvl7pPr>
-            <a:lvl8pPr indent="-317500" lvl="7" marL="3657600">
+            <a:lvl8pPr marL="3657600" lvl="7" indent="-317500">
               <a:spcBef>
                 <a:spcPts val="0"/>
               </a:spcBef>
@@ -3001,7 +3008,7 @@
               <a:buChar char="○"/>
               <a:defRPr/>
             </a:lvl8pPr>
-            <a:lvl9pPr indent="-317500" lvl="8" marL="4114800">
+            <a:lvl9pPr marL="4114800" lvl="8" indent="-317500">
               <a:spcBef>
                 <a:spcPts val="0"/>
               </a:spcBef>
@@ -3013,15 +3020,19 @@
               <a:defRPr/>
             </a:lvl9pPr>
           </a:lstStyle>
-          <a:p/>
+          <a:p>
+            <a:endParaRPr/>
+          </a:p>
         </p:txBody>
       </p:sp>
       <p:sp>
         <p:nvSpPr>
           <p:cNvPr id="20" name="Google Shape;20;p4"/>
-          <p:cNvSpPr txBox="1"/>
+          <p:cNvSpPr txBox="1">
+            <a:spLocks noGrp="1"/>
+          </p:cNvSpPr>
           <p:nvPr>
-            <p:ph idx="12" type="sldNum"/>
+            <p:ph type="sldNum" idx="12"/>
           </p:nvPr>
         </p:nvSpPr>
         <p:spPr>
@@ -3034,7 +3045,7 @@
           </a:prstGeom>
         </p:spPr>
         <p:txBody>
-          <a:bodyPr anchorCtr="0" anchor="ctr" bIns="91425" lIns="91425" spcFirstLastPara="1" rIns="91425" wrap="square" tIns="91425">
+          <a:bodyPr spcFirstLastPara="1" wrap="square" lIns="91425" tIns="91425" rIns="91425" bIns="91425" anchor="ctr" anchorCtr="0">
             <a:normAutofit/>
           </a:bodyPr>
           <a:lstStyle>
@@ -3076,7 +3087,7 @@
             </a:lvl9pPr>
           </a:lstStyle>
           <a:p>
-            <a:pPr indent="0" lvl="0" marL="0" rtl="0" algn="r">
+            <a:pPr marL="0" lvl="0" indent="0" algn="r" rtl="0">
               <a:spcBef>
                 <a:spcPts val="0"/>
               </a:spcBef>
@@ -3102,11 +3113,11 @@
 </file>
 
 <file path=ppt/slideLayouts/slideLayout4.xml><?xml version="1.0" encoding="utf-8"?>
-<p:sldLayout xmlns:a="http://schemas.openxmlformats.org/drawingml/2006/main" xmlns:r="http://schemas.openxmlformats.org/officeDocument/2006/relationships" xmlns:mc="http://schemas.openxmlformats.org/markup-compatibility/2006" xmlns:mv="urn:schemas-microsoft-com:mac:vml" xmlns:p="http://schemas.openxmlformats.org/presentationml/2006/main" xmlns:c="http://schemas.openxmlformats.org/drawingml/2006/chart" xmlns:dgm="http://schemas.openxmlformats.org/drawingml/2006/diagram" xmlns:o="urn:schemas-microsoft-com:office:office" xmlns:v="urn:schemas-microsoft-com:vml" xmlns:pvml="urn:schemas-microsoft-com:office:powerpoint" xmlns:com="http://schemas.openxmlformats.org/drawingml/2006/compatibility" xmlns:p14="http://schemas.microsoft.com/office/powerpoint/2010/main" xmlns:p15="http://schemas.microsoft.com/office/powerpoint/2012/main" xmlns:ahyp="http://schemas.microsoft.com/office/drawing/2018/hyperlinkcolor" matchingName="Title and two columns" type="twoColTx">
+<p:sldLayout xmlns:a="http://schemas.openxmlformats.org/drawingml/2006/main" xmlns:r="http://schemas.openxmlformats.org/officeDocument/2006/relationships" xmlns:p="http://schemas.openxmlformats.org/presentationml/2006/main" matchingName="Title and two columns" type="twoColTx">
   <p:cSld name="TITLE_AND_TWO_COLUMNS">
     <p:spTree>
       <p:nvGrpSpPr>
-        <p:cNvPr id="21" name="Shape 21"/>
+        <p:cNvPr id="1" name="Shape 21"/>
         <p:cNvGrpSpPr/>
         <p:nvPr/>
       </p:nvGrpSpPr>
@@ -3121,7 +3132,9 @@
       <p:sp>
         <p:nvSpPr>
           <p:cNvPr id="22" name="Google Shape;22;p5"/>
-          <p:cNvSpPr txBox="1"/>
+          <p:cNvSpPr txBox="1">
+            <a:spLocks noGrp="1"/>
+          </p:cNvSpPr>
           <p:nvPr>
             <p:ph type="title"/>
           </p:nvPr>
@@ -3136,7 +3149,7 @@
           </a:prstGeom>
         </p:spPr>
         <p:txBody>
-          <a:bodyPr anchorCtr="0" anchor="t" bIns="91425" lIns="91425" spcFirstLastPara="1" rIns="91425" wrap="square" tIns="91425">
+          <a:bodyPr spcFirstLastPara="1" wrap="square" lIns="91425" tIns="91425" rIns="91425" bIns="91425" anchor="t" anchorCtr="0">
             <a:normAutofit/>
           </a:bodyPr>
           <a:lstStyle>
@@ -3240,15 +3253,19 @@
               <a:defRPr/>
             </a:lvl9pPr>
           </a:lstStyle>
-          <a:p/>
+          <a:p>
+            <a:endParaRPr/>
+          </a:p>
         </p:txBody>
       </p:sp>
       <p:sp>
         <p:nvSpPr>
           <p:cNvPr id="23" name="Google Shape;23;p5"/>
-          <p:cNvSpPr txBox="1"/>
+          <p:cNvSpPr txBox="1">
+            <a:spLocks noGrp="1"/>
+          </p:cNvSpPr>
           <p:nvPr>
-            <p:ph idx="1" type="body"/>
+            <p:ph type="body" idx="1"/>
           </p:nvPr>
         </p:nvSpPr>
         <p:spPr>
@@ -3261,11 +3278,11 @@
           </a:prstGeom>
         </p:spPr>
         <p:txBody>
-          <a:bodyPr anchorCtr="0" anchor="t" bIns="91425" lIns="91425" spcFirstLastPara="1" rIns="91425" wrap="square" tIns="91425">
+          <a:bodyPr spcFirstLastPara="1" wrap="square" lIns="91425" tIns="91425" rIns="91425" bIns="91425" anchor="t" anchorCtr="0">
             <a:normAutofit/>
           </a:bodyPr>
           <a:lstStyle>
-            <a:lvl1pPr indent="-317500" lvl="0" marL="457200">
+            <a:lvl1pPr marL="457200" lvl="0" indent="-317500">
               <a:spcBef>
                 <a:spcPts val="0"/>
               </a:spcBef>
@@ -3276,7 +3293,7 @@
               <a:buChar char="●"/>
               <a:defRPr sz="1400"/>
             </a:lvl1pPr>
-            <a:lvl2pPr indent="-304800" lvl="1" marL="914400">
+            <a:lvl2pPr marL="914400" lvl="1" indent="-304800">
               <a:spcBef>
                 <a:spcPts val="0"/>
               </a:spcBef>
@@ -3287,7 +3304,7 @@
               <a:buChar char="○"/>
               <a:defRPr sz="1200"/>
             </a:lvl2pPr>
-            <a:lvl3pPr indent="-304800" lvl="2" marL="1371600">
+            <a:lvl3pPr marL="1371600" lvl="2" indent="-304800">
               <a:spcBef>
                 <a:spcPts val="0"/>
               </a:spcBef>
@@ -3298,7 +3315,7 @@
               <a:buChar char="■"/>
               <a:defRPr sz="1200"/>
             </a:lvl3pPr>
-            <a:lvl4pPr indent="-304800" lvl="3" marL="1828800">
+            <a:lvl4pPr marL="1828800" lvl="3" indent="-304800">
               <a:spcBef>
                 <a:spcPts val="0"/>
               </a:spcBef>
@@ -3309,7 +3326,7 @@
               <a:buChar char="●"/>
               <a:defRPr sz="1200"/>
             </a:lvl4pPr>
-            <a:lvl5pPr indent="-304800" lvl="4" marL="2286000">
+            <a:lvl5pPr marL="2286000" lvl="4" indent="-304800">
               <a:spcBef>
                 <a:spcPts val="0"/>
               </a:spcBef>
@@ -3320,7 +3337,7 @@
               <a:buChar char="○"/>
               <a:defRPr sz="1200"/>
             </a:lvl5pPr>
-            <a:lvl6pPr indent="-304800" lvl="5" marL="2743200">
+            <a:lvl6pPr marL="2743200" lvl="5" indent="-304800">
               <a:spcBef>
                 <a:spcPts val="0"/>
               </a:spcBef>
@@ -3331,7 +3348,7 @@
               <a:buChar char="■"/>
               <a:defRPr sz="1200"/>
             </a:lvl6pPr>
-            <a:lvl7pPr indent="-304800" lvl="6" marL="3200400">
+            <a:lvl7pPr marL="3200400" lvl="6" indent="-304800">
               <a:spcBef>
                 <a:spcPts val="0"/>
               </a:spcBef>
@@ -3342,7 +3359,7 @@
               <a:buChar char="●"/>
               <a:defRPr sz="1200"/>
             </a:lvl7pPr>
-            <a:lvl8pPr indent="-304800" lvl="7" marL="3657600">
+            <a:lvl8pPr marL="3657600" lvl="7" indent="-304800">
               <a:spcBef>
                 <a:spcPts val="0"/>
               </a:spcBef>
@@ -3353,7 +3370,7 @@
               <a:buChar char="○"/>
               <a:defRPr sz="1200"/>
             </a:lvl8pPr>
-            <a:lvl9pPr indent="-304800" lvl="8" marL="4114800">
+            <a:lvl9pPr marL="4114800" lvl="8" indent="-304800">
               <a:spcBef>
                 <a:spcPts val="0"/>
               </a:spcBef>
@@ -3365,15 +3382,19 @@
               <a:defRPr sz="1200"/>
             </a:lvl9pPr>
           </a:lstStyle>
-          <a:p/>
+          <a:p>
+            <a:endParaRPr/>
+          </a:p>
         </p:txBody>
       </p:sp>
       <p:sp>
         <p:nvSpPr>
           <p:cNvPr id="24" name="Google Shape;24;p5"/>
-          <p:cNvSpPr txBox="1"/>
+          <p:cNvSpPr txBox="1">
+            <a:spLocks noGrp="1"/>
+          </p:cNvSpPr>
           <p:nvPr>
-            <p:ph idx="2" type="body"/>
+            <p:ph type="body" idx="2"/>
           </p:nvPr>
         </p:nvSpPr>
         <p:spPr>
@@ -3386,11 +3407,11 @@
           </a:prstGeom>
         </p:spPr>
         <p:txBody>
-          <a:bodyPr anchorCtr="0" anchor="t" bIns="91425" lIns="91425" spcFirstLastPara="1" rIns="91425" wrap="square" tIns="91425">
+          <a:bodyPr spcFirstLastPara="1" wrap="square" lIns="91425" tIns="91425" rIns="91425" bIns="91425" anchor="t" anchorCtr="0">
             <a:normAutofit/>
           </a:bodyPr>
           <a:lstStyle>
-            <a:lvl1pPr indent="-317500" lvl="0" marL="457200">
+            <a:lvl1pPr marL="457200" lvl="0" indent="-317500">
               <a:spcBef>
                 <a:spcPts val="0"/>
               </a:spcBef>
@@ -3401,7 +3422,7 @@
               <a:buChar char="●"/>
               <a:defRPr sz="1400"/>
             </a:lvl1pPr>
-            <a:lvl2pPr indent="-304800" lvl="1" marL="914400">
+            <a:lvl2pPr marL="914400" lvl="1" indent="-304800">
               <a:spcBef>
                 <a:spcPts val="0"/>
               </a:spcBef>
@@ -3412,7 +3433,7 @@
               <a:buChar char="○"/>
               <a:defRPr sz="1200"/>
             </a:lvl2pPr>
-            <a:lvl3pPr indent="-304800" lvl="2" marL="1371600">
+            <a:lvl3pPr marL="1371600" lvl="2" indent="-304800">
               <a:spcBef>
                 <a:spcPts val="0"/>
               </a:spcBef>
@@ -3423,7 +3444,7 @@
               <a:buChar char="■"/>
               <a:defRPr sz="1200"/>
             </a:lvl3pPr>
-            <a:lvl4pPr indent="-304800" lvl="3" marL="1828800">
+            <a:lvl4pPr marL="1828800" lvl="3" indent="-304800">
               <a:spcBef>
                 <a:spcPts val="0"/>
               </a:spcBef>
@@ -3434,7 +3455,7 @@
               <a:buChar char="●"/>
               <a:defRPr sz="1200"/>
             </a:lvl4pPr>
-            <a:lvl5pPr indent="-304800" lvl="4" marL="2286000">
+            <a:lvl5pPr marL="2286000" lvl="4" indent="-304800">
               <a:spcBef>
                 <a:spcPts val="0"/>
               </a:spcBef>
@@ -3445,7 +3466,7 @@
               <a:buChar char="○"/>
               <a:defRPr sz="1200"/>
             </a:lvl5pPr>
-            <a:lvl6pPr indent="-304800" lvl="5" marL="2743200">
+            <a:lvl6pPr marL="2743200" lvl="5" indent="-304800">
               <a:spcBef>
                 <a:spcPts val="0"/>
               </a:spcBef>
@@ -3456,7 +3477,7 @@
               <a:buChar char="■"/>
               <a:defRPr sz="1200"/>
             </a:lvl6pPr>
-            <a:lvl7pPr indent="-304800" lvl="6" marL="3200400">
+            <a:lvl7pPr marL="3200400" lvl="6" indent="-304800">
               <a:spcBef>
                 <a:spcPts val="0"/>
               </a:spcBef>
@@ -3467,7 +3488,7 @@
               <a:buChar char="●"/>
               <a:defRPr sz="1200"/>
             </a:lvl7pPr>
-            <a:lvl8pPr indent="-304800" lvl="7" marL="3657600">
+            <a:lvl8pPr marL="3657600" lvl="7" indent="-304800">
               <a:spcBef>
                 <a:spcPts val="0"/>
               </a:spcBef>
@@ -3478,7 +3499,7 @@
               <a:buChar char="○"/>
               <a:defRPr sz="1200"/>
             </a:lvl8pPr>
-            <a:lvl9pPr indent="-304800" lvl="8" marL="4114800">
+            <a:lvl9pPr marL="4114800" lvl="8" indent="-304800">
               <a:spcBef>
                 <a:spcPts val="0"/>
               </a:spcBef>
@@ -3490,15 +3511,19 @@
               <a:defRPr sz="1200"/>
             </a:lvl9pPr>
           </a:lstStyle>
-          <a:p/>
+          <a:p>
+            <a:endParaRPr/>
+          </a:p>
         </p:txBody>
       </p:sp>
       <p:sp>
         <p:nvSpPr>
           <p:cNvPr id="25" name="Google Shape;25;p5"/>
-          <p:cNvSpPr txBox="1"/>
+          <p:cNvSpPr txBox="1">
+            <a:spLocks noGrp="1"/>
+          </p:cNvSpPr>
           <p:nvPr>
-            <p:ph idx="12" type="sldNum"/>
+            <p:ph type="sldNum" idx="12"/>
           </p:nvPr>
         </p:nvSpPr>
         <p:spPr>
@@ -3511,7 +3536,7 @@
           </a:prstGeom>
         </p:spPr>
         <p:txBody>
-          <a:bodyPr anchorCtr="0" anchor="ctr" bIns="91425" lIns="91425" spcFirstLastPara="1" rIns="91425" wrap="square" tIns="91425">
+          <a:bodyPr spcFirstLastPara="1" wrap="square" lIns="91425" tIns="91425" rIns="91425" bIns="91425" anchor="ctr" anchorCtr="0">
             <a:normAutofit/>
           </a:bodyPr>
           <a:lstStyle>
@@ -3553,7 +3578,7 @@
             </a:lvl9pPr>
           </a:lstStyle>
           <a:p>
-            <a:pPr indent="0" lvl="0" marL="0" rtl="0" algn="r">
+            <a:pPr marL="0" lvl="0" indent="0" algn="r" rtl="0">
               <a:spcBef>
                 <a:spcPts val="0"/>
               </a:spcBef>
@@ -3579,11 +3604,11 @@
 </file>
 
 <file path=ppt/slideLayouts/slideLayout5.xml><?xml version="1.0" encoding="utf-8"?>
-<p:sldLayout xmlns:a="http://schemas.openxmlformats.org/drawingml/2006/main" xmlns:r="http://schemas.openxmlformats.org/officeDocument/2006/relationships" xmlns:mc="http://schemas.openxmlformats.org/markup-compatibility/2006" xmlns:mv="urn:schemas-microsoft-com:mac:vml" xmlns:p="http://schemas.openxmlformats.org/presentationml/2006/main" xmlns:c="http://schemas.openxmlformats.org/drawingml/2006/chart" xmlns:dgm="http://schemas.openxmlformats.org/drawingml/2006/diagram" xmlns:o="urn:schemas-microsoft-com:office:office" xmlns:v="urn:schemas-microsoft-com:vml" xmlns:pvml="urn:schemas-microsoft-com:office:powerpoint" xmlns:com="http://schemas.openxmlformats.org/drawingml/2006/compatibility" xmlns:p14="http://schemas.microsoft.com/office/powerpoint/2010/main" xmlns:p15="http://schemas.microsoft.com/office/powerpoint/2012/main" xmlns:ahyp="http://schemas.microsoft.com/office/drawing/2018/hyperlinkcolor" matchingName="Title only" type="titleOnly">
+<p:sldLayout xmlns:a="http://schemas.openxmlformats.org/drawingml/2006/main" xmlns:r="http://schemas.openxmlformats.org/officeDocument/2006/relationships" xmlns:p="http://schemas.openxmlformats.org/presentationml/2006/main" matchingName="Title only" type="titleOnly">
   <p:cSld name="TITLE_ONLY">
     <p:spTree>
       <p:nvGrpSpPr>
-        <p:cNvPr id="26" name="Shape 26"/>
+        <p:cNvPr id="1" name="Shape 26"/>
         <p:cNvGrpSpPr/>
         <p:nvPr/>
       </p:nvGrpSpPr>
@@ -3598,7 +3623,9 @@
       <p:sp>
         <p:nvSpPr>
           <p:cNvPr id="27" name="Google Shape;27;p6"/>
-          <p:cNvSpPr txBox="1"/>
+          <p:cNvSpPr txBox="1">
+            <a:spLocks noGrp="1"/>
+          </p:cNvSpPr>
           <p:nvPr>
             <p:ph type="title"/>
           </p:nvPr>
@@ -3613,7 +3640,7 @@
           </a:prstGeom>
         </p:spPr>
         <p:txBody>
-          <a:bodyPr anchorCtr="0" anchor="t" bIns="91425" lIns="91425" spcFirstLastPara="1" rIns="91425" wrap="square" tIns="91425">
+          <a:bodyPr spcFirstLastPara="1" wrap="square" lIns="91425" tIns="91425" rIns="91425" bIns="91425" anchor="t" anchorCtr="0">
             <a:normAutofit/>
           </a:bodyPr>
           <a:lstStyle>
@@ -3717,15 +3744,19 @@
               <a:defRPr/>
             </a:lvl9pPr>
           </a:lstStyle>
-          <a:p/>
+          <a:p>
+            <a:endParaRPr/>
+          </a:p>
         </p:txBody>
       </p:sp>
       <p:sp>
         <p:nvSpPr>
           <p:cNvPr id="28" name="Google Shape;28;p6"/>
-          <p:cNvSpPr txBox="1"/>
+          <p:cNvSpPr txBox="1">
+            <a:spLocks noGrp="1"/>
+          </p:cNvSpPr>
           <p:nvPr>
-            <p:ph idx="12" type="sldNum"/>
+            <p:ph type="sldNum" idx="12"/>
           </p:nvPr>
         </p:nvSpPr>
         <p:spPr>
@@ -3738,7 +3769,7 @@
           </a:prstGeom>
         </p:spPr>
         <p:txBody>
-          <a:bodyPr anchorCtr="0" anchor="ctr" bIns="91425" lIns="91425" spcFirstLastPara="1" rIns="91425" wrap="square" tIns="91425">
+          <a:bodyPr spcFirstLastPara="1" wrap="square" lIns="91425" tIns="91425" rIns="91425" bIns="91425" anchor="ctr" anchorCtr="0">
             <a:normAutofit/>
           </a:bodyPr>
           <a:lstStyle>
@@ -3780,7 +3811,7 @@
             </a:lvl9pPr>
           </a:lstStyle>
           <a:p>
-            <a:pPr indent="0" lvl="0" marL="0" rtl="0" algn="r">
+            <a:pPr marL="0" lvl="0" indent="0" algn="r" rtl="0">
               <a:spcBef>
                 <a:spcPts val="0"/>
               </a:spcBef>
@@ -3806,11 +3837,11 @@
 </file>
 
 <file path=ppt/slideLayouts/slideLayout6.xml><?xml version="1.0" encoding="utf-8"?>
-<p:sldLayout xmlns:a="http://schemas.openxmlformats.org/drawingml/2006/main" xmlns:r="http://schemas.openxmlformats.org/officeDocument/2006/relationships" xmlns:mc="http://schemas.openxmlformats.org/markup-compatibility/2006" xmlns:mv="urn:schemas-microsoft-com:mac:vml" xmlns:p="http://schemas.openxmlformats.org/presentationml/2006/main" xmlns:c="http://schemas.openxmlformats.org/drawingml/2006/chart" xmlns:dgm="http://schemas.openxmlformats.org/drawingml/2006/diagram" xmlns:o="urn:schemas-microsoft-com:office:office" xmlns:v="urn:schemas-microsoft-com:vml" xmlns:pvml="urn:schemas-microsoft-com:office:powerpoint" xmlns:com="http://schemas.openxmlformats.org/drawingml/2006/compatibility" xmlns:p14="http://schemas.microsoft.com/office/powerpoint/2010/main" xmlns:p15="http://schemas.microsoft.com/office/powerpoint/2012/main" xmlns:ahyp="http://schemas.microsoft.com/office/drawing/2018/hyperlinkcolor" matchingName="One column text">
+<p:sldLayout xmlns:a="http://schemas.openxmlformats.org/drawingml/2006/main" xmlns:r="http://schemas.openxmlformats.org/officeDocument/2006/relationships" xmlns:p="http://schemas.openxmlformats.org/presentationml/2006/main" matchingName="One column text">
   <p:cSld name="ONE_COLUMN_TEXT">
     <p:spTree>
       <p:nvGrpSpPr>
-        <p:cNvPr id="29" name="Shape 29"/>
+        <p:cNvPr id="1" name="Shape 29"/>
         <p:cNvGrpSpPr/>
         <p:nvPr/>
       </p:nvGrpSpPr>
@@ -3825,7 +3856,9 @@
       <p:sp>
         <p:nvSpPr>
           <p:cNvPr id="30" name="Google Shape;30;p7"/>
-          <p:cNvSpPr txBox="1"/>
+          <p:cNvSpPr txBox="1">
+            <a:spLocks noGrp="1"/>
+          </p:cNvSpPr>
           <p:nvPr>
             <p:ph type="title"/>
           </p:nvPr>
@@ -3840,7 +3873,7 @@
           </a:prstGeom>
         </p:spPr>
         <p:txBody>
-          <a:bodyPr anchorCtr="0" anchor="b" bIns="91425" lIns="91425" spcFirstLastPara="1" rIns="91425" wrap="square" tIns="91425">
+          <a:bodyPr spcFirstLastPara="1" wrap="square" lIns="91425" tIns="91425" rIns="91425" bIns="91425" anchor="b" anchorCtr="0">
             <a:normAutofit/>
           </a:bodyPr>
           <a:lstStyle>
@@ -3944,15 +3977,19 @@
               <a:defRPr sz="2400"/>
             </a:lvl9pPr>
           </a:lstStyle>
-          <a:p/>
+          <a:p>
+            <a:endParaRPr/>
+          </a:p>
         </p:txBody>
       </p:sp>
       <p:sp>
         <p:nvSpPr>
           <p:cNvPr id="31" name="Google Shape;31;p7"/>
-          <p:cNvSpPr txBox="1"/>
+          <p:cNvSpPr txBox="1">
+            <a:spLocks noGrp="1"/>
+          </p:cNvSpPr>
           <p:nvPr>
-            <p:ph idx="1" type="body"/>
+            <p:ph type="body" idx="1"/>
           </p:nvPr>
         </p:nvSpPr>
         <p:spPr>
@@ -3965,11 +4002,11 @@
           </a:prstGeom>
         </p:spPr>
         <p:txBody>
-          <a:bodyPr anchorCtr="0" anchor="t" bIns="91425" lIns="91425" spcFirstLastPara="1" rIns="91425" wrap="square" tIns="91425">
+          <a:bodyPr spcFirstLastPara="1" wrap="square" lIns="91425" tIns="91425" rIns="91425" bIns="91425" anchor="t" anchorCtr="0">
             <a:normAutofit/>
           </a:bodyPr>
           <a:lstStyle>
-            <a:lvl1pPr indent="-304800" lvl="0" marL="457200">
+            <a:lvl1pPr marL="457200" lvl="0" indent="-304800">
               <a:spcBef>
                 <a:spcPts val="0"/>
               </a:spcBef>
@@ -3980,7 +4017,7 @@
               <a:buChar char="●"/>
               <a:defRPr sz="1200"/>
             </a:lvl1pPr>
-            <a:lvl2pPr indent="-304800" lvl="1" marL="914400">
+            <a:lvl2pPr marL="914400" lvl="1" indent="-304800">
               <a:spcBef>
                 <a:spcPts val="0"/>
               </a:spcBef>
@@ -3991,7 +4028,7 @@
               <a:buChar char="○"/>
               <a:defRPr sz="1200"/>
             </a:lvl2pPr>
-            <a:lvl3pPr indent="-304800" lvl="2" marL="1371600">
+            <a:lvl3pPr marL="1371600" lvl="2" indent="-304800">
               <a:spcBef>
                 <a:spcPts val="0"/>
               </a:spcBef>
@@ -4002,7 +4039,7 @@
               <a:buChar char="■"/>
               <a:defRPr sz="1200"/>
             </a:lvl3pPr>
-            <a:lvl4pPr indent="-304800" lvl="3" marL="1828800">
+            <a:lvl4pPr marL="1828800" lvl="3" indent="-304800">
               <a:spcBef>
                 <a:spcPts val="0"/>
               </a:spcBef>
@@ -4013,7 +4050,7 @@
               <a:buChar char="●"/>
               <a:defRPr sz="1200"/>
             </a:lvl4pPr>
-            <a:lvl5pPr indent="-304800" lvl="4" marL="2286000">
+            <a:lvl5pPr marL="2286000" lvl="4" indent="-304800">
               <a:spcBef>
                 <a:spcPts val="0"/>
               </a:spcBef>
@@ -4024,7 +4061,7 @@
               <a:buChar char="○"/>
               <a:defRPr sz="1200"/>
             </a:lvl5pPr>
-            <a:lvl6pPr indent="-304800" lvl="5" marL="2743200">
+            <a:lvl6pPr marL="2743200" lvl="5" indent="-304800">
               <a:spcBef>
                 <a:spcPts val="0"/>
               </a:spcBef>
@@ -4035,7 +4072,7 @@
               <a:buChar char="■"/>
               <a:defRPr sz="1200"/>
             </a:lvl6pPr>
-            <a:lvl7pPr indent="-304800" lvl="6" marL="3200400">
+            <a:lvl7pPr marL="3200400" lvl="6" indent="-304800">
               <a:spcBef>
                 <a:spcPts val="0"/>
               </a:spcBef>
@@ -4046,7 +4083,7 @@
               <a:buChar char="●"/>
               <a:defRPr sz="1200"/>
             </a:lvl7pPr>
-            <a:lvl8pPr indent="-304800" lvl="7" marL="3657600">
+            <a:lvl8pPr marL="3657600" lvl="7" indent="-304800">
               <a:spcBef>
                 <a:spcPts val="0"/>
               </a:spcBef>
@@ -4057,7 +4094,7 @@
               <a:buChar char="○"/>
               <a:defRPr sz="1200"/>
             </a:lvl8pPr>
-            <a:lvl9pPr indent="-304800" lvl="8" marL="4114800">
+            <a:lvl9pPr marL="4114800" lvl="8" indent="-304800">
               <a:spcBef>
                 <a:spcPts val="0"/>
               </a:spcBef>
@@ -4069,15 +4106,19 @@
               <a:defRPr sz="1200"/>
             </a:lvl9pPr>
           </a:lstStyle>
-          <a:p/>
+          <a:p>
+            <a:endParaRPr/>
+          </a:p>
         </p:txBody>
       </p:sp>
       <p:sp>
         <p:nvSpPr>
           <p:cNvPr id="32" name="Google Shape;32;p7"/>
-          <p:cNvSpPr txBox="1"/>
+          <p:cNvSpPr txBox="1">
+            <a:spLocks noGrp="1"/>
+          </p:cNvSpPr>
           <p:nvPr>
-            <p:ph idx="12" type="sldNum"/>
+            <p:ph type="sldNum" idx="12"/>
           </p:nvPr>
         </p:nvSpPr>
         <p:spPr>
@@ -4090,7 +4131,7 @@
           </a:prstGeom>
         </p:spPr>
         <p:txBody>
-          <a:bodyPr anchorCtr="0" anchor="ctr" bIns="91425" lIns="91425" spcFirstLastPara="1" rIns="91425" wrap="square" tIns="91425">
+          <a:bodyPr spcFirstLastPara="1" wrap="square" lIns="91425" tIns="91425" rIns="91425" bIns="91425" anchor="ctr" anchorCtr="0">
             <a:normAutofit/>
           </a:bodyPr>
           <a:lstStyle>
@@ -4132,7 +4173,7 @@
             </a:lvl9pPr>
           </a:lstStyle>
           <a:p>
-            <a:pPr indent="0" lvl="0" marL="0" rtl="0" algn="r">
+            <a:pPr marL="0" lvl="0" indent="0" algn="r" rtl="0">
               <a:spcBef>
                 <a:spcPts val="0"/>
               </a:spcBef>
@@ -4158,11 +4199,11 @@
 </file>
 
 <file path=ppt/slideLayouts/slideLayout7.xml><?xml version="1.0" encoding="utf-8"?>
-<p:sldLayout xmlns:a="http://schemas.openxmlformats.org/drawingml/2006/main" xmlns:r="http://schemas.openxmlformats.org/officeDocument/2006/relationships" xmlns:mc="http://schemas.openxmlformats.org/markup-compatibility/2006" xmlns:mv="urn:schemas-microsoft-com:mac:vml" xmlns:p="http://schemas.openxmlformats.org/presentationml/2006/main" xmlns:c="http://schemas.openxmlformats.org/drawingml/2006/chart" xmlns:dgm="http://schemas.openxmlformats.org/drawingml/2006/diagram" xmlns:o="urn:schemas-microsoft-com:office:office" xmlns:v="urn:schemas-microsoft-com:vml" xmlns:pvml="urn:schemas-microsoft-com:office:powerpoint" xmlns:com="http://schemas.openxmlformats.org/drawingml/2006/compatibility" xmlns:p14="http://schemas.microsoft.com/office/powerpoint/2010/main" xmlns:p15="http://schemas.microsoft.com/office/powerpoint/2012/main" xmlns:ahyp="http://schemas.microsoft.com/office/drawing/2018/hyperlinkcolor" matchingName="Main point">
+<p:sldLayout xmlns:a="http://schemas.openxmlformats.org/drawingml/2006/main" xmlns:r="http://schemas.openxmlformats.org/officeDocument/2006/relationships" xmlns:p="http://schemas.openxmlformats.org/presentationml/2006/main" matchingName="Main point">
   <p:cSld name="MAIN_POINT">
     <p:spTree>
       <p:nvGrpSpPr>
-        <p:cNvPr id="33" name="Shape 33"/>
+        <p:cNvPr id="1" name="Shape 33"/>
         <p:cNvGrpSpPr/>
         <p:nvPr/>
       </p:nvGrpSpPr>
@@ -4177,7 +4218,9 @@
       <p:sp>
         <p:nvSpPr>
           <p:cNvPr id="34" name="Google Shape;34;p8"/>
-          <p:cNvSpPr txBox="1"/>
+          <p:cNvSpPr txBox="1">
+            <a:spLocks noGrp="1"/>
+          </p:cNvSpPr>
           <p:nvPr>
             <p:ph type="title"/>
           </p:nvPr>
@@ -4192,7 +4235,7 @@
           </a:prstGeom>
         </p:spPr>
         <p:txBody>
-          <a:bodyPr anchorCtr="0" anchor="ctr" bIns="91425" lIns="91425" spcFirstLastPara="1" rIns="91425" wrap="square" tIns="91425">
+          <a:bodyPr spcFirstLastPara="1" wrap="square" lIns="91425" tIns="91425" rIns="91425" bIns="91425" anchor="ctr" anchorCtr="0">
             <a:normAutofit/>
           </a:bodyPr>
           <a:lstStyle>
@@ -4296,15 +4339,19 @@
               <a:defRPr sz="4800"/>
             </a:lvl9pPr>
           </a:lstStyle>
-          <a:p/>
+          <a:p>
+            <a:endParaRPr/>
+          </a:p>
         </p:txBody>
       </p:sp>
       <p:sp>
         <p:nvSpPr>
           <p:cNvPr id="35" name="Google Shape;35;p8"/>
-          <p:cNvSpPr txBox="1"/>
+          <p:cNvSpPr txBox="1">
+            <a:spLocks noGrp="1"/>
+          </p:cNvSpPr>
           <p:nvPr>
-            <p:ph idx="12" type="sldNum"/>
+            <p:ph type="sldNum" idx="12"/>
           </p:nvPr>
         </p:nvSpPr>
         <p:spPr>
@@ -4317,7 +4364,7 @@
           </a:prstGeom>
         </p:spPr>
         <p:txBody>
-          <a:bodyPr anchorCtr="0" anchor="ctr" bIns="91425" lIns="91425" spcFirstLastPara="1" rIns="91425" wrap="square" tIns="91425">
+          <a:bodyPr spcFirstLastPara="1" wrap="square" lIns="91425" tIns="91425" rIns="91425" bIns="91425" anchor="ctr" anchorCtr="0">
             <a:normAutofit/>
           </a:bodyPr>
           <a:lstStyle>
@@ -4359,7 +4406,7 @@
             </a:lvl9pPr>
           </a:lstStyle>
           <a:p>
-            <a:pPr indent="0" lvl="0" marL="0" rtl="0" algn="r">
+            <a:pPr marL="0" lvl="0" indent="0" algn="r" rtl="0">
               <a:spcBef>
                 <a:spcPts val="0"/>
               </a:spcBef>
@@ -4385,11 +4432,11 @@
 </file>
 
 <file path=ppt/slideLayouts/slideLayout8.xml><?xml version="1.0" encoding="utf-8"?>
-<p:sldLayout xmlns:a="http://schemas.openxmlformats.org/drawingml/2006/main" xmlns:r="http://schemas.openxmlformats.org/officeDocument/2006/relationships" xmlns:mc="http://schemas.openxmlformats.org/markup-compatibility/2006" xmlns:mv="urn:schemas-microsoft-com:mac:vml" xmlns:p="http://schemas.openxmlformats.org/presentationml/2006/main" xmlns:c="http://schemas.openxmlformats.org/drawingml/2006/chart" xmlns:dgm="http://schemas.openxmlformats.org/drawingml/2006/diagram" xmlns:o="urn:schemas-microsoft-com:office:office" xmlns:v="urn:schemas-microsoft-com:vml" xmlns:pvml="urn:schemas-microsoft-com:office:powerpoint" xmlns:com="http://schemas.openxmlformats.org/drawingml/2006/compatibility" xmlns:p14="http://schemas.microsoft.com/office/powerpoint/2010/main" xmlns:p15="http://schemas.microsoft.com/office/powerpoint/2012/main" xmlns:ahyp="http://schemas.microsoft.com/office/drawing/2018/hyperlinkcolor" matchingName="Section title and description">
+<p:sldLayout xmlns:a="http://schemas.openxmlformats.org/drawingml/2006/main" xmlns:r="http://schemas.openxmlformats.org/officeDocument/2006/relationships" xmlns:p="http://schemas.openxmlformats.org/presentationml/2006/main" matchingName="Section title and description">
   <p:cSld name="SECTION_TITLE_AND_DESCRIPTION">
     <p:spTree>
       <p:nvGrpSpPr>
-        <p:cNvPr id="36" name="Shape 36"/>
+        <p:cNvPr id="1" name="Shape 36"/>
         <p:cNvGrpSpPr/>
         <p:nvPr/>
       </p:nvGrpSpPr>
@@ -4423,12 +4470,12 @@
           </a:ln>
         </p:spPr>
         <p:txBody>
-          <a:bodyPr anchorCtr="0" anchor="ctr" bIns="91425" lIns="91425" spcFirstLastPara="1" rIns="91425" wrap="square" tIns="91425">
+          <a:bodyPr spcFirstLastPara="1" wrap="square" lIns="91425" tIns="91425" rIns="91425" bIns="91425" anchor="ctr" anchorCtr="0">
             <a:noAutofit/>
           </a:bodyPr>
           <a:lstStyle/>
           <a:p>
-            <a:pPr indent="0" lvl="0" marL="0" rtl="0" algn="l">
+            <a:pPr marL="0" lvl="0" indent="0" algn="l" rtl="0">
               <a:spcBef>
                 <a:spcPts val="0"/>
               </a:spcBef>
@@ -4437,9 +4484,6 @@
               </a:spcAft>
               <a:buNone/>
             </a:pPr>
-            <a:r>
-              <a:t/>
-            </a:r>
             <a:endParaRPr/>
           </a:p>
         </p:txBody>
@@ -4447,7 +4491,9 @@
       <p:sp>
         <p:nvSpPr>
           <p:cNvPr id="38" name="Google Shape;38;p9"/>
-          <p:cNvSpPr txBox="1"/>
+          <p:cNvSpPr txBox="1">
+            <a:spLocks noGrp="1"/>
+          </p:cNvSpPr>
           <p:nvPr>
             <p:ph type="title"/>
           </p:nvPr>
@@ -4462,7 +4508,7 @@
           </a:prstGeom>
         </p:spPr>
         <p:txBody>
-          <a:bodyPr anchorCtr="0" anchor="b" bIns="91425" lIns="91425" spcFirstLastPara="1" rIns="91425" wrap="square" tIns="91425">
+          <a:bodyPr spcFirstLastPara="1" wrap="square" lIns="91425" tIns="91425" rIns="91425" bIns="91425" anchor="b" anchorCtr="0">
             <a:normAutofit/>
           </a:bodyPr>
           <a:lstStyle>
@@ -4566,15 +4612,19 @@
               <a:defRPr sz="4200"/>
             </a:lvl9pPr>
           </a:lstStyle>
-          <a:p/>
+          <a:p>
+            <a:endParaRPr/>
+          </a:p>
         </p:txBody>
       </p:sp>
       <p:sp>
         <p:nvSpPr>
           <p:cNvPr id="39" name="Google Shape;39;p9"/>
-          <p:cNvSpPr txBox="1"/>
+          <p:cNvSpPr txBox="1">
+            <a:spLocks noGrp="1"/>
+          </p:cNvSpPr>
           <p:nvPr>
-            <p:ph idx="1" type="body"/>
+            <p:ph type="body" idx="1"/>
           </p:nvPr>
         </p:nvSpPr>
         <p:spPr>
@@ -4587,11 +4637,11 @@
           </a:prstGeom>
         </p:spPr>
         <p:txBody>
-          <a:bodyPr anchorCtr="0" anchor="ctr" bIns="91425" lIns="91425" spcFirstLastPara="1" rIns="91425" wrap="square" tIns="91425">
+          <a:bodyPr spcFirstLastPara="1" wrap="square" lIns="91425" tIns="91425" rIns="91425" bIns="91425" anchor="ctr" anchorCtr="0">
             <a:normAutofit/>
           </a:bodyPr>
           <a:lstStyle>
-            <a:lvl1pPr indent="-342900" lvl="0" marL="457200">
+            <a:lvl1pPr marL="457200" lvl="0" indent="-342900">
               <a:spcBef>
                 <a:spcPts val="0"/>
               </a:spcBef>
@@ -4609,7 +4659,7 @@
                 </a:solidFill>
               </a:defRPr>
             </a:lvl1pPr>
-            <a:lvl2pPr indent="-317500" lvl="1" marL="914400">
+            <a:lvl2pPr marL="914400" lvl="1" indent="-317500">
               <a:spcBef>
                 <a:spcPts val="0"/>
               </a:spcBef>
@@ -4627,7 +4677,7 @@
                 </a:solidFill>
               </a:defRPr>
             </a:lvl2pPr>
-            <a:lvl3pPr indent="-317500" lvl="2" marL="1371600">
+            <a:lvl3pPr marL="1371600" lvl="2" indent="-317500">
               <a:spcBef>
                 <a:spcPts val="0"/>
               </a:spcBef>
@@ -4645,7 +4695,7 @@
                 </a:solidFill>
               </a:defRPr>
             </a:lvl3pPr>
-            <a:lvl4pPr indent="-317500" lvl="3" marL="1828800">
+            <a:lvl4pPr marL="1828800" lvl="3" indent="-317500">
               <a:spcBef>
                 <a:spcPts val="0"/>
               </a:spcBef>
@@ -4663,7 +4713,7 @@
                 </a:solidFill>
               </a:defRPr>
             </a:lvl4pPr>
-            <a:lvl5pPr indent="-317500" lvl="4" marL="2286000">
+            <a:lvl5pPr marL="2286000" lvl="4" indent="-317500">
               <a:spcBef>
                 <a:spcPts val="0"/>
               </a:spcBef>
@@ -4681,7 +4731,7 @@
                 </a:solidFill>
               </a:defRPr>
             </a:lvl5pPr>
-            <a:lvl6pPr indent="-317500" lvl="5" marL="2743200">
+            <a:lvl6pPr marL="2743200" lvl="5" indent="-317500">
               <a:spcBef>
                 <a:spcPts val="0"/>
               </a:spcBef>
@@ -4699,7 +4749,7 @@
                 </a:solidFill>
               </a:defRPr>
             </a:lvl6pPr>
-            <a:lvl7pPr indent="-317500" lvl="6" marL="3200400">
+            <a:lvl7pPr marL="3200400" lvl="6" indent="-317500">
               <a:spcBef>
                 <a:spcPts val="0"/>
               </a:spcBef>
@@ -4717,7 +4767,7 @@
                 </a:solidFill>
               </a:defRPr>
             </a:lvl7pPr>
-            <a:lvl8pPr indent="-317500" lvl="7" marL="3657600">
+            <a:lvl8pPr marL="3657600" lvl="7" indent="-317500">
               <a:spcBef>
                 <a:spcPts val="0"/>
               </a:spcBef>
@@ -4735,7 +4785,7 @@
                 </a:solidFill>
               </a:defRPr>
             </a:lvl8pPr>
-            <a:lvl9pPr indent="-317500" lvl="8" marL="4114800">
+            <a:lvl9pPr marL="4114800" lvl="8" indent="-317500">
               <a:spcBef>
                 <a:spcPts val="0"/>
               </a:spcBef>
@@ -4754,7 +4804,9 @@
               </a:defRPr>
             </a:lvl9pPr>
           </a:lstStyle>
-          <a:p/>
+          <a:p>
+            <a:endParaRPr/>
+          </a:p>
         </p:txBody>
       </p:sp>
       <p:pic>
@@ -4788,9 +4840,11 @@
       <p:sp>
         <p:nvSpPr>
           <p:cNvPr id="41" name="Google Shape;41;p9"/>
-          <p:cNvSpPr txBox="1"/>
+          <p:cNvSpPr txBox="1">
+            <a:spLocks noGrp="1"/>
+          </p:cNvSpPr>
           <p:nvPr>
-            <p:ph idx="2" type="subTitle"/>
+            <p:ph type="subTitle" idx="2"/>
           </p:nvPr>
         </p:nvSpPr>
         <p:spPr>
@@ -4803,7 +4857,7 @@
           </a:prstGeom>
         </p:spPr>
         <p:txBody>
-          <a:bodyPr anchorCtr="0" anchor="t" bIns="91425" lIns="91425" spcFirstLastPara="1" rIns="91425" wrap="square" tIns="91425">
+          <a:bodyPr spcFirstLastPara="1" wrap="square" lIns="91425" tIns="91425" rIns="91425" bIns="91425" anchor="t" anchorCtr="0">
             <a:normAutofit/>
           </a:bodyPr>
           <a:lstStyle>
@@ -4934,15 +4988,19 @@
               <a:defRPr sz="2100"/>
             </a:lvl9pPr>
           </a:lstStyle>
-          <a:p/>
+          <a:p>
+            <a:endParaRPr/>
+          </a:p>
         </p:txBody>
       </p:sp>
       <p:sp>
         <p:nvSpPr>
           <p:cNvPr id="42" name="Google Shape;42;p9"/>
-          <p:cNvSpPr txBox="1"/>
+          <p:cNvSpPr txBox="1">
+            <a:spLocks noGrp="1"/>
+          </p:cNvSpPr>
           <p:nvPr>
-            <p:ph idx="12" type="sldNum"/>
+            <p:ph type="sldNum" idx="12"/>
           </p:nvPr>
         </p:nvSpPr>
         <p:spPr>
@@ -4955,7 +5013,7 @@
           </a:prstGeom>
         </p:spPr>
         <p:txBody>
-          <a:bodyPr anchorCtr="0" anchor="ctr" bIns="91425" lIns="91425" spcFirstLastPara="1" rIns="91425" wrap="square" tIns="91425">
+          <a:bodyPr spcFirstLastPara="1" wrap="square" lIns="91425" tIns="91425" rIns="91425" bIns="91425" anchor="ctr" anchorCtr="0">
             <a:normAutofit/>
           </a:bodyPr>
           <a:lstStyle>
@@ -4997,7 +5055,7 @@
             </a:lvl9pPr>
           </a:lstStyle>
           <a:p>
-            <a:pPr indent="0" lvl="0" marL="0" rtl="0" algn="r">
+            <a:pPr marL="0" lvl="0" indent="0" algn="r" rtl="0">
               <a:spcBef>
                 <a:spcPts val="0"/>
               </a:spcBef>
@@ -5023,11 +5081,11 @@
 </file>
 
 <file path=ppt/slideLayouts/slideLayout9.xml><?xml version="1.0" encoding="utf-8"?>
-<p:sldLayout xmlns:a="http://schemas.openxmlformats.org/drawingml/2006/main" xmlns:r="http://schemas.openxmlformats.org/officeDocument/2006/relationships" xmlns:mc="http://schemas.openxmlformats.org/markup-compatibility/2006" xmlns:mv="urn:schemas-microsoft-com:mac:vml" xmlns:p="http://schemas.openxmlformats.org/presentationml/2006/main" xmlns:c="http://schemas.openxmlformats.org/drawingml/2006/chart" xmlns:dgm="http://schemas.openxmlformats.org/drawingml/2006/diagram" xmlns:o="urn:schemas-microsoft-com:office:office" xmlns:v="urn:schemas-microsoft-com:vml" xmlns:pvml="urn:schemas-microsoft-com:office:powerpoint" xmlns:com="http://schemas.openxmlformats.org/drawingml/2006/compatibility" xmlns:p14="http://schemas.microsoft.com/office/powerpoint/2010/main" xmlns:p15="http://schemas.microsoft.com/office/powerpoint/2012/main" xmlns:ahyp="http://schemas.microsoft.com/office/drawing/2018/hyperlinkcolor" matchingName="Caption">
+<p:sldLayout xmlns:a="http://schemas.openxmlformats.org/drawingml/2006/main" xmlns:r="http://schemas.openxmlformats.org/officeDocument/2006/relationships" xmlns:p="http://schemas.openxmlformats.org/presentationml/2006/main" matchingName="Caption">
   <p:cSld name="CAPTION_ONLY">
     <p:spTree>
       <p:nvGrpSpPr>
-        <p:cNvPr id="43" name="Shape 43"/>
+        <p:cNvPr id="1" name="Shape 43"/>
         <p:cNvGrpSpPr/>
         <p:nvPr/>
       </p:nvGrpSpPr>
@@ -5042,9 +5100,11 @@
       <p:sp>
         <p:nvSpPr>
           <p:cNvPr id="44" name="Google Shape;44;p10"/>
-          <p:cNvSpPr txBox="1"/>
+          <p:cNvSpPr txBox="1">
+            <a:spLocks noGrp="1"/>
+          </p:cNvSpPr>
           <p:nvPr>
-            <p:ph idx="1" type="body"/>
+            <p:ph type="body" idx="1"/>
           </p:nvPr>
         </p:nvSpPr>
         <p:spPr>
@@ -5057,11 +5117,11 @@
           </a:prstGeom>
         </p:spPr>
         <p:txBody>
-          <a:bodyPr anchorCtr="0" anchor="ctr" bIns="91425" lIns="91425" spcFirstLastPara="1" rIns="91425" wrap="square" tIns="91425">
+          <a:bodyPr spcFirstLastPara="1" wrap="square" lIns="91425" tIns="91425" rIns="91425" bIns="91425" anchor="ctr" anchorCtr="0">
             <a:normAutofit/>
           </a:bodyPr>
           <a:lstStyle>
-            <a:lvl1pPr indent="-228600" lvl="0" marL="457200">
+            <a:lvl1pPr marL="457200" lvl="0" indent="-228600">
               <a:lnSpc>
                 <a:spcPct val="100000"/>
               </a:lnSpc>
@@ -5076,15 +5136,19 @@
               <a:defRPr/>
             </a:lvl1pPr>
           </a:lstStyle>
-          <a:p/>
+          <a:p>
+            <a:endParaRPr/>
+          </a:p>
         </p:txBody>
       </p:sp>
       <p:sp>
         <p:nvSpPr>
           <p:cNvPr id="45" name="Google Shape;45;p10"/>
-          <p:cNvSpPr txBox="1"/>
+          <p:cNvSpPr txBox="1">
+            <a:spLocks noGrp="1"/>
+          </p:cNvSpPr>
           <p:nvPr>
-            <p:ph idx="12" type="sldNum"/>
+            <p:ph type="sldNum" idx="12"/>
           </p:nvPr>
         </p:nvSpPr>
         <p:spPr>
@@ -5097,7 +5161,7 @@
           </a:prstGeom>
         </p:spPr>
         <p:txBody>
-          <a:bodyPr anchorCtr="0" anchor="ctr" bIns="91425" lIns="91425" spcFirstLastPara="1" rIns="91425" wrap="square" tIns="91425">
+          <a:bodyPr spcFirstLastPara="1" wrap="square" lIns="91425" tIns="91425" rIns="91425" bIns="91425" anchor="ctr" anchorCtr="0">
             <a:normAutofit/>
           </a:bodyPr>
           <a:lstStyle>
@@ -5139,7 +5203,7 @@
             </a:lvl9pPr>
           </a:lstStyle>
           <a:p>
-            <a:pPr indent="0" lvl="0" marL="0" rtl="0" algn="r">
+            <a:pPr marL="0" lvl="0" indent="0" algn="r" rtl="0">
               <a:spcBef>
                 <a:spcPts val="0"/>
               </a:spcBef>
@@ -5165,18 +5229,19 @@
 </file>
 
 <file path=ppt/slideMasters/slideMaster1.xml><?xml version="1.0" encoding="utf-8"?>
-<p:sldMaster xmlns:a="http://schemas.openxmlformats.org/drawingml/2006/main" xmlns:r="http://schemas.openxmlformats.org/officeDocument/2006/relationships" xmlns:mc="http://schemas.openxmlformats.org/markup-compatibility/2006" xmlns:mv="urn:schemas-microsoft-com:mac:vml" xmlns:p="http://schemas.openxmlformats.org/presentationml/2006/main" xmlns:c="http://schemas.openxmlformats.org/drawingml/2006/chart" xmlns:dgm="http://schemas.openxmlformats.org/drawingml/2006/diagram" xmlns:o="urn:schemas-microsoft-com:office:office" xmlns:v="urn:schemas-microsoft-com:vml" xmlns:pvml="urn:schemas-microsoft-com:office:powerpoint" xmlns:com="http://schemas.openxmlformats.org/drawingml/2006/compatibility" xmlns:p14="http://schemas.microsoft.com/office/powerpoint/2010/main" xmlns:p15="http://schemas.microsoft.com/office/powerpoint/2012/main" xmlns:ahyp="http://schemas.microsoft.com/office/drawing/2018/hyperlinkcolor">
+<p:sldMaster xmlns:a="http://schemas.openxmlformats.org/drawingml/2006/main" xmlns:r="http://schemas.openxmlformats.org/officeDocument/2006/relationships" xmlns:p="http://schemas.openxmlformats.org/presentationml/2006/main">
   <p:cSld name="simple-dark-2">
     <p:bg>
       <p:bgPr>
         <a:solidFill>
           <a:schemeClr val="lt1"/>
         </a:solidFill>
+        <a:effectLst/>
       </p:bgPr>
     </p:bg>
     <p:spTree>
       <p:nvGrpSpPr>
-        <p:cNvPr id="5" name="Shape 5"/>
+        <p:cNvPr id="1" name="Shape 5"/>
         <p:cNvGrpSpPr/>
         <p:nvPr/>
       </p:nvGrpSpPr>
@@ -5195,7 +5260,7 @@
           <p:nvPr/>
         </p:nvPicPr>
         <p:blipFill>
-          <a:blip r:embed="rId1">
+          <a:blip r:embed="rId13">
             <a:alphaModFix amt="21000"/>
           </a:blip>
           <a:stretch>
@@ -5219,7 +5284,9 @@
       <p:sp>
         <p:nvSpPr>
           <p:cNvPr id="7" name="Google Shape;7;p1"/>
-          <p:cNvSpPr txBox="1"/>
+          <p:cNvSpPr txBox="1">
+            <a:spLocks noGrp="1"/>
+          </p:cNvSpPr>
           <p:nvPr>
             <p:ph type="title"/>
           </p:nvPr>
@@ -5238,7 +5305,7 @@
           </a:ln>
         </p:spPr>
         <p:txBody>
-          <a:bodyPr anchorCtr="0" anchor="t" bIns="91425" lIns="91425" spcFirstLastPara="1" rIns="91425" wrap="square" tIns="91425">
+          <a:bodyPr spcFirstLastPara="1" wrap="square" lIns="91425" tIns="91425" rIns="91425" bIns="91425" anchor="t" anchorCtr="0">
             <a:normAutofit/>
           </a:bodyPr>
           <a:lstStyle>
@@ -5405,15 +5472,19 @@
               </a:defRPr>
             </a:lvl9pPr>
           </a:lstStyle>
-          <a:p/>
+          <a:p>
+            <a:endParaRPr/>
+          </a:p>
         </p:txBody>
       </p:sp>
       <p:sp>
         <p:nvSpPr>
           <p:cNvPr id="8" name="Google Shape;8;p1"/>
-          <p:cNvSpPr txBox="1"/>
+          <p:cNvSpPr txBox="1">
+            <a:spLocks noGrp="1"/>
+          </p:cNvSpPr>
           <p:nvPr>
-            <p:ph idx="1" type="body"/>
+            <p:ph type="body" idx="1"/>
           </p:nvPr>
         </p:nvSpPr>
         <p:spPr>
@@ -5430,11 +5501,11 @@
           </a:ln>
         </p:spPr>
         <p:txBody>
-          <a:bodyPr anchorCtr="0" anchor="t" bIns="91425" lIns="91425" spcFirstLastPara="1" rIns="91425" wrap="square" tIns="91425">
+          <a:bodyPr spcFirstLastPara="1" wrap="square" lIns="91425" tIns="91425" rIns="91425" bIns="91425" anchor="t" anchorCtr="0">
             <a:normAutofit/>
           </a:bodyPr>
           <a:lstStyle>
-            <a:lvl1pPr indent="-342900" lvl="0" marL="457200">
+            <a:lvl1pPr marL="457200" lvl="0" indent="-342900">
               <a:lnSpc>
                 <a:spcPct val="115000"/>
               </a:lnSpc>
@@ -5455,7 +5526,7 @@
                 </a:solidFill>
               </a:defRPr>
             </a:lvl1pPr>
-            <a:lvl2pPr indent="-317500" lvl="1" marL="914400">
+            <a:lvl2pPr marL="914400" lvl="1" indent="-317500">
               <a:lnSpc>
                 <a:spcPct val="115000"/>
               </a:lnSpc>
@@ -5476,7 +5547,7 @@
                 </a:solidFill>
               </a:defRPr>
             </a:lvl2pPr>
-            <a:lvl3pPr indent="-317500" lvl="2" marL="1371600">
+            <a:lvl3pPr marL="1371600" lvl="2" indent="-317500">
               <a:lnSpc>
                 <a:spcPct val="115000"/>
               </a:lnSpc>
@@ -5497,7 +5568,7 @@
                 </a:solidFill>
               </a:defRPr>
             </a:lvl3pPr>
-            <a:lvl4pPr indent="-317500" lvl="3" marL="1828800">
+            <a:lvl4pPr marL="1828800" lvl="3" indent="-317500">
               <a:lnSpc>
                 <a:spcPct val="115000"/>
               </a:lnSpc>
@@ -5518,7 +5589,7 @@
                 </a:solidFill>
               </a:defRPr>
             </a:lvl4pPr>
-            <a:lvl5pPr indent="-317500" lvl="4" marL="2286000">
+            <a:lvl5pPr marL="2286000" lvl="4" indent="-317500">
               <a:lnSpc>
                 <a:spcPct val="115000"/>
               </a:lnSpc>
@@ -5539,7 +5610,7 @@
                 </a:solidFill>
               </a:defRPr>
             </a:lvl5pPr>
-            <a:lvl6pPr indent="-317500" lvl="5" marL="2743200">
+            <a:lvl6pPr marL="2743200" lvl="5" indent="-317500">
               <a:lnSpc>
                 <a:spcPct val="115000"/>
               </a:lnSpc>
@@ -5560,7 +5631,7 @@
                 </a:solidFill>
               </a:defRPr>
             </a:lvl6pPr>
-            <a:lvl7pPr indent="-317500" lvl="6" marL="3200400">
+            <a:lvl7pPr marL="3200400" lvl="6" indent="-317500">
               <a:lnSpc>
                 <a:spcPct val="115000"/>
               </a:lnSpc>
@@ -5581,7 +5652,7 @@
                 </a:solidFill>
               </a:defRPr>
             </a:lvl7pPr>
-            <a:lvl8pPr indent="-317500" lvl="7" marL="3657600">
+            <a:lvl8pPr marL="3657600" lvl="7" indent="-317500">
               <a:lnSpc>
                 <a:spcPct val="115000"/>
               </a:lnSpc>
@@ -5602,7 +5673,7 @@
                 </a:solidFill>
               </a:defRPr>
             </a:lvl8pPr>
-            <a:lvl9pPr indent="-317500" lvl="8" marL="4114800">
+            <a:lvl9pPr marL="4114800" lvl="8" indent="-317500">
               <a:lnSpc>
                 <a:spcPct val="115000"/>
               </a:lnSpc>
@@ -5624,15 +5695,19 @@
               </a:defRPr>
             </a:lvl9pPr>
           </a:lstStyle>
-          <a:p/>
+          <a:p>
+            <a:endParaRPr/>
+          </a:p>
         </p:txBody>
       </p:sp>
       <p:sp>
         <p:nvSpPr>
           <p:cNvPr id="9" name="Google Shape;9;p1"/>
-          <p:cNvSpPr txBox="1"/>
+          <p:cNvSpPr txBox="1">
+            <a:spLocks noGrp="1"/>
+          </p:cNvSpPr>
           <p:nvPr>
-            <p:ph idx="12" type="sldNum"/>
+            <p:ph type="sldNum" idx="12"/>
           </p:nvPr>
         </p:nvSpPr>
         <p:spPr>
@@ -5649,7 +5724,7 @@
           </a:ln>
         </p:spPr>
         <p:txBody>
-          <a:bodyPr anchorCtr="0" anchor="ctr" bIns="91425" lIns="91425" spcFirstLastPara="1" rIns="91425" wrap="square" tIns="91425">
+          <a:bodyPr spcFirstLastPara="1" wrap="square" lIns="91425" tIns="91425" rIns="91425" bIns="91425" anchor="ctr" anchorCtr="0">
             <a:normAutofit/>
           </a:bodyPr>
           <a:lstStyle>
@@ -5727,7 +5802,7 @@
             </a:lvl9pPr>
           </a:lstStyle>
           <a:p>
-            <a:pPr indent="0" lvl="0" marL="0" rtl="0" algn="r">
+            <a:pPr marL="0" lvl="0" indent="0" algn="r" rtl="0">
               <a:spcBef>
                 <a:spcPts val="0"/>
               </a:spcBef>
@@ -5746,24 +5821,24 @@
       </p:sp>
     </p:spTree>
   </p:cSld>
-  <p:clrMap accent1="accent1" accent2="accent2" accent3="accent3" accent4="accent4" accent5="accent5" accent6="accent6" bg1="lt1" bg2="dk2" tx1="dk1" tx2="lt2" folHlink="folHlink" hlink="hlink"/>
+  <p:clrMap bg1="lt1" tx1="dk1" bg2="dk2" tx2="lt2" accent1="accent1" accent2="accent2" accent3="accent3" accent4="accent4" accent5="accent5" accent6="accent6" hlink="hlink" folHlink="folHlink"/>
   <p:sldLayoutIdLst>
-    <p:sldLayoutId id="2147483648" r:id="rId2"/>
-    <p:sldLayoutId id="2147483649" r:id="rId3"/>
-    <p:sldLayoutId id="2147483650" r:id="rId4"/>
-    <p:sldLayoutId id="2147483651" r:id="rId5"/>
-    <p:sldLayoutId id="2147483652" r:id="rId6"/>
-    <p:sldLayoutId id="2147483653" r:id="rId7"/>
-    <p:sldLayoutId id="2147483654" r:id="rId8"/>
-    <p:sldLayoutId id="2147483655" r:id="rId9"/>
-    <p:sldLayoutId id="2147483656" r:id="rId10"/>
-    <p:sldLayoutId id="2147483657" r:id="rId11"/>
-    <p:sldLayoutId id="2147483658" r:id="rId12"/>
+    <p:sldLayoutId id="2147483648" r:id="rId1"/>
+    <p:sldLayoutId id="2147483649" r:id="rId2"/>
+    <p:sldLayoutId id="2147483650" r:id="rId3"/>
+    <p:sldLayoutId id="2147483651" r:id="rId4"/>
+    <p:sldLayoutId id="2147483652" r:id="rId5"/>
+    <p:sldLayoutId id="2147483653" r:id="rId6"/>
+    <p:sldLayoutId id="2147483654" r:id="rId7"/>
+    <p:sldLayoutId id="2147483655" r:id="rId8"/>
+    <p:sldLayoutId id="2147483656" r:id="rId9"/>
+    <p:sldLayoutId id="2147483657" r:id="rId10"/>
+    <p:sldLayoutId id="2147483658" r:id="rId11"/>
   </p:sldLayoutIdLst>
-  <p:hf dt="0" ftr="0" hdr="0" sldNum="0"/>
+  <p:hf sldNum="0" hdr="0" ftr="0" dt="0"/>
   <p:txStyles>
     <p:titleStyle>
-      <a:defPPr lvl="0" marR="0" rtl="0" algn="l">
+      <a:defPPr marR="0" lvl="0" algn="l" rtl="0">
         <a:lnSpc>
           <a:spcPct val="100000"/>
         </a:lnSpc>
@@ -5774,7 +5849,7 @@
           <a:spcPts val="0"/>
         </a:spcAft>
       </a:defPPr>
-      <a:lvl1pPr lvl="0" marR="0" rtl="0" algn="l">
+      <a:lvl1pPr marR="0" lvl="0" algn="l" rtl="0">
         <a:lnSpc>
           <a:spcPct val="100000"/>
         </a:lnSpc>
@@ -5788,7 +5863,7 @@
           <a:srgbClr val="000000"/>
         </a:buClr>
         <a:buFont typeface="Arial"/>
-        <a:defRPr b="0" i="0" sz="1400" u="none" cap="none" strike="noStrike">
+        <a:defRPr sz="1400" b="0" i="0" u="none" strike="noStrike" cap="none">
           <a:solidFill>
             <a:srgbClr val="000000"/>
           </a:solidFill>
@@ -5798,7 +5873,7 @@
           <a:sym typeface="Arial"/>
         </a:defRPr>
       </a:lvl1pPr>
-      <a:lvl2pPr lvl="1" marR="0" rtl="0" algn="l">
+      <a:lvl2pPr marR="0" lvl="1" algn="l" rtl="0">
         <a:lnSpc>
           <a:spcPct val="100000"/>
         </a:lnSpc>
@@ -5812,7 +5887,7 @@
           <a:srgbClr val="000000"/>
         </a:buClr>
         <a:buFont typeface="Arial"/>
-        <a:defRPr b="0" i="0" sz="1400" u="none" cap="none" strike="noStrike">
+        <a:defRPr sz="1400" b="0" i="0" u="none" strike="noStrike" cap="none">
           <a:solidFill>
             <a:srgbClr val="000000"/>
           </a:solidFill>
@@ -5822,7 +5897,7 @@
           <a:sym typeface="Arial"/>
         </a:defRPr>
       </a:lvl2pPr>
-      <a:lvl3pPr lvl="2" marR="0" rtl="0" algn="l">
+      <a:lvl3pPr marR="0" lvl="2" algn="l" rtl="0">
         <a:lnSpc>
           <a:spcPct val="100000"/>
         </a:lnSpc>
@@ -5836,7 +5911,7 @@
           <a:srgbClr val="000000"/>
         </a:buClr>
         <a:buFont typeface="Arial"/>
-        <a:defRPr b="0" i="0" sz="1400" u="none" cap="none" strike="noStrike">
+        <a:defRPr sz="1400" b="0" i="0" u="none" strike="noStrike" cap="none">
           <a:solidFill>
             <a:srgbClr val="000000"/>
           </a:solidFill>
@@ -5846,7 +5921,7 @@
           <a:sym typeface="Arial"/>
         </a:defRPr>
       </a:lvl3pPr>
-      <a:lvl4pPr lvl="3" marR="0" rtl="0" algn="l">
+      <a:lvl4pPr marR="0" lvl="3" algn="l" rtl="0">
         <a:lnSpc>
           <a:spcPct val="100000"/>
         </a:lnSpc>
@@ -5860,7 +5935,7 @@
           <a:srgbClr val="000000"/>
         </a:buClr>
         <a:buFont typeface="Arial"/>
-        <a:defRPr b="0" i="0" sz="1400" u="none" cap="none" strike="noStrike">
+        <a:defRPr sz="1400" b="0" i="0" u="none" strike="noStrike" cap="none">
           <a:solidFill>
             <a:srgbClr val="000000"/>
           </a:solidFill>
@@ -5870,7 +5945,7 @@
           <a:sym typeface="Arial"/>
         </a:defRPr>
       </a:lvl4pPr>
-      <a:lvl5pPr lvl="4" marR="0" rtl="0" algn="l">
+      <a:lvl5pPr marR="0" lvl="4" algn="l" rtl="0">
         <a:lnSpc>
           <a:spcPct val="100000"/>
         </a:lnSpc>
@@ -5884,7 +5959,7 @@
           <a:srgbClr val="000000"/>
         </a:buClr>
         <a:buFont typeface="Arial"/>
-        <a:defRPr b="0" i="0" sz="1400" u="none" cap="none" strike="noStrike">
+        <a:defRPr sz="1400" b="0" i="0" u="none" strike="noStrike" cap="none">
           <a:solidFill>
             <a:srgbClr val="000000"/>
           </a:solidFill>
@@ -5894,7 +5969,7 @@
           <a:sym typeface="Arial"/>
         </a:defRPr>
       </a:lvl5pPr>
-      <a:lvl6pPr lvl="5" marR="0" rtl="0" algn="l">
+      <a:lvl6pPr marR="0" lvl="5" algn="l" rtl="0">
         <a:lnSpc>
           <a:spcPct val="100000"/>
         </a:lnSpc>
@@ -5908,7 +5983,7 @@
           <a:srgbClr val="000000"/>
         </a:buClr>
         <a:buFont typeface="Arial"/>
-        <a:defRPr b="0" i="0" sz="1400" u="none" cap="none" strike="noStrike">
+        <a:defRPr sz="1400" b="0" i="0" u="none" strike="noStrike" cap="none">
           <a:solidFill>
             <a:srgbClr val="000000"/>
           </a:solidFill>
@@ -5918,7 +5993,7 @@
           <a:sym typeface="Arial"/>
         </a:defRPr>
       </a:lvl6pPr>
-      <a:lvl7pPr lvl="6" marR="0" rtl="0" algn="l">
+      <a:lvl7pPr marR="0" lvl="6" algn="l" rtl="0">
         <a:lnSpc>
           <a:spcPct val="100000"/>
         </a:lnSpc>
@@ -5932,7 +6007,7 @@
           <a:srgbClr val="000000"/>
         </a:buClr>
         <a:buFont typeface="Arial"/>
-        <a:defRPr b="0" i="0" sz="1400" u="none" cap="none" strike="noStrike">
+        <a:defRPr sz="1400" b="0" i="0" u="none" strike="noStrike" cap="none">
           <a:solidFill>
             <a:srgbClr val="000000"/>
           </a:solidFill>
@@ -5942,7 +6017,7 @@
           <a:sym typeface="Arial"/>
         </a:defRPr>
       </a:lvl7pPr>
-      <a:lvl8pPr lvl="7" marR="0" rtl="0" algn="l">
+      <a:lvl8pPr marR="0" lvl="7" algn="l" rtl="0">
         <a:lnSpc>
           <a:spcPct val="100000"/>
         </a:lnSpc>
@@ -5956,7 +6031,7 @@
           <a:srgbClr val="000000"/>
         </a:buClr>
         <a:buFont typeface="Arial"/>
-        <a:defRPr b="0" i="0" sz="1400" u="none" cap="none" strike="noStrike">
+        <a:defRPr sz="1400" b="0" i="0" u="none" strike="noStrike" cap="none">
           <a:solidFill>
             <a:srgbClr val="000000"/>
           </a:solidFill>
@@ -5966,7 +6041,7 @@
           <a:sym typeface="Arial"/>
         </a:defRPr>
       </a:lvl8pPr>
-      <a:lvl9pPr lvl="8" marR="0" rtl="0" algn="l">
+      <a:lvl9pPr marR="0" lvl="8" algn="l" rtl="0">
         <a:lnSpc>
           <a:spcPct val="100000"/>
         </a:lnSpc>
@@ -5980,7 +6055,7 @@
           <a:srgbClr val="000000"/>
         </a:buClr>
         <a:buFont typeface="Arial"/>
-        <a:defRPr b="0" i="0" sz="1400" u="none" cap="none" strike="noStrike">
+        <a:defRPr sz="1400" b="0" i="0" u="none" strike="noStrike" cap="none">
           <a:solidFill>
             <a:srgbClr val="000000"/>
           </a:solidFill>
@@ -5992,7 +6067,7 @@
       </a:lvl9pPr>
     </p:titleStyle>
     <p:bodyStyle>
-      <a:defPPr lvl="0" marR="0" rtl="0" algn="l">
+      <a:defPPr marR="0" lvl="0" algn="l" rtl="0">
         <a:lnSpc>
           <a:spcPct val="100000"/>
         </a:lnSpc>
@@ -6003,7 +6078,7 @@
           <a:spcPts val="0"/>
         </a:spcAft>
       </a:defPPr>
-      <a:lvl1pPr lvl="0" marR="0" rtl="0" algn="l">
+      <a:lvl1pPr marR="0" lvl="0" algn="l" rtl="0">
         <a:lnSpc>
           <a:spcPct val="100000"/>
         </a:lnSpc>
@@ -6017,7 +6092,7 @@
           <a:srgbClr val="000000"/>
         </a:buClr>
         <a:buFont typeface="Arial"/>
-        <a:defRPr b="0" i="0" sz="1400" u="none" cap="none" strike="noStrike">
+        <a:defRPr sz="1400" b="0" i="0" u="none" strike="noStrike" cap="none">
           <a:solidFill>
             <a:srgbClr val="000000"/>
           </a:solidFill>
@@ -6027,7 +6102,7 @@
           <a:sym typeface="Arial"/>
         </a:defRPr>
       </a:lvl1pPr>
-      <a:lvl2pPr lvl="1" marR="0" rtl="0" algn="l">
+      <a:lvl2pPr marR="0" lvl="1" algn="l" rtl="0">
         <a:lnSpc>
           <a:spcPct val="100000"/>
         </a:lnSpc>
@@ -6041,7 +6116,7 @@
           <a:srgbClr val="000000"/>
         </a:buClr>
         <a:buFont typeface="Arial"/>
-        <a:defRPr b="0" i="0" sz="1400" u="none" cap="none" strike="noStrike">
+        <a:defRPr sz="1400" b="0" i="0" u="none" strike="noStrike" cap="none">
           <a:solidFill>
             <a:srgbClr val="000000"/>
           </a:solidFill>
@@ -6051,7 +6126,7 @@
           <a:sym typeface="Arial"/>
         </a:defRPr>
       </a:lvl2pPr>
-      <a:lvl3pPr lvl="2" marR="0" rtl="0" algn="l">
+      <a:lvl3pPr marR="0" lvl="2" algn="l" rtl="0">
         <a:lnSpc>
           <a:spcPct val="100000"/>
         </a:lnSpc>
@@ -6065,7 +6140,7 @@
           <a:srgbClr val="000000"/>
         </a:buClr>
         <a:buFont typeface="Arial"/>
-        <a:defRPr b="0" i="0" sz="1400" u="none" cap="none" strike="noStrike">
+        <a:defRPr sz="1400" b="0" i="0" u="none" strike="noStrike" cap="none">
           <a:solidFill>
             <a:srgbClr val="000000"/>
           </a:solidFill>
@@ -6075,7 +6150,7 @@
           <a:sym typeface="Arial"/>
         </a:defRPr>
       </a:lvl3pPr>
-      <a:lvl4pPr lvl="3" marR="0" rtl="0" algn="l">
+      <a:lvl4pPr marR="0" lvl="3" algn="l" rtl="0">
         <a:lnSpc>
           <a:spcPct val="100000"/>
         </a:lnSpc>
@@ -6089,7 +6164,7 @@
           <a:srgbClr val="000000"/>
         </a:buClr>
         <a:buFont typeface="Arial"/>
-        <a:defRPr b="0" i="0" sz="1400" u="none" cap="none" strike="noStrike">
+        <a:defRPr sz="1400" b="0" i="0" u="none" strike="noStrike" cap="none">
           <a:solidFill>
             <a:srgbClr val="000000"/>
           </a:solidFill>
@@ -6099,7 +6174,7 @@
           <a:sym typeface="Arial"/>
         </a:defRPr>
       </a:lvl4pPr>
-      <a:lvl5pPr lvl="4" marR="0" rtl="0" algn="l">
+      <a:lvl5pPr marR="0" lvl="4" algn="l" rtl="0">
         <a:lnSpc>
           <a:spcPct val="100000"/>
         </a:lnSpc>
@@ -6113,7 +6188,7 @@
           <a:srgbClr val="000000"/>
         </a:buClr>
         <a:buFont typeface="Arial"/>
-        <a:defRPr b="0" i="0" sz="1400" u="none" cap="none" strike="noStrike">
+        <a:defRPr sz="1400" b="0" i="0" u="none" strike="noStrike" cap="none">
           <a:solidFill>
             <a:srgbClr val="000000"/>
           </a:solidFill>
@@ -6123,7 +6198,7 @@
           <a:sym typeface="Arial"/>
         </a:defRPr>
       </a:lvl5pPr>
-      <a:lvl6pPr lvl="5" marR="0" rtl="0" algn="l">
+      <a:lvl6pPr marR="0" lvl="5" algn="l" rtl="0">
         <a:lnSpc>
           <a:spcPct val="100000"/>
         </a:lnSpc>
@@ -6137,7 +6212,7 @@
           <a:srgbClr val="000000"/>
         </a:buClr>
         <a:buFont typeface="Arial"/>
-        <a:defRPr b="0" i="0" sz="1400" u="none" cap="none" strike="noStrike">
+        <a:defRPr sz="1400" b="0" i="0" u="none" strike="noStrike" cap="none">
           <a:solidFill>
             <a:srgbClr val="000000"/>
           </a:solidFill>
@@ -6147,7 +6222,7 @@
           <a:sym typeface="Arial"/>
         </a:defRPr>
       </a:lvl6pPr>
-      <a:lvl7pPr lvl="6" marR="0" rtl="0" algn="l">
+      <a:lvl7pPr marR="0" lvl="6" algn="l" rtl="0">
         <a:lnSpc>
           <a:spcPct val="100000"/>
         </a:lnSpc>
@@ -6161,7 +6236,7 @@
           <a:srgbClr val="000000"/>
         </a:buClr>
         <a:buFont typeface="Arial"/>
-        <a:defRPr b="0" i="0" sz="1400" u="none" cap="none" strike="noStrike">
+        <a:defRPr sz="1400" b="0" i="0" u="none" strike="noStrike" cap="none">
           <a:solidFill>
             <a:srgbClr val="000000"/>
           </a:solidFill>
@@ -6171,7 +6246,7 @@
           <a:sym typeface="Arial"/>
         </a:defRPr>
       </a:lvl7pPr>
-      <a:lvl8pPr lvl="7" marR="0" rtl="0" algn="l">
+      <a:lvl8pPr marR="0" lvl="7" algn="l" rtl="0">
         <a:lnSpc>
           <a:spcPct val="100000"/>
         </a:lnSpc>
@@ -6185,7 +6260,7 @@
           <a:srgbClr val="000000"/>
         </a:buClr>
         <a:buFont typeface="Arial"/>
-        <a:defRPr b="0" i="0" sz="1400" u="none" cap="none" strike="noStrike">
+        <a:defRPr sz="1400" b="0" i="0" u="none" strike="noStrike" cap="none">
           <a:solidFill>
             <a:srgbClr val="000000"/>
           </a:solidFill>
@@ -6195,7 +6270,7 @@
           <a:sym typeface="Arial"/>
         </a:defRPr>
       </a:lvl8pPr>
-      <a:lvl9pPr lvl="8" marR="0" rtl="0" algn="l">
+      <a:lvl9pPr marR="0" lvl="8" algn="l" rtl="0">
         <a:lnSpc>
           <a:spcPct val="100000"/>
         </a:lnSpc>
@@ -6209,7 +6284,7 @@
           <a:srgbClr val="000000"/>
         </a:buClr>
         <a:buFont typeface="Arial"/>
-        <a:defRPr b="0" i="0" sz="1400" u="none" cap="none" strike="noStrike">
+        <a:defRPr sz="1400" b="0" i="0" u="none" strike="noStrike" cap="none">
           <a:solidFill>
             <a:srgbClr val="000000"/>
           </a:solidFill>
@@ -6221,7 +6296,7 @@
       </a:lvl9pPr>
     </p:bodyStyle>
     <p:otherStyle>
-      <a:defPPr lvl="0" marR="0" rtl="0" algn="l">
+      <a:defPPr marR="0" lvl="0" algn="l" rtl="0">
         <a:lnSpc>
           <a:spcPct val="100000"/>
         </a:lnSpc>
@@ -6232,7 +6307,7 @@
           <a:spcPts val="0"/>
         </a:spcAft>
       </a:defPPr>
-      <a:lvl1pPr lvl="0" marR="0" rtl="0" algn="l">
+      <a:lvl1pPr marR="0" lvl="0" algn="l" rtl="0">
         <a:lnSpc>
           <a:spcPct val="100000"/>
         </a:lnSpc>
@@ -6246,7 +6321,7 @@
           <a:srgbClr val="000000"/>
         </a:buClr>
         <a:buFont typeface="Arial"/>
-        <a:defRPr b="0" i="0" sz="1400" u="none" cap="none" strike="noStrike">
+        <a:defRPr sz="1400" b="0" i="0" u="none" strike="noStrike" cap="none">
           <a:solidFill>
             <a:srgbClr val="000000"/>
           </a:solidFill>
@@ -6256,7 +6331,7 @@
           <a:sym typeface="Arial"/>
         </a:defRPr>
       </a:lvl1pPr>
-      <a:lvl2pPr lvl="1" marR="0" rtl="0" algn="l">
+      <a:lvl2pPr marR="0" lvl="1" algn="l" rtl="0">
         <a:lnSpc>
           <a:spcPct val="100000"/>
         </a:lnSpc>
@@ -6270,7 +6345,7 @@
           <a:srgbClr val="000000"/>
         </a:buClr>
         <a:buFont typeface="Arial"/>
-        <a:defRPr b="0" i="0" sz="1400" u="none" cap="none" strike="noStrike">
+        <a:defRPr sz="1400" b="0" i="0" u="none" strike="noStrike" cap="none">
           <a:solidFill>
             <a:srgbClr val="000000"/>
           </a:solidFill>
@@ -6280,7 +6355,7 @@
           <a:sym typeface="Arial"/>
         </a:defRPr>
       </a:lvl2pPr>
-      <a:lvl3pPr lvl="2" marR="0" rtl="0" algn="l">
+      <a:lvl3pPr marR="0" lvl="2" algn="l" rtl="0">
         <a:lnSpc>
           <a:spcPct val="100000"/>
         </a:lnSpc>
@@ -6294,7 +6369,7 @@
           <a:srgbClr val="000000"/>
         </a:buClr>
         <a:buFont typeface="Arial"/>
-        <a:defRPr b="0" i="0" sz="1400" u="none" cap="none" strike="noStrike">
+        <a:defRPr sz="1400" b="0" i="0" u="none" strike="noStrike" cap="none">
           <a:solidFill>
             <a:srgbClr val="000000"/>
           </a:solidFill>
@@ -6304,7 +6379,7 @@
           <a:sym typeface="Arial"/>
         </a:defRPr>
       </a:lvl3pPr>
-      <a:lvl4pPr lvl="3" marR="0" rtl="0" algn="l">
+      <a:lvl4pPr marR="0" lvl="3" algn="l" rtl="0">
         <a:lnSpc>
           <a:spcPct val="100000"/>
         </a:lnSpc>
@@ -6318,7 +6393,7 @@
           <a:srgbClr val="000000"/>
         </a:buClr>
         <a:buFont typeface="Arial"/>
-        <a:defRPr b="0" i="0" sz="1400" u="none" cap="none" strike="noStrike">
+        <a:defRPr sz="1400" b="0" i="0" u="none" strike="noStrike" cap="none">
           <a:solidFill>
             <a:srgbClr val="000000"/>
           </a:solidFill>
@@ -6328,7 +6403,7 @@
           <a:sym typeface="Arial"/>
         </a:defRPr>
       </a:lvl4pPr>
-      <a:lvl5pPr lvl="4" marR="0" rtl="0" algn="l">
+      <a:lvl5pPr marR="0" lvl="4" algn="l" rtl="0">
         <a:lnSpc>
           <a:spcPct val="100000"/>
         </a:lnSpc>
@@ -6342,7 +6417,7 @@
           <a:srgbClr val="000000"/>
         </a:buClr>
         <a:buFont typeface="Arial"/>
-        <a:defRPr b="0" i="0" sz="1400" u="none" cap="none" strike="noStrike">
+        <a:defRPr sz="1400" b="0" i="0" u="none" strike="noStrike" cap="none">
           <a:solidFill>
             <a:srgbClr val="000000"/>
           </a:solidFill>
@@ -6352,7 +6427,7 @@
           <a:sym typeface="Arial"/>
         </a:defRPr>
       </a:lvl5pPr>
-      <a:lvl6pPr lvl="5" marR="0" rtl="0" algn="l">
+      <a:lvl6pPr marR="0" lvl="5" algn="l" rtl="0">
         <a:lnSpc>
           <a:spcPct val="100000"/>
         </a:lnSpc>
@@ -6366,7 +6441,7 @@
           <a:srgbClr val="000000"/>
         </a:buClr>
         <a:buFont typeface="Arial"/>
-        <a:defRPr b="0" i="0" sz="1400" u="none" cap="none" strike="noStrike">
+        <a:defRPr sz="1400" b="0" i="0" u="none" strike="noStrike" cap="none">
           <a:solidFill>
             <a:srgbClr val="000000"/>
           </a:solidFill>
@@ -6376,7 +6451,7 @@
           <a:sym typeface="Arial"/>
         </a:defRPr>
       </a:lvl6pPr>
-      <a:lvl7pPr lvl="6" marR="0" rtl="0" algn="l">
+      <a:lvl7pPr marR="0" lvl="6" algn="l" rtl="0">
         <a:lnSpc>
           <a:spcPct val="100000"/>
         </a:lnSpc>
@@ -6390,7 +6465,7 @@
           <a:srgbClr val="000000"/>
         </a:buClr>
         <a:buFont typeface="Arial"/>
-        <a:defRPr b="0" i="0" sz="1400" u="none" cap="none" strike="noStrike">
+        <a:defRPr sz="1400" b="0" i="0" u="none" strike="noStrike" cap="none">
           <a:solidFill>
             <a:srgbClr val="000000"/>
           </a:solidFill>
@@ -6400,7 +6475,7 @@
           <a:sym typeface="Arial"/>
         </a:defRPr>
       </a:lvl7pPr>
-      <a:lvl8pPr lvl="7" marR="0" rtl="0" algn="l">
+      <a:lvl8pPr marR="0" lvl="7" algn="l" rtl="0">
         <a:lnSpc>
           <a:spcPct val="100000"/>
         </a:lnSpc>
@@ -6414,7 +6489,7 @@
           <a:srgbClr val="000000"/>
         </a:buClr>
         <a:buFont typeface="Arial"/>
-        <a:defRPr b="0" i="0" sz="1400" u="none" cap="none" strike="noStrike">
+        <a:defRPr sz="1400" b="0" i="0" u="none" strike="noStrike" cap="none">
           <a:solidFill>
             <a:srgbClr val="000000"/>
           </a:solidFill>
@@ -6424,7 +6499,7 @@
           <a:sym typeface="Arial"/>
         </a:defRPr>
       </a:lvl8pPr>
-      <a:lvl9pPr lvl="8" marR="0" rtl="0" algn="l">
+      <a:lvl9pPr marR="0" lvl="8" algn="l" rtl="0">
         <a:lnSpc>
           <a:spcPct val="100000"/>
         </a:lnSpc>
@@ -6438,7 +6513,7 @@
           <a:srgbClr val="000000"/>
         </a:buClr>
         <a:buFont typeface="Arial"/>
-        <a:defRPr b="0" i="0" sz="1400" u="none" cap="none" strike="noStrike">
+        <a:defRPr sz="1400" b="0" i="0" u="none" strike="noStrike" cap="none">
           <a:solidFill>
             <a:srgbClr val="000000"/>
           </a:solidFill>
@@ -6454,11 +6529,11 @@
 </file>
 
 <file path=ppt/slides/slide1.xml><?xml version="1.0" encoding="utf-8"?>
-<p:sld xmlns:a="http://schemas.openxmlformats.org/drawingml/2006/main" xmlns:r="http://schemas.openxmlformats.org/officeDocument/2006/relationships" xmlns:mc="http://schemas.openxmlformats.org/markup-compatibility/2006" xmlns:mv="urn:schemas-microsoft-com:mac:vml" xmlns:p="http://schemas.openxmlformats.org/presentationml/2006/main" xmlns:c="http://schemas.openxmlformats.org/drawingml/2006/chart" xmlns:dgm="http://schemas.openxmlformats.org/drawingml/2006/diagram" xmlns:o="urn:schemas-microsoft-com:office:office" xmlns:v="urn:schemas-microsoft-com:vml" xmlns:pvml="urn:schemas-microsoft-com:office:powerpoint" xmlns:com="http://schemas.openxmlformats.org/drawingml/2006/compatibility" xmlns:p14="http://schemas.microsoft.com/office/powerpoint/2010/main" xmlns:p15="http://schemas.microsoft.com/office/powerpoint/2012/main" xmlns:ahyp="http://schemas.microsoft.com/office/drawing/2018/hyperlinkcolor">
+<p:sld xmlns:a="http://schemas.openxmlformats.org/drawingml/2006/main" xmlns:r="http://schemas.openxmlformats.org/officeDocument/2006/relationships" xmlns:p="http://schemas.openxmlformats.org/presentationml/2006/main">
   <p:cSld>
     <p:spTree>
       <p:nvGrpSpPr>
-        <p:cNvPr id="55" name="Shape 55"/>
+        <p:cNvPr id="1" name="Shape 55"/>
         <p:cNvGrpSpPr/>
         <p:nvPr/>
       </p:nvGrpSpPr>
@@ -6473,7 +6548,9 @@
       <p:sp>
         <p:nvSpPr>
           <p:cNvPr id="56" name="Google Shape;56;p13"/>
-          <p:cNvSpPr txBox="1"/>
+          <p:cNvSpPr txBox="1">
+            <a:spLocks noGrp="1"/>
+          </p:cNvSpPr>
           <p:nvPr>
             <p:ph type="title"/>
           </p:nvPr>
@@ -6488,12 +6565,12 @@
           </a:prstGeom>
         </p:spPr>
         <p:txBody>
-          <a:bodyPr anchorCtr="0" anchor="b" bIns="91425" lIns="91425" spcFirstLastPara="1" rIns="91425" wrap="square" tIns="91425">
+          <a:bodyPr spcFirstLastPara="1" wrap="square" lIns="91425" tIns="91425" rIns="91425" bIns="91425" anchor="b" anchorCtr="0">
             <a:normAutofit/>
           </a:bodyPr>
           <a:lstStyle/>
           <a:p>
-            <a:pPr indent="0" lvl="0" marL="0" rtl="0" algn="ctr">
+            <a:pPr marL="0" lvl="0" indent="0" algn="ctr" rtl="0">
               <a:spcBef>
                 <a:spcPts val="0"/>
               </a:spcBef>
@@ -6503,19 +6580,21 @@
               <a:buNone/>
             </a:pPr>
             <a:r>
-              <a:rPr lang="en"/>
-              <a:t>UI</a:t>
-            </a:r>
-            <a:endParaRPr/>
+              <a:rPr lang="en" dirty="0"/>
+              <a:t>UI Part 1</a:t>
+            </a:r>
+            <a:endParaRPr dirty="0"/>
           </a:p>
         </p:txBody>
       </p:sp>
       <p:sp>
         <p:nvSpPr>
           <p:cNvPr id="57" name="Google Shape;57;p13"/>
-          <p:cNvSpPr txBox="1"/>
+          <p:cNvSpPr txBox="1">
+            <a:spLocks noGrp="1"/>
+          </p:cNvSpPr>
           <p:nvPr>
-            <p:ph idx="2" type="subTitle"/>
+            <p:ph type="subTitle" idx="2"/>
           </p:nvPr>
         </p:nvSpPr>
         <p:spPr>
@@ -6528,12 +6607,12 @@
           </a:prstGeom>
         </p:spPr>
         <p:txBody>
-          <a:bodyPr anchorCtr="0" anchor="t" bIns="91425" lIns="91425" spcFirstLastPara="1" rIns="91425" wrap="square" tIns="91425">
+          <a:bodyPr spcFirstLastPara="1" wrap="square" lIns="91425" tIns="91425" rIns="91425" bIns="91425" anchor="t" anchorCtr="0">
             <a:normAutofit/>
           </a:bodyPr>
           <a:lstStyle/>
           <a:p>
-            <a:pPr indent="0" lvl="0" marL="0" rtl="0" algn="ctr">
+            <a:pPr marL="0" lvl="0" indent="0" algn="ctr" rtl="0">
               <a:spcBef>
                 <a:spcPts val="0"/>
               </a:spcBef>
@@ -6543,19 +6622,21 @@
               <a:buNone/>
             </a:pPr>
             <a:r>
-              <a:rPr lang="en"/>
+              <a:rPr lang="en" dirty="0"/>
               <a:t>Daniel Janák</a:t>
             </a:r>
-            <a:endParaRPr/>
+            <a:endParaRPr dirty="0"/>
           </a:p>
         </p:txBody>
       </p:sp>
       <p:sp>
         <p:nvSpPr>
           <p:cNvPr id="58" name="Google Shape;58;p13"/>
-          <p:cNvSpPr txBox="1"/>
+          <p:cNvSpPr txBox="1">
+            <a:spLocks noGrp="1"/>
+          </p:cNvSpPr>
           <p:nvPr>
-            <p:ph idx="1" type="body"/>
+            <p:ph type="body" idx="1"/>
           </p:nvPr>
         </p:nvSpPr>
         <p:spPr>
@@ -6568,12 +6649,12 @@
           </a:prstGeom>
         </p:spPr>
         <p:txBody>
-          <a:bodyPr anchorCtr="0" anchor="ctr" bIns="91425" lIns="91425" spcFirstLastPara="1" rIns="91425" wrap="square" tIns="91425">
+          <a:bodyPr spcFirstLastPara="1" wrap="square" lIns="91425" tIns="91425" rIns="91425" bIns="91425" anchor="ctr" anchorCtr="0">
             <a:normAutofit/>
           </a:bodyPr>
           <a:lstStyle/>
           <a:p>
-            <a:pPr indent="0" lvl="0" marL="0" rtl="0" algn="l">
+            <a:pPr marL="0" lvl="0" indent="0" algn="l" rtl="0">
               <a:spcBef>
                 <a:spcPts val="0"/>
               </a:spcBef>
@@ -6582,9 +6663,6 @@
               </a:spcAft>
               <a:buNone/>
             </a:pPr>
-            <a:r>
-              <a:t/>
-            </a:r>
             <a:endParaRPr/>
           </a:p>
         </p:txBody>
@@ -6598,11 +6676,862 @@
 </file>
 
 <file path=ppt/slides/slide10.xml><?xml version="1.0" encoding="utf-8"?>
-<p:sld xmlns:a="http://schemas.openxmlformats.org/drawingml/2006/main" xmlns:r="http://schemas.openxmlformats.org/officeDocument/2006/relationships" xmlns:mc="http://schemas.openxmlformats.org/markup-compatibility/2006" xmlns:mv="urn:schemas-microsoft-com:mac:vml" xmlns:p="http://schemas.openxmlformats.org/presentationml/2006/main" xmlns:c="http://schemas.openxmlformats.org/drawingml/2006/chart" xmlns:dgm="http://schemas.openxmlformats.org/drawingml/2006/diagram" xmlns:o="urn:schemas-microsoft-com:office:office" xmlns:v="urn:schemas-microsoft-com:vml" xmlns:pvml="urn:schemas-microsoft-com:office:powerpoint" xmlns:com="http://schemas.openxmlformats.org/drawingml/2006/compatibility" xmlns:p14="http://schemas.microsoft.com/office/powerpoint/2010/main" xmlns:p15="http://schemas.microsoft.com/office/powerpoint/2012/main" xmlns:ahyp="http://schemas.microsoft.com/office/drawing/2018/hyperlinkcolor">
+<p:sld xmlns:a="http://schemas.openxmlformats.org/drawingml/2006/main" xmlns:r="http://schemas.openxmlformats.org/officeDocument/2006/relationships" xmlns:p="http://schemas.openxmlformats.org/presentationml/2006/main">
   <p:cSld>
     <p:spTree>
       <p:nvGrpSpPr>
-        <p:cNvPr id="137" name="Shape 137"/>
+        <p:cNvPr id="1" name=""/>
+        <p:cNvGrpSpPr/>
+        <p:nvPr/>
+      </p:nvGrpSpPr>
+      <p:grpSpPr>
+        <a:xfrm>
+          <a:off x="0" y="0"/>
+          <a:ext cx="0" cy="0"/>
+          <a:chOff x="0" y="0"/>
+          <a:chExt cx="0" cy="0"/>
+        </a:xfrm>
+      </p:grpSpPr>
+      <p:sp>
+        <p:nvSpPr>
+          <p:cNvPr id="2" name="Title 1">
+            <a:extLst>
+              <a:ext uri="{FF2B5EF4-FFF2-40B4-BE49-F238E27FC236}">
+                <a16:creationId xmlns:a16="http://schemas.microsoft.com/office/drawing/2014/main" id="{209E4A20-8435-FD48-5195-75A16E237896}"/>
+              </a:ext>
+            </a:extLst>
+          </p:cNvPr>
+          <p:cNvSpPr>
+            <a:spLocks noGrp="1"/>
+          </p:cNvSpPr>
+          <p:nvPr>
+            <p:ph type="title"/>
+          </p:nvPr>
+        </p:nvSpPr>
+        <p:spPr/>
+        <p:txBody>
+          <a:bodyPr>
+            <a:normAutofit fontScale="90000"/>
+          </a:bodyPr>
+          <a:lstStyle/>
+          <a:p>
+            <a:r>
+              <a:rPr lang="en-US"/>
+              <a:t>Let’s </a:t>
+            </a:r>
+            <a:r>
+              <a:rPr lang="en-US" dirty="0"/>
+              <a:t>create simple menu</a:t>
+            </a:r>
+          </a:p>
+        </p:txBody>
+      </p:sp>
+      <p:sp>
+        <p:nvSpPr>
+          <p:cNvPr id="3" name="Google Shape;133;p21">
+            <a:extLst>
+              <a:ext uri="{FF2B5EF4-FFF2-40B4-BE49-F238E27FC236}">
+                <a16:creationId xmlns:a16="http://schemas.microsoft.com/office/drawing/2014/main" id="{7A59926D-8CCA-CBF9-5A76-219FEB3816D1}"/>
+              </a:ext>
+            </a:extLst>
+          </p:cNvPr>
+          <p:cNvSpPr txBox="1">
+            <a:spLocks/>
+          </p:cNvSpPr>
+          <p:nvPr/>
+        </p:nvSpPr>
+        <p:spPr>
+          <a:xfrm>
+            <a:off x="311700" y="1368950"/>
+            <a:ext cx="8520600" cy="3431700"/>
+          </a:xfrm>
+          <a:prstGeom prst="rect">
+            <a:avLst/>
+          </a:prstGeom>
+          <a:noFill/>
+          <a:ln>
+            <a:noFill/>
+          </a:ln>
+        </p:spPr>
+        <p:txBody>
+          <a:bodyPr spcFirstLastPara="1" wrap="square" lIns="91425" tIns="91425" rIns="91425" bIns="91425" anchor="t" anchorCtr="0">
+            <a:normAutofit/>
+          </a:bodyPr>
+          <a:lstStyle>
+            <a:defPPr marR="0" lvl="0" algn="l" rtl="0">
+              <a:lnSpc>
+                <a:spcPct val="100000"/>
+              </a:lnSpc>
+              <a:spcBef>
+                <a:spcPts val="0"/>
+              </a:spcBef>
+              <a:spcAft>
+                <a:spcPts val="0"/>
+              </a:spcAft>
+            </a:defPPr>
+            <a:lvl1pPr marR="0" lvl="0" algn="l" rtl="0">
+              <a:lnSpc>
+                <a:spcPct val="100000"/>
+              </a:lnSpc>
+              <a:spcBef>
+                <a:spcPts val="0"/>
+              </a:spcBef>
+              <a:spcAft>
+                <a:spcPts val="0"/>
+              </a:spcAft>
+              <a:buClr>
+                <a:schemeClr val="dk1"/>
+              </a:buClr>
+              <a:buSzPts val="2800"/>
+              <a:buFont typeface="Arial"/>
+              <a:buNone/>
+              <a:defRPr sz="2800" b="0" i="0" u="none" strike="noStrike" cap="none">
+                <a:solidFill>
+                  <a:schemeClr val="dk1"/>
+                </a:solidFill>
+                <a:latin typeface="Arial"/>
+                <a:ea typeface="Arial"/>
+                <a:cs typeface="Arial"/>
+                <a:sym typeface="Arial"/>
+              </a:defRPr>
+            </a:lvl1pPr>
+            <a:lvl2pPr marR="0" lvl="1" algn="l" rtl="0">
+              <a:lnSpc>
+                <a:spcPct val="100000"/>
+              </a:lnSpc>
+              <a:spcBef>
+                <a:spcPts val="0"/>
+              </a:spcBef>
+              <a:spcAft>
+                <a:spcPts val="0"/>
+              </a:spcAft>
+              <a:buClr>
+                <a:schemeClr val="dk1"/>
+              </a:buClr>
+              <a:buSzPts val="2800"/>
+              <a:buFont typeface="Arial"/>
+              <a:buNone/>
+              <a:defRPr sz="2800" b="0" i="0" u="none" strike="noStrike" cap="none">
+                <a:solidFill>
+                  <a:schemeClr val="dk1"/>
+                </a:solidFill>
+                <a:latin typeface="Arial"/>
+                <a:ea typeface="Arial"/>
+                <a:cs typeface="Arial"/>
+                <a:sym typeface="Arial"/>
+              </a:defRPr>
+            </a:lvl2pPr>
+            <a:lvl3pPr marR="0" lvl="2" algn="l" rtl="0">
+              <a:lnSpc>
+                <a:spcPct val="100000"/>
+              </a:lnSpc>
+              <a:spcBef>
+                <a:spcPts val="0"/>
+              </a:spcBef>
+              <a:spcAft>
+                <a:spcPts val="0"/>
+              </a:spcAft>
+              <a:buClr>
+                <a:schemeClr val="dk1"/>
+              </a:buClr>
+              <a:buSzPts val="2800"/>
+              <a:buFont typeface="Arial"/>
+              <a:buNone/>
+              <a:defRPr sz="2800" b="0" i="0" u="none" strike="noStrike" cap="none">
+                <a:solidFill>
+                  <a:schemeClr val="dk1"/>
+                </a:solidFill>
+                <a:latin typeface="Arial"/>
+                <a:ea typeface="Arial"/>
+                <a:cs typeface="Arial"/>
+                <a:sym typeface="Arial"/>
+              </a:defRPr>
+            </a:lvl3pPr>
+            <a:lvl4pPr marR="0" lvl="3" algn="l" rtl="0">
+              <a:lnSpc>
+                <a:spcPct val="100000"/>
+              </a:lnSpc>
+              <a:spcBef>
+                <a:spcPts val="0"/>
+              </a:spcBef>
+              <a:spcAft>
+                <a:spcPts val="0"/>
+              </a:spcAft>
+              <a:buClr>
+                <a:schemeClr val="dk1"/>
+              </a:buClr>
+              <a:buSzPts val="2800"/>
+              <a:buFont typeface="Arial"/>
+              <a:buNone/>
+              <a:defRPr sz="2800" b="0" i="0" u="none" strike="noStrike" cap="none">
+                <a:solidFill>
+                  <a:schemeClr val="dk1"/>
+                </a:solidFill>
+                <a:latin typeface="Arial"/>
+                <a:ea typeface="Arial"/>
+                <a:cs typeface="Arial"/>
+                <a:sym typeface="Arial"/>
+              </a:defRPr>
+            </a:lvl4pPr>
+            <a:lvl5pPr marR="0" lvl="4" algn="l" rtl="0">
+              <a:lnSpc>
+                <a:spcPct val="100000"/>
+              </a:lnSpc>
+              <a:spcBef>
+                <a:spcPts val="0"/>
+              </a:spcBef>
+              <a:spcAft>
+                <a:spcPts val="0"/>
+              </a:spcAft>
+              <a:buClr>
+                <a:schemeClr val="dk1"/>
+              </a:buClr>
+              <a:buSzPts val="2800"/>
+              <a:buFont typeface="Arial"/>
+              <a:buNone/>
+              <a:defRPr sz="2800" b="0" i="0" u="none" strike="noStrike" cap="none">
+                <a:solidFill>
+                  <a:schemeClr val="dk1"/>
+                </a:solidFill>
+                <a:latin typeface="Arial"/>
+                <a:ea typeface="Arial"/>
+                <a:cs typeface="Arial"/>
+                <a:sym typeface="Arial"/>
+              </a:defRPr>
+            </a:lvl5pPr>
+            <a:lvl6pPr marR="0" lvl="5" algn="l" rtl="0">
+              <a:lnSpc>
+                <a:spcPct val="100000"/>
+              </a:lnSpc>
+              <a:spcBef>
+                <a:spcPts val="0"/>
+              </a:spcBef>
+              <a:spcAft>
+                <a:spcPts val="0"/>
+              </a:spcAft>
+              <a:buClr>
+                <a:schemeClr val="dk1"/>
+              </a:buClr>
+              <a:buSzPts val="2800"/>
+              <a:buFont typeface="Arial"/>
+              <a:buNone/>
+              <a:defRPr sz="2800" b="0" i="0" u="none" strike="noStrike" cap="none">
+                <a:solidFill>
+                  <a:schemeClr val="dk1"/>
+                </a:solidFill>
+                <a:latin typeface="Arial"/>
+                <a:ea typeface="Arial"/>
+                <a:cs typeface="Arial"/>
+                <a:sym typeface="Arial"/>
+              </a:defRPr>
+            </a:lvl6pPr>
+            <a:lvl7pPr marR="0" lvl="6" algn="l" rtl="0">
+              <a:lnSpc>
+                <a:spcPct val="100000"/>
+              </a:lnSpc>
+              <a:spcBef>
+                <a:spcPts val="0"/>
+              </a:spcBef>
+              <a:spcAft>
+                <a:spcPts val="0"/>
+              </a:spcAft>
+              <a:buClr>
+                <a:schemeClr val="dk1"/>
+              </a:buClr>
+              <a:buSzPts val="2800"/>
+              <a:buFont typeface="Arial"/>
+              <a:buNone/>
+              <a:defRPr sz="2800" b="0" i="0" u="none" strike="noStrike" cap="none">
+                <a:solidFill>
+                  <a:schemeClr val="dk1"/>
+                </a:solidFill>
+                <a:latin typeface="Arial"/>
+                <a:ea typeface="Arial"/>
+                <a:cs typeface="Arial"/>
+                <a:sym typeface="Arial"/>
+              </a:defRPr>
+            </a:lvl7pPr>
+            <a:lvl8pPr marR="0" lvl="7" algn="l" rtl="0">
+              <a:lnSpc>
+                <a:spcPct val="100000"/>
+              </a:lnSpc>
+              <a:spcBef>
+                <a:spcPts val="0"/>
+              </a:spcBef>
+              <a:spcAft>
+                <a:spcPts val="0"/>
+              </a:spcAft>
+              <a:buClr>
+                <a:schemeClr val="dk1"/>
+              </a:buClr>
+              <a:buSzPts val="2800"/>
+              <a:buFont typeface="Arial"/>
+              <a:buNone/>
+              <a:defRPr sz="2800" b="0" i="0" u="none" strike="noStrike" cap="none">
+                <a:solidFill>
+                  <a:schemeClr val="dk1"/>
+                </a:solidFill>
+                <a:latin typeface="Arial"/>
+                <a:ea typeface="Arial"/>
+                <a:cs typeface="Arial"/>
+                <a:sym typeface="Arial"/>
+              </a:defRPr>
+            </a:lvl8pPr>
+            <a:lvl9pPr marR="0" lvl="8" algn="l" rtl="0">
+              <a:lnSpc>
+                <a:spcPct val="100000"/>
+              </a:lnSpc>
+              <a:spcBef>
+                <a:spcPts val="0"/>
+              </a:spcBef>
+              <a:spcAft>
+                <a:spcPts val="0"/>
+              </a:spcAft>
+              <a:buClr>
+                <a:schemeClr val="dk1"/>
+              </a:buClr>
+              <a:buSzPts val="2800"/>
+              <a:buFont typeface="Arial"/>
+              <a:buNone/>
+              <a:defRPr sz="2800" b="0" i="0" u="none" strike="noStrike" cap="none">
+                <a:solidFill>
+                  <a:schemeClr val="dk1"/>
+                </a:solidFill>
+                <a:latin typeface="Arial"/>
+                <a:ea typeface="Arial"/>
+                <a:cs typeface="Arial"/>
+                <a:sym typeface="Arial"/>
+              </a:defRPr>
+            </a:lvl9pPr>
+          </a:lstStyle>
+          <a:p>
+            <a:pPr marL="114300">
+              <a:buSzPts val="1800"/>
+            </a:pPr>
+            <a:r>
+              <a:rPr lang="en-US" sz="1800" dirty="0"/>
+              <a:t>Button example explanation</a:t>
+            </a:r>
+          </a:p>
+          <a:p>
+            <a:pPr marL="114300">
+              <a:buSzPts val="1800"/>
+            </a:pPr>
+            <a:endParaRPr lang="en-US" sz="1800" dirty="0"/>
+          </a:p>
+          <a:p>
+            <a:pPr marL="114300">
+              <a:buSzPts val="1800"/>
+            </a:pPr>
+            <a:r>
+              <a:rPr lang="en-US" sz="1800" dirty="0"/>
+              <a:t>Buttons:</a:t>
+            </a:r>
+          </a:p>
+          <a:p>
+            <a:pPr marL="400050" indent="-285750">
+              <a:buSzPts val="1800"/>
+              <a:buFontTx/>
+              <a:buChar char="-"/>
+            </a:pPr>
+            <a:r>
+              <a:rPr lang="en-US" sz="1800" dirty="0"/>
+              <a:t>Resume</a:t>
+            </a:r>
+          </a:p>
+          <a:p>
+            <a:pPr marL="400050" indent="-285750">
+              <a:buSzPts val="1800"/>
+              <a:buFontTx/>
+              <a:buChar char="-"/>
+            </a:pPr>
+            <a:r>
+              <a:rPr lang="en-US" sz="1800" dirty="0"/>
+              <a:t>Restart</a:t>
+            </a:r>
+          </a:p>
+          <a:p>
+            <a:pPr marL="400050" indent="-285750">
+              <a:buSzPts val="1800"/>
+              <a:buFontTx/>
+              <a:buChar char="-"/>
+            </a:pPr>
+            <a:r>
+              <a:rPr lang="en-US" sz="1800" dirty="0"/>
+              <a:t>Quit</a:t>
+            </a:r>
+          </a:p>
+          <a:p>
+            <a:pPr marL="400050" indent="-285750">
+              <a:buSzPts val="1800"/>
+              <a:buFontTx/>
+              <a:buChar char="-"/>
+            </a:pPr>
+            <a:endParaRPr lang="en-US" sz="1800" dirty="0"/>
+          </a:p>
+          <a:p>
+            <a:pPr marL="114300">
+              <a:buSzPts val="1800"/>
+            </a:pPr>
+            <a:r>
+              <a:rPr lang="en-US" sz="1800" dirty="0"/>
+              <a:t>Show menu on Tab press</a:t>
+            </a:r>
+          </a:p>
+          <a:p>
+            <a:pPr marL="114300">
+              <a:buSzPts val="1800"/>
+            </a:pPr>
+            <a:r>
+              <a:rPr lang="en-US" sz="1800" dirty="0"/>
+              <a:t>Hide Quit when gamepad is used</a:t>
+            </a:r>
+          </a:p>
+        </p:txBody>
+      </p:sp>
+    </p:spTree>
+    <p:extLst>
+      <p:ext uri="{BB962C8B-B14F-4D97-AF65-F5344CB8AC3E}">
+        <p14:creationId xmlns:p14="http://schemas.microsoft.com/office/powerpoint/2010/main" val="3600440656"/>
+      </p:ext>
+    </p:extLst>
+  </p:cSld>
+  <p:clrMapOvr>
+    <a:masterClrMapping/>
+  </p:clrMapOvr>
+</p:sld>
+</file>
+
+<file path=ppt/slides/slide11.xml><?xml version="1.0" encoding="utf-8"?>
+<p:sld xmlns:a="http://schemas.openxmlformats.org/drawingml/2006/main" xmlns:r="http://schemas.openxmlformats.org/officeDocument/2006/relationships" xmlns:p="http://schemas.openxmlformats.org/presentationml/2006/main">
+  <p:cSld>
+    <p:spTree>
+      <p:nvGrpSpPr>
+        <p:cNvPr id="1" name=""/>
+        <p:cNvGrpSpPr/>
+        <p:nvPr/>
+      </p:nvGrpSpPr>
+      <p:grpSpPr>
+        <a:xfrm>
+          <a:off x="0" y="0"/>
+          <a:ext cx="0" cy="0"/>
+          <a:chOff x="0" y="0"/>
+          <a:chExt cx="0" cy="0"/>
+        </a:xfrm>
+      </p:grpSpPr>
+      <p:sp>
+        <p:nvSpPr>
+          <p:cNvPr id="2" name="Title 1">
+            <a:extLst>
+              <a:ext uri="{FF2B5EF4-FFF2-40B4-BE49-F238E27FC236}">
+                <a16:creationId xmlns:a16="http://schemas.microsoft.com/office/drawing/2014/main" id="{D26490BC-E533-CA4B-6C1D-8F531BD36E00}"/>
+              </a:ext>
+            </a:extLst>
+          </p:cNvPr>
+          <p:cNvSpPr>
+            <a:spLocks noGrp="1"/>
+          </p:cNvSpPr>
+          <p:nvPr>
+            <p:ph type="title"/>
+          </p:nvPr>
+        </p:nvSpPr>
+        <p:spPr/>
+        <p:txBody>
+          <a:bodyPr>
+            <a:normAutofit fontScale="90000"/>
+          </a:bodyPr>
+          <a:lstStyle/>
+          <a:p>
+            <a:r>
+              <a:rPr lang="en-US" dirty="0"/>
+              <a:t>Next Time</a:t>
+            </a:r>
+          </a:p>
+        </p:txBody>
+      </p:sp>
+      <p:sp>
+        <p:nvSpPr>
+          <p:cNvPr id="3" name="Google Shape;133;p21">
+            <a:extLst>
+              <a:ext uri="{FF2B5EF4-FFF2-40B4-BE49-F238E27FC236}">
+                <a16:creationId xmlns:a16="http://schemas.microsoft.com/office/drawing/2014/main" id="{6989357E-4C7B-7AB0-C32C-795DAB7926CC}"/>
+              </a:ext>
+            </a:extLst>
+          </p:cNvPr>
+          <p:cNvSpPr txBox="1">
+            <a:spLocks/>
+          </p:cNvSpPr>
+          <p:nvPr/>
+        </p:nvSpPr>
+        <p:spPr>
+          <a:xfrm>
+            <a:off x="311700" y="1368950"/>
+            <a:ext cx="8520600" cy="3431700"/>
+          </a:xfrm>
+          <a:prstGeom prst="rect">
+            <a:avLst/>
+          </a:prstGeom>
+          <a:noFill/>
+          <a:ln>
+            <a:noFill/>
+          </a:ln>
+        </p:spPr>
+        <p:txBody>
+          <a:bodyPr spcFirstLastPara="1" wrap="square" lIns="91425" tIns="91425" rIns="91425" bIns="91425" anchor="t" anchorCtr="0">
+            <a:normAutofit/>
+          </a:bodyPr>
+          <a:lstStyle>
+            <a:defPPr marR="0" lvl="0" algn="l" rtl="0">
+              <a:lnSpc>
+                <a:spcPct val="100000"/>
+              </a:lnSpc>
+              <a:spcBef>
+                <a:spcPts val="0"/>
+              </a:spcBef>
+              <a:spcAft>
+                <a:spcPts val="0"/>
+              </a:spcAft>
+            </a:defPPr>
+            <a:lvl1pPr marR="0" lvl="0" algn="l" rtl="0">
+              <a:lnSpc>
+                <a:spcPct val="100000"/>
+              </a:lnSpc>
+              <a:spcBef>
+                <a:spcPts val="0"/>
+              </a:spcBef>
+              <a:spcAft>
+                <a:spcPts val="0"/>
+              </a:spcAft>
+              <a:buClr>
+                <a:schemeClr val="dk1"/>
+              </a:buClr>
+              <a:buSzPts val="2800"/>
+              <a:buFont typeface="Arial"/>
+              <a:buNone/>
+              <a:defRPr sz="2800" b="0" i="0" u="none" strike="noStrike" cap="none">
+                <a:solidFill>
+                  <a:schemeClr val="dk1"/>
+                </a:solidFill>
+                <a:latin typeface="Arial"/>
+                <a:ea typeface="Arial"/>
+                <a:cs typeface="Arial"/>
+                <a:sym typeface="Arial"/>
+              </a:defRPr>
+            </a:lvl1pPr>
+            <a:lvl2pPr marR="0" lvl="1" algn="l" rtl="0">
+              <a:lnSpc>
+                <a:spcPct val="100000"/>
+              </a:lnSpc>
+              <a:spcBef>
+                <a:spcPts val="0"/>
+              </a:spcBef>
+              <a:spcAft>
+                <a:spcPts val="0"/>
+              </a:spcAft>
+              <a:buClr>
+                <a:schemeClr val="dk1"/>
+              </a:buClr>
+              <a:buSzPts val="2800"/>
+              <a:buFont typeface="Arial"/>
+              <a:buNone/>
+              <a:defRPr sz="2800" b="0" i="0" u="none" strike="noStrike" cap="none">
+                <a:solidFill>
+                  <a:schemeClr val="dk1"/>
+                </a:solidFill>
+                <a:latin typeface="Arial"/>
+                <a:ea typeface="Arial"/>
+                <a:cs typeface="Arial"/>
+                <a:sym typeface="Arial"/>
+              </a:defRPr>
+            </a:lvl2pPr>
+            <a:lvl3pPr marR="0" lvl="2" algn="l" rtl="0">
+              <a:lnSpc>
+                <a:spcPct val="100000"/>
+              </a:lnSpc>
+              <a:spcBef>
+                <a:spcPts val="0"/>
+              </a:spcBef>
+              <a:spcAft>
+                <a:spcPts val="0"/>
+              </a:spcAft>
+              <a:buClr>
+                <a:schemeClr val="dk1"/>
+              </a:buClr>
+              <a:buSzPts val="2800"/>
+              <a:buFont typeface="Arial"/>
+              <a:buNone/>
+              <a:defRPr sz="2800" b="0" i="0" u="none" strike="noStrike" cap="none">
+                <a:solidFill>
+                  <a:schemeClr val="dk1"/>
+                </a:solidFill>
+                <a:latin typeface="Arial"/>
+                <a:ea typeface="Arial"/>
+                <a:cs typeface="Arial"/>
+                <a:sym typeface="Arial"/>
+              </a:defRPr>
+            </a:lvl3pPr>
+            <a:lvl4pPr marR="0" lvl="3" algn="l" rtl="0">
+              <a:lnSpc>
+                <a:spcPct val="100000"/>
+              </a:lnSpc>
+              <a:spcBef>
+                <a:spcPts val="0"/>
+              </a:spcBef>
+              <a:spcAft>
+                <a:spcPts val="0"/>
+              </a:spcAft>
+              <a:buClr>
+                <a:schemeClr val="dk1"/>
+              </a:buClr>
+              <a:buSzPts val="2800"/>
+              <a:buFont typeface="Arial"/>
+              <a:buNone/>
+              <a:defRPr sz="2800" b="0" i="0" u="none" strike="noStrike" cap="none">
+                <a:solidFill>
+                  <a:schemeClr val="dk1"/>
+                </a:solidFill>
+                <a:latin typeface="Arial"/>
+                <a:ea typeface="Arial"/>
+                <a:cs typeface="Arial"/>
+                <a:sym typeface="Arial"/>
+              </a:defRPr>
+            </a:lvl4pPr>
+            <a:lvl5pPr marR="0" lvl="4" algn="l" rtl="0">
+              <a:lnSpc>
+                <a:spcPct val="100000"/>
+              </a:lnSpc>
+              <a:spcBef>
+                <a:spcPts val="0"/>
+              </a:spcBef>
+              <a:spcAft>
+                <a:spcPts val="0"/>
+              </a:spcAft>
+              <a:buClr>
+                <a:schemeClr val="dk1"/>
+              </a:buClr>
+              <a:buSzPts val="2800"/>
+              <a:buFont typeface="Arial"/>
+              <a:buNone/>
+              <a:defRPr sz="2800" b="0" i="0" u="none" strike="noStrike" cap="none">
+                <a:solidFill>
+                  <a:schemeClr val="dk1"/>
+                </a:solidFill>
+                <a:latin typeface="Arial"/>
+                <a:ea typeface="Arial"/>
+                <a:cs typeface="Arial"/>
+                <a:sym typeface="Arial"/>
+              </a:defRPr>
+            </a:lvl5pPr>
+            <a:lvl6pPr marR="0" lvl="5" algn="l" rtl="0">
+              <a:lnSpc>
+                <a:spcPct val="100000"/>
+              </a:lnSpc>
+              <a:spcBef>
+                <a:spcPts val="0"/>
+              </a:spcBef>
+              <a:spcAft>
+                <a:spcPts val="0"/>
+              </a:spcAft>
+              <a:buClr>
+                <a:schemeClr val="dk1"/>
+              </a:buClr>
+              <a:buSzPts val="2800"/>
+              <a:buFont typeface="Arial"/>
+              <a:buNone/>
+              <a:defRPr sz="2800" b="0" i="0" u="none" strike="noStrike" cap="none">
+                <a:solidFill>
+                  <a:schemeClr val="dk1"/>
+                </a:solidFill>
+                <a:latin typeface="Arial"/>
+                <a:ea typeface="Arial"/>
+                <a:cs typeface="Arial"/>
+                <a:sym typeface="Arial"/>
+              </a:defRPr>
+            </a:lvl6pPr>
+            <a:lvl7pPr marR="0" lvl="6" algn="l" rtl="0">
+              <a:lnSpc>
+                <a:spcPct val="100000"/>
+              </a:lnSpc>
+              <a:spcBef>
+                <a:spcPts val="0"/>
+              </a:spcBef>
+              <a:spcAft>
+                <a:spcPts val="0"/>
+              </a:spcAft>
+              <a:buClr>
+                <a:schemeClr val="dk1"/>
+              </a:buClr>
+              <a:buSzPts val="2800"/>
+              <a:buFont typeface="Arial"/>
+              <a:buNone/>
+              <a:defRPr sz="2800" b="0" i="0" u="none" strike="noStrike" cap="none">
+                <a:solidFill>
+                  <a:schemeClr val="dk1"/>
+                </a:solidFill>
+                <a:latin typeface="Arial"/>
+                <a:ea typeface="Arial"/>
+                <a:cs typeface="Arial"/>
+                <a:sym typeface="Arial"/>
+              </a:defRPr>
+            </a:lvl7pPr>
+            <a:lvl8pPr marR="0" lvl="7" algn="l" rtl="0">
+              <a:lnSpc>
+                <a:spcPct val="100000"/>
+              </a:lnSpc>
+              <a:spcBef>
+                <a:spcPts val="0"/>
+              </a:spcBef>
+              <a:spcAft>
+                <a:spcPts val="0"/>
+              </a:spcAft>
+              <a:buClr>
+                <a:schemeClr val="dk1"/>
+              </a:buClr>
+              <a:buSzPts val="2800"/>
+              <a:buFont typeface="Arial"/>
+              <a:buNone/>
+              <a:defRPr sz="2800" b="0" i="0" u="none" strike="noStrike" cap="none">
+                <a:solidFill>
+                  <a:schemeClr val="dk1"/>
+                </a:solidFill>
+                <a:latin typeface="Arial"/>
+                <a:ea typeface="Arial"/>
+                <a:cs typeface="Arial"/>
+                <a:sym typeface="Arial"/>
+              </a:defRPr>
+            </a:lvl8pPr>
+            <a:lvl9pPr marR="0" lvl="8" algn="l" rtl="0">
+              <a:lnSpc>
+                <a:spcPct val="100000"/>
+              </a:lnSpc>
+              <a:spcBef>
+                <a:spcPts val="0"/>
+              </a:spcBef>
+              <a:spcAft>
+                <a:spcPts val="0"/>
+              </a:spcAft>
+              <a:buClr>
+                <a:schemeClr val="dk1"/>
+              </a:buClr>
+              <a:buSzPts val="2800"/>
+              <a:buFont typeface="Arial"/>
+              <a:buNone/>
+              <a:defRPr sz="2800" b="0" i="0" u="none" strike="noStrike" cap="none">
+                <a:solidFill>
+                  <a:schemeClr val="dk1"/>
+                </a:solidFill>
+                <a:latin typeface="Arial"/>
+                <a:ea typeface="Arial"/>
+                <a:cs typeface="Arial"/>
+                <a:sym typeface="Arial"/>
+              </a:defRPr>
+            </a:lvl9pPr>
+          </a:lstStyle>
+          <a:p>
+            <a:pPr marL="114300">
+              <a:buSzPts val="1800"/>
+            </a:pPr>
+            <a:r>
+              <a:rPr lang="en-US" sz="1800" dirty="0"/>
+              <a:t>Advanced Lists</a:t>
+            </a:r>
+          </a:p>
+          <a:p>
+            <a:pPr marL="400050" indent="-285750">
+              <a:buSzPts val="1800"/>
+              <a:buFontTx/>
+              <a:buChar char="-"/>
+            </a:pPr>
+            <a:r>
+              <a:rPr lang="en-US" sz="1800" dirty="0" err="1"/>
+              <a:t>ListView</a:t>
+            </a:r>
+            <a:endParaRPr lang="en-US" sz="1800" dirty="0"/>
+          </a:p>
+          <a:p>
+            <a:pPr marL="400050" indent="-285750">
+              <a:buSzPts val="1800"/>
+              <a:buFontTx/>
+              <a:buChar char="-"/>
+            </a:pPr>
+            <a:r>
+              <a:rPr lang="en-US" sz="1800" dirty="0" err="1"/>
+              <a:t>TileView</a:t>
+            </a:r>
+            <a:endParaRPr lang="en-US" sz="1800" dirty="0"/>
+          </a:p>
+          <a:p>
+            <a:pPr marL="400050" indent="-285750">
+              <a:buSzPts val="1800"/>
+              <a:buFontTx/>
+              <a:buChar char="-"/>
+            </a:pPr>
+            <a:r>
+              <a:rPr lang="en-US" sz="1800" dirty="0" err="1"/>
+              <a:t>TreeView</a:t>
+            </a:r>
+            <a:endParaRPr lang="en-US" sz="1800" dirty="0"/>
+          </a:p>
+          <a:p>
+            <a:pPr marL="400050" indent="-285750">
+              <a:buSzPts val="1800"/>
+              <a:buFontTx/>
+              <a:buChar char="-"/>
+            </a:pPr>
+            <a:endParaRPr lang="en-US" sz="1800" dirty="0"/>
+          </a:p>
+          <a:p>
+            <a:pPr marL="114300">
+              <a:buSzPts val="1800"/>
+            </a:pPr>
+            <a:r>
+              <a:rPr lang="en-US" sz="1800" dirty="0"/>
+              <a:t>UI Materials</a:t>
+            </a:r>
+          </a:p>
+          <a:p>
+            <a:pPr marL="400050" indent="-285750">
+              <a:buSzPts val="1800"/>
+              <a:buFontTx/>
+              <a:buChar char="-"/>
+            </a:pPr>
+            <a:r>
+              <a:rPr lang="en-US" sz="1800" dirty="0"/>
+              <a:t>Why prefer Materials</a:t>
+            </a:r>
+          </a:p>
+          <a:p>
+            <a:pPr marL="400050" indent="-285750">
+              <a:buSzPts val="1800"/>
+              <a:buFontTx/>
+              <a:buChar char="-"/>
+            </a:pPr>
+            <a:r>
+              <a:rPr lang="en-US" sz="1800" dirty="0"/>
+              <a:t>Performance Differences</a:t>
+            </a:r>
+          </a:p>
+        </p:txBody>
+      </p:sp>
+    </p:spTree>
+    <p:extLst>
+      <p:ext uri="{BB962C8B-B14F-4D97-AF65-F5344CB8AC3E}">
+        <p14:creationId xmlns:p14="http://schemas.microsoft.com/office/powerpoint/2010/main" val="1967371451"/>
+      </p:ext>
+    </p:extLst>
+  </p:cSld>
+  <p:clrMapOvr>
+    <a:masterClrMapping/>
+  </p:clrMapOvr>
+</p:sld>
+</file>
+
+<file path=ppt/slides/slide12.xml><?xml version="1.0" encoding="utf-8"?>
+<p:sld xmlns:a="http://schemas.openxmlformats.org/drawingml/2006/main" xmlns:r="http://schemas.openxmlformats.org/officeDocument/2006/relationships" xmlns:p="http://schemas.openxmlformats.org/presentationml/2006/main">
+  <p:cSld>
+    <p:spTree>
+      <p:nvGrpSpPr>
+        <p:cNvPr id="1" name="Shape 137"/>
         <p:cNvGrpSpPr/>
         <p:nvPr/>
       </p:nvGrpSpPr>
@@ -6617,7 +7546,9 @@
       <p:sp>
         <p:nvSpPr>
           <p:cNvPr id="138" name="Google Shape;138;p22"/>
-          <p:cNvSpPr txBox="1"/>
+          <p:cNvSpPr txBox="1">
+            <a:spLocks noGrp="1"/>
+          </p:cNvSpPr>
           <p:nvPr>
             <p:ph type="title"/>
           </p:nvPr>
@@ -6632,12 +7563,12 @@
           </a:prstGeom>
         </p:spPr>
         <p:txBody>
-          <a:bodyPr anchorCtr="0" anchor="t" bIns="91425" lIns="91425" spcFirstLastPara="1" rIns="91425" wrap="square" tIns="91425">
+          <a:bodyPr spcFirstLastPara="1" wrap="square" lIns="91425" tIns="91425" rIns="91425" bIns="91425" anchor="t" anchorCtr="0">
             <a:normAutofit fontScale="90000"/>
           </a:bodyPr>
           <a:lstStyle/>
           <a:p>
-            <a:pPr indent="0" lvl="0" marL="0" rtl="0" algn="l">
+            <a:pPr marL="0" lvl="0" indent="0" algn="l" rtl="0">
               <a:spcBef>
                 <a:spcPts val="0"/>
               </a:spcBef>
@@ -6657,7 +7588,9 @@
       <p:sp>
         <p:nvSpPr>
           <p:cNvPr id="139" name="Google Shape;139;p22"/>
-          <p:cNvSpPr txBox="1"/>
+          <p:cNvSpPr txBox="1">
+            <a:spLocks noGrp="1"/>
+          </p:cNvSpPr>
           <p:nvPr>
             <p:ph type="title"/>
           </p:nvPr>
@@ -6672,12 +7605,12 @@
           </a:prstGeom>
         </p:spPr>
         <p:txBody>
-          <a:bodyPr anchorCtr="0" anchor="t" bIns="91425" lIns="91425" spcFirstLastPara="1" rIns="91425" wrap="square" tIns="91425">
+          <a:bodyPr spcFirstLastPara="1" wrap="square" lIns="91425" tIns="91425" rIns="91425" bIns="91425" anchor="t" anchorCtr="0">
             <a:normAutofit/>
           </a:bodyPr>
           <a:lstStyle/>
           <a:p>
-            <a:pPr indent="-342900" lvl="0" marL="457200" rtl="0" algn="l">
+            <a:pPr marL="457200" lvl="0" indent="-342900" algn="l" rtl="0">
               <a:spcBef>
                 <a:spcPts val="0"/>
               </a:spcBef>
@@ -6688,7 +7621,7 @@
               <a:buChar char="●"/>
             </a:pPr>
             <a:r>
-              <a:rPr lang="en" sz="1800" u="sng">
+              <a:rPr lang="en" sz="1800" u="sng" dirty="0">
                 <a:solidFill>
                   <a:schemeClr val="hlink"/>
                 </a:solidFill>
@@ -6696,10 +7629,10 @@
               </a:rPr>
               <a:t>UI Material Use</a:t>
             </a:r>
-            <a:endParaRPr sz="1800"/>
-          </a:p>
-          <a:p>
-            <a:pPr indent="-342900" lvl="0" marL="457200" rtl="0" algn="l">
+            <a:endParaRPr sz="1800" dirty="0"/>
+          </a:p>
+          <a:p>
+            <a:pPr marL="457200" lvl="0" indent="-342900" algn="l" rtl="0">
               <a:spcBef>
                 <a:spcPts val="0"/>
               </a:spcBef>
@@ -6710,7 +7643,7 @@
               <a:buChar char="●"/>
             </a:pPr>
             <a:r>
-              <a:rPr lang="en" sz="1800" u="sng">
+              <a:rPr lang="en" sz="1800" u="sng" dirty="0">
                 <a:solidFill>
                   <a:schemeClr val="hlink"/>
                 </a:solidFill>
@@ -6718,10 +7651,10 @@
               </a:rPr>
               <a:t>Basic Optimizations</a:t>
             </a:r>
-            <a:endParaRPr sz="1800"/>
-          </a:p>
-          <a:p>
-            <a:pPr indent="-342900" lvl="0" marL="457200" rtl="0" algn="l">
+            <a:endParaRPr sz="1800" dirty="0"/>
+          </a:p>
+          <a:p>
+            <a:pPr marL="457200" lvl="0" indent="-342900" algn="l" rtl="0">
               <a:spcBef>
                 <a:spcPts val="0"/>
               </a:spcBef>
@@ -6732,7 +7665,7 @@
               <a:buChar char="●"/>
             </a:pPr>
             <a:r>
-              <a:rPr lang="en" sz="1800" u="sng">
+              <a:rPr lang="en" sz="1800" u="sng" dirty="0">
                 <a:solidFill>
                   <a:schemeClr val="hlink"/>
                 </a:solidFill>
@@ -6740,10 +7673,10 @@
               </a:rPr>
               <a:t>CommonUI Overview</a:t>
             </a:r>
-            <a:endParaRPr sz="1800"/>
-          </a:p>
-          <a:p>
-            <a:pPr indent="-342900" lvl="0" marL="457200" rtl="0" algn="l">
+            <a:endParaRPr sz="1800" dirty="0"/>
+          </a:p>
+          <a:p>
+            <a:pPr marL="457200" lvl="0" indent="-342900" algn="l" rtl="0">
               <a:spcBef>
                 <a:spcPts val="0"/>
               </a:spcBef>
@@ -6754,7 +7687,7 @@
               <a:buChar char="●"/>
             </a:pPr>
             <a:r>
-              <a:rPr lang="en" sz="1800" u="sng">
+              <a:rPr lang="en" sz="1800" u="sng" dirty="0">
                 <a:solidFill>
                   <a:schemeClr val="hlink"/>
                 </a:solidFill>
@@ -6762,7 +7695,7 @@
               </a:rPr>
               <a:t>CommonUI Tutorial</a:t>
             </a:r>
-            <a:endParaRPr sz="1800"/>
+            <a:endParaRPr sz="1800" dirty="0"/>
           </a:p>
         </p:txBody>
       </p:sp>
@@ -6775,11 +7708,11 @@
 </file>
 
 <file path=ppt/slides/slide2.xml><?xml version="1.0" encoding="utf-8"?>
-<p:sld xmlns:a="http://schemas.openxmlformats.org/drawingml/2006/main" xmlns:r="http://schemas.openxmlformats.org/officeDocument/2006/relationships" xmlns:mc="http://schemas.openxmlformats.org/markup-compatibility/2006" xmlns:mv="urn:schemas-microsoft-com:mac:vml" xmlns:p="http://schemas.openxmlformats.org/presentationml/2006/main" xmlns:c="http://schemas.openxmlformats.org/drawingml/2006/chart" xmlns:dgm="http://schemas.openxmlformats.org/drawingml/2006/diagram" xmlns:o="urn:schemas-microsoft-com:office:office" xmlns:v="urn:schemas-microsoft-com:vml" xmlns:pvml="urn:schemas-microsoft-com:office:powerpoint" xmlns:com="http://schemas.openxmlformats.org/drawingml/2006/compatibility" xmlns:p14="http://schemas.microsoft.com/office/powerpoint/2010/main" xmlns:p15="http://schemas.microsoft.com/office/powerpoint/2012/main" xmlns:ahyp="http://schemas.microsoft.com/office/drawing/2018/hyperlinkcolor">
+<p:sld xmlns:a="http://schemas.openxmlformats.org/drawingml/2006/main" xmlns:r="http://schemas.openxmlformats.org/officeDocument/2006/relationships" xmlns:p="http://schemas.openxmlformats.org/presentationml/2006/main">
   <p:cSld>
     <p:spTree>
       <p:nvGrpSpPr>
-        <p:cNvPr id="62" name="Shape 62"/>
+        <p:cNvPr id="1" name="Shape 62"/>
         <p:cNvGrpSpPr/>
         <p:nvPr/>
       </p:nvGrpSpPr>
@@ -6794,7 +7727,9 @@
       <p:sp>
         <p:nvSpPr>
           <p:cNvPr id="63" name="Google Shape;63;p14"/>
-          <p:cNvSpPr txBox="1"/>
+          <p:cNvSpPr txBox="1">
+            <a:spLocks noGrp="1"/>
+          </p:cNvSpPr>
           <p:nvPr>
             <p:ph type="title"/>
           </p:nvPr>
@@ -6809,12 +7744,12 @@
           </a:prstGeom>
         </p:spPr>
         <p:txBody>
-          <a:bodyPr anchorCtr="0" anchor="t" bIns="91425" lIns="91425" spcFirstLastPara="1" rIns="91425" wrap="square" tIns="91425">
+          <a:bodyPr spcFirstLastPara="1" wrap="square" lIns="91425" tIns="91425" rIns="91425" bIns="91425" anchor="t" anchorCtr="0">
             <a:normAutofit fontScale="90000"/>
           </a:bodyPr>
           <a:lstStyle/>
           <a:p>
-            <a:pPr indent="0" lvl="0" marL="0" rtl="0" algn="l">
+            <a:pPr marL="0" lvl="0" indent="0" algn="l" rtl="0">
               <a:spcBef>
                 <a:spcPts val="0"/>
               </a:spcBef>
@@ -6824,17 +7759,19 @@
               <a:buNone/>
             </a:pPr>
             <a:r>
-              <a:rPr lang="en"/>
+              <a:rPr lang="en" dirty="0"/>
               <a:t>Content of this lecture</a:t>
             </a:r>
-            <a:endParaRPr/>
+            <a:endParaRPr dirty="0"/>
           </a:p>
         </p:txBody>
       </p:sp>
       <p:sp>
         <p:nvSpPr>
           <p:cNvPr id="64" name="Google Shape;64;p14"/>
-          <p:cNvSpPr txBox="1"/>
+          <p:cNvSpPr txBox="1">
+            <a:spLocks noGrp="1"/>
+          </p:cNvSpPr>
           <p:nvPr>
             <p:ph type="title"/>
           </p:nvPr>
@@ -6849,12 +7786,12 @@
           </a:prstGeom>
         </p:spPr>
         <p:txBody>
-          <a:bodyPr anchorCtr="0" anchor="t" bIns="91425" lIns="91425" spcFirstLastPara="1" rIns="91425" wrap="square" tIns="91425">
+          <a:bodyPr spcFirstLastPara="1" wrap="square" lIns="91425" tIns="91425" rIns="91425" bIns="91425" anchor="t" anchorCtr="0">
             <a:normAutofit/>
           </a:bodyPr>
           <a:lstStyle/>
           <a:p>
-            <a:pPr indent="0" lvl="0" marL="0" rtl="0" algn="l">
+            <a:pPr marL="0" lvl="0" indent="0" algn="l" rtl="0">
               <a:spcBef>
                 <a:spcPts val="0"/>
               </a:spcBef>
@@ -6864,13 +7801,13 @@
               <a:buNone/>
             </a:pPr>
             <a:r>
-              <a:rPr lang="en" sz="1800"/>
+              <a:rPr lang="en" sz="1800" dirty="0"/>
               <a:t>Core content</a:t>
             </a:r>
-            <a:endParaRPr sz="1800"/>
-          </a:p>
-          <a:p>
-            <a:pPr indent="0" lvl="0" marL="0" rtl="0" algn="l">
+            <a:endParaRPr sz="1800" dirty="0"/>
+          </a:p>
+          <a:p>
+            <a:pPr marL="0" lvl="0" indent="0" algn="l" rtl="0">
               <a:spcBef>
                 <a:spcPts val="0"/>
               </a:spcBef>
@@ -6879,13 +7816,10 @@
               </a:spcAft>
               <a:buNone/>
             </a:pPr>
-            <a:r>
-              <a:t/>
-            </a:r>
-            <a:endParaRPr sz="1800"/>
-          </a:p>
-          <a:p>
-            <a:pPr indent="-342900" lvl="0" marL="457200" rtl="0" algn="l">
+            <a:endParaRPr sz="1800" dirty="0"/>
+          </a:p>
+          <a:p>
+            <a:pPr marL="114300" lvl="0" algn="l" rtl="0">
               <a:spcBef>
                 <a:spcPts val="0"/>
               </a:spcBef>
@@ -6893,24 +7827,23 @@
                 <a:spcPts val="0"/>
               </a:spcAft>
               <a:buSzPts val="1800"/>
-              <a:buChar char="●"/>
             </a:pPr>
             <a:r>
-              <a:rPr lang="en" sz="1800"/>
-              <a:t>UMG</a:t>
-            </a:r>
-            <a:r>
-              <a:rPr lang="en" sz="1800"/>
-              <a:t> &amp; </a:t>
-            </a:r>
-            <a:r>
-              <a:rPr lang="en" sz="1800"/>
-              <a:t>Designer</a:t>
-            </a:r>
-            <a:endParaRPr sz="1800"/>
-          </a:p>
-          <a:p>
-            <a:pPr indent="-342900" lvl="0" marL="457200" rtl="0" algn="l">
+              <a:rPr lang="en" sz="1800" dirty="0"/>
+              <a:t>UMG, </a:t>
+            </a:r>
+            <a:r>
+              <a:rPr lang="en" sz="1800" dirty="0" err="1"/>
+              <a:t>CommonUI</a:t>
+            </a:r>
+            <a:r>
+              <a:rPr lang="en" sz="1800" dirty="0"/>
+              <a:t> &amp; Designer</a:t>
+            </a:r>
+            <a:endParaRPr sz="1800" dirty="0"/>
+          </a:p>
+          <a:p>
+            <a:pPr marL="114300" lvl="0" algn="l" rtl="0">
               <a:spcBef>
                 <a:spcPts val="0"/>
               </a:spcBef>
@@ -6918,16 +7851,26 @@
                 <a:spcPts val="0"/>
               </a:spcAft>
               <a:buSzPts val="1800"/>
-              <a:buChar char="●"/>
             </a:pPr>
             <a:r>
-              <a:rPr lang="en" sz="1800"/>
-              <a:t>Widget Templating</a:t>
-            </a:r>
-            <a:endParaRPr sz="1800"/>
-          </a:p>
-          <a:p>
-            <a:pPr indent="-342900" lvl="0" marL="457200" rtl="0" algn="l">
+              <a:rPr lang="en" sz="1800" dirty="0"/>
+              <a:t>Focus</a:t>
+            </a:r>
+            <a:endParaRPr sz="1800" dirty="0"/>
+          </a:p>
+          <a:p>
+            <a:pPr lvl="0" algn="l" rtl="0">
+              <a:spcBef>
+                <a:spcPts val="0"/>
+              </a:spcBef>
+              <a:spcAft>
+                <a:spcPts val="0"/>
+              </a:spcAft>
+            </a:pPr>
+            <a:endParaRPr sz="1800" dirty="0"/>
+          </a:p>
+          <a:p>
+            <a:pPr marL="114300" lvl="0" algn="l" rtl="0">
               <a:spcBef>
                 <a:spcPts val="0"/>
               </a:spcBef>
@@ -6935,31 +7878,31 @@
                 <a:spcPts val="0"/>
               </a:spcAft>
               <a:buSzPts val="1800"/>
-              <a:buChar char="●"/>
             </a:pPr>
             <a:r>
-              <a:rPr lang="en" sz="1800"/>
-              <a:t>Focus</a:t>
-            </a:r>
-            <a:endParaRPr sz="1800"/>
-          </a:p>
-          <a:p>
-            <a:pPr indent="0" lvl="0" marL="0" rtl="0" algn="l">
-              <a:spcBef>
-                <a:spcPts val="0"/>
-              </a:spcBef>
-              <a:spcAft>
-                <a:spcPts val="0"/>
-              </a:spcAft>
-              <a:buNone/>
+              <a:rPr lang="en" sz="1800" dirty="0" err="1"/>
+              <a:t>ActivatableWidgets</a:t>
+            </a:r>
+            <a:endParaRPr sz="1800" dirty="0"/>
+          </a:p>
+          <a:p>
+            <a:pPr marL="114300" lvl="0" algn="l" rtl="0">
+              <a:spcBef>
+                <a:spcPts val="0"/>
+              </a:spcBef>
+              <a:spcAft>
+                <a:spcPts val="0"/>
+              </a:spcAft>
+              <a:buSzPts val="1800"/>
             </a:pPr>
             <a:r>
-              <a:t/>
-            </a:r>
-            <a:endParaRPr sz="1800"/>
-          </a:p>
-          <a:p>
-            <a:pPr indent="-342900" lvl="0" marL="457200" rtl="0" algn="l">
+              <a:rPr lang="en" sz="1800" dirty="0"/>
+              <a:t>Layers</a:t>
+            </a:r>
+            <a:endParaRPr sz="1800" dirty="0"/>
+          </a:p>
+          <a:p>
+            <a:pPr marL="114300" lvl="0" algn="l" rtl="0">
               <a:spcBef>
                 <a:spcPts val="0"/>
               </a:spcBef>
@@ -6967,16 +7910,29 @@
                 <a:spcPts val="0"/>
               </a:spcAft>
               <a:buSzPts val="1800"/>
-              <a:buChar char="●"/>
             </a:pPr>
             <a:r>
-              <a:rPr lang="en" sz="1800"/>
-              <a:t>Views</a:t>
-            </a:r>
-            <a:endParaRPr sz="1800"/>
-          </a:p>
-          <a:p>
-            <a:pPr indent="-342900" lvl="0" marL="457200" rtl="0" algn="l">
+              <a:rPr lang="en" sz="1800" dirty="0"/>
+              <a:t>UI Management</a:t>
+            </a:r>
+            <a:br>
+              <a:rPr lang="en" sz="1800" dirty="0"/>
+            </a:br>
+            <a:r>
+              <a:rPr lang="en" sz="1800" dirty="0"/>
+              <a:t>Input Routing in </a:t>
+            </a:r>
+            <a:r>
+              <a:rPr lang="en" sz="1800" dirty="0" err="1"/>
+              <a:t>CommonUI</a:t>
+            </a:r>
+            <a:br>
+              <a:rPr lang="en" sz="1800" dirty="0"/>
+            </a:br>
+            <a:endParaRPr sz="1800" dirty="0"/>
+          </a:p>
+          <a:p>
+            <a:pPr marL="114300" lvl="0" algn="l" rtl="0">
               <a:spcBef>
                 <a:spcPts val="0"/>
               </a:spcBef>
@@ -6984,69 +7940,21 @@
                 <a:spcPts val="0"/>
               </a:spcAft>
               <a:buSzPts val="1800"/>
-              <a:buChar char="●"/>
             </a:pPr>
             <a:r>
-              <a:rPr lang="en" sz="1800"/>
-              <a:t>Layers</a:t>
-            </a:r>
-            <a:endParaRPr sz="1800"/>
-          </a:p>
-          <a:p>
-            <a:pPr indent="-342900" lvl="0" marL="457200" rtl="0" algn="l">
-              <a:spcBef>
-                <a:spcPts val="0"/>
-              </a:spcBef>
-              <a:spcAft>
-                <a:spcPts val="0"/>
-              </a:spcAft>
-              <a:buSzPts val="1800"/>
-              <a:buChar char="●"/>
-            </a:pPr>
-            <a:r>
-              <a:rPr lang="en" sz="1800"/>
-              <a:t>UI Management</a:t>
-            </a:r>
-            <a:endParaRPr sz="1800"/>
-          </a:p>
-          <a:p>
-            <a:pPr indent="0" lvl="0" marL="0" rtl="0" algn="l">
-              <a:spcBef>
-                <a:spcPts val="0"/>
-              </a:spcBef>
-              <a:spcAft>
-                <a:spcPts val="0"/>
-              </a:spcAft>
-              <a:buNone/>
-            </a:pPr>
-            <a:r>
-              <a:t/>
-            </a:r>
-            <a:endParaRPr sz="1800"/>
-          </a:p>
-          <a:p>
-            <a:pPr indent="-342900" lvl="0" marL="457200" rtl="0" algn="l">
-              <a:spcBef>
-                <a:spcPts val="0"/>
-              </a:spcBef>
-              <a:spcAft>
-                <a:spcPts val="0"/>
-              </a:spcAft>
-              <a:buSzPts val="1800"/>
-              <a:buChar char="●"/>
-            </a:pPr>
-            <a:r>
-              <a:rPr lang="en" sz="1800"/>
+              <a:rPr lang="en" sz="1800" dirty="0"/>
               <a:t>Additional Resources</a:t>
             </a:r>
-            <a:endParaRPr sz="1800"/>
+            <a:endParaRPr sz="1800" dirty="0"/>
           </a:p>
         </p:txBody>
       </p:sp>
       <p:sp>
         <p:nvSpPr>
           <p:cNvPr id="65" name="Google Shape;65;p14"/>
-          <p:cNvSpPr txBox="1"/>
+          <p:cNvSpPr txBox="1">
+            <a:spLocks noGrp="1"/>
+          </p:cNvSpPr>
           <p:nvPr>
             <p:ph type="title"/>
           </p:nvPr>
@@ -7061,12 +7969,12 @@
           </a:prstGeom>
         </p:spPr>
         <p:txBody>
-          <a:bodyPr anchorCtr="0" anchor="t" bIns="91425" lIns="91425" spcFirstLastPara="1" rIns="91425" wrap="square" tIns="91425">
+          <a:bodyPr spcFirstLastPara="1" wrap="square" lIns="91425" tIns="91425" rIns="91425" bIns="91425" anchor="t" anchorCtr="0">
             <a:normAutofit/>
           </a:bodyPr>
           <a:lstStyle/>
           <a:p>
-            <a:pPr indent="0" lvl="0" marL="0" rtl="0" algn="l">
+            <a:pPr marL="0" lvl="0" indent="0" algn="l" rtl="0">
               <a:spcBef>
                 <a:spcPts val="0"/>
               </a:spcBef>
@@ -7076,13 +7984,21 @@
               <a:buNone/>
             </a:pPr>
             <a:r>
-              <a:rPr lang="en" sz="1800"/>
-              <a:t>Optional Content</a:t>
-            </a:r>
-            <a:endParaRPr sz="1800"/>
-          </a:p>
-          <a:p>
-            <a:pPr indent="0" lvl="0" marL="0" rtl="0" algn="l">
+              <a:rPr lang="sk-SK" sz="1800" dirty="0" err="1"/>
+              <a:t>Next</a:t>
+            </a:r>
+            <a:r>
+              <a:rPr lang="sk-SK" sz="1800" dirty="0"/>
+              <a:t> </a:t>
+            </a:r>
+            <a:r>
+              <a:rPr lang="sk-SK" sz="1800" dirty="0" err="1"/>
+              <a:t>time</a:t>
+            </a:r>
+            <a:endParaRPr sz="1800" dirty="0"/>
+          </a:p>
+          <a:p>
+            <a:pPr marL="0" lvl="0" indent="0" algn="l" rtl="0">
               <a:spcBef>
                 <a:spcPts val="0"/>
               </a:spcBef>
@@ -7091,13 +8007,10 @@
               </a:spcAft>
               <a:buNone/>
             </a:pPr>
-            <a:r>
-              <a:t/>
-            </a:r>
-            <a:endParaRPr sz="1800"/>
-          </a:p>
-          <a:p>
-            <a:pPr indent="-342900" lvl="0" marL="457200" rtl="0" algn="l">
+            <a:endParaRPr sz="1800" dirty="0"/>
+          </a:p>
+          <a:p>
+            <a:pPr marL="114300" lvl="0" algn="l" rtl="0">
               <a:spcBef>
                 <a:spcPts val="0"/>
               </a:spcBef>
@@ -7105,47 +8018,50 @@
                 <a:spcPts val="0"/>
               </a:spcAft>
               <a:buSzPts val="1800"/>
-              <a:buChar char="●"/>
             </a:pPr>
             <a:r>
-              <a:rPr lang="en" sz="1800"/>
-              <a:t>Generic Layouting</a:t>
-            </a:r>
-            <a:endParaRPr sz="1800"/>
-          </a:p>
-          <a:p>
-            <a:pPr indent="-342900" lvl="0" marL="457200" rtl="0" algn="l">
-              <a:spcBef>
-                <a:spcPts val="0"/>
-              </a:spcBef>
-              <a:spcAft>
-                <a:spcPts val="0"/>
-              </a:spcAft>
-              <a:buSzPts val="1800"/>
-              <a:buChar char="●"/>
-            </a:pPr>
-            <a:r>
-              <a:rPr lang="en" sz="1800"/>
-              <a:t>Animations</a:t>
-            </a:r>
-            <a:endParaRPr sz="1800"/>
-          </a:p>
-          <a:p>
-            <a:pPr indent="-342900" lvl="0" marL="457200" rtl="0" algn="l">
-              <a:spcBef>
-                <a:spcPts val="0"/>
-              </a:spcBef>
-              <a:spcAft>
-                <a:spcPts val="0"/>
-              </a:spcAft>
-              <a:buSzPts val="1800"/>
-              <a:buChar char="●"/>
-            </a:pPr>
-            <a:r>
-              <a:rPr lang="en" sz="1800"/>
-              <a:t>UI Materials</a:t>
-            </a:r>
-            <a:endParaRPr sz="1800"/>
+              <a:rPr lang="sk-SK" sz="1800" dirty="0" err="1"/>
+              <a:t>Advanced</a:t>
+            </a:r>
+            <a:r>
+              <a:rPr lang="sk-SK" sz="1800" dirty="0"/>
+              <a:t> </a:t>
+            </a:r>
+            <a:r>
+              <a:rPr lang="sk-SK" sz="1800" dirty="0" err="1"/>
+              <a:t>Lists</a:t>
+            </a:r>
+            <a:br>
+              <a:rPr lang="sk-SK" sz="1800" dirty="0"/>
+            </a:br>
+            <a:r>
+              <a:rPr lang="sk-SK" sz="1800" dirty="0" err="1"/>
+              <a:t>Data</a:t>
+            </a:r>
+            <a:r>
+              <a:rPr lang="sk-SK" sz="1800" dirty="0"/>
+              <a:t> </a:t>
+            </a:r>
+            <a:r>
+              <a:rPr lang="sk-SK" sz="1800" dirty="0" err="1"/>
+              <a:t>Driven</a:t>
+            </a:r>
+            <a:r>
+              <a:rPr lang="sk-SK" sz="1800" dirty="0"/>
+              <a:t> UI</a:t>
+            </a:r>
+            <a:br>
+              <a:rPr lang="sk-SK" sz="1800" dirty="0"/>
+            </a:br>
+            <a:r>
+              <a:rPr lang="sk-SK" sz="1800" dirty="0"/>
+              <a:t>UI </a:t>
+            </a:r>
+            <a:r>
+              <a:rPr lang="sk-SK" sz="1800" dirty="0" err="1"/>
+              <a:t>Materials</a:t>
+            </a:r>
+            <a:endParaRPr sz="1800" dirty="0"/>
           </a:p>
         </p:txBody>
       </p:sp>
@@ -7158,11 +8074,11 @@
 </file>
 
 <file path=ppt/slides/slide3.xml><?xml version="1.0" encoding="utf-8"?>
-<p:sld xmlns:a="http://schemas.openxmlformats.org/drawingml/2006/main" xmlns:r="http://schemas.openxmlformats.org/officeDocument/2006/relationships" xmlns:mc="http://schemas.openxmlformats.org/markup-compatibility/2006" xmlns:mv="urn:schemas-microsoft-com:mac:vml" xmlns:p="http://schemas.openxmlformats.org/presentationml/2006/main" xmlns:c="http://schemas.openxmlformats.org/drawingml/2006/chart" xmlns:dgm="http://schemas.openxmlformats.org/drawingml/2006/diagram" xmlns:o="urn:schemas-microsoft-com:office:office" xmlns:v="urn:schemas-microsoft-com:vml" xmlns:pvml="urn:schemas-microsoft-com:office:powerpoint" xmlns:com="http://schemas.openxmlformats.org/drawingml/2006/compatibility" xmlns:p14="http://schemas.microsoft.com/office/powerpoint/2010/main" xmlns:p15="http://schemas.microsoft.com/office/powerpoint/2012/main" xmlns:ahyp="http://schemas.microsoft.com/office/drawing/2018/hyperlinkcolor">
+<p:sld xmlns:a="http://schemas.openxmlformats.org/drawingml/2006/main" xmlns:r="http://schemas.openxmlformats.org/officeDocument/2006/relationships" xmlns:p="http://schemas.openxmlformats.org/presentationml/2006/main">
   <p:cSld>
     <p:spTree>
       <p:nvGrpSpPr>
-        <p:cNvPr id="69" name="Shape 69"/>
+        <p:cNvPr id="1" name="Shape 69"/>
         <p:cNvGrpSpPr/>
         <p:nvPr/>
       </p:nvGrpSpPr>
@@ -7177,7 +8093,9 @@
       <p:sp>
         <p:nvSpPr>
           <p:cNvPr id="70" name="Google Shape;70;p15"/>
-          <p:cNvSpPr txBox="1"/>
+          <p:cNvSpPr txBox="1">
+            <a:spLocks noGrp="1"/>
+          </p:cNvSpPr>
           <p:nvPr>
             <p:ph type="title"/>
           </p:nvPr>
@@ -7192,12 +8110,12 @@
           </a:prstGeom>
         </p:spPr>
         <p:txBody>
-          <a:bodyPr anchorCtr="0" anchor="t" bIns="91425" lIns="91425" spcFirstLastPara="1" rIns="91425" wrap="square" tIns="91425">
+          <a:bodyPr spcFirstLastPara="1" wrap="square" lIns="91425" tIns="91425" rIns="91425" bIns="91425" anchor="t" anchorCtr="0">
             <a:normAutofit fontScale="90000"/>
           </a:bodyPr>
           <a:lstStyle/>
           <a:p>
-            <a:pPr indent="0" lvl="0" marL="0" rtl="0" algn="l">
+            <a:pPr marL="0" lvl="0" indent="0" algn="l" rtl="0">
               <a:spcBef>
                 <a:spcPts val="0"/>
               </a:spcBef>
@@ -7207,17 +8125,18 @@
               <a:buNone/>
             </a:pPr>
             <a:r>
-              <a:rPr lang="en"/>
+              <a:rPr lang="en-US"/>
               <a:t>UMG &amp; Designer</a:t>
             </a:r>
-            <a:endParaRPr/>
           </a:p>
         </p:txBody>
       </p:sp>
       <p:sp>
         <p:nvSpPr>
           <p:cNvPr id="71" name="Google Shape;71;p15"/>
-          <p:cNvSpPr txBox="1"/>
+          <p:cNvSpPr txBox="1">
+            <a:spLocks noGrp="1"/>
+          </p:cNvSpPr>
           <p:nvPr>
             <p:ph type="title"/>
           </p:nvPr>
@@ -7225,19 +8144,19 @@
         <p:spPr>
           <a:xfrm>
             <a:off x="311700" y="1187825"/>
-            <a:ext cx="8686500" cy="992700"/>
+            <a:ext cx="8520600" cy="1210318"/>
           </a:xfrm>
           <a:prstGeom prst="rect">
             <a:avLst/>
           </a:prstGeom>
         </p:spPr>
         <p:txBody>
-          <a:bodyPr anchorCtr="0" anchor="t" bIns="91425" lIns="91425" spcFirstLastPara="1" rIns="91425" wrap="square" tIns="91425">
+          <a:bodyPr spcFirstLastPara="1" wrap="square" lIns="91425" tIns="91425" rIns="91425" bIns="91425" anchor="t" anchorCtr="0">
             <a:normAutofit/>
           </a:bodyPr>
           <a:lstStyle/>
           <a:p>
-            <a:pPr indent="-342900" lvl="0" marL="457200" rtl="0" algn="l">
+            <a:pPr marL="400050" lvl="0" indent="-285750" algn="l" rtl="0">
               <a:spcBef>
                 <a:spcPts val="0"/>
               </a:spcBef>
@@ -7245,16 +8164,16 @@
                 <a:spcPts val="0"/>
               </a:spcAft>
               <a:buSzPts val="1800"/>
-              <a:buChar char="●"/>
+              <a:buFont typeface="Arial" panose="020B0604020202020204" pitchFamily="34" charset="0"/>
+              <a:buChar char="•"/>
             </a:pPr>
             <a:r>
-              <a:rPr lang="en" sz="1800"/>
-              <a:t>Unreal Motion Graphics - Default UI system</a:t>
-            </a:r>
-            <a:endParaRPr sz="1800"/>
-          </a:p>
-          <a:p>
-            <a:pPr indent="-342900" lvl="0" marL="457200" rtl="0" algn="l">
+              <a:rPr lang="en" sz="1800" dirty="0"/>
+              <a:t>Unreal Motion Graphics</a:t>
+            </a:r>
+          </a:p>
+          <a:p>
+            <a:pPr marL="400050" lvl="0" indent="-285750" algn="l" rtl="0">
               <a:spcBef>
                 <a:spcPts val="0"/>
               </a:spcBef>
@@ -7262,13 +8181,25 @@
                 <a:spcPts val="0"/>
               </a:spcAft>
               <a:buSzPts val="1800"/>
-              <a:buChar char="●"/>
+              <a:buFont typeface="Arial" panose="020B0604020202020204" pitchFamily="34" charset="0"/>
+              <a:buChar char="•"/>
             </a:pPr>
             <a:r>
-              <a:rPr lang="en" sz="1800"/>
-              <a:t>Widget vs User Widget</a:t>
-            </a:r>
-            <a:endParaRPr sz="1800"/>
+              <a:rPr lang="en-US" sz="1800" dirty="0" err="1">
+                <a:hlinkClick r:id="rId3"/>
+              </a:rPr>
+              <a:t>CommonUI</a:t>
+            </a:r>
+            <a:br>
+              <a:rPr lang="en-US" sz="1800" dirty="0"/>
+            </a:br>
+            <a:r>
+              <a:rPr lang="en-US" sz="1800" dirty="0">
+                <a:hlinkClick r:id="rId4"/>
+              </a:rPr>
+              <a:t>Optimization Guidelines</a:t>
+            </a:r>
+            <a:endParaRPr lang="en-US" sz="1800" dirty="0"/>
           </a:p>
         </p:txBody>
       </p:sp>
@@ -7279,7 +8210,7 @@
           <p:nvPr/>
         </p:nvPicPr>
         <p:blipFill>
-          <a:blip r:embed="rId3">
+          <a:blip r:embed="rId5">
             <a:alphaModFix/>
           </a:blip>
           <a:stretch>
@@ -7288,8 +8219,8 @@
         </p:blipFill>
         <p:spPr>
           <a:xfrm>
-            <a:off x="311675" y="2196400"/>
-            <a:ext cx="2452099" cy="2707526"/>
+            <a:off x="380687" y="2476926"/>
+            <a:ext cx="2315226" cy="2556395"/>
           </a:xfrm>
           <a:prstGeom prst="rect">
             <a:avLst/>
@@ -7307,7 +8238,7 @@
           <p:nvPr/>
         </p:nvPicPr>
         <p:blipFill>
-          <a:blip r:embed="rId4">
+          <a:blip r:embed="rId6">
             <a:alphaModFix/>
           </a:blip>
           <a:stretch>
@@ -7316,8 +8247,8 @@
         </p:blipFill>
         <p:spPr>
           <a:xfrm>
-            <a:off x="3193812" y="2196400"/>
-            <a:ext cx="2756374" cy="2633325"/>
+            <a:off x="3262823" y="2472785"/>
+            <a:ext cx="2602517" cy="2486336"/>
           </a:xfrm>
           <a:prstGeom prst="rect">
             <a:avLst/>
@@ -7335,7 +8266,7 @@
           <p:nvPr/>
         </p:nvPicPr>
         <p:blipFill>
-          <a:blip r:embed="rId5">
+          <a:blip r:embed="rId7">
             <a:alphaModFix/>
           </a:blip>
           <a:stretch>
@@ -7344,8 +8275,8 @@
         </p:blipFill>
         <p:spPr>
           <a:xfrm>
-            <a:off x="6380199" y="2180400"/>
-            <a:ext cx="2452100" cy="2739519"/>
+            <a:off x="6449210" y="2462712"/>
+            <a:ext cx="2315227" cy="2586603"/>
           </a:xfrm>
           <a:prstGeom prst="rect">
             <a:avLst/>
@@ -7365,201 +8296,11 @@
 </file>
 
 <file path=ppt/slides/slide4.xml><?xml version="1.0" encoding="utf-8"?>
-<p:sld xmlns:a="http://schemas.openxmlformats.org/drawingml/2006/main" xmlns:r="http://schemas.openxmlformats.org/officeDocument/2006/relationships" xmlns:mc="http://schemas.openxmlformats.org/markup-compatibility/2006" xmlns:mv="urn:schemas-microsoft-com:mac:vml" xmlns:p="http://schemas.openxmlformats.org/presentationml/2006/main" xmlns:c="http://schemas.openxmlformats.org/drawingml/2006/chart" xmlns:dgm="http://schemas.openxmlformats.org/drawingml/2006/diagram" xmlns:o="urn:schemas-microsoft-com:office:office" xmlns:v="urn:schemas-microsoft-com:vml" xmlns:pvml="urn:schemas-microsoft-com:office:powerpoint" xmlns:com="http://schemas.openxmlformats.org/drawingml/2006/compatibility" xmlns:p14="http://schemas.microsoft.com/office/powerpoint/2010/main" xmlns:p15="http://schemas.microsoft.com/office/powerpoint/2012/main" xmlns:ahyp="http://schemas.microsoft.com/office/drawing/2018/hyperlinkcolor">
+<p:sld xmlns:a="http://schemas.openxmlformats.org/drawingml/2006/main" xmlns:r="http://schemas.openxmlformats.org/officeDocument/2006/relationships" xmlns:p="http://schemas.openxmlformats.org/presentationml/2006/main">
   <p:cSld>
     <p:spTree>
       <p:nvGrpSpPr>
-        <p:cNvPr id="78" name="Shape 78"/>
-        <p:cNvGrpSpPr/>
-        <p:nvPr/>
-      </p:nvGrpSpPr>
-      <p:grpSpPr>
-        <a:xfrm>
-          <a:off x="0" y="0"/>
-          <a:ext cx="0" cy="0"/>
-          <a:chOff x="0" y="0"/>
-          <a:chExt cx="0" cy="0"/>
-        </a:xfrm>
-      </p:grpSpPr>
-      <p:sp>
-        <p:nvSpPr>
-          <p:cNvPr id="79" name="Google Shape;79;p16"/>
-          <p:cNvSpPr txBox="1"/>
-          <p:nvPr>
-            <p:ph type="title"/>
-          </p:nvPr>
-        </p:nvSpPr>
-        <p:spPr>
-          <a:xfrm>
-            <a:off x="311700" y="445025"/>
-            <a:ext cx="8520600" cy="572700"/>
-          </a:xfrm>
-          <a:prstGeom prst="rect">
-            <a:avLst/>
-          </a:prstGeom>
-        </p:spPr>
-        <p:txBody>
-          <a:bodyPr anchorCtr="0" anchor="t" bIns="91425" lIns="91425" spcFirstLastPara="1" rIns="91425" wrap="square" tIns="91425">
-            <a:normAutofit fontScale="90000"/>
-          </a:bodyPr>
-          <a:lstStyle/>
-          <a:p>
-            <a:pPr indent="0" lvl="0" marL="0" rtl="0" algn="l">
-              <a:spcBef>
-                <a:spcPts val="0"/>
-              </a:spcBef>
-              <a:spcAft>
-                <a:spcPts val="0"/>
-              </a:spcAft>
-              <a:buNone/>
-            </a:pPr>
-            <a:r>
-              <a:rPr lang="en"/>
-              <a:t>Widget Templating</a:t>
-            </a:r>
-            <a:endParaRPr/>
-          </a:p>
-        </p:txBody>
-      </p:sp>
-      <p:sp>
-        <p:nvSpPr>
-          <p:cNvPr id="80" name="Google Shape;80;p16"/>
-          <p:cNvSpPr txBox="1"/>
-          <p:nvPr>
-            <p:ph type="title"/>
-          </p:nvPr>
-        </p:nvSpPr>
-        <p:spPr>
-          <a:xfrm>
-            <a:off x="311700" y="1368950"/>
-            <a:ext cx="4082100" cy="3431700"/>
-          </a:xfrm>
-          <a:prstGeom prst="rect">
-            <a:avLst/>
-          </a:prstGeom>
-        </p:spPr>
-        <p:txBody>
-          <a:bodyPr anchorCtr="0" anchor="t" bIns="91425" lIns="91425" spcFirstLastPara="1" rIns="91425" wrap="square" tIns="91425">
-            <a:normAutofit/>
-          </a:bodyPr>
-          <a:lstStyle/>
-          <a:p>
-            <a:pPr indent="-342900" lvl="0" marL="457200" rtl="0" algn="l">
-              <a:spcBef>
-                <a:spcPts val="0"/>
-              </a:spcBef>
-              <a:spcAft>
-                <a:spcPts val="0"/>
-              </a:spcAft>
-              <a:buSzPts val="1800"/>
-              <a:buChar char="●"/>
-            </a:pPr>
-            <a:r>
-              <a:rPr lang="en" sz="1800" u="sng">
-                <a:solidFill>
-                  <a:schemeClr val="hlink"/>
-                </a:solidFill>
-                <a:hlinkClick r:id="rId3"/>
-              </a:rPr>
-              <a:t>Unreal Tutorial</a:t>
-            </a:r>
-            <a:endParaRPr sz="1800"/>
-          </a:p>
-          <a:p>
-            <a:pPr indent="-342900" lvl="0" marL="457200" rtl="0" algn="l">
-              <a:spcBef>
-                <a:spcPts val="0"/>
-              </a:spcBef>
-              <a:spcAft>
-                <a:spcPts val="0"/>
-              </a:spcAft>
-              <a:buSzPts val="1800"/>
-              <a:buChar char="●"/>
-            </a:pPr>
-            <a:r>
-              <a:rPr lang="en" sz="1800"/>
-              <a:t>Reusable Visual for Widgets</a:t>
-            </a:r>
-            <a:endParaRPr sz="1800"/>
-          </a:p>
-          <a:p>
-            <a:pPr indent="-342900" lvl="0" marL="457200" rtl="0" algn="l">
-              <a:spcBef>
-                <a:spcPts val="0"/>
-              </a:spcBef>
-              <a:spcAft>
-                <a:spcPts val="0"/>
-              </a:spcAft>
-              <a:buSzPts val="1800"/>
-              <a:buChar char="●"/>
-            </a:pPr>
-            <a:r>
-              <a:rPr lang="en" sz="1800"/>
-              <a:t>Additional Properties</a:t>
-            </a:r>
-            <a:endParaRPr sz="1800"/>
-          </a:p>
-          <a:p>
-            <a:pPr indent="-342900" lvl="0" marL="457200" rtl="0" algn="l">
-              <a:spcBef>
-                <a:spcPts val="0"/>
-              </a:spcBef>
-              <a:spcAft>
-                <a:spcPts val="0"/>
-              </a:spcAft>
-              <a:buSzPts val="1800"/>
-              <a:buChar char="●"/>
-            </a:pPr>
-            <a:r>
-              <a:rPr lang="en" sz="1800"/>
-              <a:t>Forwarding Events</a:t>
-            </a:r>
-            <a:endParaRPr sz="1800"/>
-          </a:p>
-        </p:txBody>
-      </p:sp>
-      <p:pic>
-        <p:nvPicPr>
-          <p:cNvPr id="81" name="Google Shape;81;p16"/>
-          <p:cNvPicPr preferRelativeResize="0"/>
-          <p:nvPr/>
-        </p:nvPicPr>
-        <p:blipFill>
-          <a:blip r:embed="rId4">
-            <a:alphaModFix/>
-          </a:blip>
-          <a:stretch>
-            <a:fillRect/>
-          </a:stretch>
-        </p:blipFill>
-        <p:spPr>
-          <a:xfrm>
-            <a:off x="0" y="3540014"/>
-            <a:ext cx="9143999" cy="1025321"/>
-          </a:xfrm>
-          <a:prstGeom prst="rect">
-            <a:avLst/>
-          </a:prstGeom>
-          <a:noFill/>
-          <a:ln>
-            <a:noFill/>
-          </a:ln>
-        </p:spPr>
-      </p:pic>
-    </p:spTree>
-  </p:cSld>
-  <p:clrMapOvr>
-    <a:masterClrMapping/>
-  </p:clrMapOvr>
-</p:sld>
-</file>
-
-<file path=ppt/slides/slide5.xml><?xml version="1.0" encoding="utf-8"?>
-<p:sld xmlns:a="http://schemas.openxmlformats.org/drawingml/2006/main" xmlns:r="http://schemas.openxmlformats.org/officeDocument/2006/relationships" xmlns:mc="http://schemas.openxmlformats.org/markup-compatibility/2006" xmlns:mv="urn:schemas-microsoft-com:mac:vml" xmlns:p="http://schemas.openxmlformats.org/presentationml/2006/main" xmlns:c="http://schemas.openxmlformats.org/drawingml/2006/chart" xmlns:dgm="http://schemas.openxmlformats.org/drawingml/2006/diagram" xmlns:o="urn:schemas-microsoft-com:office:office" xmlns:v="urn:schemas-microsoft-com:vml" xmlns:pvml="urn:schemas-microsoft-com:office:powerpoint" xmlns:com="http://schemas.openxmlformats.org/drawingml/2006/compatibility" xmlns:p14="http://schemas.microsoft.com/office/powerpoint/2010/main" xmlns:p15="http://schemas.microsoft.com/office/powerpoint/2012/main" xmlns:ahyp="http://schemas.microsoft.com/office/drawing/2018/hyperlinkcolor">
-  <p:cSld>
-    <p:spTree>
-      <p:nvGrpSpPr>
-        <p:cNvPr id="85" name="Shape 85"/>
+        <p:cNvPr id="1" name="Shape 85"/>
         <p:cNvGrpSpPr/>
         <p:nvPr/>
       </p:nvGrpSpPr>
@@ -7574,7 +8315,9 @@
       <p:sp>
         <p:nvSpPr>
           <p:cNvPr id="86" name="Google Shape;86;p17"/>
-          <p:cNvSpPr txBox="1"/>
+          <p:cNvSpPr txBox="1">
+            <a:spLocks noGrp="1"/>
+          </p:cNvSpPr>
           <p:nvPr>
             <p:ph type="title"/>
           </p:nvPr>
@@ -7582,19 +8325,19 @@
         <p:spPr>
           <a:xfrm>
             <a:off x="311700" y="445025"/>
-            <a:ext cx="8520600" cy="572700"/>
+            <a:ext cx="3975628" cy="572700"/>
           </a:xfrm>
           <a:prstGeom prst="rect">
             <a:avLst/>
           </a:prstGeom>
         </p:spPr>
         <p:txBody>
-          <a:bodyPr anchorCtr="0" anchor="t" bIns="91425" lIns="91425" spcFirstLastPara="1" rIns="91425" wrap="square" tIns="91425">
+          <a:bodyPr spcFirstLastPara="1" wrap="square" lIns="91425" tIns="91425" rIns="91425" bIns="91425" anchor="t" anchorCtr="0">
             <a:normAutofit fontScale="90000"/>
           </a:bodyPr>
           <a:lstStyle/>
           <a:p>
-            <a:pPr indent="0" lvl="0" marL="0" rtl="0" algn="l">
+            <a:pPr marL="0" lvl="0" indent="0" algn="l" rtl="0">
               <a:spcBef>
                 <a:spcPts val="0"/>
               </a:spcBef>
@@ -7604,17 +8347,19 @@
               <a:buNone/>
             </a:pPr>
             <a:r>
-              <a:rPr lang="en"/>
+              <a:rPr lang="en" dirty="0"/>
               <a:t>Focus</a:t>
             </a:r>
-            <a:endParaRPr/>
+            <a:endParaRPr dirty="0"/>
           </a:p>
         </p:txBody>
       </p:sp>
       <p:sp>
         <p:nvSpPr>
           <p:cNvPr id="87" name="Google Shape;87;p17"/>
-          <p:cNvSpPr txBox="1"/>
+          <p:cNvSpPr txBox="1">
+            <a:spLocks noGrp="1"/>
+          </p:cNvSpPr>
           <p:nvPr>
             <p:ph type="title"/>
           </p:nvPr>
@@ -7622,19 +8367,19 @@
         <p:spPr>
           <a:xfrm>
             <a:off x="311700" y="1368950"/>
-            <a:ext cx="3431100" cy="3431700"/>
+            <a:ext cx="3431100" cy="1520899"/>
           </a:xfrm>
           <a:prstGeom prst="rect">
             <a:avLst/>
           </a:prstGeom>
         </p:spPr>
         <p:txBody>
-          <a:bodyPr anchorCtr="0" anchor="t" bIns="91425" lIns="91425" spcFirstLastPara="1" rIns="91425" wrap="square" tIns="91425">
+          <a:bodyPr spcFirstLastPara="1" wrap="square" lIns="91425" tIns="91425" rIns="91425" bIns="91425" anchor="t" anchorCtr="0">
             <a:normAutofit/>
           </a:bodyPr>
           <a:lstStyle/>
           <a:p>
-            <a:pPr indent="-342900" lvl="0" marL="457200" rtl="0" algn="l">
+            <a:pPr marL="114300" lvl="0" algn="l" rtl="0">
               <a:spcBef>
                 <a:spcPts val="0"/>
               </a:spcBef>
@@ -7642,16 +8387,15 @@
                 <a:spcPts val="0"/>
               </a:spcAft>
               <a:buSzPts val="1800"/>
-              <a:buChar char="●"/>
             </a:pPr>
             <a:r>
-              <a:rPr lang="en" sz="1800"/>
+              <a:rPr lang="en" sz="1800" dirty="0"/>
               <a:t>Core mechanism behind UI navigation</a:t>
             </a:r>
-            <a:endParaRPr sz="1800"/>
-          </a:p>
-          <a:p>
-            <a:pPr indent="-342900" lvl="0" marL="457200" rtl="0" algn="l">
+            <a:endParaRPr sz="1800" dirty="0"/>
+          </a:p>
+          <a:p>
+            <a:pPr marL="114300" lvl="0" algn="l" rtl="0">
               <a:spcBef>
                 <a:spcPts val="0"/>
               </a:spcBef>
@@ -7659,16 +8403,15 @@
                 <a:spcPts val="0"/>
               </a:spcAft>
               <a:buSzPts val="1800"/>
-              <a:buChar char="●"/>
             </a:pPr>
             <a:r>
-              <a:rPr lang="en" sz="1800"/>
-              <a:t>Only one focused widget at a time</a:t>
-            </a:r>
-            <a:endParaRPr sz="1800"/>
-          </a:p>
-          <a:p>
-            <a:pPr indent="-342900" lvl="0" marL="457200" rtl="0" algn="l">
+              <a:rPr lang="en" sz="1800" dirty="0"/>
+              <a:t>Only one widget at a time</a:t>
+            </a:r>
+            <a:endParaRPr sz="1800" dirty="0"/>
+          </a:p>
+          <a:p>
+            <a:pPr marL="114300" lvl="0" algn="l" rtl="0">
               <a:spcBef>
                 <a:spcPts val="0"/>
               </a:spcBef>
@@ -7676,13 +8419,12 @@
                 <a:spcPts val="0"/>
               </a:spcAft>
               <a:buSzPts val="1800"/>
-              <a:buChar char="●"/>
             </a:pPr>
             <a:r>
-              <a:rPr lang="en" sz="1800"/>
+              <a:rPr lang="en" sz="1800" dirty="0"/>
               <a:t>Focus vs Hover</a:t>
             </a:r>
-            <a:endParaRPr sz="1800"/>
+            <a:endParaRPr sz="1800" dirty="0"/>
           </a:p>
         </p:txBody>
       </p:sp>
@@ -7702,8 +8444,8 @@
         </p:blipFill>
         <p:spPr>
           <a:xfrm>
-            <a:off x="3968900" y="1140350"/>
-            <a:ext cx="4863400" cy="2862800"/>
+            <a:off x="316407" y="2961211"/>
+            <a:ext cx="3426393" cy="2016918"/>
           </a:xfrm>
           <a:prstGeom prst="rect">
             <a:avLst/>
@@ -7712,6 +8454,309 @@
           <a:ln>
             <a:noFill/>
           </a:ln>
+        </p:spPr>
+      </p:pic>
+      <p:pic>
+        <p:nvPicPr>
+          <p:cNvPr id="2" name="Picture 1">
+            <a:extLst>
+              <a:ext uri="{FF2B5EF4-FFF2-40B4-BE49-F238E27FC236}">
+                <a16:creationId xmlns:a16="http://schemas.microsoft.com/office/drawing/2014/main" id="{C55B1B89-E290-5DFD-1179-12D41033ADDE}"/>
+              </a:ext>
+            </a:extLst>
+          </p:cNvPr>
+          <p:cNvPicPr>
+            <a:picLocks noChangeAspect="1"/>
+          </p:cNvPicPr>
+          <p:nvPr/>
+        </p:nvPicPr>
+        <p:blipFill>
+          <a:blip r:embed="rId4"/>
+          <a:stretch>
+            <a:fillRect/>
+          </a:stretch>
+        </p:blipFill>
+        <p:spPr>
+          <a:xfrm>
+            <a:off x="4287328" y="445024"/>
+            <a:ext cx="4549679" cy="4533105"/>
+          </a:xfrm>
+          <a:prstGeom prst="rect">
+            <a:avLst/>
+          </a:prstGeom>
+        </p:spPr>
+      </p:pic>
+    </p:spTree>
+  </p:cSld>
+  <p:clrMapOvr>
+    <a:masterClrMapping/>
+  </p:clrMapOvr>
+</p:sld>
+</file>
+
+<file path=ppt/slides/slide5.xml><?xml version="1.0" encoding="utf-8"?>
+<p:sld xmlns:a="http://schemas.openxmlformats.org/drawingml/2006/main" xmlns:r="http://schemas.openxmlformats.org/officeDocument/2006/relationships" xmlns:p="http://schemas.openxmlformats.org/presentationml/2006/main">
+  <p:cSld>
+    <p:spTree>
+      <p:nvGrpSpPr>
+        <p:cNvPr id="1" name="Shape 78"/>
+        <p:cNvGrpSpPr/>
+        <p:nvPr/>
+      </p:nvGrpSpPr>
+      <p:grpSpPr>
+        <a:xfrm>
+          <a:off x="0" y="0"/>
+          <a:ext cx="0" cy="0"/>
+          <a:chOff x="0" y="0"/>
+          <a:chExt cx="0" cy="0"/>
+        </a:xfrm>
+      </p:grpSpPr>
+      <p:sp>
+        <p:nvSpPr>
+          <p:cNvPr id="79" name="Google Shape;79;p16"/>
+          <p:cNvSpPr txBox="1">
+            <a:spLocks noGrp="1"/>
+          </p:cNvSpPr>
+          <p:nvPr>
+            <p:ph type="title"/>
+          </p:nvPr>
+        </p:nvSpPr>
+        <p:spPr>
+          <a:xfrm>
+            <a:off x="311700" y="445025"/>
+            <a:ext cx="4388611" cy="1150862"/>
+          </a:xfrm>
+          <a:prstGeom prst="rect">
+            <a:avLst/>
+          </a:prstGeom>
+        </p:spPr>
+        <p:txBody>
+          <a:bodyPr spcFirstLastPara="1" wrap="square" lIns="91425" tIns="91425" rIns="91425" bIns="91425" anchor="t" anchorCtr="0">
+            <a:normAutofit/>
+          </a:bodyPr>
+          <a:lstStyle/>
+          <a:p>
+            <a:pPr marL="0" lvl="0" indent="0" algn="l" rtl="0">
+              <a:spcBef>
+                <a:spcPts val="0"/>
+              </a:spcBef>
+              <a:spcAft>
+                <a:spcPts val="0"/>
+              </a:spcAft>
+              <a:buNone/>
+            </a:pPr>
+            <a:r>
+              <a:rPr lang="en" dirty="0" err="1"/>
+              <a:t>CommonUI</a:t>
+            </a:r>
+            <a:r>
+              <a:rPr lang="en" dirty="0"/>
+              <a:t> </a:t>
+            </a:r>
+            <a:br>
+              <a:rPr lang="en" dirty="0"/>
+            </a:br>
+            <a:r>
+              <a:rPr lang="en" dirty="0"/>
+              <a:t>– Activatable Widgets</a:t>
+            </a:r>
+            <a:endParaRPr dirty="0"/>
+          </a:p>
+        </p:txBody>
+      </p:sp>
+      <p:sp>
+        <p:nvSpPr>
+          <p:cNvPr id="80" name="Google Shape;80;p16"/>
+          <p:cNvSpPr txBox="1">
+            <a:spLocks noGrp="1"/>
+          </p:cNvSpPr>
+          <p:nvPr>
+            <p:ph type="title"/>
+          </p:nvPr>
+        </p:nvSpPr>
+        <p:spPr>
+          <a:xfrm>
+            <a:off x="311701" y="1656272"/>
+            <a:ext cx="4130904" cy="3295290"/>
+          </a:xfrm>
+          <a:prstGeom prst="rect">
+            <a:avLst/>
+          </a:prstGeom>
+        </p:spPr>
+        <p:txBody>
+          <a:bodyPr spcFirstLastPara="1" wrap="square" lIns="91425" tIns="91425" rIns="91425" bIns="91425" anchor="t" anchorCtr="0">
+            <a:normAutofit fontScale="90000"/>
+          </a:bodyPr>
+          <a:lstStyle/>
+          <a:p>
+            <a:pPr marL="114300" lvl="0" algn="l" rtl="0">
+              <a:spcBef>
+                <a:spcPts val="0"/>
+              </a:spcBef>
+              <a:spcAft>
+                <a:spcPts val="0"/>
+              </a:spcAft>
+              <a:buSzPts val="1800"/>
+            </a:pPr>
+            <a:r>
+              <a:rPr lang="sk-SK" sz="1800" dirty="0" err="1"/>
+              <a:t>Activatable</a:t>
+            </a:r>
+            <a:r>
+              <a:rPr lang="sk-SK" sz="1800" dirty="0"/>
+              <a:t> </a:t>
+            </a:r>
+            <a:r>
+              <a:rPr lang="sk-SK" sz="1800" dirty="0" err="1"/>
+              <a:t>Widgets</a:t>
+            </a:r>
+            <a:br>
+              <a:rPr lang="sk-SK" sz="1800" dirty="0"/>
+            </a:br>
+            <a:r>
+              <a:rPr lang="sk-SK" sz="1800" dirty="0"/>
+              <a:t> - </a:t>
+            </a:r>
+            <a:r>
+              <a:rPr lang="sk-SK" sz="1800" dirty="0" err="1"/>
+              <a:t>Manages</a:t>
+            </a:r>
+            <a:r>
+              <a:rPr lang="sk-SK" sz="1800" dirty="0"/>
+              <a:t> </a:t>
+            </a:r>
+            <a:r>
+              <a:rPr lang="sk-SK" sz="1800" dirty="0" err="1"/>
+              <a:t>lifetimes</a:t>
+            </a:r>
+            <a:br>
+              <a:rPr lang="sk-SK" sz="1800" dirty="0"/>
+            </a:br>
+            <a:r>
+              <a:rPr lang="sk-SK" sz="1800" dirty="0"/>
+              <a:t> - </a:t>
+            </a:r>
+            <a:r>
+              <a:rPr lang="sk-SK" sz="1800" dirty="0" err="1"/>
+              <a:t>Used</a:t>
+            </a:r>
+            <a:r>
+              <a:rPr lang="sk-SK" sz="1800" dirty="0"/>
+              <a:t> by </a:t>
+            </a:r>
+            <a:r>
+              <a:rPr lang="sk-SK" sz="1800" dirty="0" err="1"/>
+              <a:t>Stack</a:t>
+            </a:r>
+            <a:r>
+              <a:rPr lang="sk-SK" sz="1800" dirty="0"/>
+              <a:t> and </a:t>
+            </a:r>
+            <a:r>
+              <a:rPr lang="sk-SK" sz="1800" dirty="0" err="1"/>
+              <a:t>Queue</a:t>
+            </a:r>
+            <a:r>
+              <a:rPr lang="sk-SK" sz="1800" dirty="0"/>
+              <a:t> </a:t>
+            </a:r>
+            <a:r>
+              <a:rPr lang="sk-SK" sz="1800" dirty="0" err="1"/>
+              <a:t>panels</a:t>
+            </a:r>
+            <a:br>
+              <a:rPr lang="sk-SK" sz="1800" dirty="0"/>
+            </a:br>
+            <a:endParaRPr sz="1800" dirty="0"/>
+          </a:p>
+          <a:p>
+            <a:pPr marL="114300" lvl="0" algn="l" rtl="0">
+              <a:spcBef>
+                <a:spcPts val="0"/>
+              </a:spcBef>
+              <a:spcAft>
+                <a:spcPts val="0"/>
+              </a:spcAft>
+              <a:buSzPts val="1800"/>
+            </a:pPr>
+            <a:r>
+              <a:rPr lang="en" sz="1800" dirty="0"/>
+              <a:t>Input Routing</a:t>
+            </a:r>
+            <a:br>
+              <a:rPr lang="en" sz="1800" dirty="0"/>
+            </a:br>
+            <a:r>
+              <a:rPr lang="en" sz="1800" dirty="0"/>
+              <a:t> - Tree of Activatable Widgets</a:t>
+            </a:r>
+            <a:br>
+              <a:rPr lang="en" sz="1800" dirty="0"/>
+            </a:br>
+            <a:r>
+              <a:rPr lang="en" sz="1800" dirty="0"/>
+              <a:t> - Detects top most AW and processes input in t</a:t>
+            </a:r>
+            <a:r>
+              <a:rPr lang="en-US" sz="1800" dirty="0"/>
+              <a:t>he branch</a:t>
+            </a:r>
+            <a:br>
+              <a:rPr lang="en-US" sz="1800" dirty="0"/>
+            </a:br>
+            <a:br>
+              <a:rPr lang="en-US" sz="1800" dirty="0"/>
+            </a:br>
+            <a:r>
+              <a:rPr lang="en-US" sz="1800" dirty="0"/>
+              <a:t>Input Modes</a:t>
+            </a:r>
+            <a:br>
+              <a:rPr lang="en-US" sz="1800" dirty="0"/>
+            </a:br>
+            <a:r>
+              <a:rPr lang="en-US" sz="1800" dirty="0"/>
+              <a:t>- Config for Gameplay, Menu, All</a:t>
+            </a:r>
+            <a:br>
+              <a:rPr lang="en-US" sz="1800" dirty="0"/>
+            </a:br>
+            <a:r>
+              <a:rPr lang="en-US" sz="1800" dirty="0"/>
+              <a:t>- Pointer Capture</a:t>
+            </a:r>
+            <a:endParaRPr sz="1800" dirty="0"/>
+          </a:p>
+        </p:txBody>
+      </p:sp>
+      <p:pic>
+        <p:nvPicPr>
+          <p:cNvPr id="2" name="Picture 1">
+            <a:extLst>
+              <a:ext uri="{FF2B5EF4-FFF2-40B4-BE49-F238E27FC236}">
+                <a16:creationId xmlns:a16="http://schemas.microsoft.com/office/drawing/2014/main" id="{91185BDF-6A4A-073C-A156-27742AB8525E}"/>
+              </a:ext>
+            </a:extLst>
+          </p:cNvPr>
+          <p:cNvPicPr>
+            <a:picLocks noChangeAspect="1"/>
+          </p:cNvPicPr>
+          <p:nvPr/>
+        </p:nvPicPr>
+        <p:blipFill>
+          <a:blip r:embed="rId3"/>
+          <a:stretch>
+            <a:fillRect/>
+          </a:stretch>
+        </p:blipFill>
+        <p:spPr>
+          <a:xfrm>
+            <a:off x="4571999" y="445025"/>
+            <a:ext cx="4388611" cy="4244196"/>
+          </a:xfrm>
+          <a:prstGeom prst="rect">
+            <a:avLst/>
+          </a:prstGeom>
         </p:spPr>
       </p:pic>
     </p:spTree>
@@ -7723,11 +8768,11 @@
 </file>
 
 <file path=ppt/slides/slide6.xml><?xml version="1.0" encoding="utf-8"?>
-<p:sld xmlns:a="http://schemas.openxmlformats.org/drawingml/2006/main" xmlns:r="http://schemas.openxmlformats.org/officeDocument/2006/relationships" xmlns:mc="http://schemas.openxmlformats.org/markup-compatibility/2006" xmlns:mv="urn:schemas-microsoft-com:mac:vml" xmlns:p="http://schemas.openxmlformats.org/presentationml/2006/main" xmlns:c="http://schemas.openxmlformats.org/drawingml/2006/chart" xmlns:dgm="http://schemas.openxmlformats.org/drawingml/2006/diagram" xmlns:o="urn:schemas-microsoft-com:office:office" xmlns:v="urn:schemas-microsoft-com:vml" xmlns:pvml="urn:schemas-microsoft-com:office:powerpoint" xmlns:com="http://schemas.openxmlformats.org/drawingml/2006/compatibility" xmlns:p14="http://schemas.microsoft.com/office/powerpoint/2010/main" xmlns:p15="http://schemas.microsoft.com/office/powerpoint/2012/main" xmlns:ahyp="http://schemas.microsoft.com/office/drawing/2018/hyperlinkcolor">
+<p:sld xmlns:a="http://schemas.openxmlformats.org/drawingml/2006/main" xmlns:r="http://schemas.openxmlformats.org/officeDocument/2006/relationships" xmlns:p="http://schemas.openxmlformats.org/presentationml/2006/main">
   <p:cSld>
     <p:spTree>
       <p:nvGrpSpPr>
-        <p:cNvPr id="92" name="Shape 92"/>
+        <p:cNvPr id="1" name="Shape 92"/>
         <p:cNvGrpSpPr/>
         <p:nvPr/>
       </p:nvGrpSpPr>
@@ -7742,7 +8787,9 @@
       <p:sp>
         <p:nvSpPr>
           <p:cNvPr id="93" name="Google Shape;93;p18"/>
-          <p:cNvSpPr txBox="1"/>
+          <p:cNvSpPr txBox="1">
+            <a:spLocks noGrp="1"/>
+          </p:cNvSpPr>
           <p:nvPr>
             <p:ph type="title"/>
           </p:nvPr>
@@ -7750,19 +8797,19 @@
         <p:spPr>
           <a:xfrm>
             <a:off x="311700" y="445025"/>
-            <a:ext cx="8520600" cy="572700"/>
+            <a:ext cx="4907281" cy="572700"/>
           </a:xfrm>
           <a:prstGeom prst="rect">
             <a:avLst/>
           </a:prstGeom>
         </p:spPr>
         <p:txBody>
-          <a:bodyPr anchorCtr="0" anchor="t" bIns="91425" lIns="91425" spcFirstLastPara="1" rIns="91425" wrap="square" tIns="91425">
+          <a:bodyPr spcFirstLastPara="1" wrap="square" lIns="91425" tIns="91425" rIns="91425" bIns="91425" anchor="t" anchorCtr="0">
             <a:normAutofit fontScale="90000"/>
           </a:bodyPr>
           <a:lstStyle/>
           <a:p>
-            <a:pPr indent="0" lvl="0" marL="0" rtl="0" algn="l">
+            <a:pPr marL="0" lvl="0" indent="0" algn="l" rtl="0">
               <a:spcBef>
                 <a:spcPts val="0"/>
               </a:spcBef>
@@ -7772,17 +8819,22 @@
               <a:buNone/>
             </a:pPr>
             <a:r>
-              <a:rPr lang="en"/>
-              <a:t>Views</a:t>
-            </a:r>
-            <a:endParaRPr/>
+              <a:rPr lang="en" dirty="0"/>
+              <a:t>Menus</a:t>
+            </a:r>
+            <a:br>
+              <a:rPr lang="en" dirty="0"/>
+            </a:br>
+            <a:endParaRPr dirty="0"/>
           </a:p>
         </p:txBody>
       </p:sp>
       <p:sp>
         <p:nvSpPr>
           <p:cNvPr id="94" name="Google Shape;94;p18"/>
-          <p:cNvSpPr txBox="1"/>
+          <p:cNvSpPr txBox="1">
+            <a:spLocks noGrp="1"/>
+          </p:cNvSpPr>
           <p:nvPr>
             <p:ph type="title"/>
           </p:nvPr>
@@ -7797,12 +8849,12 @@
           </a:prstGeom>
         </p:spPr>
         <p:txBody>
-          <a:bodyPr anchorCtr="0" anchor="t" bIns="91425" lIns="91425" spcFirstLastPara="1" rIns="91425" wrap="square" tIns="91425">
+          <a:bodyPr spcFirstLastPara="1" wrap="square" lIns="91425" tIns="91425" rIns="91425" bIns="91425" anchor="t" anchorCtr="0">
             <a:normAutofit/>
           </a:bodyPr>
           <a:lstStyle/>
           <a:p>
-            <a:pPr indent="-342900" lvl="0" marL="457200" rtl="0" algn="l">
+            <a:pPr marL="114300" lvl="0" algn="l" rtl="0">
               <a:spcBef>
                 <a:spcPts val="0"/>
               </a:spcBef>
@@ -7810,110 +8862,45 @@
                 <a:spcPts val="0"/>
               </a:spcAft>
               <a:buSzPts val="1800"/>
-              <a:buChar char="●"/>
             </a:pPr>
             <a:r>
-              <a:rPr lang="en" sz="1800"/>
-              <a:t>Partition to standalone Views</a:t>
-            </a:r>
-            <a:endParaRPr sz="1800"/>
-          </a:p>
-          <a:p>
-            <a:pPr indent="-342900" lvl="0" marL="457200" rtl="0" algn="l">
-              <a:spcBef>
-                <a:spcPts val="0"/>
-              </a:spcBef>
-              <a:spcAft>
-                <a:spcPts val="0"/>
-              </a:spcAft>
-              <a:buSzPts val="1800"/>
-              <a:buChar char="●"/>
-            </a:pPr>
-            <a:r>
-              <a:rPr lang="en" sz="1800"/>
-              <a:t>Unique Identification of each View</a:t>
-            </a:r>
-            <a:endParaRPr sz="1800"/>
-          </a:p>
-          <a:p>
-            <a:pPr indent="-342900" lvl="0" marL="457200" rtl="0" algn="l">
-              <a:spcBef>
-                <a:spcPts val="0"/>
-              </a:spcBef>
-              <a:spcAft>
-                <a:spcPts val="0"/>
-              </a:spcAft>
-              <a:buSzPts val="1800"/>
-              <a:buChar char="●"/>
-            </a:pPr>
-            <a:r>
-              <a:rPr lang="en" sz="1800"/>
-              <a:t>View Types for shared behavior</a:t>
-            </a:r>
-            <a:endParaRPr sz="1800"/>
-          </a:p>
-          <a:p>
-            <a:pPr indent="-342900" lvl="0" marL="457200" rtl="0" algn="l">
-              <a:spcBef>
-                <a:spcPts val="0"/>
-              </a:spcBef>
-              <a:spcAft>
-                <a:spcPts val="0"/>
-              </a:spcAft>
-              <a:buSzPts val="1800"/>
-              <a:buChar char="●"/>
-            </a:pPr>
-            <a:r>
-              <a:rPr lang="en" sz="1800"/>
-              <a:t>Event Based, no direct access to other Views</a:t>
-            </a:r>
-            <a:endParaRPr sz="1800"/>
-          </a:p>
-          <a:p>
-            <a:pPr indent="0" lvl="0" marL="0" rtl="0" algn="l">
-              <a:spcBef>
-                <a:spcPts val="0"/>
-              </a:spcBef>
-              <a:spcAft>
-                <a:spcPts val="0"/>
-              </a:spcAft>
-              <a:buNone/>
-            </a:pPr>
-            <a:r>
-              <a:t/>
-            </a:r>
-            <a:endParaRPr sz="1800"/>
-          </a:p>
-          <a:p>
-            <a:pPr indent="0" lvl="0" marL="0" rtl="0" algn="l">
-              <a:spcBef>
-                <a:spcPts val="0"/>
-              </a:spcBef>
-              <a:spcAft>
-                <a:spcPts val="0"/>
-              </a:spcAft>
-              <a:buNone/>
-            </a:pPr>
-            <a:r>
-              <a:t/>
-            </a:r>
-            <a:endParaRPr sz="1800"/>
-          </a:p>
-          <a:p>
-            <a:pPr indent="0" lvl="0" marL="0" rtl="0" algn="l">
-              <a:spcBef>
-                <a:spcPts val="0"/>
-              </a:spcBef>
-              <a:spcAft>
-                <a:spcPts val="0"/>
-              </a:spcAft>
-              <a:buNone/>
-            </a:pPr>
-            <a:r>
-              <a:rPr lang="en" sz="1800"/>
-              <a:t>Just because two UIs share a common part doesn’t mean they need to be clumped to one View</a:t>
-            </a:r>
-            <a:endParaRPr sz="1800"/>
+              <a:rPr lang="en" sz="1800" dirty="0"/>
+              <a:t>Partition to standalone Menus and Submenus</a:t>
+            </a:r>
+            <a:br>
+              <a:rPr lang="en" sz="1800" dirty="0"/>
+            </a:br>
+            <a:br>
+              <a:rPr lang="en" sz="1800" dirty="0"/>
+            </a:br>
+            <a:r>
+              <a:rPr lang="en" sz="1800" dirty="0"/>
+              <a:t>Event Based, usually no direct access to other Menus</a:t>
+            </a:r>
+            <a:br>
+              <a:rPr lang="en" sz="1800" dirty="0"/>
+            </a:br>
+            <a:br>
+              <a:rPr lang="sk-SK" sz="1800" dirty="0"/>
+            </a:br>
+            <a:r>
+              <a:rPr lang="en-US" sz="1800" dirty="0"/>
+              <a:t>Use of Submenus</a:t>
+            </a:r>
+            <a:br>
+              <a:rPr lang="en-US" sz="1800" dirty="0"/>
+            </a:br>
+            <a:br>
+              <a:rPr lang="en-US" sz="1800" dirty="0"/>
+            </a:br>
+            <a:r>
+              <a:rPr lang="en-US" sz="1800" dirty="0"/>
+              <a:t>Clean-up on deactivation when switching</a:t>
+            </a:r>
+            <a:br>
+              <a:rPr lang="en-US" sz="1800" dirty="0"/>
+            </a:br>
+            <a:endParaRPr sz="1800" dirty="0"/>
           </a:p>
         </p:txBody>
       </p:sp>
@@ -7954,11 +8941,11 @@
 </file>
 
 <file path=ppt/slides/slide7.xml><?xml version="1.0" encoding="utf-8"?>
-<p:sld xmlns:a="http://schemas.openxmlformats.org/drawingml/2006/main" xmlns:r="http://schemas.openxmlformats.org/officeDocument/2006/relationships" xmlns:mc="http://schemas.openxmlformats.org/markup-compatibility/2006" xmlns:mv="urn:schemas-microsoft-com:mac:vml" xmlns:p="http://schemas.openxmlformats.org/presentationml/2006/main" xmlns:c="http://schemas.openxmlformats.org/drawingml/2006/chart" xmlns:dgm="http://schemas.openxmlformats.org/drawingml/2006/diagram" xmlns:o="urn:schemas-microsoft-com:office:office" xmlns:v="urn:schemas-microsoft-com:vml" xmlns:pvml="urn:schemas-microsoft-com:office:powerpoint" xmlns:com="http://schemas.openxmlformats.org/drawingml/2006/compatibility" xmlns:p14="http://schemas.microsoft.com/office/powerpoint/2010/main" xmlns:p15="http://schemas.microsoft.com/office/powerpoint/2012/main" xmlns:ahyp="http://schemas.microsoft.com/office/drawing/2018/hyperlinkcolor">
+<p:sld xmlns:a="http://schemas.openxmlformats.org/drawingml/2006/main" xmlns:r="http://schemas.openxmlformats.org/officeDocument/2006/relationships" xmlns:p="http://schemas.openxmlformats.org/presentationml/2006/main">
   <p:cSld>
     <p:spTree>
       <p:nvGrpSpPr>
-        <p:cNvPr id="99" name="Shape 99"/>
+        <p:cNvPr id="1" name="Shape 124"/>
         <p:cNvGrpSpPr/>
         <p:nvPr/>
       </p:nvGrpSpPr>
@@ -7972,8 +8959,10 @@
       </p:grpSpPr>
       <p:sp>
         <p:nvSpPr>
-          <p:cNvPr id="100" name="Google Shape;100;p19"/>
-          <p:cNvSpPr txBox="1"/>
+          <p:cNvPr id="125" name="Google Shape;125;p20"/>
+          <p:cNvSpPr txBox="1">
+            <a:spLocks noGrp="1"/>
+          </p:cNvSpPr>
           <p:nvPr>
             <p:ph type="title"/>
           </p:nvPr>
@@ -7988,12 +8977,12 @@
           </a:prstGeom>
         </p:spPr>
         <p:txBody>
-          <a:bodyPr anchorCtr="0" anchor="t" bIns="91425" lIns="91425" spcFirstLastPara="1" rIns="91425" wrap="square" tIns="91425">
+          <a:bodyPr spcFirstLastPara="1" wrap="square" lIns="91425" tIns="91425" rIns="91425" bIns="91425" anchor="t" anchorCtr="0">
             <a:normAutofit fontScale="90000"/>
           </a:bodyPr>
           <a:lstStyle/>
           <a:p>
-            <a:pPr indent="0" lvl="0" marL="0" rtl="0" algn="l">
+            <a:pPr marL="0" lvl="0" indent="0" algn="l" rtl="0">
               <a:spcBef>
                 <a:spcPts val="0"/>
               </a:spcBef>
@@ -8003,17 +8992,19 @@
               <a:buNone/>
             </a:pPr>
             <a:r>
-              <a:rPr lang="en"/>
-              <a:t>Views</a:t>
-            </a:r>
-            <a:endParaRPr/>
+              <a:rPr lang="en" dirty="0"/>
+              <a:t>Layers</a:t>
+            </a:r>
+            <a:endParaRPr dirty="0"/>
           </a:p>
         </p:txBody>
       </p:sp>
       <p:sp>
         <p:nvSpPr>
-          <p:cNvPr id="101" name="Google Shape;101;p19"/>
-          <p:cNvSpPr txBox="1"/>
+          <p:cNvPr id="126" name="Google Shape;126;p20"/>
+          <p:cNvSpPr txBox="1">
+            <a:spLocks noGrp="1"/>
+          </p:cNvSpPr>
           <p:nvPr>
             <p:ph type="title"/>
           </p:nvPr>
@@ -8028,12 +9019,12 @@
           </a:prstGeom>
         </p:spPr>
         <p:txBody>
-          <a:bodyPr anchorCtr="0" anchor="t" bIns="91425" lIns="91425" spcFirstLastPara="1" rIns="91425" wrap="square" tIns="91425">
+          <a:bodyPr spcFirstLastPara="1" wrap="square" lIns="91425" tIns="91425" rIns="91425" bIns="91425" anchor="t" anchorCtr="0">
             <a:normAutofit/>
           </a:bodyPr>
           <a:lstStyle/>
           <a:p>
-            <a:pPr indent="-342900" lvl="0" marL="457200" rtl="0" algn="l">
+            <a:pPr marL="114300" lvl="0" algn="l" rtl="0">
               <a:spcBef>
                 <a:spcPts val="0"/>
               </a:spcBef>
@@ -8041,1020 +9032,39 @@
                 <a:spcPts val="0"/>
               </a:spcAft>
               <a:buSzPts val="1800"/>
-              <a:buChar char="●"/>
             </a:pPr>
             <a:r>
-              <a:rPr lang="en" sz="1800"/>
-              <a:t>Need to be able to react to different lifetime events</a:t>
-            </a:r>
-            <a:endParaRPr sz="1800"/>
-          </a:p>
-          <a:p>
-            <a:pPr indent="-342900" lvl="0" marL="457200" rtl="0" algn="l">
-              <a:spcBef>
-                <a:spcPts val="0"/>
-              </a:spcBef>
-              <a:spcAft>
-                <a:spcPts val="0"/>
-              </a:spcAft>
+              <a:rPr lang="en" sz="1800" dirty="0"/>
+              <a:t>Grouping of Menus </a:t>
+            </a:r>
+            <a:br>
+              <a:rPr lang="en" sz="1800" dirty="0"/>
+            </a:br>
+            <a:r>
+              <a:rPr lang="en" sz="1800" dirty="0"/>
+              <a:t>- usually by Stacks and Queues</a:t>
+            </a:r>
+            <a:endParaRPr sz="1800" dirty="0"/>
+          </a:p>
+          <a:p>
+            <a:pPr marL="114300" lvl="0">
               <a:buSzPts val="1800"/>
-              <a:buChar char="●"/>
             </a:pPr>
-            <a:r>
-              <a:rPr lang="en" sz="1800"/>
-              <a:t>Register opening/closing events in Created</a:t>
-            </a:r>
-            <a:endParaRPr sz="1800"/>
-          </a:p>
-          <a:p>
-            <a:pPr indent="-342900" lvl="0" marL="457200" rtl="0" algn="l">
-              <a:spcBef>
-                <a:spcPts val="0"/>
-              </a:spcBef>
-              <a:spcAft>
-                <a:spcPts val="0"/>
-              </a:spcAft>
-              <a:buSzPts val="1800"/>
-              <a:buChar char="●"/>
-            </a:pPr>
-            <a:r>
-              <a:rPr lang="en" sz="1800"/>
-              <a:t>Register visual change events in Initialize View</a:t>
-            </a:r>
-            <a:endParaRPr sz="1800"/>
-          </a:p>
-          <a:p>
-            <a:pPr indent="-342900" lvl="0" marL="457200" rtl="0" algn="l">
-              <a:spcBef>
-                <a:spcPts val="0"/>
-              </a:spcBef>
-              <a:spcAft>
-                <a:spcPts val="0"/>
-              </a:spcAft>
-              <a:buSzPts val="1800"/>
-              <a:buChar char="●"/>
-            </a:pPr>
-            <a:r>
-              <a:rPr lang="en" sz="1800"/>
-              <a:t>Clean up your delegates</a:t>
-            </a:r>
-            <a:endParaRPr sz="1800"/>
-          </a:p>
-          <a:p>
-            <a:pPr indent="-342900" lvl="0" marL="457200" rtl="0" algn="l">
-              <a:spcBef>
-                <a:spcPts val="0"/>
-              </a:spcBef>
-              <a:spcAft>
-                <a:spcPts val="0"/>
-              </a:spcAft>
-              <a:buSzPts val="1800"/>
-              <a:buChar char="●"/>
-            </a:pPr>
-            <a:r>
-              <a:rPr lang="en" sz="1800"/>
-              <a:t>Should include both C++ functions and Blueprint delegates</a:t>
-            </a:r>
-            <a:endParaRPr sz="1800"/>
-          </a:p>
-        </p:txBody>
-      </p:sp>
-      <p:grpSp>
-        <p:nvGrpSpPr>
-          <p:cNvPr id="102" name="Google Shape;102;p19"/>
-          <p:cNvGrpSpPr/>
-          <p:nvPr/>
-        </p:nvGrpSpPr>
-        <p:grpSpPr>
-          <a:xfrm>
-            <a:off x="4486775" y="765300"/>
-            <a:ext cx="4345525" cy="3612900"/>
-            <a:chOff x="4486775" y="1278350"/>
-            <a:chExt cx="4345525" cy="3612900"/>
-          </a:xfrm>
-        </p:grpSpPr>
-        <p:grpSp>
-          <p:nvGrpSpPr>
-            <p:cNvPr id="103" name="Google Shape;103;p19"/>
-            <p:cNvGrpSpPr/>
-            <p:nvPr/>
-          </p:nvGrpSpPr>
-          <p:grpSpPr>
-            <a:xfrm>
-              <a:off x="4486775" y="1278350"/>
-              <a:ext cx="3868500" cy="3612900"/>
-              <a:chOff x="4486775" y="1278350"/>
-              <a:chExt cx="3868500" cy="3612900"/>
-            </a:xfrm>
-          </p:grpSpPr>
-          <p:sp>
-            <p:nvSpPr>
-              <p:cNvPr id="104" name="Google Shape;104;p19"/>
-              <p:cNvSpPr/>
-              <p:nvPr/>
-            </p:nvSpPr>
-            <p:spPr>
-              <a:xfrm>
-                <a:off x="4486775" y="1278350"/>
-                <a:ext cx="3868500" cy="509700"/>
-              </a:xfrm>
-              <a:prstGeom prst="roundRect">
-                <a:avLst>
-                  <a:gd fmla="val 16667" name="adj"/>
-                </a:avLst>
-              </a:prstGeom>
-              <a:solidFill>
-                <a:schemeClr val="lt1"/>
-              </a:solidFill>
-              <a:ln>
-                <a:noFill/>
-              </a:ln>
-            </p:spPr>
-            <p:txBody>
-              <a:bodyPr anchorCtr="0" anchor="ctr" bIns="91425" lIns="91425" spcFirstLastPara="1" rIns="91425" wrap="square" tIns="91425">
-                <a:noAutofit/>
-              </a:bodyPr>
-              <a:lstStyle/>
-              <a:p>
-                <a:pPr indent="0" lvl="0" marL="0" rtl="0" algn="l">
-                  <a:spcBef>
-                    <a:spcPts val="0"/>
-                  </a:spcBef>
-                  <a:spcAft>
-                    <a:spcPts val="0"/>
-                  </a:spcAft>
-                  <a:buNone/>
-                </a:pPr>
-                <a:r>
-                  <a:rPr lang="en" sz="1200">
-                    <a:solidFill>
-                      <a:schemeClr val="dk1"/>
-                    </a:solidFill>
-                  </a:rPr>
-                  <a:t>Instantiated (game start)</a:t>
-                </a:r>
-                <a:endParaRPr sz="1200">
-                  <a:solidFill>
-                    <a:schemeClr val="dk1"/>
-                  </a:solidFill>
-                </a:endParaRPr>
-              </a:p>
-            </p:txBody>
-          </p:sp>
-          <p:sp>
-            <p:nvSpPr>
-              <p:cNvPr id="105" name="Google Shape;105;p19"/>
-              <p:cNvSpPr/>
-              <p:nvPr/>
-            </p:nvSpPr>
-            <p:spPr>
-              <a:xfrm>
-                <a:off x="4486775" y="2316900"/>
-                <a:ext cx="3868500" cy="509700"/>
-              </a:xfrm>
-              <a:prstGeom prst="roundRect">
-                <a:avLst>
-                  <a:gd fmla="val 16667" name="adj"/>
-                </a:avLst>
-              </a:prstGeom>
-              <a:solidFill>
-                <a:schemeClr val="lt1"/>
-              </a:solidFill>
-              <a:ln>
-                <a:noFill/>
-              </a:ln>
-            </p:spPr>
-            <p:txBody>
-              <a:bodyPr anchorCtr="0" anchor="ctr" bIns="91425" lIns="91425" spcFirstLastPara="1" rIns="91425" wrap="square" tIns="91425">
-                <a:noAutofit/>
-              </a:bodyPr>
-              <a:lstStyle/>
-              <a:p>
-                <a:pPr indent="0" lvl="0" marL="0" rtl="0" algn="l">
-                  <a:spcBef>
-                    <a:spcPts val="0"/>
-                  </a:spcBef>
-                  <a:spcAft>
-                    <a:spcPts val="0"/>
-                  </a:spcAft>
-                  <a:buNone/>
-                </a:pPr>
-                <a:r>
-                  <a:rPr lang="en" sz="1200">
-                    <a:solidFill>
-                      <a:schemeClr val="dk1"/>
-                    </a:solidFill>
-                  </a:rPr>
-                  <a:t>Opened</a:t>
-                </a:r>
-                <a:endParaRPr sz="1200">
-                  <a:solidFill>
-                    <a:schemeClr val="dk1"/>
-                  </a:solidFill>
-                </a:endParaRPr>
-              </a:p>
-            </p:txBody>
-          </p:sp>
-          <p:sp>
-            <p:nvSpPr>
-              <p:cNvPr id="106" name="Google Shape;106;p19"/>
-              <p:cNvSpPr/>
-              <p:nvPr/>
-            </p:nvSpPr>
-            <p:spPr>
-              <a:xfrm>
-                <a:off x="4486775" y="2829950"/>
-                <a:ext cx="3868500" cy="509700"/>
-              </a:xfrm>
-              <a:prstGeom prst="roundRect">
-                <a:avLst>
-                  <a:gd fmla="val 16667" name="adj"/>
-                </a:avLst>
-              </a:prstGeom>
-              <a:solidFill>
-                <a:schemeClr val="lt1"/>
-              </a:solidFill>
-              <a:ln>
-                <a:noFill/>
-              </a:ln>
-            </p:spPr>
-            <p:txBody>
-              <a:bodyPr anchorCtr="0" anchor="ctr" bIns="91425" lIns="91425" spcFirstLastPara="1" rIns="91425" wrap="square" tIns="91425">
-                <a:noAutofit/>
-              </a:bodyPr>
-              <a:lstStyle/>
-              <a:p>
-                <a:pPr indent="0" lvl="0" marL="0" rtl="0" algn="l">
-                  <a:spcBef>
-                    <a:spcPts val="0"/>
-                  </a:spcBef>
-                  <a:spcAft>
-                    <a:spcPts val="0"/>
-                  </a:spcAft>
-                  <a:buNone/>
-                </a:pPr>
-                <a:r>
-                  <a:rPr lang="en" sz="1200">
-                    <a:solidFill>
-                      <a:schemeClr val="dk1"/>
-                    </a:solidFill>
-                  </a:rPr>
-                  <a:t>Optional (when on top)</a:t>
-                </a:r>
-                <a:endParaRPr sz="1200">
-                  <a:solidFill>
-                    <a:schemeClr val="dk1"/>
-                  </a:solidFill>
-                </a:endParaRPr>
-              </a:p>
-            </p:txBody>
-          </p:sp>
-          <p:sp>
-            <p:nvSpPr>
-              <p:cNvPr id="107" name="Google Shape;107;p19"/>
-              <p:cNvSpPr/>
-              <p:nvPr/>
-            </p:nvSpPr>
-            <p:spPr>
-              <a:xfrm>
-                <a:off x="4486775" y="3343000"/>
-                <a:ext cx="3868500" cy="509700"/>
-              </a:xfrm>
-              <a:prstGeom prst="roundRect">
-                <a:avLst>
-                  <a:gd fmla="val 16667" name="adj"/>
-                </a:avLst>
-              </a:prstGeom>
-              <a:solidFill>
-                <a:schemeClr val="lt1"/>
-              </a:solidFill>
-              <a:ln>
-                <a:noFill/>
-              </a:ln>
-            </p:spPr>
-            <p:txBody>
-              <a:bodyPr anchorCtr="0" anchor="ctr" bIns="91425" lIns="91425" spcFirstLastPara="1" rIns="91425" wrap="square" tIns="91425">
-                <a:noAutofit/>
-              </a:bodyPr>
-              <a:lstStyle/>
-              <a:p>
-                <a:pPr indent="0" lvl="0" marL="0" rtl="0" algn="l">
-                  <a:spcBef>
-                    <a:spcPts val="0"/>
-                  </a:spcBef>
-                  <a:spcAft>
-                    <a:spcPts val="0"/>
-                  </a:spcAft>
-                  <a:buNone/>
-                </a:pPr>
-                <a:r>
-                  <a:rPr lang="en" sz="1200">
-                    <a:solidFill>
-                      <a:schemeClr val="dk1"/>
-                    </a:solidFill>
-                  </a:rPr>
-                  <a:t>Closed</a:t>
-                </a:r>
-                <a:endParaRPr sz="1200">
-                  <a:solidFill>
-                    <a:schemeClr val="dk1"/>
-                  </a:solidFill>
-                </a:endParaRPr>
-              </a:p>
-            </p:txBody>
-          </p:sp>
-          <p:sp>
-            <p:nvSpPr>
-              <p:cNvPr id="108" name="Google Shape;108;p19"/>
-              <p:cNvSpPr/>
-              <p:nvPr/>
-            </p:nvSpPr>
-            <p:spPr>
-              <a:xfrm>
-                <a:off x="4486775" y="4381550"/>
-                <a:ext cx="3868500" cy="509700"/>
-              </a:xfrm>
-              <a:prstGeom prst="roundRect">
-                <a:avLst>
-                  <a:gd fmla="val 16667" name="adj"/>
-                </a:avLst>
-              </a:prstGeom>
-              <a:solidFill>
-                <a:schemeClr val="lt1"/>
-              </a:solidFill>
-              <a:ln>
-                <a:noFill/>
-              </a:ln>
-            </p:spPr>
-            <p:txBody>
-              <a:bodyPr anchorCtr="0" anchor="ctr" bIns="91425" lIns="91425" spcFirstLastPara="1" rIns="91425" wrap="square" tIns="91425">
-                <a:noAutofit/>
-              </a:bodyPr>
-              <a:lstStyle/>
-              <a:p>
-                <a:pPr indent="0" lvl="0" marL="0" rtl="0" algn="l">
-                  <a:spcBef>
-                    <a:spcPts val="0"/>
-                  </a:spcBef>
-                  <a:spcAft>
-                    <a:spcPts val="0"/>
-                  </a:spcAft>
-                  <a:buNone/>
-                </a:pPr>
-                <a:r>
-                  <a:rPr lang="en" sz="1200">
-                    <a:solidFill>
-                      <a:schemeClr val="dk1"/>
-                    </a:solidFill>
-                  </a:rPr>
-                  <a:t>Destroyed</a:t>
-                </a:r>
-                <a:endParaRPr sz="1200">
-                  <a:solidFill>
-                    <a:schemeClr val="dk1"/>
-                  </a:solidFill>
-                </a:endParaRPr>
-              </a:p>
-            </p:txBody>
-          </p:sp>
-        </p:grpSp>
-        <p:grpSp>
-          <p:nvGrpSpPr>
-            <p:cNvPr id="109" name="Google Shape;109;p19"/>
-            <p:cNvGrpSpPr/>
-            <p:nvPr/>
-          </p:nvGrpSpPr>
-          <p:grpSpPr>
-            <a:xfrm>
-              <a:off x="6363850" y="1368950"/>
-              <a:ext cx="2468450" cy="3431700"/>
-              <a:chOff x="5726200" y="1368950"/>
-              <a:chExt cx="2468450" cy="3431700"/>
-            </a:xfrm>
-          </p:grpSpPr>
-          <p:sp>
-            <p:nvSpPr>
-              <p:cNvPr id="110" name="Google Shape;110;p19"/>
-              <p:cNvSpPr/>
-              <p:nvPr/>
-            </p:nvSpPr>
-            <p:spPr>
-              <a:xfrm>
-                <a:off x="5726200" y="1368950"/>
-                <a:ext cx="1916100" cy="336300"/>
-              </a:xfrm>
-              <a:prstGeom prst="flowChartAlternateProcess">
-                <a:avLst/>
-              </a:prstGeom>
-              <a:solidFill>
-                <a:srgbClr val="6D9EEB"/>
-              </a:solidFill>
-              <a:ln>
-                <a:noFill/>
-              </a:ln>
-            </p:spPr>
-            <p:txBody>
-              <a:bodyPr anchorCtr="0" anchor="ctr" bIns="91425" lIns="91425" spcFirstLastPara="1" rIns="91425" wrap="square" tIns="91425">
-                <a:noAutofit/>
-              </a:bodyPr>
-              <a:lstStyle/>
-              <a:p>
-                <a:pPr indent="0" lvl="0" marL="0" rtl="0" algn="ctr">
-                  <a:spcBef>
-                    <a:spcPts val="0"/>
-                  </a:spcBef>
-                  <a:spcAft>
-                    <a:spcPts val="0"/>
-                  </a:spcAft>
-                  <a:buNone/>
-                </a:pPr>
-                <a:r>
-                  <a:rPr b="1" lang="en">
-                    <a:solidFill>
-                      <a:schemeClr val="dk1"/>
-                    </a:solidFill>
-                  </a:rPr>
-                  <a:t>Created</a:t>
-                </a:r>
-                <a:endParaRPr b="1">
-                  <a:solidFill>
-                    <a:schemeClr val="dk1"/>
-                  </a:solidFill>
-                </a:endParaRPr>
-              </a:p>
-            </p:txBody>
-          </p:sp>
-          <p:sp>
-            <p:nvSpPr>
-              <p:cNvPr id="111" name="Google Shape;111;p19"/>
-              <p:cNvSpPr/>
-              <p:nvPr/>
-            </p:nvSpPr>
-            <p:spPr>
-              <a:xfrm>
-                <a:off x="5726200" y="2403600"/>
-                <a:ext cx="1916100" cy="336300"/>
-              </a:xfrm>
-              <a:prstGeom prst="flowChartAlternateProcess">
-                <a:avLst/>
-              </a:prstGeom>
-              <a:solidFill>
-                <a:srgbClr val="6D9EEB"/>
-              </a:solidFill>
-              <a:ln>
-                <a:noFill/>
-              </a:ln>
-            </p:spPr>
-            <p:txBody>
-              <a:bodyPr anchorCtr="0" anchor="ctr" bIns="91425" lIns="91425" spcFirstLastPara="1" rIns="91425" wrap="square" tIns="91425">
-                <a:noAutofit/>
-              </a:bodyPr>
-              <a:lstStyle/>
-              <a:p>
-                <a:pPr indent="0" lvl="0" marL="0" rtl="0" algn="ctr">
-                  <a:spcBef>
-                    <a:spcPts val="0"/>
-                  </a:spcBef>
-                  <a:spcAft>
-                    <a:spcPts val="0"/>
-                  </a:spcAft>
-                  <a:buNone/>
-                </a:pPr>
-                <a:r>
-                  <a:rPr b="1" lang="en">
-                    <a:solidFill>
-                      <a:schemeClr val="dk1"/>
-                    </a:solidFill>
-                  </a:rPr>
-                  <a:t>Initialize View</a:t>
-                </a:r>
-                <a:endParaRPr b="1">
-                  <a:solidFill>
-                    <a:schemeClr val="dk1"/>
-                  </a:solidFill>
-                </a:endParaRPr>
-              </a:p>
-            </p:txBody>
-          </p:sp>
-          <p:sp>
-            <p:nvSpPr>
-              <p:cNvPr id="112" name="Google Shape;112;p19"/>
-              <p:cNvSpPr/>
-              <p:nvPr/>
-            </p:nvSpPr>
-            <p:spPr>
-              <a:xfrm>
-                <a:off x="5726200" y="2915513"/>
-                <a:ext cx="1916100" cy="336300"/>
-              </a:xfrm>
-              <a:prstGeom prst="flowChartAlternateProcess">
-                <a:avLst/>
-              </a:prstGeom>
-              <a:solidFill>
-                <a:srgbClr val="C9DAF8"/>
-              </a:solidFill>
-              <a:ln>
-                <a:noFill/>
-              </a:ln>
-            </p:spPr>
-            <p:txBody>
-              <a:bodyPr anchorCtr="0" anchor="ctr" bIns="91425" lIns="91425" spcFirstLastPara="1" rIns="91425" wrap="square" tIns="91425">
-                <a:noAutofit/>
-              </a:bodyPr>
-              <a:lstStyle/>
-              <a:p>
-                <a:pPr indent="0" lvl="0" marL="0" rtl="0" algn="ctr">
-                  <a:spcBef>
-                    <a:spcPts val="0"/>
-                  </a:spcBef>
-                  <a:spcAft>
-                    <a:spcPts val="0"/>
-                  </a:spcAft>
-                  <a:buNone/>
-                </a:pPr>
-                <a:r>
-                  <a:rPr b="1" lang="en">
-                    <a:solidFill>
-                      <a:srgbClr val="4D5156"/>
-                    </a:solidFill>
-                  </a:rPr>
-                  <a:t>Refocus</a:t>
-                </a:r>
-                <a:endParaRPr b="1">
-                  <a:solidFill>
-                    <a:srgbClr val="4D5156"/>
-                  </a:solidFill>
-                </a:endParaRPr>
-              </a:p>
-            </p:txBody>
-          </p:sp>
-          <p:sp>
-            <p:nvSpPr>
-              <p:cNvPr id="113" name="Google Shape;113;p19"/>
-              <p:cNvSpPr/>
-              <p:nvPr/>
-            </p:nvSpPr>
-            <p:spPr>
-              <a:xfrm>
-                <a:off x="5726200" y="3427450"/>
-                <a:ext cx="1916100" cy="336300"/>
-              </a:xfrm>
-              <a:prstGeom prst="flowChartAlternateProcess">
-                <a:avLst/>
-              </a:prstGeom>
-              <a:solidFill>
-                <a:srgbClr val="6D9EEB"/>
-              </a:solidFill>
-              <a:ln>
-                <a:noFill/>
-              </a:ln>
-            </p:spPr>
-            <p:txBody>
-              <a:bodyPr anchorCtr="0" anchor="ctr" bIns="91425" lIns="91425" spcFirstLastPara="1" rIns="91425" wrap="square" tIns="91425">
-                <a:noAutofit/>
-              </a:bodyPr>
-              <a:lstStyle/>
-              <a:p>
-                <a:pPr indent="0" lvl="0" marL="0" rtl="0" algn="ctr">
-                  <a:spcBef>
-                    <a:spcPts val="0"/>
-                  </a:spcBef>
-                  <a:spcAft>
-                    <a:spcPts val="0"/>
-                  </a:spcAft>
-                  <a:buNone/>
-                </a:pPr>
-                <a:r>
-                  <a:rPr b="1" lang="en">
-                    <a:solidFill>
-                      <a:schemeClr val="dk1"/>
-                    </a:solidFill>
-                  </a:rPr>
-                  <a:t>Deinitialize View</a:t>
-                </a:r>
-                <a:endParaRPr b="1">
-                  <a:solidFill>
-                    <a:schemeClr val="dk1"/>
-                  </a:solidFill>
-                </a:endParaRPr>
-              </a:p>
-            </p:txBody>
-          </p:sp>
-          <p:sp>
-            <p:nvSpPr>
-              <p:cNvPr id="114" name="Google Shape;114;p19"/>
-              <p:cNvSpPr/>
-              <p:nvPr/>
-            </p:nvSpPr>
-            <p:spPr>
-              <a:xfrm>
-                <a:off x="5726200" y="4464350"/>
-                <a:ext cx="1916100" cy="336300"/>
-              </a:xfrm>
-              <a:prstGeom prst="flowChartAlternateProcess">
-                <a:avLst/>
-              </a:prstGeom>
-              <a:solidFill>
-                <a:srgbClr val="6D9EEB"/>
-              </a:solidFill>
-              <a:ln>
-                <a:noFill/>
-              </a:ln>
-            </p:spPr>
-            <p:txBody>
-              <a:bodyPr anchorCtr="0" anchor="ctr" bIns="91425" lIns="91425" spcFirstLastPara="1" rIns="91425" wrap="square" tIns="91425">
-                <a:noAutofit/>
-              </a:bodyPr>
-              <a:lstStyle/>
-              <a:p>
-                <a:pPr indent="0" lvl="0" marL="0" rtl="0" algn="ctr">
-                  <a:spcBef>
-                    <a:spcPts val="0"/>
-                  </a:spcBef>
-                  <a:spcAft>
-                    <a:spcPts val="0"/>
-                  </a:spcAft>
-                  <a:buNone/>
-                </a:pPr>
-                <a:r>
-                  <a:rPr b="1" lang="en">
-                    <a:solidFill>
-                      <a:schemeClr val="dk1"/>
-                    </a:solidFill>
-                  </a:rPr>
-                  <a:t>Removed</a:t>
-                </a:r>
-                <a:endParaRPr b="1">
-                  <a:solidFill>
-                    <a:schemeClr val="dk1"/>
-                  </a:solidFill>
-                </a:endParaRPr>
-              </a:p>
-            </p:txBody>
-          </p:sp>
-          <p:cxnSp>
-            <p:nvCxnSpPr>
-              <p:cNvPr id="115" name="Google Shape;115;p19"/>
-              <p:cNvCxnSpPr>
-                <a:stCxn id="110" idx="2"/>
-                <a:endCxn id="111" idx="0"/>
-              </p:cNvCxnSpPr>
-              <p:nvPr/>
-            </p:nvCxnSpPr>
-            <p:spPr>
-              <a:xfrm>
-                <a:off x="6684250" y="1705250"/>
-                <a:ext cx="0" cy="698400"/>
-              </a:xfrm>
-              <a:prstGeom prst="straightConnector1">
-                <a:avLst/>
-              </a:prstGeom>
-              <a:noFill/>
-              <a:ln cap="flat" cmpd="sng" w="19050">
-                <a:solidFill>
-                  <a:schemeClr val="dk1"/>
-                </a:solidFill>
-                <a:prstDash val="solid"/>
-                <a:round/>
-                <a:headEnd len="med" w="med" type="none"/>
-                <a:tailEnd len="med" w="med" type="triangle"/>
-              </a:ln>
-            </p:spPr>
-          </p:cxnSp>
-          <p:cxnSp>
-            <p:nvCxnSpPr>
-              <p:cNvPr id="116" name="Google Shape;116;p19"/>
-              <p:cNvCxnSpPr>
-                <a:stCxn id="111" idx="2"/>
-                <a:endCxn id="112" idx="0"/>
-              </p:cNvCxnSpPr>
-              <p:nvPr/>
-            </p:nvCxnSpPr>
-            <p:spPr>
-              <a:xfrm>
-                <a:off x="6684250" y="2739900"/>
-                <a:ext cx="0" cy="175500"/>
-              </a:xfrm>
-              <a:prstGeom prst="straightConnector1">
-                <a:avLst/>
-              </a:prstGeom>
-              <a:noFill/>
-              <a:ln cap="flat" cmpd="sng" w="19050">
-                <a:solidFill>
-                  <a:schemeClr val="dk1"/>
-                </a:solidFill>
-                <a:prstDash val="solid"/>
-                <a:round/>
-                <a:headEnd len="med" w="med" type="none"/>
-                <a:tailEnd len="med" w="med" type="triangle"/>
-              </a:ln>
-            </p:spPr>
-          </p:cxnSp>
-          <p:cxnSp>
-            <p:nvCxnSpPr>
-              <p:cNvPr id="117" name="Google Shape;117;p19"/>
-              <p:cNvCxnSpPr>
-                <a:stCxn id="112" idx="2"/>
-                <a:endCxn id="113" idx="0"/>
-              </p:cNvCxnSpPr>
-              <p:nvPr/>
-            </p:nvCxnSpPr>
-            <p:spPr>
-              <a:xfrm>
-                <a:off x="6684250" y="3251813"/>
-                <a:ext cx="0" cy="175500"/>
-              </a:xfrm>
-              <a:prstGeom prst="straightConnector1">
-                <a:avLst/>
-              </a:prstGeom>
-              <a:noFill/>
-              <a:ln cap="flat" cmpd="sng" w="19050">
-                <a:solidFill>
-                  <a:schemeClr val="dk1"/>
-                </a:solidFill>
-                <a:prstDash val="solid"/>
-                <a:round/>
-                <a:headEnd len="med" w="med" type="none"/>
-                <a:tailEnd len="med" w="med" type="triangle"/>
-              </a:ln>
-            </p:spPr>
-          </p:cxnSp>
-          <p:cxnSp>
-            <p:nvCxnSpPr>
-              <p:cNvPr id="118" name="Google Shape;118;p19"/>
-              <p:cNvCxnSpPr>
-                <a:stCxn id="113" idx="2"/>
-                <a:endCxn id="114" idx="0"/>
-              </p:cNvCxnSpPr>
-              <p:nvPr/>
-            </p:nvCxnSpPr>
-            <p:spPr>
-              <a:xfrm>
-                <a:off x="6684250" y="3763750"/>
-                <a:ext cx="0" cy="700500"/>
-              </a:xfrm>
-              <a:prstGeom prst="straightConnector1">
-                <a:avLst/>
-              </a:prstGeom>
-              <a:noFill/>
-              <a:ln cap="flat" cmpd="sng" w="19050">
-                <a:solidFill>
-                  <a:schemeClr val="dk1"/>
-                </a:solidFill>
-                <a:prstDash val="solid"/>
-                <a:round/>
-                <a:headEnd len="med" w="med" type="none"/>
-                <a:tailEnd len="med" w="med" type="triangle"/>
-              </a:ln>
-            </p:spPr>
-          </p:cxnSp>
-          <p:cxnSp>
-            <p:nvCxnSpPr>
-              <p:cNvPr id="119" name="Google Shape;119;p19"/>
-              <p:cNvCxnSpPr>
-                <a:stCxn id="113" idx="2"/>
-                <a:endCxn id="111" idx="0"/>
-              </p:cNvCxnSpPr>
-              <p:nvPr/>
-            </p:nvCxnSpPr>
-            <p:spPr>
-              <a:xfrm rot="-5400000">
-                <a:off x="6004450" y="3083350"/>
-                <a:ext cx="1360200" cy="600"/>
-              </a:xfrm>
-              <a:prstGeom prst="bentConnector5">
-                <a:avLst>
-                  <a:gd fmla="val -24836" name="adj1"/>
-                  <a:gd fmla="val 251733333" name="adj2"/>
-                  <a:gd fmla="val 129031" name="adj3"/>
-                </a:avLst>
-              </a:prstGeom>
-              <a:noFill/>
-              <a:ln cap="flat" cmpd="sng" w="19050">
-                <a:solidFill>
-                  <a:schemeClr val="dk1"/>
-                </a:solidFill>
-                <a:prstDash val="solid"/>
-                <a:round/>
-                <a:headEnd len="med" w="med" type="none"/>
-                <a:tailEnd len="med" w="med" type="none"/>
-              </a:ln>
-            </p:spPr>
-          </p:cxnSp>
-          <p:cxnSp>
-            <p:nvCxnSpPr>
-              <p:cNvPr id="120" name="Google Shape;120;p19"/>
-              <p:cNvCxnSpPr/>
-              <p:nvPr/>
-            </p:nvCxnSpPr>
-            <p:spPr>
-              <a:xfrm rot="10800000">
-                <a:off x="8194650" y="3010700"/>
-                <a:ext cx="0" cy="1082700"/>
-              </a:xfrm>
-              <a:prstGeom prst="straightConnector1">
-                <a:avLst/>
-              </a:prstGeom>
-              <a:noFill/>
-              <a:ln cap="flat" cmpd="sng" w="19050">
-                <a:solidFill>
-                  <a:schemeClr val="dk1"/>
-                </a:solidFill>
-                <a:prstDash val="solid"/>
-                <a:round/>
-                <a:headEnd len="med" w="med" type="none"/>
-                <a:tailEnd len="med" w="med" type="triangle"/>
-              </a:ln>
-            </p:spPr>
-          </p:cxnSp>
-        </p:grpSp>
-      </p:grpSp>
-    </p:spTree>
-  </p:cSld>
-  <p:clrMapOvr>
-    <a:masterClrMapping/>
-  </p:clrMapOvr>
-</p:sld>
-</file>
-
-<file path=ppt/slides/slide8.xml><?xml version="1.0" encoding="utf-8"?>
-<p:sld xmlns:a="http://schemas.openxmlformats.org/drawingml/2006/main" xmlns:r="http://schemas.openxmlformats.org/officeDocument/2006/relationships" xmlns:mc="http://schemas.openxmlformats.org/markup-compatibility/2006" xmlns:mv="urn:schemas-microsoft-com:mac:vml" xmlns:p="http://schemas.openxmlformats.org/presentationml/2006/main" xmlns:c="http://schemas.openxmlformats.org/drawingml/2006/chart" xmlns:dgm="http://schemas.openxmlformats.org/drawingml/2006/diagram" xmlns:o="urn:schemas-microsoft-com:office:office" xmlns:v="urn:schemas-microsoft-com:vml" xmlns:pvml="urn:schemas-microsoft-com:office:powerpoint" xmlns:com="http://schemas.openxmlformats.org/drawingml/2006/compatibility" xmlns:p14="http://schemas.microsoft.com/office/powerpoint/2010/main" xmlns:p15="http://schemas.microsoft.com/office/powerpoint/2012/main" xmlns:ahyp="http://schemas.microsoft.com/office/drawing/2018/hyperlinkcolor">
-  <p:cSld>
-    <p:spTree>
-      <p:nvGrpSpPr>
-        <p:cNvPr id="124" name="Shape 124"/>
-        <p:cNvGrpSpPr/>
-        <p:nvPr/>
-      </p:nvGrpSpPr>
-      <p:grpSpPr>
-        <a:xfrm>
-          <a:off x="0" y="0"/>
-          <a:ext cx="0" cy="0"/>
-          <a:chOff x="0" y="0"/>
-          <a:chExt cx="0" cy="0"/>
-        </a:xfrm>
-      </p:grpSpPr>
-      <p:sp>
-        <p:nvSpPr>
-          <p:cNvPr id="125" name="Google Shape;125;p20"/>
-          <p:cNvSpPr txBox="1"/>
-          <p:nvPr>
-            <p:ph type="title"/>
-          </p:nvPr>
-        </p:nvSpPr>
-        <p:spPr>
-          <a:xfrm>
-            <a:off x="311700" y="445025"/>
-            <a:ext cx="8520600" cy="572700"/>
-          </a:xfrm>
-          <a:prstGeom prst="rect">
-            <a:avLst/>
-          </a:prstGeom>
-        </p:spPr>
-        <p:txBody>
-          <a:bodyPr anchorCtr="0" anchor="t" bIns="91425" lIns="91425" spcFirstLastPara="1" rIns="91425" wrap="square" tIns="91425">
-            <a:normAutofit fontScale="90000"/>
-          </a:bodyPr>
-          <a:lstStyle/>
-          <a:p>
-            <a:pPr indent="0" lvl="0" marL="0" rtl="0" algn="l">
-              <a:spcBef>
-                <a:spcPts val="0"/>
-              </a:spcBef>
-              <a:spcAft>
-                <a:spcPts val="0"/>
-              </a:spcAft>
-              <a:buNone/>
-            </a:pPr>
-            <a:r>
-              <a:rPr lang="en"/>
-              <a:t>Layers</a:t>
-            </a:r>
-            <a:endParaRPr/>
-          </a:p>
-        </p:txBody>
-      </p:sp>
-      <p:sp>
-        <p:nvSpPr>
-          <p:cNvPr id="126" name="Google Shape;126;p20"/>
-          <p:cNvSpPr txBox="1"/>
-          <p:nvPr>
-            <p:ph type="title"/>
-          </p:nvPr>
-        </p:nvSpPr>
-        <p:spPr>
-          <a:xfrm>
-            <a:off x="311700" y="1368950"/>
-            <a:ext cx="4082100" cy="3431700"/>
-          </a:xfrm>
-          <a:prstGeom prst="rect">
-            <a:avLst/>
-          </a:prstGeom>
-        </p:spPr>
-        <p:txBody>
-          <a:bodyPr anchorCtr="0" anchor="t" bIns="91425" lIns="91425" spcFirstLastPara="1" rIns="91425" wrap="square" tIns="91425">
-            <a:normAutofit/>
-          </a:bodyPr>
-          <a:lstStyle/>
-          <a:p>
-            <a:pPr indent="-342900" lvl="0" marL="457200" rtl="0" algn="l">
-              <a:spcBef>
-                <a:spcPts val="0"/>
-              </a:spcBef>
-              <a:spcAft>
-                <a:spcPts val="0"/>
-              </a:spcAft>
-              <a:buSzPts val="1800"/>
-              <a:buChar char="●"/>
-            </a:pPr>
-            <a:r>
-              <a:rPr lang="en" sz="1800"/>
-              <a:t>Grouping of Views</a:t>
-            </a:r>
-            <a:endParaRPr sz="1800"/>
-          </a:p>
-          <a:p>
-            <a:pPr indent="-342900" lvl="0" marL="457200" rtl="0" algn="l">
-              <a:spcBef>
-                <a:spcPts val="0"/>
-              </a:spcBef>
-              <a:spcAft>
-                <a:spcPts val="0"/>
-              </a:spcAft>
-              <a:buSzPts val="1800"/>
-              <a:buChar char="●"/>
-            </a:pPr>
-            <a:r>
-              <a:rPr lang="en" sz="1800"/>
-              <a:t>Rendering order</a:t>
-            </a:r>
-            <a:endParaRPr sz="1800"/>
-          </a:p>
-          <a:p>
-            <a:pPr indent="-342900" lvl="0" marL="457200" rtl="0" algn="l">
-              <a:spcBef>
-                <a:spcPts val="0"/>
-              </a:spcBef>
-              <a:spcAft>
-                <a:spcPts val="0"/>
-              </a:spcAft>
-              <a:buSzPts val="1800"/>
-              <a:buChar char="●"/>
-            </a:pPr>
-            <a:r>
-              <a:rPr lang="en" sz="1800"/>
-              <a:t>Visibility manipulations</a:t>
-            </a:r>
-            <a:endParaRPr sz="1800"/>
-          </a:p>
-          <a:p>
-            <a:pPr indent="0" lvl="0" marL="0" rtl="0" algn="l">
-              <a:spcBef>
-                <a:spcPts val="0"/>
-              </a:spcBef>
-              <a:spcAft>
-                <a:spcPts val="0"/>
-              </a:spcAft>
-              <a:buNone/>
-            </a:pPr>
-            <a:r>
-              <a:t/>
-            </a:r>
-            <a:endParaRPr sz="1800"/>
-          </a:p>
-          <a:p>
-            <a:pPr indent="-342900" lvl="0" marL="457200" rtl="0" algn="l">
-              <a:spcBef>
-                <a:spcPts val="0"/>
-              </a:spcBef>
-              <a:spcAft>
-                <a:spcPts val="0"/>
-              </a:spcAft>
-              <a:buSzPts val="1800"/>
-              <a:buChar char="●"/>
-            </a:pPr>
-            <a:r>
-              <a:rPr lang="en" sz="1800"/>
-              <a:t>99% predefined</a:t>
-            </a:r>
-            <a:endParaRPr sz="1800"/>
-          </a:p>
-          <a:p>
-            <a:pPr indent="-342900" lvl="0" marL="457200" rtl="0" algn="l">
-              <a:spcBef>
-                <a:spcPts val="0"/>
-              </a:spcBef>
-              <a:spcAft>
-                <a:spcPts val="0"/>
-              </a:spcAft>
-              <a:buSzPts val="1800"/>
-              <a:buChar char="●"/>
-            </a:pPr>
-            <a:r>
-              <a:rPr lang="en" sz="1800"/>
-              <a:t>Use of Layer Widget</a:t>
-            </a:r>
-            <a:endParaRPr sz="1800"/>
+            <a:br>
+              <a:rPr lang="en" sz="1800" dirty="0"/>
+            </a:br>
+            <a:r>
+              <a:rPr lang="en" sz="1800" dirty="0"/>
+              <a:t>Use of Layer Widget </a:t>
+            </a:r>
+            <a:br>
+              <a:rPr lang="en" sz="1800" dirty="0"/>
+            </a:br>
+            <a:r>
+              <a:rPr lang="en" sz="1800" dirty="0"/>
+              <a:t>- Rendering order</a:t>
+            </a:r>
+            <a:endParaRPr sz="1800" dirty="0"/>
           </a:p>
         </p:txBody>
       </p:sp>
@@ -9094,12 +9104,270 @@
 </p:sld>
 </file>
 
-<file path=ppt/slides/slide9.xml><?xml version="1.0" encoding="utf-8"?>
-<p:sld xmlns:a="http://schemas.openxmlformats.org/drawingml/2006/main" xmlns:r="http://schemas.openxmlformats.org/officeDocument/2006/relationships" xmlns:mc="http://schemas.openxmlformats.org/markup-compatibility/2006" xmlns:mv="urn:schemas-microsoft-com:mac:vml" xmlns:p="http://schemas.openxmlformats.org/presentationml/2006/main" xmlns:c="http://schemas.openxmlformats.org/drawingml/2006/chart" xmlns:dgm="http://schemas.openxmlformats.org/drawingml/2006/diagram" xmlns:o="urn:schemas-microsoft-com:office:office" xmlns:v="urn:schemas-microsoft-com:vml" xmlns:pvml="urn:schemas-microsoft-com:office:powerpoint" xmlns:com="http://schemas.openxmlformats.org/drawingml/2006/compatibility" xmlns:p14="http://schemas.microsoft.com/office/powerpoint/2010/main" xmlns:p15="http://schemas.microsoft.com/office/powerpoint/2012/main" xmlns:ahyp="http://schemas.microsoft.com/office/drawing/2018/hyperlinkcolor">
+<file path=ppt/slides/slide8.xml><?xml version="1.0" encoding="utf-8"?>
+<p:sld xmlns:a="http://schemas.openxmlformats.org/drawingml/2006/main" xmlns:r="http://schemas.openxmlformats.org/officeDocument/2006/relationships" xmlns:p="http://schemas.openxmlformats.org/presentationml/2006/main">
   <p:cSld>
     <p:spTree>
       <p:nvGrpSpPr>
-        <p:cNvPr id="131" name="Shape 131"/>
+        <p:cNvPr id="1" name=""/>
+        <p:cNvGrpSpPr/>
+        <p:nvPr/>
+      </p:nvGrpSpPr>
+      <p:grpSpPr>
+        <a:xfrm>
+          <a:off x="0" y="0"/>
+          <a:ext cx="0" cy="0"/>
+          <a:chOff x="0" y="0"/>
+          <a:chExt cx="0" cy="0"/>
+        </a:xfrm>
+      </p:grpSpPr>
+      <p:sp>
+        <p:nvSpPr>
+          <p:cNvPr id="2" name="Title 1">
+            <a:extLst>
+              <a:ext uri="{FF2B5EF4-FFF2-40B4-BE49-F238E27FC236}">
+                <a16:creationId xmlns:a16="http://schemas.microsoft.com/office/drawing/2014/main" id="{5D878704-29C2-7AF4-696C-D9DF50EA245C}"/>
+              </a:ext>
+            </a:extLst>
+          </p:cNvPr>
+          <p:cNvSpPr>
+            <a:spLocks noGrp="1"/>
+          </p:cNvSpPr>
+          <p:nvPr>
+            <p:ph type="title"/>
+          </p:nvPr>
+        </p:nvSpPr>
+        <p:spPr>
+          <a:xfrm>
+            <a:off x="311700" y="445025"/>
+            <a:ext cx="4717500" cy="572700"/>
+          </a:xfrm>
+        </p:spPr>
+        <p:txBody>
+          <a:bodyPr>
+            <a:normAutofit fontScale="90000"/>
+          </a:bodyPr>
+          <a:lstStyle/>
+          <a:p>
+            <a:r>
+              <a:rPr lang="en-US" dirty="0"/>
+              <a:t>Input Routing</a:t>
+            </a:r>
+          </a:p>
+        </p:txBody>
+      </p:sp>
+      <p:pic>
+        <p:nvPicPr>
+          <p:cNvPr id="1026" name="Picture 2" descr="Flowchart showing input routing logic.">
+            <a:extLst>
+              <a:ext uri="{FF2B5EF4-FFF2-40B4-BE49-F238E27FC236}">
+                <a16:creationId xmlns:a16="http://schemas.microsoft.com/office/drawing/2014/main" id="{5D30717C-53BD-D30A-554E-08FB0E3D3B84}"/>
+              </a:ext>
+            </a:extLst>
+          </p:cNvPr>
+          <p:cNvPicPr>
+            <a:picLocks noChangeAspect="1" noChangeArrowheads="1"/>
+          </p:cNvPicPr>
+          <p:nvPr/>
+        </p:nvPicPr>
+        <p:blipFill>
+          <a:blip r:embed="rId2">
+            <a:extLst>
+              <a:ext uri="{28A0092B-C50C-407E-A947-70E740481C1C}">
+                <a14:useLocalDpi xmlns:a14="http://schemas.microsoft.com/office/drawing/2010/main" val="0"/>
+              </a:ext>
+            </a:extLst>
+          </a:blip>
+          <a:srcRect/>
+          <a:stretch>
+            <a:fillRect/>
+          </a:stretch>
+        </p:blipFill>
+        <p:spPr bwMode="auto">
+          <a:xfrm>
+            <a:off x="5124091" y="445025"/>
+            <a:ext cx="3509393" cy="4453754"/>
+          </a:xfrm>
+          <a:prstGeom prst="rect">
+            <a:avLst/>
+          </a:prstGeom>
+          <a:noFill/>
+          <a:extLst>
+            <a:ext uri="{909E8E84-426E-40DD-AFC4-6F175D3DCCD1}">
+              <a14:hiddenFill xmlns:a14="http://schemas.microsoft.com/office/drawing/2010/main">
+                <a:solidFill>
+                  <a:srgbClr val="FFFFFF"/>
+                </a:solidFill>
+              </a14:hiddenFill>
+            </a:ext>
+          </a:extLst>
+        </p:spPr>
+      </p:pic>
+      <p:sp>
+        <p:nvSpPr>
+          <p:cNvPr id="4" name="TextBox 3">
+            <a:extLst>
+              <a:ext uri="{FF2B5EF4-FFF2-40B4-BE49-F238E27FC236}">
+                <a16:creationId xmlns:a16="http://schemas.microsoft.com/office/drawing/2014/main" id="{7716C203-2F0D-565A-73C9-B83526F1B95D}"/>
+              </a:ext>
+            </a:extLst>
+          </p:cNvPr>
+          <p:cNvSpPr txBox="1"/>
+          <p:nvPr/>
+        </p:nvSpPr>
+        <p:spPr>
+          <a:xfrm>
+            <a:off x="311700" y="1282155"/>
+            <a:ext cx="4572000" cy="1200329"/>
+          </a:xfrm>
+          <a:prstGeom prst="rect">
+            <a:avLst/>
+          </a:prstGeom>
+          <a:noFill/>
+        </p:spPr>
+        <p:txBody>
+          <a:bodyPr wrap="square">
+            <a:spAutoFit/>
+          </a:bodyPr>
+          <a:lstStyle/>
+          <a:p>
+            <a:pPr marL="114300" lvl="0" algn="l" rtl="0">
+              <a:spcBef>
+                <a:spcPts val="0"/>
+              </a:spcBef>
+              <a:spcAft>
+                <a:spcPts val="0"/>
+              </a:spcAft>
+              <a:buSzPts val="1800"/>
+            </a:pPr>
+            <a:r>
+              <a:rPr lang="en-US" sz="1800" dirty="0">
+                <a:solidFill>
+                  <a:schemeClr val="tx1"/>
+                </a:solidFill>
+              </a:rPr>
+              <a:t>Activatable Widgets contain IMCs</a:t>
+            </a:r>
+          </a:p>
+          <a:p>
+            <a:pPr marL="114300" lvl="0" algn="l" rtl="0">
+              <a:spcBef>
+                <a:spcPts val="0"/>
+              </a:spcBef>
+              <a:spcAft>
+                <a:spcPts val="0"/>
+              </a:spcAft>
+              <a:buSzPts val="1800"/>
+            </a:pPr>
+            <a:r>
+              <a:rPr lang="en-US" sz="1800" dirty="0">
+                <a:solidFill>
+                  <a:schemeClr val="tx1"/>
+                </a:solidFill>
+              </a:rPr>
+              <a:t>Only highest visible widget (parallel) get input</a:t>
+            </a:r>
+          </a:p>
+          <a:p>
+            <a:pPr marL="114300" lvl="0" algn="l" rtl="0">
+              <a:spcBef>
+                <a:spcPts val="0"/>
+              </a:spcBef>
+              <a:spcAft>
+                <a:spcPts val="0"/>
+              </a:spcAft>
+              <a:buSzPts val="1800"/>
+            </a:pPr>
+            <a:r>
+              <a:rPr lang="en-US" sz="1800" dirty="0">
+                <a:solidFill>
+                  <a:schemeClr val="tx1"/>
+                </a:solidFill>
+              </a:rPr>
+              <a:t> - plus all Child Widgets</a:t>
+            </a:r>
+          </a:p>
+        </p:txBody>
+      </p:sp>
+      <p:pic>
+        <p:nvPicPr>
+          <p:cNvPr id="5" name="Picture 4">
+            <a:extLst>
+              <a:ext uri="{FF2B5EF4-FFF2-40B4-BE49-F238E27FC236}">
+                <a16:creationId xmlns:a16="http://schemas.microsoft.com/office/drawing/2014/main" id="{E7C8D4BA-F210-3C41-7422-E28EC7A58F2D}"/>
+              </a:ext>
+            </a:extLst>
+          </p:cNvPr>
+          <p:cNvPicPr>
+            <a:picLocks noChangeAspect="1"/>
+          </p:cNvPicPr>
+          <p:nvPr/>
+        </p:nvPicPr>
+        <p:blipFill>
+          <a:blip r:embed="rId3"/>
+          <a:stretch>
+            <a:fillRect/>
+          </a:stretch>
+        </p:blipFill>
+        <p:spPr>
+          <a:xfrm>
+            <a:off x="71309" y="4435644"/>
+            <a:ext cx="4812391" cy="525661"/>
+          </a:xfrm>
+          <a:prstGeom prst="rect">
+            <a:avLst/>
+          </a:prstGeom>
+        </p:spPr>
+      </p:pic>
+      <p:pic>
+        <p:nvPicPr>
+          <p:cNvPr id="6" name="Picture 5">
+            <a:extLst>
+              <a:ext uri="{FF2B5EF4-FFF2-40B4-BE49-F238E27FC236}">
+                <a16:creationId xmlns:a16="http://schemas.microsoft.com/office/drawing/2014/main" id="{CA8A5A1E-DB3A-5439-E320-104CC048F4AA}"/>
+              </a:ext>
+            </a:extLst>
+          </p:cNvPr>
+          <p:cNvPicPr>
+            <a:picLocks noChangeAspect="1"/>
+          </p:cNvPicPr>
+          <p:nvPr/>
+        </p:nvPicPr>
+        <p:blipFill>
+          <a:blip r:embed="rId4"/>
+          <a:stretch>
+            <a:fillRect/>
+          </a:stretch>
+        </p:blipFill>
+        <p:spPr>
+          <a:xfrm>
+            <a:off x="191504" y="2746914"/>
+            <a:ext cx="3141837" cy="1603476"/>
+          </a:xfrm>
+          <a:prstGeom prst="rect">
+            <a:avLst/>
+          </a:prstGeom>
+        </p:spPr>
+      </p:pic>
+    </p:spTree>
+    <p:extLst>
+      <p:ext uri="{BB962C8B-B14F-4D97-AF65-F5344CB8AC3E}">
+        <p14:creationId xmlns:p14="http://schemas.microsoft.com/office/powerpoint/2010/main" val="2936315228"/>
+      </p:ext>
+    </p:extLst>
+  </p:cSld>
+  <p:clrMapOvr>
+    <a:masterClrMapping/>
+  </p:clrMapOvr>
+</p:sld>
+</file>
+
+<file path=ppt/slides/slide9.xml><?xml version="1.0" encoding="utf-8"?>
+<p:sld xmlns:a="http://schemas.openxmlformats.org/drawingml/2006/main" xmlns:r="http://schemas.openxmlformats.org/officeDocument/2006/relationships" xmlns:p="http://schemas.openxmlformats.org/presentationml/2006/main">
+  <p:cSld>
+    <p:spTree>
+      <p:nvGrpSpPr>
+        <p:cNvPr id="1" name="Shape 131"/>
         <p:cNvGrpSpPr/>
         <p:nvPr/>
       </p:nvGrpSpPr>
@@ -9114,7 +9382,9 @@
       <p:sp>
         <p:nvSpPr>
           <p:cNvPr id="132" name="Google Shape;132;p21"/>
-          <p:cNvSpPr txBox="1"/>
+          <p:cNvSpPr txBox="1">
+            <a:spLocks noGrp="1"/>
+          </p:cNvSpPr>
           <p:nvPr>
             <p:ph type="title"/>
           </p:nvPr>
@@ -9129,12 +9399,12 @@
           </a:prstGeom>
         </p:spPr>
         <p:txBody>
-          <a:bodyPr anchorCtr="0" anchor="t" bIns="91425" lIns="91425" spcFirstLastPara="1" rIns="91425" wrap="square" tIns="91425">
+          <a:bodyPr spcFirstLastPara="1" wrap="square" lIns="91425" tIns="91425" rIns="91425" bIns="91425" anchor="t" anchorCtr="0">
             <a:normAutofit fontScale="90000"/>
           </a:bodyPr>
           <a:lstStyle/>
           <a:p>
-            <a:pPr indent="0" lvl="0" marL="0" rtl="0" algn="l">
+            <a:pPr marL="0" lvl="0" indent="0" algn="l" rtl="0">
               <a:spcBef>
                 <a:spcPts val="0"/>
               </a:spcBef>
@@ -9154,7 +9424,9 @@
       <p:sp>
         <p:nvSpPr>
           <p:cNvPr id="133" name="Google Shape;133;p21"/>
-          <p:cNvSpPr txBox="1"/>
+          <p:cNvSpPr txBox="1">
+            <a:spLocks noGrp="1"/>
+          </p:cNvSpPr>
           <p:nvPr>
             <p:ph type="title"/>
           </p:nvPr>
@@ -9169,12 +9441,12 @@
           </a:prstGeom>
         </p:spPr>
         <p:txBody>
-          <a:bodyPr anchorCtr="0" anchor="t" bIns="91425" lIns="91425" spcFirstLastPara="1" rIns="91425" wrap="square" tIns="91425">
+          <a:bodyPr spcFirstLastPara="1" wrap="square" lIns="91425" tIns="91425" rIns="91425" bIns="91425" anchor="t" anchorCtr="0">
             <a:normAutofit/>
           </a:bodyPr>
           <a:lstStyle/>
           <a:p>
-            <a:pPr indent="-342900" lvl="0" marL="457200" rtl="0" algn="l">
+            <a:pPr marL="114300" lvl="0" algn="l" rtl="0">
               <a:spcBef>
                 <a:spcPts val="0"/>
               </a:spcBef>
@@ -9182,16 +9454,15 @@
                 <a:spcPts val="0"/>
               </a:spcAft>
               <a:buSzPts val="1800"/>
-              <a:buChar char="●"/>
             </a:pPr>
             <a:r>
-              <a:rPr lang="en" sz="1800"/>
+              <a:rPr lang="en" sz="1800" dirty="0"/>
               <a:t>Automates processes</a:t>
             </a:r>
-            <a:endParaRPr sz="1800"/>
-          </a:p>
-          <a:p>
-            <a:pPr indent="-342900" lvl="0" marL="457200" rtl="0" algn="l">
+            <a:endParaRPr sz="1800" dirty="0"/>
+          </a:p>
+          <a:p>
+            <a:pPr marL="114300" lvl="0" algn="l" rtl="0">
               <a:spcBef>
                 <a:spcPts val="0"/>
               </a:spcBef>
@@ -9199,16 +9470,15 @@
                 <a:spcPts val="0"/>
               </a:spcAft>
               <a:buSzPts val="1800"/>
-              <a:buChar char="●"/>
             </a:pPr>
             <a:r>
-              <a:rPr lang="en" sz="1800"/>
+              <a:rPr lang="en" sz="1800" dirty="0"/>
               <a:t>Contains current state of UI</a:t>
             </a:r>
-            <a:endParaRPr sz="1800"/>
-          </a:p>
-          <a:p>
-            <a:pPr indent="-342900" lvl="0" marL="457200" rtl="0" algn="l">
+            <a:endParaRPr sz="1800" dirty="0"/>
+          </a:p>
+          <a:p>
+            <a:pPr marL="114300" lvl="0" algn="l" rtl="0">
               <a:spcBef>
                 <a:spcPts val="0"/>
               </a:spcBef>
@@ -9216,16 +9486,35 @@
                 <a:spcPts val="0"/>
               </a:spcAft>
               <a:buSzPts val="1800"/>
-              <a:buChar char="●"/>
             </a:pPr>
             <a:r>
-              <a:rPr lang="en" sz="1800"/>
-              <a:t>Creates and Destroys Views</a:t>
-            </a:r>
-            <a:endParaRPr sz="1800"/>
-          </a:p>
-          <a:p>
-            <a:pPr indent="-342900" lvl="0" marL="457200" rtl="0" algn="l">
+              <a:rPr lang="sk-SK" sz="1800" dirty="0"/>
+              <a:t>Access to UI </a:t>
+            </a:r>
+            <a:r>
+              <a:rPr lang="sk-SK" sz="1800" dirty="0" err="1"/>
+              <a:t>from</a:t>
+            </a:r>
+            <a:r>
+              <a:rPr lang="sk-SK" sz="1800" dirty="0"/>
+              <a:t> </a:t>
+            </a:r>
+            <a:r>
+              <a:rPr lang="sk-SK" sz="1800" dirty="0" err="1"/>
+              <a:t>Gameplay</a:t>
+            </a:r>
+            <a:r>
+              <a:rPr lang="sk-SK" sz="1800" dirty="0"/>
+              <a:t> </a:t>
+            </a:r>
+            <a:r>
+              <a:rPr lang="sk-SK" sz="1800" dirty="0" err="1"/>
+              <a:t>Code</a:t>
+            </a:r>
+            <a:endParaRPr sz="1800" dirty="0"/>
+          </a:p>
+          <a:p>
+            <a:pPr marL="114300" lvl="0" algn="l" rtl="0">
               <a:spcBef>
                 <a:spcPts val="0"/>
               </a:spcBef>
@@ -9233,16 +9522,61 @@
                 <a:spcPts val="0"/>
               </a:spcAft>
               <a:buSzPts val="1800"/>
-              <a:buChar char="●"/>
             </a:pPr>
             <a:r>
-              <a:rPr lang="en" sz="1800"/>
-              <a:t>Only manager can manipulate Views</a:t>
-            </a:r>
-            <a:endParaRPr sz="1800"/>
-          </a:p>
-          <a:p>
-            <a:pPr indent="-342900" lvl="0" marL="457200" rtl="0" algn="l">
+              <a:rPr lang="sk-SK" sz="1800" dirty="0" err="1"/>
+              <a:t>Subsystems</a:t>
+            </a:r>
+            <a:r>
+              <a:rPr lang="sk-SK" sz="1800" dirty="0"/>
+              <a:t> </a:t>
+            </a:r>
+            <a:r>
+              <a:rPr lang="sk-SK" sz="1800" dirty="0" err="1"/>
+              <a:t>for</a:t>
+            </a:r>
+            <a:r>
+              <a:rPr lang="sk-SK" sz="1800" dirty="0"/>
+              <a:t> </a:t>
+            </a:r>
+            <a:r>
+              <a:rPr lang="sk-SK" sz="1800" dirty="0" err="1"/>
+              <a:t>additional</a:t>
+            </a:r>
+            <a:r>
+              <a:rPr lang="sk-SK" sz="1800" dirty="0"/>
+              <a:t> </a:t>
+            </a:r>
+            <a:r>
+              <a:rPr lang="sk-SK" sz="1800" dirty="0" err="1"/>
+              <a:t>managers</a:t>
+            </a:r>
+            <a:br>
+              <a:rPr lang="sk-SK" sz="1800" dirty="0"/>
+            </a:br>
+            <a:r>
+              <a:rPr lang="sk-SK" sz="1800" dirty="0"/>
+              <a:t>- </a:t>
+            </a:r>
+            <a:r>
+              <a:rPr lang="sk-SK" sz="1800" dirty="0" err="1"/>
+              <a:t>Notification</a:t>
+            </a:r>
+            <a:br>
+              <a:rPr lang="sk-SK" sz="1800" dirty="0"/>
+            </a:br>
+            <a:r>
+              <a:rPr lang="sk-SK" sz="1800" dirty="0"/>
+              <a:t>- </a:t>
+            </a:r>
+            <a:r>
+              <a:rPr lang="sk-SK" sz="1800" dirty="0" err="1"/>
+              <a:t>Modals</a:t>
+            </a:r>
+            <a:endParaRPr lang="sk-SK" sz="1800" dirty="0"/>
+          </a:p>
+          <a:p>
+            <a:pPr marL="114300" lvl="0" algn="l" rtl="0">
               <a:spcBef>
                 <a:spcPts val="0"/>
               </a:spcBef>
@@ -9250,16 +9584,95 @@
                 <a:spcPts val="0"/>
               </a:spcAft>
               <a:buSzPts val="1800"/>
-              <a:buChar char="●"/>
             </a:pPr>
             <a:r>
-              <a:rPr lang="en" sz="1800"/>
-              <a:t>Should be “black box” feature, doesn’t need to bother you when coding Views themselves</a:t>
-            </a:r>
-            <a:endParaRPr sz="1800"/>
-          </a:p>
-          <a:p>
-            <a:pPr indent="-342900" lvl="0" marL="457200" rtl="0" algn="l">
+              <a:rPr lang="sk-SK" sz="1800" dirty="0" err="1"/>
+              <a:t>Should</a:t>
+            </a:r>
+            <a:r>
+              <a:rPr lang="sk-SK" sz="1800" dirty="0"/>
+              <a:t> </a:t>
+            </a:r>
+            <a:r>
+              <a:rPr lang="sk-SK" sz="1800" dirty="0" err="1"/>
+              <a:t>be</a:t>
+            </a:r>
+            <a:r>
+              <a:rPr lang="sk-SK" sz="1800" dirty="0"/>
+              <a:t> “</a:t>
+            </a:r>
+            <a:r>
+              <a:rPr lang="sk-SK" sz="1800" dirty="0" err="1"/>
+              <a:t>black</a:t>
+            </a:r>
+            <a:r>
+              <a:rPr lang="sk-SK" sz="1800" dirty="0"/>
+              <a:t> box” feature, </a:t>
+            </a:r>
+            <a:r>
+              <a:rPr lang="sk-SK" sz="1800" dirty="0" err="1"/>
+              <a:t>doesn’t</a:t>
+            </a:r>
+            <a:r>
+              <a:rPr lang="sk-SK" sz="1800" dirty="0"/>
+              <a:t> </a:t>
+            </a:r>
+            <a:r>
+              <a:rPr lang="sk-SK" sz="1800" dirty="0" err="1"/>
+              <a:t>need</a:t>
+            </a:r>
+            <a:r>
+              <a:rPr lang="sk-SK" sz="1800" dirty="0"/>
+              <a:t> to </a:t>
+            </a:r>
+            <a:r>
+              <a:rPr lang="sk-SK" sz="1800" dirty="0" err="1"/>
+              <a:t>bother</a:t>
+            </a:r>
+            <a:r>
+              <a:rPr lang="sk-SK" sz="1800" dirty="0"/>
+              <a:t> </a:t>
+            </a:r>
+            <a:r>
+              <a:rPr lang="sk-SK" sz="1800" dirty="0" err="1"/>
+              <a:t>you</a:t>
+            </a:r>
+            <a:r>
+              <a:rPr lang="sk-SK" sz="1800" dirty="0"/>
+              <a:t> </a:t>
+            </a:r>
+            <a:r>
+              <a:rPr lang="sk-SK" sz="1800" dirty="0" err="1"/>
+              <a:t>when</a:t>
+            </a:r>
+            <a:r>
+              <a:rPr lang="sk-SK" sz="1800" dirty="0"/>
+              <a:t> </a:t>
+            </a:r>
+            <a:r>
+              <a:rPr lang="sk-SK" sz="1800" dirty="0" err="1"/>
+              <a:t>coding</a:t>
+            </a:r>
+            <a:r>
+              <a:rPr lang="sk-SK" sz="1800" dirty="0"/>
+              <a:t> </a:t>
+            </a:r>
+            <a:r>
+              <a:rPr lang="sk-SK" sz="1800" dirty="0" err="1"/>
+              <a:t>Menus</a:t>
+            </a:r>
+            <a:r>
+              <a:rPr lang="sk-SK" sz="1800" dirty="0"/>
+              <a:t> </a:t>
+            </a:r>
+            <a:r>
+              <a:rPr lang="sk-SK" sz="1800" dirty="0" err="1"/>
+              <a:t>themselves</a:t>
+            </a:r>
+            <a:endParaRPr lang="sk-SK" sz="1800" dirty="0"/>
+          </a:p>
+          <a:p>
+            <a:pPr marL="114300" lvl="0" algn="l" rtl="0">
               <a:spcBef>
                 <a:spcPts val="0"/>
               </a:spcBef>
@@ -9267,16 +9680,15 @@
                 <a:spcPts val="0"/>
               </a:spcAft>
               <a:buSzPts val="1800"/>
-              <a:buChar char="●"/>
             </a:pPr>
             <a:r>
-              <a:rPr lang="en" sz="1800"/>
+              <a:rPr lang="en" sz="1800" dirty="0"/>
               <a:t>Can be configurable for different levels</a:t>
             </a:r>
-            <a:endParaRPr sz="1800"/>
-          </a:p>
-          <a:p>
-            <a:pPr indent="-342900" lvl="0" marL="457200" rtl="0" algn="l">
+            <a:endParaRPr sz="1800" dirty="0"/>
+          </a:p>
+          <a:p>
+            <a:pPr marL="114300" lvl="0" algn="l" rtl="0">
               <a:spcBef>
                 <a:spcPts val="0"/>
               </a:spcBef>
@@ -9284,13 +9696,12 @@
                 <a:spcPts val="0"/>
               </a:spcAft>
               <a:buSzPts val="1800"/>
-              <a:buChar char="●"/>
             </a:pPr>
             <a:r>
-              <a:rPr lang="en" sz="1800"/>
+              <a:rPr lang="en" sz="1800" dirty="0"/>
               <a:t>Can be implemented either through Subsystem or HUD actor</a:t>
             </a:r>
-            <a:endParaRPr sz="1800"/>
+            <a:endParaRPr sz="1800" dirty="0"/>
           </a:p>
         </p:txBody>
       </p:sp>
@@ -9303,7 +9714,288 @@
 </file>
 
 <file path=ppt/theme/theme1.xml><?xml version="1.0" encoding="utf-8"?>
-<a:theme xmlns:a="http://schemas.openxmlformats.org/drawingml/2006/main" xmlns:r="http://schemas.openxmlformats.org/officeDocument/2006/relationships">
+<a:theme xmlns:a="http://schemas.openxmlformats.org/drawingml/2006/main" name="Simple Dark">
+  <a:themeElements>
+    <a:clrScheme name="Simple Dark">
+      <a:dk1>
+        <a:srgbClr val="FFFFFF"/>
+      </a:dk1>
+      <a:lt1>
+        <a:srgbClr val="212121"/>
+      </a:lt1>
+      <a:dk2>
+        <a:srgbClr val="303030"/>
+      </a:dk2>
+      <a:lt2>
+        <a:srgbClr val="ADADAD"/>
+      </a:lt2>
+      <a:accent1>
+        <a:srgbClr val="009688"/>
+      </a:accent1>
+      <a:accent2>
+        <a:srgbClr val="EEEEEE"/>
+      </a:accent2>
+      <a:accent3>
+        <a:srgbClr val="78909C"/>
+      </a:accent3>
+      <a:accent4>
+        <a:srgbClr val="FFAB40"/>
+      </a:accent4>
+      <a:accent5>
+        <a:srgbClr val="4DD0E1"/>
+      </a:accent5>
+      <a:accent6>
+        <a:srgbClr val="EEFF41"/>
+      </a:accent6>
+      <a:hlink>
+        <a:srgbClr val="4DD0E1"/>
+      </a:hlink>
+      <a:folHlink>
+        <a:srgbClr val="4DD0E1"/>
+      </a:folHlink>
+    </a:clrScheme>
+    <a:fontScheme name="Office">
+      <a:majorFont>
+        <a:latin typeface="Arial"/>
+        <a:ea typeface=""/>
+        <a:cs typeface=""/>
+        <a:font script="Jpan" typeface="ＭＳ Ｐゴシック"/>
+        <a:font script="Hang" typeface="맑은 고딕"/>
+        <a:font script="Hans" typeface="宋体"/>
+        <a:font script="Hant" typeface="新細明體"/>
+        <a:font script="Arab" typeface="Times New Roman"/>
+        <a:font script="Hebr" typeface="Times New Roman"/>
+        <a:font script="Thai" typeface="Angsana New"/>
+        <a:font script="Ethi" typeface="Nyala"/>
+        <a:font script="Beng" typeface="Vrinda"/>
+        <a:font script="Gujr" typeface="Shruti"/>
+        <a:font script="Khmr" typeface="MoolBoran"/>
+        <a:font script="Knda" typeface="Tunga"/>
+        <a:font script="Guru" typeface="Raavi"/>
+        <a:font script="Cans" typeface="Euphemia"/>
+        <a:font script="Cher" typeface="Plantagenet Cherokee"/>
+        <a:font script="Yiii" typeface="Microsoft Yi Baiti"/>
+        <a:font script="Tibt" typeface="Microsoft Himalaya"/>
+        <a:font script="Thaa" typeface="MV Boli"/>
+        <a:font script="Deva" typeface="Mangal"/>
+        <a:font script="Telu" typeface="Gautami"/>
+        <a:font script="Taml" typeface="Latha"/>
+        <a:font script="Syrc" typeface="Estrangelo Edessa"/>
+        <a:font script="Orya" typeface="Kalinga"/>
+        <a:font script="Mlym" typeface="Kartika"/>
+        <a:font script="Laoo" typeface="DokChampa"/>
+        <a:font script="Sinh" typeface="Iskoola Pota"/>
+        <a:font script="Mong" typeface="Mongolian Baiti"/>
+        <a:font script="Viet" typeface="Times New Roman"/>
+        <a:font script="Uigh" typeface="Microsoft Uighur"/>
+        <a:font script="Geor" typeface="Sylfaen"/>
+      </a:majorFont>
+      <a:minorFont>
+        <a:latin typeface="Arial"/>
+        <a:ea typeface=""/>
+        <a:cs typeface=""/>
+        <a:font script="Jpan" typeface="ＭＳ Ｐゴシック"/>
+        <a:font script="Hang" typeface="맑은 고딕"/>
+        <a:font script="Hans" typeface="宋体"/>
+        <a:font script="Hant" typeface="新細明體"/>
+        <a:font script="Arab" typeface="Arial"/>
+        <a:font script="Hebr" typeface="Arial"/>
+        <a:font script="Thai" typeface="Cordia New"/>
+        <a:font script="Ethi" typeface="Nyala"/>
+        <a:font script="Beng" typeface="Vrinda"/>
+        <a:font script="Gujr" typeface="Shruti"/>
+        <a:font script="Khmr" typeface="DaunPenh"/>
+        <a:font script="Knda" typeface="Tunga"/>
+        <a:font script="Guru" typeface="Raavi"/>
+        <a:font script="Cans" typeface="Euphemia"/>
+        <a:font script="Cher" typeface="Plantagenet Cherokee"/>
+        <a:font script="Yiii" typeface="Microsoft Yi Baiti"/>
+        <a:font script="Tibt" typeface="Microsoft Himalaya"/>
+        <a:font script="Thaa" typeface="MV Boli"/>
+        <a:font script="Deva" typeface="Mangal"/>
+        <a:font script="Telu" typeface="Gautami"/>
+        <a:font script="Taml" typeface="Latha"/>
+        <a:font script="Syrc" typeface="Estrangelo Edessa"/>
+        <a:font script="Orya" typeface="Kalinga"/>
+        <a:font script="Mlym" typeface="Kartika"/>
+        <a:font script="Laoo" typeface="DokChampa"/>
+        <a:font script="Sinh" typeface="Iskoola Pota"/>
+        <a:font script="Mong" typeface="Mongolian Baiti"/>
+        <a:font script="Viet" typeface="Arial"/>
+        <a:font script="Uigh" typeface="Microsoft Uighur"/>
+        <a:font script="Geor" typeface="Sylfaen"/>
+      </a:minorFont>
+    </a:fontScheme>
+    <a:fmtScheme name="Office">
+      <a:fillStyleLst>
+        <a:solidFill>
+          <a:schemeClr val="phClr"/>
+        </a:solidFill>
+        <a:gradFill rotWithShape="1">
+          <a:gsLst>
+            <a:gs pos="0">
+              <a:schemeClr val="phClr">
+                <a:tint val="50000"/>
+                <a:satMod val="300000"/>
+              </a:schemeClr>
+            </a:gs>
+            <a:gs pos="35000">
+              <a:schemeClr val="phClr">
+                <a:tint val="37000"/>
+                <a:satMod val="300000"/>
+              </a:schemeClr>
+            </a:gs>
+            <a:gs pos="100000">
+              <a:schemeClr val="phClr">
+                <a:tint val="15000"/>
+                <a:satMod val="350000"/>
+              </a:schemeClr>
+            </a:gs>
+          </a:gsLst>
+          <a:lin ang="16200000" scaled="1"/>
+        </a:gradFill>
+        <a:gradFill rotWithShape="1">
+          <a:gsLst>
+            <a:gs pos="0">
+              <a:schemeClr val="phClr">
+                <a:tint val="100000"/>
+                <a:shade val="100000"/>
+                <a:satMod val="130000"/>
+              </a:schemeClr>
+            </a:gs>
+            <a:gs pos="100000">
+              <a:schemeClr val="phClr">
+                <a:tint val="50000"/>
+                <a:shade val="100000"/>
+                <a:satMod val="350000"/>
+              </a:schemeClr>
+            </a:gs>
+          </a:gsLst>
+          <a:lin ang="16200000" scaled="0"/>
+        </a:gradFill>
+      </a:fillStyleLst>
+      <a:lnStyleLst>
+        <a:ln w="9525" cap="flat" cmpd="sng" algn="ctr">
+          <a:solidFill>
+            <a:schemeClr val="phClr">
+              <a:shade val="95000"/>
+              <a:satMod val="105000"/>
+            </a:schemeClr>
+          </a:solidFill>
+          <a:prstDash val="solid"/>
+        </a:ln>
+        <a:ln w="25400" cap="flat" cmpd="sng" algn="ctr">
+          <a:solidFill>
+            <a:schemeClr val="phClr"/>
+          </a:solidFill>
+          <a:prstDash val="solid"/>
+        </a:ln>
+        <a:ln w="38100" cap="flat" cmpd="sng" algn="ctr">
+          <a:solidFill>
+            <a:schemeClr val="phClr"/>
+          </a:solidFill>
+          <a:prstDash val="solid"/>
+        </a:ln>
+      </a:lnStyleLst>
+      <a:effectStyleLst>
+        <a:effectStyle>
+          <a:effectLst>
+            <a:outerShdw blurRad="40000" dist="20000" dir="5400000" rotWithShape="0">
+              <a:srgbClr val="000000">
+                <a:alpha val="38000"/>
+              </a:srgbClr>
+            </a:outerShdw>
+          </a:effectLst>
+        </a:effectStyle>
+        <a:effectStyle>
+          <a:effectLst>
+            <a:outerShdw blurRad="40000" dist="23000" dir="5400000" rotWithShape="0">
+              <a:srgbClr val="000000">
+                <a:alpha val="35000"/>
+              </a:srgbClr>
+            </a:outerShdw>
+          </a:effectLst>
+        </a:effectStyle>
+        <a:effectStyle>
+          <a:effectLst>
+            <a:outerShdw blurRad="40000" dist="23000" dir="5400000" rotWithShape="0">
+              <a:srgbClr val="000000">
+                <a:alpha val="35000"/>
+              </a:srgbClr>
+            </a:outerShdw>
+          </a:effectLst>
+          <a:scene3d>
+            <a:camera prst="orthographicFront">
+              <a:rot lat="0" lon="0" rev="0"/>
+            </a:camera>
+            <a:lightRig rig="threePt" dir="t">
+              <a:rot lat="0" lon="0" rev="1200000"/>
+            </a:lightRig>
+          </a:scene3d>
+          <a:sp3d>
+            <a:bevelT w="63500" h="25400"/>
+          </a:sp3d>
+        </a:effectStyle>
+      </a:effectStyleLst>
+      <a:bgFillStyleLst>
+        <a:solidFill>
+          <a:schemeClr val="phClr"/>
+        </a:solidFill>
+        <a:gradFill rotWithShape="1">
+          <a:gsLst>
+            <a:gs pos="0">
+              <a:schemeClr val="phClr">
+                <a:tint val="40000"/>
+                <a:satMod val="350000"/>
+              </a:schemeClr>
+            </a:gs>
+            <a:gs pos="40000">
+              <a:schemeClr val="phClr">
+                <a:tint val="45000"/>
+                <a:shade val="99000"/>
+                <a:satMod val="350000"/>
+              </a:schemeClr>
+            </a:gs>
+            <a:gs pos="100000">
+              <a:schemeClr val="phClr">
+                <a:shade val="20000"/>
+                <a:satMod val="255000"/>
+              </a:schemeClr>
+            </a:gs>
+          </a:gsLst>
+          <a:path path="circle">
+            <a:fillToRect l="50000" t="-80000" r="50000" b="180000"/>
+          </a:path>
+        </a:gradFill>
+        <a:gradFill rotWithShape="1">
+          <a:gsLst>
+            <a:gs pos="0">
+              <a:schemeClr val="phClr">
+                <a:tint val="80000"/>
+                <a:satMod val="300000"/>
+              </a:schemeClr>
+            </a:gs>
+            <a:gs pos="100000">
+              <a:schemeClr val="phClr">
+                <a:shade val="30000"/>
+                <a:satMod val="200000"/>
+              </a:schemeClr>
+            </a:gs>
+          </a:gsLst>
+          <a:path path="circle">
+            <a:fillToRect l="50000" t="50000" r="50000" b="50000"/>
+          </a:path>
+        </a:gradFill>
+      </a:bgFillStyleLst>
+    </a:fmtScheme>
+  </a:themeElements>
+  <a:objectDefaults/>
+  <a:extraClrSchemeLst/>
+</a:theme>
+</file>
+
+<file path=ppt/theme/theme2.xml><?xml version="1.0" encoding="utf-8"?>
+<a:theme xmlns:a="http://schemas.openxmlformats.org/drawingml/2006/main">
   <a:themeElements>
     <a:clrScheme name="Default">
       <a:dk1>
@@ -9578,284 +10270,7 @@
       </a:bgFillStyleLst>
     </a:fmtScheme>
   </a:themeElements>
-</a:theme>
-</file>
-
-<file path=ppt/theme/theme2.xml><?xml version="1.0" encoding="utf-8"?>
-<a:theme xmlns:a="http://schemas.openxmlformats.org/drawingml/2006/main" xmlns:r="http://schemas.openxmlformats.org/officeDocument/2006/relationships" name="Simple Dark">
-  <a:themeElements>
-    <a:clrScheme name="Simple Dark">
-      <a:dk1>
-        <a:srgbClr val="FFFFFF"/>
-      </a:dk1>
-      <a:lt1>
-        <a:srgbClr val="212121"/>
-      </a:lt1>
-      <a:dk2>
-        <a:srgbClr val="303030"/>
-      </a:dk2>
-      <a:lt2>
-        <a:srgbClr val="ADADAD"/>
-      </a:lt2>
-      <a:accent1>
-        <a:srgbClr val="009688"/>
-      </a:accent1>
-      <a:accent2>
-        <a:srgbClr val="EEEEEE"/>
-      </a:accent2>
-      <a:accent3>
-        <a:srgbClr val="78909C"/>
-      </a:accent3>
-      <a:accent4>
-        <a:srgbClr val="FFAB40"/>
-      </a:accent4>
-      <a:accent5>
-        <a:srgbClr val="4DD0E1"/>
-      </a:accent5>
-      <a:accent6>
-        <a:srgbClr val="EEFF41"/>
-      </a:accent6>
-      <a:hlink>
-        <a:srgbClr val="4DD0E1"/>
-      </a:hlink>
-      <a:folHlink>
-        <a:srgbClr val="4DD0E1"/>
-      </a:folHlink>
-    </a:clrScheme>
-    <a:fontScheme name="Office">
-      <a:majorFont>
-        <a:latin typeface="Arial"/>
-        <a:ea typeface=""/>
-        <a:cs typeface=""/>
-        <a:font script="Jpan" typeface="ＭＳ Ｐゴシック"/>
-        <a:font script="Hang" typeface="맑은 고딕"/>
-        <a:font script="Hans" typeface="宋体"/>
-        <a:font script="Hant" typeface="新細明體"/>
-        <a:font script="Arab" typeface="Times New Roman"/>
-        <a:font script="Hebr" typeface="Times New Roman"/>
-        <a:font script="Thai" typeface="Angsana New"/>
-        <a:font script="Ethi" typeface="Nyala"/>
-        <a:font script="Beng" typeface="Vrinda"/>
-        <a:font script="Gujr" typeface="Shruti"/>
-        <a:font script="Khmr" typeface="MoolBoran"/>
-        <a:font script="Knda" typeface="Tunga"/>
-        <a:font script="Guru" typeface="Raavi"/>
-        <a:font script="Cans" typeface="Euphemia"/>
-        <a:font script="Cher" typeface="Plantagenet Cherokee"/>
-        <a:font script="Yiii" typeface="Microsoft Yi Baiti"/>
-        <a:font script="Tibt" typeface="Microsoft Himalaya"/>
-        <a:font script="Thaa" typeface="MV Boli"/>
-        <a:font script="Deva" typeface="Mangal"/>
-        <a:font script="Telu" typeface="Gautami"/>
-        <a:font script="Taml" typeface="Latha"/>
-        <a:font script="Syrc" typeface="Estrangelo Edessa"/>
-        <a:font script="Orya" typeface="Kalinga"/>
-        <a:font script="Mlym" typeface="Kartika"/>
-        <a:font script="Laoo" typeface="DokChampa"/>
-        <a:font script="Sinh" typeface="Iskoola Pota"/>
-        <a:font script="Mong" typeface="Mongolian Baiti"/>
-        <a:font script="Viet" typeface="Times New Roman"/>
-        <a:font script="Uigh" typeface="Microsoft Uighur"/>
-        <a:font script="Geor" typeface="Sylfaen"/>
-      </a:majorFont>
-      <a:minorFont>
-        <a:latin typeface="Arial"/>
-        <a:ea typeface=""/>
-        <a:cs typeface=""/>
-        <a:font script="Jpan" typeface="ＭＳ Ｐゴシック"/>
-        <a:font script="Hang" typeface="맑은 고딕"/>
-        <a:font script="Hans" typeface="宋体"/>
-        <a:font script="Hant" typeface="新細明體"/>
-        <a:font script="Arab" typeface="Arial"/>
-        <a:font script="Hebr" typeface="Arial"/>
-        <a:font script="Thai" typeface="Cordia New"/>
-        <a:font script="Ethi" typeface="Nyala"/>
-        <a:font script="Beng" typeface="Vrinda"/>
-        <a:font script="Gujr" typeface="Shruti"/>
-        <a:font script="Khmr" typeface="DaunPenh"/>
-        <a:font script="Knda" typeface="Tunga"/>
-        <a:font script="Guru" typeface="Raavi"/>
-        <a:font script="Cans" typeface="Euphemia"/>
-        <a:font script="Cher" typeface="Plantagenet Cherokee"/>
-        <a:font script="Yiii" typeface="Microsoft Yi Baiti"/>
-        <a:font script="Tibt" typeface="Microsoft Himalaya"/>
-        <a:font script="Thaa" typeface="MV Boli"/>
-        <a:font script="Deva" typeface="Mangal"/>
-        <a:font script="Telu" typeface="Gautami"/>
-        <a:font script="Taml" typeface="Latha"/>
-        <a:font script="Syrc" typeface="Estrangelo Edessa"/>
-        <a:font script="Orya" typeface="Kalinga"/>
-        <a:font script="Mlym" typeface="Kartika"/>
-        <a:font script="Laoo" typeface="DokChampa"/>
-        <a:font script="Sinh" typeface="Iskoola Pota"/>
-        <a:font script="Mong" typeface="Mongolian Baiti"/>
-        <a:font script="Viet" typeface="Arial"/>
-        <a:font script="Uigh" typeface="Microsoft Uighur"/>
-        <a:font script="Geor" typeface="Sylfaen"/>
-      </a:minorFont>
-    </a:fontScheme>
-    <a:fmtScheme name="Office">
-      <a:fillStyleLst>
-        <a:solidFill>
-          <a:schemeClr val="phClr"/>
-        </a:solidFill>
-        <a:gradFill rotWithShape="1">
-          <a:gsLst>
-            <a:gs pos="0">
-              <a:schemeClr val="phClr">
-                <a:tint val="50000"/>
-                <a:satMod val="300000"/>
-              </a:schemeClr>
-            </a:gs>
-            <a:gs pos="35000">
-              <a:schemeClr val="phClr">
-                <a:tint val="37000"/>
-                <a:satMod val="300000"/>
-              </a:schemeClr>
-            </a:gs>
-            <a:gs pos="100000">
-              <a:schemeClr val="phClr">
-                <a:tint val="15000"/>
-                <a:satMod val="350000"/>
-              </a:schemeClr>
-            </a:gs>
-          </a:gsLst>
-          <a:lin ang="16200000" scaled="1"/>
-        </a:gradFill>
-        <a:gradFill rotWithShape="1">
-          <a:gsLst>
-            <a:gs pos="0">
-              <a:schemeClr val="phClr">
-                <a:tint val="100000"/>
-                <a:shade val="100000"/>
-                <a:satMod val="130000"/>
-              </a:schemeClr>
-            </a:gs>
-            <a:gs pos="100000">
-              <a:schemeClr val="phClr">
-                <a:tint val="50000"/>
-                <a:shade val="100000"/>
-                <a:satMod val="350000"/>
-              </a:schemeClr>
-            </a:gs>
-          </a:gsLst>
-          <a:lin ang="16200000" scaled="0"/>
-        </a:gradFill>
-      </a:fillStyleLst>
-      <a:lnStyleLst>
-        <a:ln w="9525" cap="flat" cmpd="sng" algn="ctr">
-          <a:solidFill>
-            <a:schemeClr val="phClr">
-              <a:shade val="95000"/>
-              <a:satMod val="105000"/>
-            </a:schemeClr>
-          </a:solidFill>
-          <a:prstDash val="solid"/>
-        </a:ln>
-        <a:ln w="25400" cap="flat" cmpd="sng" algn="ctr">
-          <a:solidFill>
-            <a:schemeClr val="phClr"/>
-          </a:solidFill>
-          <a:prstDash val="solid"/>
-        </a:ln>
-        <a:ln w="38100" cap="flat" cmpd="sng" algn="ctr">
-          <a:solidFill>
-            <a:schemeClr val="phClr"/>
-          </a:solidFill>
-          <a:prstDash val="solid"/>
-        </a:ln>
-      </a:lnStyleLst>
-      <a:effectStyleLst>
-        <a:effectStyle>
-          <a:effectLst>
-            <a:outerShdw blurRad="40000" dist="20000" dir="5400000" rotWithShape="0">
-              <a:srgbClr val="000000">
-                <a:alpha val="38000"/>
-              </a:srgbClr>
-            </a:outerShdw>
-          </a:effectLst>
-        </a:effectStyle>
-        <a:effectStyle>
-          <a:effectLst>
-            <a:outerShdw blurRad="40000" dist="23000" dir="5400000" rotWithShape="0">
-              <a:srgbClr val="000000">
-                <a:alpha val="35000"/>
-              </a:srgbClr>
-            </a:outerShdw>
-          </a:effectLst>
-        </a:effectStyle>
-        <a:effectStyle>
-          <a:effectLst>
-            <a:outerShdw blurRad="40000" dist="23000" dir="5400000" rotWithShape="0">
-              <a:srgbClr val="000000">
-                <a:alpha val="35000"/>
-              </a:srgbClr>
-            </a:outerShdw>
-          </a:effectLst>
-          <a:scene3d>
-            <a:camera prst="orthographicFront">
-              <a:rot lat="0" lon="0" rev="0"/>
-            </a:camera>
-            <a:lightRig rig="threePt" dir="t">
-              <a:rot lat="0" lon="0" rev="1200000"/>
-            </a:lightRig>
-          </a:scene3d>
-          <a:sp3d>
-            <a:bevelT w="63500" h="25400"/>
-          </a:sp3d>
-        </a:effectStyle>
-      </a:effectStyleLst>
-      <a:bgFillStyleLst>
-        <a:solidFill>
-          <a:schemeClr val="phClr"/>
-        </a:solidFill>
-        <a:gradFill rotWithShape="1">
-          <a:gsLst>
-            <a:gs pos="0">
-              <a:schemeClr val="phClr">
-                <a:tint val="40000"/>
-                <a:satMod val="350000"/>
-              </a:schemeClr>
-            </a:gs>
-            <a:gs pos="40000">
-              <a:schemeClr val="phClr">
-                <a:tint val="45000"/>
-                <a:shade val="99000"/>
-                <a:satMod val="350000"/>
-              </a:schemeClr>
-            </a:gs>
-            <a:gs pos="100000">
-              <a:schemeClr val="phClr">
-                <a:shade val="20000"/>
-                <a:satMod val="255000"/>
-              </a:schemeClr>
-            </a:gs>
-          </a:gsLst>
-          <a:path path="circle">
-            <a:fillToRect l="50000" t="-80000" r="50000" b="180000"/>
-          </a:path>
-        </a:gradFill>
-        <a:gradFill rotWithShape="1">
-          <a:gsLst>
-            <a:gs pos="0">
-              <a:schemeClr val="phClr">
-                <a:tint val="80000"/>
-                <a:satMod val="300000"/>
-              </a:schemeClr>
-            </a:gs>
-            <a:gs pos="100000">
-              <a:schemeClr val="phClr">
-                <a:shade val="30000"/>
-                <a:satMod val="200000"/>
-              </a:schemeClr>
-            </a:gs>
-          </a:gsLst>
-          <a:path path="circle">
-            <a:fillToRect l="50000" t="50000" r="50000" b="50000"/>
-          </a:path>
-        </a:gradFill>
-      </a:bgFillStyleLst>
-    </a:fmtScheme>
-  </a:themeElements>
+  <a:objectDefaults/>
+  <a:extraClrSchemeLst/>
 </a:theme>
 </file>
--- a/UI/Unreal Engine Lecture - UI.pptx
+++ b/UI/Unreal Engine Lecture - UI.pptx
@@ -9218,7 +9218,7 @@
         <p:spPr>
           <a:xfrm>
             <a:off x="311700" y="1282155"/>
-            <a:ext cx="4572000" cy="1200329"/>
+            <a:ext cx="4572000" cy="1754326"/>
           </a:xfrm>
           <a:prstGeom prst="rect">
             <a:avLst/>
@@ -9284,7 +9284,45 @@
                   <a:schemeClr val="tx1"/>
                 </a:solidFill>
               </a:rPr>
-              <a:t> - plus all Child Widgets</a:t>
+              <a:t> - Plus all Child Widgets</a:t>
+            </a:r>
+          </a:p>
+          <a:p>
+            <a:pPr marL="114300" lvl="0" algn="l" rtl="0">
+              <a:spcBef>
+                <a:spcPts val="0"/>
+              </a:spcBef>
+              <a:spcAft>
+                <a:spcPts val="0"/>
+              </a:spcAft>
+              <a:buSzPts val="1800"/>
+            </a:pPr>
+            <a:r>
+              <a:rPr lang="en-US" sz="1800" dirty="0">
+                <a:solidFill>
+                  <a:schemeClr val="tx1"/>
+                </a:solidFill>
+              </a:rPr>
+              <a:t>Default Input Config</a:t>
+            </a:r>
+          </a:p>
+          <a:p>
+            <a:pPr marL="114300" lvl="0" algn="l" rtl="0">
+              <a:spcBef>
+                <a:spcPts val="0"/>
+              </a:spcBef>
+              <a:spcAft>
+                <a:spcPts val="0"/>
+              </a:spcAft>
+              <a:buSzPts val="1800"/>
+            </a:pPr>
+            <a:r>
+              <a:rPr lang="en-US" sz="1800" dirty="0">
+                <a:solidFill>
+                  <a:schemeClr val="tx1"/>
+                </a:solidFill>
+              </a:rPr>
+              <a:t>- Default Actions for Back and Accept</a:t>
             </a:r>
           </a:p>
         </p:txBody>
@@ -9341,8 +9379,8 @@
         </p:blipFill>
         <p:spPr>
           <a:xfrm>
-            <a:off x="191504" y="2746914"/>
-            <a:ext cx="3141837" cy="1603476"/>
+            <a:off x="71883" y="3146562"/>
+            <a:ext cx="2525817" cy="1289082"/>
           </a:xfrm>
           <a:prstGeom prst="rect">
             <a:avLst/>

--- a/UI/Unreal Engine Lecture - UI.pptx
+++ b/UI/Unreal Engine Lecture - UI.pptx
@@ -5,7 +5,7 @@
     <p:sldMasterId id="2147483659" r:id="rId1"/>
   </p:sldMasterIdLst>
   <p:notesMasterIdLst>
-    <p:notesMasterId r:id="rId14"/>
+    <p:notesMasterId r:id="rId19"/>
   </p:notesMasterIdLst>
   <p:sldIdLst>
     <p:sldId id="256" r:id="rId2"/>
@@ -20,6 +20,11 @@
     <p:sldId id="267" r:id="rId11"/>
     <p:sldId id="268" r:id="rId12"/>
     <p:sldId id="265" r:id="rId13"/>
+    <p:sldId id="269" r:id="rId14"/>
+    <p:sldId id="270" r:id="rId15"/>
+    <p:sldId id="271" r:id="rId16"/>
+    <p:sldId id="272" r:id="rId17"/>
+    <p:sldId id="273" r:id="rId18"/>
   </p:sldIdLst>
   <p:sldSz cx="9144000" cy="5143500" type="screen16x9"/>
   <p:notesSz cx="6858000" cy="9144000"/>
@@ -821,6 +826,387 @@
         </p:txBody>
       </p:sp>
     </p:spTree>
+  </p:cSld>
+  <p:clrMapOvr>
+    <a:masterClrMapping/>
+  </p:clrMapOvr>
+</p:notes>
+</file>
+
+<file path=ppt/notesSlides/notesSlide10.xml><?xml version="1.0" encoding="utf-8"?>
+<p:notes xmlns:a="http://schemas.openxmlformats.org/drawingml/2006/main" xmlns:r="http://schemas.openxmlformats.org/officeDocument/2006/relationships" xmlns:p="http://schemas.openxmlformats.org/presentationml/2006/main" showMasterSp="0" showMasterPhAnim="0">
+  <p:cSld>
+    <p:spTree>
+      <p:nvGrpSpPr>
+        <p:cNvPr id="1" name="Shape 52">
+          <a:extLst>
+            <a:ext uri="{FF2B5EF4-FFF2-40B4-BE49-F238E27FC236}">
+              <a16:creationId xmlns:a16="http://schemas.microsoft.com/office/drawing/2014/main" id="{F5477FA5-B4F8-CF30-A588-567C185D0293}"/>
+            </a:ext>
+          </a:extLst>
+        </p:cNvPr>
+        <p:cNvGrpSpPr/>
+        <p:nvPr/>
+      </p:nvGrpSpPr>
+      <p:grpSpPr>
+        <a:xfrm>
+          <a:off x="0" y="0"/>
+          <a:ext cx="0" cy="0"/>
+          <a:chOff x="0" y="0"/>
+          <a:chExt cx="0" cy="0"/>
+        </a:xfrm>
+      </p:grpSpPr>
+      <p:sp>
+        <p:nvSpPr>
+          <p:cNvPr id="53" name="Google Shape;53;g27b3fe96102_1_86:notes">
+            <a:extLst>
+              <a:ext uri="{FF2B5EF4-FFF2-40B4-BE49-F238E27FC236}">
+                <a16:creationId xmlns:a16="http://schemas.microsoft.com/office/drawing/2014/main" id="{4DFB3ECA-C130-86FE-2BC3-5372B619EEC4}"/>
+              </a:ext>
+            </a:extLst>
+          </p:cNvPr>
+          <p:cNvSpPr>
+            <a:spLocks noGrp="1" noRot="1" noChangeAspect="1"/>
+          </p:cNvSpPr>
+          <p:nvPr>
+            <p:ph type="sldImg" idx="2"/>
+          </p:nvPr>
+        </p:nvSpPr>
+        <p:spPr>
+          <a:xfrm>
+            <a:off x="381000" y="685800"/>
+            <a:ext cx="6096000" cy="3429000"/>
+          </a:xfrm>
+          <a:custGeom>
+            <a:avLst/>
+            <a:gdLst/>
+            <a:ahLst/>
+            <a:cxnLst/>
+            <a:rect l="l" t="t" r="r" b="b"/>
+            <a:pathLst>
+              <a:path w="120000" h="120000" extrusionOk="0">
+                <a:moveTo>
+                  <a:pt x="0" y="0"/>
+                </a:moveTo>
+                <a:lnTo>
+                  <a:pt x="120000" y="0"/>
+                </a:lnTo>
+                <a:lnTo>
+                  <a:pt x="120000" y="120000"/>
+                </a:lnTo>
+                <a:lnTo>
+                  <a:pt x="0" y="120000"/>
+                </a:lnTo>
+                <a:close/>
+              </a:path>
+            </a:pathLst>
+          </a:custGeom>
+        </p:spPr>
+      </p:sp>
+      <p:sp>
+        <p:nvSpPr>
+          <p:cNvPr id="54" name="Google Shape;54;g27b3fe96102_1_86:notes">
+            <a:extLst>
+              <a:ext uri="{FF2B5EF4-FFF2-40B4-BE49-F238E27FC236}">
+                <a16:creationId xmlns:a16="http://schemas.microsoft.com/office/drawing/2014/main" id="{5873F347-7532-4A60-2C55-65DFBD322A3C}"/>
+              </a:ext>
+            </a:extLst>
+          </p:cNvPr>
+          <p:cNvSpPr txBox="1">
+            <a:spLocks noGrp="1"/>
+          </p:cNvSpPr>
+          <p:nvPr>
+            <p:ph type="body" idx="1"/>
+          </p:nvPr>
+        </p:nvSpPr>
+        <p:spPr>
+          <a:xfrm>
+            <a:off x="685800" y="4343400"/>
+            <a:ext cx="5486400" cy="4114800"/>
+          </a:xfrm>
+          <a:prstGeom prst="rect">
+            <a:avLst/>
+          </a:prstGeom>
+        </p:spPr>
+        <p:txBody>
+          <a:bodyPr spcFirstLastPara="1" wrap="square" lIns="91425" tIns="91425" rIns="91425" bIns="91425" anchor="t" anchorCtr="0">
+            <a:noAutofit/>
+          </a:bodyPr>
+          <a:lstStyle/>
+          <a:p>
+            <a:pPr marL="0" lvl="0" indent="0" algn="l" rtl="0">
+              <a:spcBef>
+                <a:spcPts val="0"/>
+              </a:spcBef>
+              <a:spcAft>
+                <a:spcPts val="0"/>
+              </a:spcAft>
+              <a:buNone/>
+            </a:pPr>
+            <a:endParaRPr/>
+          </a:p>
+        </p:txBody>
+      </p:sp>
+    </p:spTree>
+    <p:extLst>
+      <p:ext uri="{BB962C8B-B14F-4D97-AF65-F5344CB8AC3E}">
+        <p14:creationId xmlns:p14="http://schemas.microsoft.com/office/powerpoint/2010/main" val="1298673517"/>
+      </p:ext>
+    </p:extLst>
+  </p:cSld>
+  <p:clrMapOvr>
+    <a:masterClrMapping/>
+  </p:clrMapOvr>
+</p:notes>
+</file>
+
+<file path=ppt/notesSlides/notesSlide11.xml><?xml version="1.0" encoding="utf-8"?>
+<p:notes xmlns:a="http://schemas.openxmlformats.org/drawingml/2006/main" xmlns:r="http://schemas.openxmlformats.org/officeDocument/2006/relationships" xmlns:p="http://schemas.openxmlformats.org/presentationml/2006/main" showMasterSp="0" showMasterPhAnim="0">
+  <p:cSld>
+    <p:spTree>
+      <p:nvGrpSpPr>
+        <p:cNvPr id="1" name="Shape 59">
+          <a:extLst>
+            <a:ext uri="{FF2B5EF4-FFF2-40B4-BE49-F238E27FC236}">
+              <a16:creationId xmlns:a16="http://schemas.microsoft.com/office/drawing/2014/main" id="{C48ADE72-093B-63CD-5DAE-8E7F50372CE4}"/>
+            </a:ext>
+          </a:extLst>
+        </p:cNvPr>
+        <p:cNvGrpSpPr/>
+        <p:nvPr/>
+      </p:nvGrpSpPr>
+      <p:grpSpPr>
+        <a:xfrm>
+          <a:off x="0" y="0"/>
+          <a:ext cx="0" cy="0"/>
+          <a:chOff x="0" y="0"/>
+          <a:chExt cx="0" cy="0"/>
+        </a:xfrm>
+      </p:grpSpPr>
+      <p:sp>
+        <p:nvSpPr>
+          <p:cNvPr id="60" name="Google Shape;60;g27b3fe96102_1_92:notes">
+            <a:extLst>
+              <a:ext uri="{FF2B5EF4-FFF2-40B4-BE49-F238E27FC236}">
+                <a16:creationId xmlns:a16="http://schemas.microsoft.com/office/drawing/2014/main" id="{03916AD4-145C-C89F-10BF-5B698A10FD62}"/>
+              </a:ext>
+            </a:extLst>
+          </p:cNvPr>
+          <p:cNvSpPr>
+            <a:spLocks noGrp="1" noRot="1" noChangeAspect="1"/>
+          </p:cNvSpPr>
+          <p:nvPr>
+            <p:ph type="sldImg" idx="2"/>
+          </p:nvPr>
+        </p:nvSpPr>
+        <p:spPr>
+          <a:xfrm>
+            <a:off x="381000" y="685800"/>
+            <a:ext cx="6096000" cy="3429000"/>
+          </a:xfrm>
+          <a:custGeom>
+            <a:avLst/>
+            <a:gdLst/>
+            <a:ahLst/>
+            <a:cxnLst/>
+            <a:rect l="l" t="t" r="r" b="b"/>
+            <a:pathLst>
+              <a:path w="120000" h="120000" extrusionOk="0">
+                <a:moveTo>
+                  <a:pt x="0" y="0"/>
+                </a:moveTo>
+                <a:lnTo>
+                  <a:pt x="120000" y="0"/>
+                </a:lnTo>
+                <a:lnTo>
+                  <a:pt x="120000" y="120000"/>
+                </a:lnTo>
+                <a:lnTo>
+                  <a:pt x="0" y="120000"/>
+                </a:lnTo>
+                <a:close/>
+              </a:path>
+            </a:pathLst>
+          </a:custGeom>
+        </p:spPr>
+      </p:sp>
+      <p:sp>
+        <p:nvSpPr>
+          <p:cNvPr id="61" name="Google Shape;61;g27b3fe96102_1_92:notes">
+            <a:extLst>
+              <a:ext uri="{FF2B5EF4-FFF2-40B4-BE49-F238E27FC236}">
+                <a16:creationId xmlns:a16="http://schemas.microsoft.com/office/drawing/2014/main" id="{62078764-F1F0-54B7-AD4C-E0002D139EA1}"/>
+              </a:ext>
+            </a:extLst>
+          </p:cNvPr>
+          <p:cNvSpPr txBox="1">
+            <a:spLocks noGrp="1"/>
+          </p:cNvSpPr>
+          <p:nvPr>
+            <p:ph type="body" idx="1"/>
+          </p:nvPr>
+        </p:nvSpPr>
+        <p:spPr>
+          <a:xfrm>
+            <a:off x="685800" y="4343400"/>
+            <a:ext cx="5486400" cy="4114800"/>
+          </a:xfrm>
+          <a:prstGeom prst="rect">
+            <a:avLst/>
+          </a:prstGeom>
+        </p:spPr>
+        <p:txBody>
+          <a:bodyPr spcFirstLastPara="1" wrap="square" lIns="91425" tIns="91425" rIns="91425" bIns="91425" anchor="t" anchorCtr="0">
+            <a:noAutofit/>
+          </a:bodyPr>
+          <a:lstStyle/>
+          <a:p>
+            <a:pPr marL="0" lvl="0" indent="0" algn="l" rtl="0">
+              <a:spcBef>
+                <a:spcPts val="0"/>
+              </a:spcBef>
+              <a:spcAft>
+                <a:spcPts val="0"/>
+              </a:spcAft>
+              <a:buNone/>
+            </a:pPr>
+            <a:endParaRPr/>
+          </a:p>
+        </p:txBody>
+      </p:sp>
+    </p:spTree>
+    <p:extLst>
+      <p:ext uri="{BB962C8B-B14F-4D97-AF65-F5344CB8AC3E}">
+        <p14:creationId xmlns:p14="http://schemas.microsoft.com/office/powerpoint/2010/main" val="3552929322"/>
+      </p:ext>
+    </p:extLst>
+  </p:cSld>
+  <p:clrMapOvr>
+    <a:masterClrMapping/>
+  </p:clrMapOvr>
+</p:notes>
+</file>
+
+<file path=ppt/notesSlides/notesSlide12.xml><?xml version="1.0" encoding="utf-8"?>
+<p:notes xmlns:a="http://schemas.openxmlformats.org/drawingml/2006/main" xmlns:r="http://schemas.openxmlformats.org/officeDocument/2006/relationships" xmlns:p="http://schemas.openxmlformats.org/presentationml/2006/main" showMasterSp="0" showMasterPhAnim="0">
+  <p:cSld>
+    <p:spTree>
+      <p:nvGrpSpPr>
+        <p:cNvPr id="1" name="Shape 75">
+          <a:extLst>
+            <a:ext uri="{FF2B5EF4-FFF2-40B4-BE49-F238E27FC236}">
+              <a16:creationId xmlns:a16="http://schemas.microsoft.com/office/drawing/2014/main" id="{8EC21CB1-BA70-E2F9-59E3-8EB5C56108B9}"/>
+            </a:ext>
+          </a:extLst>
+        </p:cNvPr>
+        <p:cNvGrpSpPr/>
+        <p:nvPr/>
+      </p:nvGrpSpPr>
+      <p:grpSpPr>
+        <a:xfrm>
+          <a:off x="0" y="0"/>
+          <a:ext cx="0" cy="0"/>
+          <a:chOff x="0" y="0"/>
+          <a:chExt cx="0" cy="0"/>
+        </a:xfrm>
+      </p:grpSpPr>
+      <p:sp>
+        <p:nvSpPr>
+          <p:cNvPr id="76" name="Google Shape;76;g2a5809dcb51_0_1:notes">
+            <a:extLst>
+              <a:ext uri="{FF2B5EF4-FFF2-40B4-BE49-F238E27FC236}">
+                <a16:creationId xmlns:a16="http://schemas.microsoft.com/office/drawing/2014/main" id="{D5735324-69BC-FF26-30C4-C2074B3AA4C4}"/>
+              </a:ext>
+            </a:extLst>
+          </p:cNvPr>
+          <p:cNvSpPr>
+            <a:spLocks noGrp="1" noRot="1" noChangeAspect="1"/>
+          </p:cNvSpPr>
+          <p:nvPr>
+            <p:ph type="sldImg" idx="2"/>
+          </p:nvPr>
+        </p:nvSpPr>
+        <p:spPr>
+          <a:xfrm>
+            <a:off x="381000" y="685800"/>
+            <a:ext cx="6096000" cy="3429000"/>
+          </a:xfrm>
+          <a:custGeom>
+            <a:avLst/>
+            <a:gdLst/>
+            <a:ahLst/>
+            <a:cxnLst/>
+            <a:rect l="l" t="t" r="r" b="b"/>
+            <a:pathLst>
+              <a:path w="120000" h="120000" extrusionOk="0">
+                <a:moveTo>
+                  <a:pt x="0" y="0"/>
+                </a:moveTo>
+                <a:lnTo>
+                  <a:pt x="120000" y="0"/>
+                </a:lnTo>
+                <a:lnTo>
+                  <a:pt x="120000" y="120000"/>
+                </a:lnTo>
+                <a:lnTo>
+                  <a:pt x="0" y="120000"/>
+                </a:lnTo>
+                <a:close/>
+              </a:path>
+            </a:pathLst>
+          </a:custGeom>
+        </p:spPr>
+      </p:sp>
+      <p:sp>
+        <p:nvSpPr>
+          <p:cNvPr id="77" name="Google Shape;77;g2a5809dcb51_0_1:notes">
+            <a:extLst>
+              <a:ext uri="{FF2B5EF4-FFF2-40B4-BE49-F238E27FC236}">
+                <a16:creationId xmlns:a16="http://schemas.microsoft.com/office/drawing/2014/main" id="{BBDEE030-C20D-9AF3-64AB-575BE5DE1213}"/>
+              </a:ext>
+            </a:extLst>
+          </p:cNvPr>
+          <p:cNvSpPr txBox="1">
+            <a:spLocks noGrp="1"/>
+          </p:cNvSpPr>
+          <p:nvPr>
+            <p:ph type="body" idx="1"/>
+          </p:nvPr>
+        </p:nvSpPr>
+        <p:spPr>
+          <a:xfrm>
+            <a:off x="685800" y="4343400"/>
+            <a:ext cx="5486400" cy="4114800"/>
+          </a:xfrm>
+          <a:prstGeom prst="rect">
+            <a:avLst/>
+          </a:prstGeom>
+        </p:spPr>
+        <p:txBody>
+          <a:bodyPr spcFirstLastPara="1" wrap="square" lIns="91425" tIns="91425" rIns="91425" bIns="91425" anchor="t" anchorCtr="0">
+            <a:noAutofit/>
+          </a:bodyPr>
+          <a:lstStyle/>
+          <a:p>
+            <a:pPr marL="0" lvl="0" indent="0" algn="l" rtl="0">
+              <a:spcBef>
+                <a:spcPts val="0"/>
+              </a:spcBef>
+              <a:spcAft>
+                <a:spcPts val="0"/>
+              </a:spcAft>
+              <a:buNone/>
+            </a:pPr>
+            <a:endParaRPr/>
+          </a:p>
+        </p:txBody>
+      </p:sp>
+    </p:spTree>
+    <p:extLst>
+      <p:ext uri="{BB962C8B-B14F-4D97-AF65-F5344CB8AC3E}">
+        <p14:creationId xmlns:p14="http://schemas.microsoft.com/office/powerpoint/2010/main" val="1482736292"/>
+      </p:ext>
+    </p:extLst>
   </p:cSld>
   <p:clrMapOvr>
     <a:masterClrMapping/>
@@ -7707,6 +8093,1557 @@
 </p:sld>
 </file>
 
+<file path=ppt/slides/slide13.xml><?xml version="1.0" encoding="utf-8"?>
+<p:sld xmlns:a="http://schemas.openxmlformats.org/drawingml/2006/main" xmlns:r="http://schemas.openxmlformats.org/officeDocument/2006/relationships" xmlns:p="http://schemas.openxmlformats.org/presentationml/2006/main">
+  <p:cSld>
+    <p:spTree>
+      <p:nvGrpSpPr>
+        <p:cNvPr id="1" name="Shape 55">
+          <a:extLst>
+            <a:ext uri="{FF2B5EF4-FFF2-40B4-BE49-F238E27FC236}">
+              <a16:creationId xmlns:a16="http://schemas.microsoft.com/office/drawing/2014/main" id="{DE000C2F-9031-5202-FAFD-03C544BA8E6E}"/>
+            </a:ext>
+          </a:extLst>
+        </p:cNvPr>
+        <p:cNvGrpSpPr/>
+        <p:nvPr/>
+      </p:nvGrpSpPr>
+      <p:grpSpPr>
+        <a:xfrm>
+          <a:off x="0" y="0"/>
+          <a:ext cx="0" cy="0"/>
+          <a:chOff x="0" y="0"/>
+          <a:chExt cx="0" cy="0"/>
+        </a:xfrm>
+      </p:grpSpPr>
+      <p:sp>
+        <p:nvSpPr>
+          <p:cNvPr id="56" name="Google Shape;56;p13">
+            <a:extLst>
+              <a:ext uri="{FF2B5EF4-FFF2-40B4-BE49-F238E27FC236}">
+                <a16:creationId xmlns:a16="http://schemas.microsoft.com/office/drawing/2014/main" id="{C490AC15-1D79-13E4-8E42-CC5FC2356556}"/>
+              </a:ext>
+            </a:extLst>
+          </p:cNvPr>
+          <p:cNvSpPr txBox="1">
+            <a:spLocks noGrp="1"/>
+          </p:cNvSpPr>
+          <p:nvPr>
+            <p:ph type="title"/>
+          </p:nvPr>
+        </p:nvSpPr>
+        <p:spPr>
+          <a:xfrm>
+            <a:off x="265500" y="1233175"/>
+            <a:ext cx="4045200" cy="1482300"/>
+          </a:xfrm>
+          <a:prstGeom prst="rect">
+            <a:avLst/>
+          </a:prstGeom>
+        </p:spPr>
+        <p:txBody>
+          <a:bodyPr spcFirstLastPara="1" wrap="square" lIns="91425" tIns="91425" rIns="91425" bIns="91425" anchor="b" anchorCtr="0">
+            <a:normAutofit/>
+          </a:bodyPr>
+          <a:lstStyle/>
+          <a:p>
+            <a:pPr marL="0" lvl="0" indent="0" algn="ctr" rtl="0">
+              <a:spcBef>
+                <a:spcPts val="0"/>
+              </a:spcBef>
+              <a:spcAft>
+                <a:spcPts val="0"/>
+              </a:spcAft>
+              <a:buNone/>
+            </a:pPr>
+            <a:r>
+              <a:rPr lang="en" dirty="0"/>
+              <a:t>UI Part 2</a:t>
+            </a:r>
+            <a:endParaRPr dirty="0"/>
+          </a:p>
+        </p:txBody>
+      </p:sp>
+      <p:sp>
+        <p:nvSpPr>
+          <p:cNvPr id="57" name="Google Shape;57;p13">
+            <a:extLst>
+              <a:ext uri="{FF2B5EF4-FFF2-40B4-BE49-F238E27FC236}">
+                <a16:creationId xmlns:a16="http://schemas.microsoft.com/office/drawing/2014/main" id="{B7846718-0995-4937-AF25-190E312E5484}"/>
+              </a:ext>
+            </a:extLst>
+          </p:cNvPr>
+          <p:cNvSpPr txBox="1">
+            <a:spLocks noGrp="1"/>
+          </p:cNvSpPr>
+          <p:nvPr>
+            <p:ph type="subTitle" idx="2"/>
+          </p:nvPr>
+        </p:nvSpPr>
+        <p:spPr>
+          <a:xfrm>
+            <a:off x="265500" y="2803075"/>
+            <a:ext cx="4045200" cy="1235100"/>
+          </a:xfrm>
+          <a:prstGeom prst="rect">
+            <a:avLst/>
+          </a:prstGeom>
+        </p:spPr>
+        <p:txBody>
+          <a:bodyPr spcFirstLastPara="1" wrap="square" lIns="91425" tIns="91425" rIns="91425" bIns="91425" anchor="t" anchorCtr="0">
+            <a:normAutofit/>
+          </a:bodyPr>
+          <a:lstStyle/>
+          <a:p>
+            <a:pPr marL="0" lvl="0" indent="0" algn="ctr" rtl="0">
+              <a:spcBef>
+                <a:spcPts val="0"/>
+              </a:spcBef>
+              <a:spcAft>
+                <a:spcPts val="0"/>
+              </a:spcAft>
+              <a:buNone/>
+            </a:pPr>
+            <a:r>
+              <a:rPr lang="en" dirty="0"/>
+              <a:t>Daniel Janák</a:t>
+            </a:r>
+            <a:endParaRPr dirty="0"/>
+          </a:p>
+        </p:txBody>
+      </p:sp>
+      <p:sp>
+        <p:nvSpPr>
+          <p:cNvPr id="58" name="Google Shape;58;p13">
+            <a:extLst>
+              <a:ext uri="{FF2B5EF4-FFF2-40B4-BE49-F238E27FC236}">
+                <a16:creationId xmlns:a16="http://schemas.microsoft.com/office/drawing/2014/main" id="{0E6CDF24-FEB3-129E-56E8-828568E3D402}"/>
+              </a:ext>
+            </a:extLst>
+          </p:cNvPr>
+          <p:cNvSpPr txBox="1">
+            <a:spLocks noGrp="1"/>
+          </p:cNvSpPr>
+          <p:nvPr>
+            <p:ph type="body" idx="1"/>
+          </p:nvPr>
+        </p:nvSpPr>
+        <p:spPr>
+          <a:xfrm>
+            <a:off x="5069250" y="724200"/>
+            <a:ext cx="3707400" cy="3695100"/>
+          </a:xfrm>
+          <a:prstGeom prst="rect">
+            <a:avLst/>
+          </a:prstGeom>
+        </p:spPr>
+        <p:txBody>
+          <a:bodyPr spcFirstLastPara="1" wrap="square" lIns="91425" tIns="91425" rIns="91425" bIns="91425" anchor="ctr" anchorCtr="0">
+            <a:normAutofit/>
+          </a:bodyPr>
+          <a:lstStyle/>
+          <a:p>
+            <a:pPr marL="0" lvl="0" indent="0" algn="l" rtl="0">
+              <a:spcBef>
+                <a:spcPts val="0"/>
+              </a:spcBef>
+              <a:spcAft>
+                <a:spcPts val="1200"/>
+              </a:spcAft>
+              <a:buNone/>
+            </a:pPr>
+            <a:endParaRPr/>
+          </a:p>
+        </p:txBody>
+      </p:sp>
+    </p:spTree>
+    <p:extLst>
+      <p:ext uri="{BB962C8B-B14F-4D97-AF65-F5344CB8AC3E}">
+        <p14:creationId xmlns:p14="http://schemas.microsoft.com/office/powerpoint/2010/main" val="1930609151"/>
+      </p:ext>
+    </p:extLst>
+  </p:cSld>
+  <p:clrMapOvr>
+    <a:masterClrMapping/>
+  </p:clrMapOvr>
+</p:sld>
+</file>
+
+<file path=ppt/slides/slide14.xml><?xml version="1.0" encoding="utf-8"?>
+<p:sld xmlns:a="http://schemas.openxmlformats.org/drawingml/2006/main" xmlns:r="http://schemas.openxmlformats.org/officeDocument/2006/relationships" xmlns:p="http://schemas.openxmlformats.org/presentationml/2006/main">
+  <p:cSld>
+    <p:spTree>
+      <p:nvGrpSpPr>
+        <p:cNvPr id="1" name="Shape 62">
+          <a:extLst>
+            <a:ext uri="{FF2B5EF4-FFF2-40B4-BE49-F238E27FC236}">
+              <a16:creationId xmlns:a16="http://schemas.microsoft.com/office/drawing/2014/main" id="{09C1337C-4C6A-8D48-B971-33C07E553E1B}"/>
+            </a:ext>
+          </a:extLst>
+        </p:cNvPr>
+        <p:cNvGrpSpPr/>
+        <p:nvPr/>
+      </p:nvGrpSpPr>
+      <p:grpSpPr>
+        <a:xfrm>
+          <a:off x="0" y="0"/>
+          <a:ext cx="0" cy="0"/>
+          <a:chOff x="0" y="0"/>
+          <a:chExt cx="0" cy="0"/>
+        </a:xfrm>
+      </p:grpSpPr>
+      <p:sp>
+        <p:nvSpPr>
+          <p:cNvPr id="63" name="Google Shape;63;p14">
+            <a:extLst>
+              <a:ext uri="{FF2B5EF4-FFF2-40B4-BE49-F238E27FC236}">
+                <a16:creationId xmlns:a16="http://schemas.microsoft.com/office/drawing/2014/main" id="{4C4F354A-F8AB-5090-A10B-73A06E5ED9C5}"/>
+              </a:ext>
+            </a:extLst>
+          </p:cNvPr>
+          <p:cNvSpPr txBox="1">
+            <a:spLocks noGrp="1"/>
+          </p:cNvSpPr>
+          <p:nvPr>
+            <p:ph type="title"/>
+          </p:nvPr>
+        </p:nvSpPr>
+        <p:spPr>
+          <a:xfrm>
+            <a:off x="311700" y="445025"/>
+            <a:ext cx="8520600" cy="572700"/>
+          </a:xfrm>
+          <a:prstGeom prst="rect">
+            <a:avLst/>
+          </a:prstGeom>
+        </p:spPr>
+        <p:txBody>
+          <a:bodyPr spcFirstLastPara="1" wrap="square" lIns="91425" tIns="91425" rIns="91425" bIns="91425" anchor="t" anchorCtr="0">
+            <a:normAutofit fontScale="90000"/>
+          </a:bodyPr>
+          <a:lstStyle/>
+          <a:p>
+            <a:pPr marL="0" lvl="0" indent="0" algn="l" rtl="0">
+              <a:spcBef>
+                <a:spcPts val="0"/>
+              </a:spcBef>
+              <a:spcAft>
+                <a:spcPts val="0"/>
+              </a:spcAft>
+              <a:buNone/>
+            </a:pPr>
+            <a:r>
+              <a:rPr lang="en" dirty="0"/>
+              <a:t>Content of this lecture</a:t>
+            </a:r>
+            <a:endParaRPr dirty="0"/>
+          </a:p>
+        </p:txBody>
+      </p:sp>
+      <p:sp>
+        <p:nvSpPr>
+          <p:cNvPr id="64" name="Google Shape;64;p14">
+            <a:extLst>
+              <a:ext uri="{FF2B5EF4-FFF2-40B4-BE49-F238E27FC236}">
+                <a16:creationId xmlns:a16="http://schemas.microsoft.com/office/drawing/2014/main" id="{AEC7D755-B090-9C3B-CDAB-6DAC74981ECE}"/>
+              </a:ext>
+            </a:extLst>
+          </p:cNvPr>
+          <p:cNvSpPr txBox="1">
+            <a:spLocks noGrp="1"/>
+          </p:cNvSpPr>
+          <p:nvPr>
+            <p:ph type="title"/>
+          </p:nvPr>
+        </p:nvSpPr>
+        <p:spPr>
+          <a:xfrm>
+            <a:off x="311700" y="1368950"/>
+            <a:ext cx="4260300" cy="3431700"/>
+          </a:xfrm>
+          <a:prstGeom prst="rect">
+            <a:avLst/>
+          </a:prstGeom>
+        </p:spPr>
+        <p:txBody>
+          <a:bodyPr spcFirstLastPara="1" wrap="square" lIns="91425" tIns="91425" rIns="91425" bIns="91425" anchor="t" anchorCtr="0">
+            <a:normAutofit/>
+          </a:bodyPr>
+          <a:lstStyle/>
+          <a:p>
+            <a:pPr marL="114300" lvl="0" algn="l" rtl="0">
+              <a:spcBef>
+                <a:spcPts val="0"/>
+              </a:spcBef>
+              <a:spcAft>
+                <a:spcPts val="0"/>
+              </a:spcAft>
+              <a:buSzPts val="1800"/>
+            </a:pPr>
+            <a:r>
+              <a:rPr lang="sk-SK" sz="1800" dirty="0" err="1"/>
+              <a:t>Basic</a:t>
+            </a:r>
+            <a:r>
+              <a:rPr lang="sk-SK" sz="1800" dirty="0"/>
+              <a:t> </a:t>
+            </a:r>
+            <a:r>
+              <a:rPr lang="sk-SK" sz="1800" dirty="0" err="1"/>
+              <a:t>Layouting</a:t>
+            </a:r>
+            <a:r>
+              <a:rPr lang="sk-SK" sz="1800" dirty="0"/>
+              <a:t> </a:t>
+            </a:r>
+            <a:r>
+              <a:rPr lang="sk-SK" sz="1800" dirty="0" err="1"/>
+              <a:t>Rules</a:t>
+            </a:r>
+            <a:endParaRPr sz="1800" dirty="0"/>
+          </a:p>
+          <a:p>
+            <a:pPr lvl="0" algn="l" rtl="0">
+              <a:spcBef>
+                <a:spcPts val="0"/>
+              </a:spcBef>
+              <a:spcAft>
+                <a:spcPts val="0"/>
+              </a:spcAft>
+            </a:pPr>
+            <a:endParaRPr sz="1800" dirty="0"/>
+          </a:p>
+          <a:p>
+            <a:pPr marL="114300" lvl="0" algn="l" rtl="0">
+              <a:spcBef>
+                <a:spcPts val="0"/>
+              </a:spcBef>
+              <a:spcAft>
+                <a:spcPts val="0"/>
+              </a:spcAft>
+              <a:buSzPts val="1800"/>
+            </a:pPr>
+            <a:r>
+              <a:rPr lang="sk-SK" sz="1800" dirty="0" err="1"/>
+              <a:t>Dos</a:t>
+            </a:r>
+            <a:r>
+              <a:rPr lang="sk-SK" sz="1800" dirty="0"/>
+              <a:t> And </a:t>
+            </a:r>
+            <a:r>
+              <a:rPr lang="sk-SK" sz="1800" dirty="0" err="1"/>
+              <a:t>Donts</a:t>
+            </a:r>
+            <a:br>
+              <a:rPr lang="sk-SK" sz="1800" dirty="0"/>
+            </a:br>
+            <a:r>
+              <a:rPr lang="sk-SK" sz="1800" dirty="0" err="1"/>
+              <a:t>ListViews</a:t>
+            </a:r>
+            <a:endParaRPr sz="1800" dirty="0"/>
+          </a:p>
+          <a:p>
+            <a:pPr marL="114300" lvl="0" algn="l" rtl="0">
+              <a:spcBef>
+                <a:spcPts val="0"/>
+              </a:spcBef>
+              <a:spcAft>
+                <a:spcPts val="0"/>
+              </a:spcAft>
+              <a:buSzPts val="1800"/>
+            </a:pPr>
+            <a:r>
+              <a:rPr lang="en" sz="1800" dirty="0"/>
+              <a:t>Materials</a:t>
+            </a:r>
+            <a:br>
+              <a:rPr lang="en" sz="1800" dirty="0"/>
+            </a:br>
+            <a:r>
+              <a:rPr lang="en" sz="1800" dirty="0"/>
+              <a:t>Performance</a:t>
+            </a:r>
+            <a:endParaRPr sz="1800" dirty="0"/>
+          </a:p>
+        </p:txBody>
+      </p:sp>
+      <p:sp>
+        <p:nvSpPr>
+          <p:cNvPr id="3" name="Title 2">
+            <a:extLst>
+              <a:ext uri="{FF2B5EF4-FFF2-40B4-BE49-F238E27FC236}">
+                <a16:creationId xmlns:a16="http://schemas.microsoft.com/office/drawing/2014/main" id="{F9FE8D67-3F73-5A47-D192-76D964D82A5B}"/>
+              </a:ext>
+            </a:extLst>
+          </p:cNvPr>
+          <p:cNvSpPr>
+            <a:spLocks noGrp="1"/>
+          </p:cNvSpPr>
+          <p:nvPr>
+            <p:ph type="title"/>
+          </p:nvPr>
+        </p:nvSpPr>
+        <p:spPr/>
+        <p:txBody>
+          <a:bodyPr>
+            <a:normAutofit fontScale="90000"/>
+          </a:bodyPr>
+          <a:lstStyle/>
+          <a:p>
+            <a:endParaRPr lang="en-US"/>
+          </a:p>
+        </p:txBody>
+      </p:sp>
+    </p:spTree>
+    <p:extLst>
+      <p:ext uri="{BB962C8B-B14F-4D97-AF65-F5344CB8AC3E}">
+        <p14:creationId xmlns:p14="http://schemas.microsoft.com/office/powerpoint/2010/main" val="4177768662"/>
+      </p:ext>
+    </p:extLst>
+  </p:cSld>
+  <p:clrMapOvr>
+    <a:masterClrMapping/>
+  </p:clrMapOvr>
+</p:sld>
+</file>
+
+<file path=ppt/slides/slide15.xml><?xml version="1.0" encoding="utf-8"?>
+<p:sld xmlns:a="http://schemas.openxmlformats.org/drawingml/2006/main" xmlns:r="http://schemas.openxmlformats.org/officeDocument/2006/relationships" xmlns:p="http://schemas.openxmlformats.org/presentationml/2006/main">
+  <p:cSld>
+    <p:spTree>
+      <p:nvGrpSpPr>
+        <p:cNvPr id="1" name="Shape 78">
+          <a:extLst>
+            <a:ext uri="{FF2B5EF4-FFF2-40B4-BE49-F238E27FC236}">
+              <a16:creationId xmlns:a16="http://schemas.microsoft.com/office/drawing/2014/main" id="{64CFEE62-2C54-68F3-6017-DAEED31CD63B}"/>
+            </a:ext>
+          </a:extLst>
+        </p:cNvPr>
+        <p:cNvGrpSpPr/>
+        <p:nvPr/>
+      </p:nvGrpSpPr>
+      <p:grpSpPr>
+        <a:xfrm>
+          <a:off x="0" y="0"/>
+          <a:ext cx="0" cy="0"/>
+          <a:chOff x="0" y="0"/>
+          <a:chExt cx="0" cy="0"/>
+        </a:xfrm>
+      </p:grpSpPr>
+      <p:sp>
+        <p:nvSpPr>
+          <p:cNvPr id="79" name="Google Shape;79;p16">
+            <a:extLst>
+              <a:ext uri="{FF2B5EF4-FFF2-40B4-BE49-F238E27FC236}">
+                <a16:creationId xmlns:a16="http://schemas.microsoft.com/office/drawing/2014/main" id="{AF45D6F4-450E-696C-D5FA-68F2FB56B610}"/>
+              </a:ext>
+            </a:extLst>
+          </p:cNvPr>
+          <p:cNvSpPr txBox="1">
+            <a:spLocks noGrp="1"/>
+          </p:cNvSpPr>
+          <p:nvPr>
+            <p:ph type="title"/>
+          </p:nvPr>
+        </p:nvSpPr>
+        <p:spPr>
+          <a:xfrm>
+            <a:off x="311700" y="445025"/>
+            <a:ext cx="4388611" cy="1150862"/>
+          </a:xfrm>
+          <a:prstGeom prst="rect">
+            <a:avLst/>
+          </a:prstGeom>
+        </p:spPr>
+        <p:txBody>
+          <a:bodyPr spcFirstLastPara="1" wrap="square" lIns="91425" tIns="91425" rIns="91425" bIns="91425" anchor="t" anchorCtr="0">
+            <a:normAutofit/>
+          </a:bodyPr>
+          <a:lstStyle/>
+          <a:p>
+            <a:pPr marL="0" lvl="0" indent="0" algn="l" rtl="0">
+              <a:spcBef>
+                <a:spcPts val="0"/>
+              </a:spcBef>
+              <a:spcAft>
+                <a:spcPts val="0"/>
+              </a:spcAft>
+              <a:buNone/>
+            </a:pPr>
+            <a:r>
+              <a:rPr lang="en" dirty="0"/>
+              <a:t>Dos and </a:t>
+            </a:r>
+            <a:r>
+              <a:rPr lang="en" dirty="0" err="1"/>
+              <a:t>Donts</a:t>
+            </a:r>
+            <a:endParaRPr dirty="0"/>
+          </a:p>
+        </p:txBody>
+      </p:sp>
+      <p:sp>
+        <p:nvSpPr>
+          <p:cNvPr id="80" name="Google Shape;80;p16">
+            <a:extLst>
+              <a:ext uri="{FF2B5EF4-FFF2-40B4-BE49-F238E27FC236}">
+                <a16:creationId xmlns:a16="http://schemas.microsoft.com/office/drawing/2014/main" id="{87528E94-1EFC-8C06-B987-EF9B2C18372E}"/>
+              </a:ext>
+            </a:extLst>
+          </p:cNvPr>
+          <p:cNvSpPr txBox="1">
+            <a:spLocks noGrp="1"/>
+          </p:cNvSpPr>
+          <p:nvPr>
+            <p:ph type="title"/>
+          </p:nvPr>
+        </p:nvSpPr>
+        <p:spPr>
+          <a:xfrm>
+            <a:off x="311701" y="1201783"/>
+            <a:ext cx="4130904" cy="3749779"/>
+          </a:xfrm>
+          <a:prstGeom prst="rect">
+            <a:avLst/>
+          </a:prstGeom>
+        </p:spPr>
+        <p:txBody>
+          <a:bodyPr spcFirstLastPara="1" wrap="square" lIns="91425" tIns="91425" rIns="91425" bIns="91425" anchor="t" anchorCtr="0">
+            <a:normAutofit/>
+          </a:bodyPr>
+          <a:lstStyle/>
+          <a:p>
+            <a:pPr marL="114300" lvl="0">
+              <a:buSzPts val="1800"/>
+            </a:pPr>
+            <a:r>
+              <a:rPr lang="sk-SK" sz="1800" dirty="0" err="1"/>
+              <a:t>Reuse</a:t>
+            </a:r>
+            <a:r>
+              <a:rPr lang="sk-SK" sz="1800" dirty="0"/>
+              <a:t> </a:t>
+            </a:r>
+            <a:r>
+              <a:rPr lang="sk-SK" sz="1800" dirty="0" err="1"/>
+              <a:t>widgets</a:t>
+            </a:r>
+            <a:r>
+              <a:rPr lang="sk-SK" sz="1800" dirty="0"/>
+              <a:t> </a:t>
+            </a:r>
+            <a:r>
+              <a:rPr lang="sk-SK" sz="1800" dirty="0" err="1"/>
+              <a:t>whenever</a:t>
+            </a:r>
+            <a:r>
+              <a:rPr lang="sk-SK" sz="1800" dirty="0"/>
+              <a:t> </a:t>
+            </a:r>
+            <a:r>
+              <a:rPr lang="sk-SK" sz="1800" dirty="0" err="1"/>
+              <a:t>possible</a:t>
+            </a:r>
+            <a:br>
+              <a:rPr lang="sk-SK" sz="1800" dirty="0"/>
+            </a:br>
+            <a:br>
+              <a:rPr lang="sk-SK" sz="1800" dirty="0"/>
+            </a:br>
+            <a:r>
+              <a:rPr lang="sk-SK" sz="1800" dirty="0" err="1"/>
+              <a:t>Instantiate</a:t>
+            </a:r>
+            <a:r>
+              <a:rPr lang="sk-SK" sz="1800" dirty="0"/>
+              <a:t> </a:t>
+            </a:r>
+            <a:r>
+              <a:rPr lang="sk-SK" sz="1800" dirty="0" err="1"/>
+              <a:t>Widgets</a:t>
+            </a:r>
+            <a:r>
+              <a:rPr lang="sk-SK" sz="1800" dirty="0"/>
+              <a:t> on </a:t>
+            </a:r>
+            <a:r>
+              <a:rPr lang="sk-SK" sz="1800" dirty="0" err="1"/>
+              <a:t>demand</a:t>
+            </a:r>
+            <a:br>
+              <a:rPr lang="sk-SK" sz="1800" dirty="0"/>
+            </a:br>
+            <a:br>
+              <a:rPr lang="en-US" sz="1800" dirty="0"/>
+            </a:br>
+            <a:r>
+              <a:rPr lang="en-US" sz="1800" dirty="0"/>
+              <a:t>Cleanup after yourself</a:t>
+            </a:r>
+            <a:br>
+              <a:rPr lang="en-US" sz="1800" dirty="0"/>
+            </a:br>
+            <a:br>
+              <a:rPr lang="en-US" sz="1800" dirty="0"/>
+            </a:br>
+            <a:r>
+              <a:rPr lang="en-US" sz="1800" dirty="0"/>
+              <a:t>Do not access widget properties outside of their scope</a:t>
+            </a:r>
+            <a:br>
+              <a:rPr lang="en-US" sz="1800" dirty="0"/>
+            </a:br>
+            <a:r>
+              <a:rPr lang="en-US" sz="1800" dirty="0"/>
+              <a:t> </a:t>
+            </a:r>
+            <a:br>
+              <a:rPr lang="en-US" sz="1800" dirty="0"/>
+            </a:br>
+            <a:r>
+              <a:rPr lang="en-US" sz="1800" dirty="0"/>
+              <a:t>Avoid getting data in Tick</a:t>
+            </a:r>
+            <a:br>
+              <a:rPr lang="en-US" sz="1800" dirty="0"/>
+            </a:br>
+            <a:br>
+              <a:rPr lang="en-US" sz="1800" dirty="0"/>
+            </a:br>
+            <a:r>
+              <a:rPr lang="en-US" sz="1800" u="sng" dirty="0">
+                <a:solidFill>
+                  <a:schemeClr val="hlink"/>
+                </a:solidFill>
+                <a:hlinkClick r:id="rId3"/>
+              </a:rPr>
+              <a:t>Basic Optimizations</a:t>
+            </a:r>
+            <a:endParaRPr sz="1800" dirty="0"/>
+          </a:p>
+        </p:txBody>
+      </p:sp>
+    </p:spTree>
+    <p:extLst>
+      <p:ext uri="{BB962C8B-B14F-4D97-AF65-F5344CB8AC3E}">
+        <p14:creationId xmlns:p14="http://schemas.microsoft.com/office/powerpoint/2010/main" val="3170702348"/>
+      </p:ext>
+    </p:extLst>
+  </p:cSld>
+  <p:clrMapOvr>
+    <a:masterClrMapping/>
+  </p:clrMapOvr>
+</p:sld>
+</file>
+
+<file path=ppt/slides/slide16.xml><?xml version="1.0" encoding="utf-8"?>
+<p:sld xmlns:a="http://schemas.openxmlformats.org/drawingml/2006/main" xmlns:r="http://schemas.openxmlformats.org/officeDocument/2006/relationships" xmlns:p="http://schemas.openxmlformats.org/presentationml/2006/main">
+  <p:cSld>
+    <p:spTree>
+      <p:nvGrpSpPr>
+        <p:cNvPr id="1" name="">
+          <a:extLst>
+            <a:ext uri="{FF2B5EF4-FFF2-40B4-BE49-F238E27FC236}">
+              <a16:creationId xmlns:a16="http://schemas.microsoft.com/office/drawing/2014/main" id="{C1FF0C61-5979-1D20-795D-2D7E6FD90F61}"/>
+            </a:ext>
+          </a:extLst>
+        </p:cNvPr>
+        <p:cNvGrpSpPr/>
+        <p:nvPr/>
+      </p:nvGrpSpPr>
+      <p:grpSpPr>
+        <a:xfrm>
+          <a:off x="0" y="0"/>
+          <a:ext cx="0" cy="0"/>
+          <a:chOff x="0" y="0"/>
+          <a:chExt cx="0" cy="0"/>
+        </a:xfrm>
+      </p:grpSpPr>
+      <p:sp>
+        <p:nvSpPr>
+          <p:cNvPr id="2" name="Title 1">
+            <a:extLst>
+              <a:ext uri="{FF2B5EF4-FFF2-40B4-BE49-F238E27FC236}">
+                <a16:creationId xmlns:a16="http://schemas.microsoft.com/office/drawing/2014/main" id="{EF481FDE-5224-C3A2-940E-9330ADB815D1}"/>
+              </a:ext>
+            </a:extLst>
+          </p:cNvPr>
+          <p:cNvSpPr>
+            <a:spLocks noGrp="1"/>
+          </p:cNvSpPr>
+          <p:nvPr>
+            <p:ph type="title"/>
+          </p:nvPr>
+        </p:nvSpPr>
+        <p:spPr/>
+        <p:txBody>
+          <a:bodyPr>
+            <a:normAutofit fontScale="90000"/>
+          </a:bodyPr>
+          <a:lstStyle/>
+          <a:p>
+            <a:r>
+              <a:rPr lang="en-US" dirty="0" err="1"/>
+              <a:t>ListView</a:t>
+            </a:r>
+            <a:endParaRPr lang="en-US" dirty="0"/>
+          </a:p>
+        </p:txBody>
+      </p:sp>
+      <p:sp>
+        <p:nvSpPr>
+          <p:cNvPr id="3" name="Google Shape;133;p21">
+            <a:extLst>
+              <a:ext uri="{FF2B5EF4-FFF2-40B4-BE49-F238E27FC236}">
+                <a16:creationId xmlns:a16="http://schemas.microsoft.com/office/drawing/2014/main" id="{B6EA4CD9-A87E-B61B-E91E-34364C7888ED}"/>
+              </a:ext>
+            </a:extLst>
+          </p:cNvPr>
+          <p:cNvSpPr txBox="1">
+            <a:spLocks/>
+          </p:cNvSpPr>
+          <p:nvPr/>
+        </p:nvSpPr>
+        <p:spPr>
+          <a:xfrm>
+            <a:off x="311700" y="1368950"/>
+            <a:ext cx="8520600" cy="3431700"/>
+          </a:xfrm>
+          <a:prstGeom prst="rect">
+            <a:avLst/>
+          </a:prstGeom>
+          <a:noFill/>
+          <a:ln>
+            <a:noFill/>
+          </a:ln>
+        </p:spPr>
+        <p:txBody>
+          <a:bodyPr spcFirstLastPara="1" wrap="square" lIns="91425" tIns="91425" rIns="91425" bIns="91425" anchor="t" anchorCtr="0">
+            <a:normAutofit/>
+          </a:bodyPr>
+          <a:lstStyle>
+            <a:defPPr marR="0" lvl="0" algn="l" rtl="0">
+              <a:lnSpc>
+                <a:spcPct val="100000"/>
+              </a:lnSpc>
+              <a:spcBef>
+                <a:spcPts val="0"/>
+              </a:spcBef>
+              <a:spcAft>
+                <a:spcPts val="0"/>
+              </a:spcAft>
+            </a:defPPr>
+            <a:lvl1pPr marR="0" lvl="0" algn="l" rtl="0">
+              <a:lnSpc>
+                <a:spcPct val="100000"/>
+              </a:lnSpc>
+              <a:spcBef>
+                <a:spcPts val="0"/>
+              </a:spcBef>
+              <a:spcAft>
+                <a:spcPts val="0"/>
+              </a:spcAft>
+              <a:buClr>
+                <a:schemeClr val="dk1"/>
+              </a:buClr>
+              <a:buSzPts val="2800"/>
+              <a:buFont typeface="Arial"/>
+              <a:buNone/>
+              <a:defRPr sz="2800" b="0" i="0" u="none" strike="noStrike" cap="none">
+                <a:solidFill>
+                  <a:schemeClr val="dk1"/>
+                </a:solidFill>
+                <a:latin typeface="Arial"/>
+                <a:ea typeface="Arial"/>
+                <a:cs typeface="Arial"/>
+                <a:sym typeface="Arial"/>
+              </a:defRPr>
+            </a:lvl1pPr>
+            <a:lvl2pPr marR="0" lvl="1" algn="l" rtl="0">
+              <a:lnSpc>
+                <a:spcPct val="100000"/>
+              </a:lnSpc>
+              <a:spcBef>
+                <a:spcPts val="0"/>
+              </a:spcBef>
+              <a:spcAft>
+                <a:spcPts val="0"/>
+              </a:spcAft>
+              <a:buClr>
+                <a:schemeClr val="dk1"/>
+              </a:buClr>
+              <a:buSzPts val="2800"/>
+              <a:buFont typeface="Arial"/>
+              <a:buNone/>
+              <a:defRPr sz="2800" b="0" i="0" u="none" strike="noStrike" cap="none">
+                <a:solidFill>
+                  <a:schemeClr val="dk1"/>
+                </a:solidFill>
+                <a:latin typeface="Arial"/>
+                <a:ea typeface="Arial"/>
+                <a:cs typeface="Arial"/>
+                <a:sym typeface="Arial"/>
+              </a:defRPr>
+            </a:lvl2pPr>
+            <a:lvl3pPr marR="0" lvl="2" algn="l" rtl="0">
+              <a:lnSpc>
+                <a:spcPct val="100000"/>
+              </a:lnSpc>
+              <a:spcBef>
+                <a:spcPts val="0"/>
+              </a:spcBef>
+              <a:spcAft>
+                <a:spcPts val="0"/>
+              </a:spcAft>
+              <a:buClr>
+                <a:schemeClr val="dk1"/>
+              </a:buClr>
+              <a:buSzPts val="2800"/>
+              <a:buFont typeface="Arial"/>
+              <a:buNone/>
+              <a:defRPr sz="2800" b="0" i="0" u="none" strike="noStrike" cap="none">
+                <a:solidFill>
+                  <a:schemeClr val="dk1"/>
+                </a:solidFill>
+                <a:latin typeface="Arial"/>
+                <a:ea typeface="Arial"/>
+                <a:cs typeface="Arial"/>
+                <a:sym typeface="Arial"/>
+              </a:defRPr>
+            </a:lvl3pPr>
+            <a:lvl4pPr marR="0" lvl="3" algn="l" rtl="0">
+              <a:lnSpc>
+                <a:spcPct val="100000"/>
+              </a:lnSpc>
+              <a:spcBef>
+                <a:spcPts val="0"/>
+              </a:spcBef>
+              <a:spcAft>
+                <a:spcPts val="0"/>
+              </a:spcAft>
+              <a:buClr>
+                <a:schemeClr val="dk1"/>
+              </a:buClr>
+              <a:buSzPts val="2800"/>
+              <a:buFont typeface="Arial"/>
+              <a:buNone/>
+              <a:defRPr sz="2800" b="0" i="0" u="none" strike="noStrike" cap="none">
+                <a:solidFill>
+                  <a:schemeClr val="dk1"/>
+                </a:solidFill>
+                <a:latin typeface="Arial"/>
+                <a:ea typeface="Arial"/>
+                <a:cs typeface="Arial"/>
+                <a:sym typeface="Arial"/>
+              </a:defRPr>
+            </a:lvl4pPr>
+            <a:lvl5pPr marR="0" lvl="4" algn="l" rtl="0">
+              <a:lnSpc>
+                <a:spcPct val="100000"/>
+              </a:lnSpc>
+              <a:spcBef>
+                <a:spcPts val="0"/>
+              </a:spcBef>
+              <a:spcAft>
+                <a:spcPts val="0"/>
+              </a:spcAft>
+              <a:buClr>
+                <a:schemeClr val="dk1"/>
+              </a:buClr>
+              <a:buSzPts val="2800"/>
+              <a:buFont typeface="Arial"/>
+              <a:buNone/>
+              <a:defRPr sz="2800" b="0" i="0" u="none" strike="noStrike" cap="none">
+                <a:solidFill>
+                  <a:schemeClr val="dk1"/>
+                </a:solidFill>
+                <a:latin typeface="Arial"/>
+                <a:ea typeface="Arial"/>
+                <a:cs typeface="Arial"/>
+                <a:sym typeface="Arial"/>
+              </a:defRPr>
+            </a:lvl5pPr>
+            <a:lvl6pPr marR="0" lvl="5" algn="l" rtl="0">
+              <a:lnSpc>
+                <a:spcPct val="100000"/>
+              </a:lnSpc>
+              <a:spcBef>
+                <a:spcPts val="0"/>
+              </a:spcBef>
+              <a:spcAft>
+                <a:spcPts val="0"/>
+              </a:spcAft>
+              <a:buClr>
+                <a:schemeClr val="dk1"/>
+              </a:buClr>
+              <a:buSzPts val="2800"/>
+              <a:buFont typeface="Arial"/>
+              <a:buNone/>
+              <a:defRPr sz="2800" b="0" i="0" u="none" strike="noStrike" cap="none">
+                <a:solidFill>
+                  <a:schemeClr val="dk1"/>
+                </a:solidFill>
+                <a:latin typeface="Arial"/>
+                <a:ea typeface="Arial"/>
+                <a:cs typeface="Arial"/>
+                <a:sym typeface="Arial"/>
+              </a:defRPr>
+            </a:lvl6pPr>
+            <a:lvl7pPr marR="0" lvl="6" algn="l" rtl="0">
+              <a:lnSpc>
+                <a:spcPct val="100000"/>
+              </a:lnSpc>
+              <a:spcBef>
+                <a:spcPts val="0"/>
+              </a:spcBef>
+              <a:spcAft>
+                <a:spcPts val="0"/>
+              </a:spcAft>
+              <a:buClr>
+                <a:schemeClr val="dk1"/>
+              </a:buClr>
+              <a:buSzPts val="2800"/>
+              <a:buFont typeface="Arial"/>
+              <a:buNone/>
+              <a:defRPr sz="2800" b="0" i="0" u="none" strike="noStrike" cap="none">
+                <a:solidFill>
+                  <a:schemeClr val="dk1"/>
+                </a:solidFill>
+                <a:latin typeface="Arial"/>
+                <a:ea typeface="Arial"/>
+                <a:cs typeface="Arial"/>
+                <a:sym typeface="Arial"/>
+              </a:defRPr>
+            </a:lvl7pPr>
+            <a:lvl8pPr marR="0" lvl="7" algn="l" rtl="0">
+              <a:lnSpc>
+                <a:spcPct val="100000"/>
+              </a:lnSpc>
+              <a:spcBef>
+                <a:spcPts val="0"/>
+              </a:spcBef>
+              <a:spcAft>
+                <a:spcPts val="0"/>
+              </a:spcAft>
+              <a:buClr>
+                <a:schemeClr val="dk1"/>
+              </a:buClr>
+              <a:buSzPts val="2800"/>
+              <a:buFont typeface="Arial"/>
+              <a:buNone/>
+              <a:defRPr sz="2800" b="0" i="0" u="none" strike="noStrike" cap="none">
+                <a:solidFill>
+                  <a:schemeClr val="dk1"/>
+                </a:solidFill>
+                <a:latin typeface="Arial"/>
+                <a:ea typeface="Arial"/>
+                <a:cs typeface="Arial"/>
+                <a:sym typeface="Arial"/>
+              </a:defRPr>
+            </a:lvl8pPr>
+            <a:lvl9pPr marR="0" lvl="8" algn="l" rtl="0">
+              <a:lnSpc>
+                <a:spcPct val="100000"/>
+              </a:lnSpc>
+              <a:spcBef>
+                <a:spcPts val="0"/>
+              </a:spcBef>
+              <a:spcAft>
+                <a:spcPts val="0"/>
+              </a:spcAft>
+              <a:buClr>
+                <a:schemeClr val="dk1"/>
+              </a:buClr>
+              <a:buSzPts val="2800"/>
+              <a:buFont typeface="Arial"/>
+              <a:buNone/>
+              <a:defRPr sz="2800" b="0" i="0" u="none" strike="noStrike" cap="none">
+                <a:solidFill>
+                  <a:schemeClr val="dk1"/>
+                </a:solidFill>
+                <a:latin typeface="Arial"/>
+                <a:ea typeface="Arial"/>
+                <a:cs typeface="Arial"/>
+                <a:sym typeface="Arial"/>
+              </a:defRPr>
+            </a:lvl9pPr>
+          </a:lstStyle>
+          <a:p>
+            <a:pPr marL="114300">
+              <a:buSzPts val="1800"/>
+            </a:pPr>
+            <a:r>
+              <a:rPr lang="en-US" sz="1800" dirty="0"/>
+              <a:t>Scrollable containers that pool widgets and reuse them</a:t>
+            </a:r>
+          </a:p>
+          <a:p>
+            <a:pPr marL="400050" indent="-285750">
+              <a:buSzPts val="1800"/>
+              <a:buFontTx/>
+              <a:buChar char="-"/>
+            </a:pPr>
+            <a:r>
+              <a:rPr lang="en-US" sz="1800" dirty="0" err="1"/>
+              <a:t>ListView</a:t>
+            </a:r>
+            <a:endParaRPr lang="en-US" sz="1800" dirty="0"/>
+          </a:p>
+          <a:p>
+            <a:pPr marL="400050" indent="-285750">
+              <a:buSzPts val="1800"/>
+              <a:buFontTx/>
+              <a:buChar char="-"/>
+            </a:pPr>
+            <a:r>
+              <a:rPr lang="en-US" sz="1800" dirty="0" err="1"/>
+              <a:t>TileView</a:t>
+            </a:r>
+            <a:endParaRPr lang="en-US" sz="1800" dirty="0"/>
+          </a:p>
+          <a:p>
+            <a:pPr marL="400050" indent="-285750">
+              <a:buSzPts val="1800"/>
+              <a:buFontTx/>
+              <a:buChar char="-"/>
+            </a:pPr>
+            <a:r>
+              <a:rPr lang="en-US" sz="1800" dirty="0" err="1"/>
+              <a:t>TreeView</a:t>
+            </a:r>
+            <a:endParaRPr lang="en-US" sz="1800" dirty="0"/>
+          </a:p>
+          <a:p>
+            <a:pPr marL="400050" indent="-285750">
+              <a:buSzPts val="1800"/>
+              <a:buFontTx/>
+              <a:buChar char="-"/>
+            </a:pPr>
+            <a:endParaRPr lang="en-US" sz="1800" dirty="0"/>
+          </a:p>
+          <a:p>
+            <a:pPr marL="114300">
+              <a:buSzPts val="1800"/>
+            </a:pPr>
+            <a:r>
+              <a:rPr lang="en-US" sz="1800" dirty="0"/>
+              <a:t>Difference from classic </a:t>
+            </a:r>
+            <a:r>
+              <a:rPr lang="en-US" sz="1800" dirty="0" err="1"/>
+              <a:t>scrollboxes</a:t>
+            </a:r>
+            <a:endParaRPr lang="en-US" sz="1800" dirty="0"/>
+          </a:p>
+          <a:p>
+            <a:pPr marL="400050" indent="-285750">
+              <a:buSzPts val="1800"/>
+              <a:buFontTx/>
+              <a:buChar char="-"/>
+            </a:pPr>
+            <a:r>
+              <a:rPr lang="en-US" sz="1800" dirty="0"/>
+              <a:t>Data and Widgets are separated</a:t>
+            </a:r>
+          </a:p>
+          <a:p>
+            <a:pPr marL="400050" indent="-285750">
+              <a:buSzPts val="1800"/>
+              <a:buFontTx/>
+              <a:buChar char="-"/>
+            </a:pPr>
+            <a:r>
+              <a:rPr lang="en-US" sz="1800" dirty="0" err="1"/>
+              <a:t>Selectability</a:t>
+            </a:r>
+            <a:r>
+              <a:rPr lang="en-US" sz="1800" dirty="0"/>
+              <a:t> of Data instead of Widgets</a:t>
+            </a:r>
+          </a:p>
+          <a:p>
+            <a:pPr marL="400050" indent="-285750">
+              <a:buSzPts val="1800"/>
+              <a:buFontTx/>
+              <a:buChar char="-"/>
+            </a:pPr>
+            <a:r>
+              <a:rPr lang="en-US" sz="1800" dirty="0"/>
+              <a:t>Better </a:t>
+            </a:r>
+            <a:r>
+              <a:rPr lang="en-US" sz="1800" dirty="0" err="1"/>
+              <a:t>autoscroll</a:t>
+            </a:r>
+            <a:endParaRPr lang="en-US" sz="1800" dirty="0"/>
+          </a:p>
+          <a:p>
+            <a:pPr marL="400050" indent="-285750">
+              <a:buSzPts val="1800"/>
+              <a:buFontTx/>
+              <a:buChar char="-"/>
+            </a:pPr>
+            <a:r>
+              <a:rPr lang="en-US" sz="1800" dirty="0"/>
+              <a:t>Can be combined with buttons</a:t>
+            </a:r>
+          </a:p>
+          <a:p>
+            <a:pPr marL="114300">
+              <a:buSzPts val="1800"/>
+            </a:pPr>
+            <a:endParaRPr lang="en-US" sz="1800" dirty="0"/>
+          </a:p>
+        </p:txBody>
+      </p:sp>
+    </p:spTree>
+    <p:extLst>
+      <p:ext uri="{BB962C8B-B14F-4D97-AF65-F5344CB8AC3E}">
+        <p14:creationId xmlns:p14="http://schemas.microsoft.com/office/powerpoint/2010/main" val="2639133885"/>
+      </p:ext>
+    </p:extLst>
+  </p:cSld>
+  <p:clrMapOvr>
+    <a:masterClrMapping/>
+  </p:clrMapOvr>
+</p:sld>
+</file>
+
+<file path=ppt/slides/slide17.xml><?xml version="1.0" encoding="utf-8"?>
+<p:sld xmlns:a="http://schemas.openxmlformats.org/drawingml/2006/main" xmlns:r="http://schemas.openxmlformats.org/officeDocument/2006/relationships" xmlns:p="http://schemas.openxmlformats.org/presentationml/2006/main">
+  <p:cSld>
+    <p:spTree>
+      <p:nvGrpSpPr>
+        <p:cNvPr id="1" name="">
+          <a:extLst>
+            <a:ext uri="{FF2B5EF4-FFF2-40B4-BE49-F238E27FC236}">
+              <a16:creationId xmlns:a16="http://schemas.microsoft.com/office/drawing/2014/main" id="{D63E33D4-1968-7E72-862D-407A735B9B41}"/>
+            </a:ext>
+          </a:extLst>
+        </p:cNvPr>
+        <p:cNvGrpSpPr/>
+        <p:nvPr/>
+      </p:nvGrpSpPr>
+      <p:grpSpPr>
+        <a:xfrm>
+          <a:off x="0" y="0"/>
+          <a:ext cx="0" cy="0"/>
+          <a:chOff x="0" y="0"/>
+          <a:chExt cx="0" cy="0"/>
+        </a:xfrm>
+      </p:grpSpPr>
+      <p:sp>
+        <p:nvSpPr>
+          <p:cNvPr id="2" name="Title 1">
+            <a:extLst>
+              <a:ext uri="{FF2B5EF4-FFF2-40B4-BE49-F238E27FC236}">
+                <a16:creationId xmlns:a16="http://schemas.microsoft.com/office/drawing/2014/main" id="{417D6A2E-0995-01CA-2795-5AA435B6785B}"/>
+              </a:ext>
+            </a:extLst>
+          </p:cNvPr>
+          <p:cNvSpPr>
+            <a:spLocks noGrp="1"/>
+          </p:cNvSpPr>
+          <p:nvPr>
+            <p:ph type="title"/>
+          </p:nvPr>
+        </p:nvSpPr>
+        <p:spPr/>
+        <p:txBody>
+          <a:bodyPr>
+            <a:normAutofit fontScale="90000"/>
+          </a:bodyPr>
+          <a:lstStyle/>
+          <a:p>
+            <a:r>
+              <a:rPr lang="en-US" dirty="0"/>
+              <a:t>Materials and Performance</a:t>
+            </a:r>
+          </a:p>
+        </p:txBody>
+      </p:sp>
+      <p:sp>
+        <p:nvSpPr>
+          <p:cNvPr id="3" name="Google Shape;133;p21">
+            <a:extLst>
+              <a:ext uri="{FF2B5EF4-FFF2-40B4-BE49-F238E27FC236}">
+                <a16:creationId xmlns:a16="http://schemas.microsoft.com/office/drawing/2014/main" id="{40CDFFA2-9F26-DA83-AE3E-464A8A839C59}"/>
+              </a:ext>
+            </a:extLst>
+          </p:cNvPr>
+          <p:cNvSpPr txBox="1">
+            <a:spLocks/>
+          </p:cNvSpPr>
+          <p:nvPr/>
+        </p:nvSpPr>
+        <p:spPr>
+          <a:xfrm>
+            <a:off x="311700" y="1368950"/>
+            <a:ext cx="8520600" cy="3431700"/>
+          </a:xfrm>
+          <a:prstGeom prst="rect">
+            <a:avLst/>
+          </a:prstGeom>
+          <a:noFill/>
+          <a:ln>
+            <a:noFill/>
+          </a:ln>
+        </p:spPr>
+        <p:txBody>
+          <a:bodyPr spcFirstLastPara="1" wrap="square" lIns="91425" tIns="91425" rIns="91425" bIns="91425" anchor="t" anchorCtr="0">
+            <a:normAutofit/>
+          </a:bodyPr>
+          <a:lstStyle>
+            <a:defPPr marR="0" lvl="0" algn="l" rtl="0">
+              <a:lnSpc>
+                <a:spcPct val="100000"/>
+              </a:lnSpc>
+              <a:spcBef>
+                <a:spcPts val="0"/>
+              </a:spcBef>
+              <a:spcAft>
+                <a:spcPts val="0"/>
+              </a:spcAft>
+            </a:defPPr>
+            <a:lvl1pPr marR="0" lvl="0" algn="l" rtl="0">
+              <a:lnSpc>
+                <a:spcPct val="100000"/>
+              </a:lnSpc>
+              <a:spcBef>
+                <a:spcPts val="0"/>
+              </a:spcBef>
+              <a:spcAft>
+                <a:spcPts val="0"/>
+              </a:spcAft>
+              <a:buClr>
+                <a:schemeClr val="dk1"/>
+              </a:buClr>
+              <a:buSzPts val="2800"/>
+              <a:buFont typeface="Arial"/>
+              <a:buNone/>
+              <a:defRPr sz="2800" b="0" i="0" u="none" strike="noStrike" cap="none">
+                <a:solidFill>
+                  <a:schemeClr val="dk1"/>
+                </a:solidFill>
+                <a:latin typeface="Arial"/>
+                <a:ea typeface="Arial"/>
+                <a:cs typeface="Arial"/>
+                <a:sym typeface="Arial"/>
+              </a:defRPr>
+            </a:lvl1pPr>
+            <a:lvl2pPr marR="0" lvl="1" algn="l" rtl="0">
+              <a:lnSpc>
+                <a:spcPct val="100000"/>
+              </a:lnSpc>
+              <a:spcBef>
+                <a:spcPts val="0"/>
+              </a:spcBef>
+              <a:spcAft>
+                <a:spcPts val="0"/>
+              </a:spcAft>
+              <a:buClr>
+                <a:schemeClr val="dk1"/>
+              </a:buClr>
+              <a:buSzPts val="2800"/>
+              <a:buFont typeface="Arial"/>
+              <a:buNone/>
+              <a:defRPr sz="2800" b="0" i="0" u="none" strike="noStrike" cap="none">
+                <a:solidFill>
+                  <a:schemeClr val="dk1"/>
+                </a:solidFill>
+                <a:latin typeface="Arial"/>
+                <a:ea typeface="Arial"/>
+                <a:cs typeface="Arial"/>
+                <a:sym typeface="Arial"/>
+              </a:defRPr>
+            </a:lvl2pPr>
+            <a:lvl3pPr marR="0" lvl="2" algn="l" rtl="0">
+              <a:lnSpc>
+                <a:spcPct val="100000"/>
+              </a:lnSpc>
+              <a:spcBef>
+                <a:spcPts val="0"/>
+              </a:spcBef>
+              <a:spcAft>
+                <a:spcPts val="0"/>
+              </a:spcAft>
+              <a:buClr>
+                <a:schemeClr val="dk1"/>
+              </a:buClr>
+              <a:buSzPts val="2800"/>
+              <a:buFont typeface="Arial"/>
+              <a:buNone/>
+              <a:defRPr sz="2800" b="0" i="0" u="none" strike="noStrike" cap="none">
+                <a:solidFill>
+                  <a:schemeClr val="dk1"/>
+                </a:solidFill>
+                <a:latin typeface="Arial"/>
+                <a:ea typeface="Arial"/>
+                <a:cs typeface="Arial"/>
+                <a:sym typeface="Arial"/>
+              </a:defRPr>
+            </a:lvl3pPr>
+            <a:lvl4pPr marR="0" lvl="3" algn="l" rtl="0">
+              <a:lnSpc>
+                <a:spcPct val="100000"/>
+              </a:lnSpc>
+              <a:spcBef>
+                <a:spcPts val="0"/>
+              </a:spcBef>
+              <a:spcAft>
+                <a:spcPts val="0"/>
+              </a:spcAft>
+              <a:buClr>
+                <a:schemeClr val="dk1"/>
+              </a:buClr>
+              <a:buSzPts val="2800"/>
+              <a:buFont typeface="Arial"/>
+              <a:buNone/>
+              <a:defRPr sz="2800" b="0" i="0" u="none" strike="noStrike" cap="none">
+                <a:solidFill>
+                  <a:schemeClr val="dk1"/>
+                </a:solidFill>
+                <a:latin typeface="Arial"/>
+                <a:ea typeface="Arial"/>
+                <a:cs typeface="Arial"/>
+                <a:sym typeface="Arial"/>
+              </a:defRPr>
+            </a:lvl4pPr>
+            <a:lvl5pPr marR="0" lvl="4" algn="l" rtl="0">
+              <a:lnSpc>
+                <a:spcPct val="100000"/>
+              </a:lnSpc>
+              <a:spcBef>
+                <a:spcPts val="0"/>
+              </a:spcBef>
+              <a:spcAft>
+                <a:spcPts val="0"/>
+              </a:spcAft>
+              <a:buClr>
+                <a:schemeClr val="dk1"/>
+              </a:buClr>
+              <a:buSzPts val="2800"/>
+              <a:buFont typeface="Arial"/>
+              <a:buNone/>
+              <a:defRPr sz="2800" b="0" i="0" u="none" strike="noStrike" cap="none">
+                <a:solidFill>
+                  <a:schemeClr val="dk1"/>
+                </a:solidFill>
+                <a:latin typeface="Arial"/>
+                <a:ea typeface="Arial"/>
+                <a:cs typeface="Arial"/>
+                <a:sym typeface="Arial"/>
+              </a:defRPr>
+            </a:lvl5pPr>
+            <a:lvl6pPr marR="0" lvl="5" algn="l" rtl="0">
+              <a:lnSpc>
+                <a:spcPct val="100000"/>
+              </a:lnSpc>
+              <a:spcBef>
+                <a:spcPts val="0"/>
+              </a:spcBef>
+              <a:spcAft>
+                <a:spcPts val="0"/>
+              </a:spcAft>
+              <a:buClr>
+                <a:schemeClr val="dk1"/>
+              </a:buClr>
+              <a:buSzPts val="2800"/>
+              <a:buFont typeface="Arial"/>
+              <a:buNone/>
+              <a:defRPr sz="2800" b="0" i="0" u="none" strike="noStrike" cap="none">
+                <a:solidFill>
+                  <a:schemeClr val="dk1"/>
+                </a:solidFill>
+                <a:latin typeface="Arial"/>
+                <a:ea typeface="Arial"/>
+                <a:cs typeface="Arial"/>
+                <a:sym typeface="Arial"/>
+              </a:defRPr>
+            </a:lvl6pPr>
+            <a:lvl7pPr marR="0" lvl="6" algn="l" rtl="0">
+              <a:lnSpc>
+                <a:spcPct val="100000"/>
+              </a:lnSpc>
+              <a:spcBef>
+                <a:spcPts val="0"/>
+              </a:spcBef>
+              <a:spcAft>
+                <a:spcPts val="0"/>
+              </a:spcAft>
+              <a:buClr>
+                <a:schemeClr val="dk1"/>
+              </a:buClr>
+              <a:buSzPts val="2800"/>
+              <a:buFont typeface="Arial"/>
+              <a:buNone/>
+              <a:defRPr sz="2800" b="0" i="0" u="none" strike="noStrike" cap="none">
+                <a:solidFill>
+                  <a:schemeClr val="dk1"/>
+                </a:solidFill>
+                <a:latin typeface="Arial"/>
+                <a:ea typeface="Arial"/>
+                <a:cs typeface="Arial"/>
+                <a:sym typeface="Arial"/>
+              </a:defRPr>
+            </a:lvl7pPr>
+            <a:lvl8pPr marR="0" lvl="7" algn="l" rtl="0">
+              <a:lnSpc>
+                <a:spcPct val="100000"/>
+              </a:lnSpc>
+              <a:spcBef>
+                <a:spcPts val="0"/>
+              </a:spcBef>
+              <a:spcAft>
+                <a:spcPts val="0"/>
+              </a:spcAft>
+              <a:buClr>
+                <a:schemeClr val="dk1"/>
+              </a:buClr>
+              <a:buSzPts val="2800"/>
+              <a:buFont typeface="Arial"/>
+              <a:buNone/>
+              <a:defRPr sz="2800" b="0" i="0" u="none" strike="noStrike" cap="none">
+                <a:solidFill>
+                  <a:schemeClr val="dk1"/>
+                </a:solidFill>
+                <a:latin typeface="Arial"/>
+                <a:ea typeface="Arial"/>
+                <a:cs typeface="Arial"/>
+                <a:sym typeface="Arial"/>
+              </a:defRPr>
+            </a:lvl8pPr>
+            <a:lvl9pPr marR="0" lvl="8" algn="l" rtl="0">
+              <a:lnSpc>
+                <a:spcPct val="100000"/>
+              </a:lnSpc>
+              <a:spcBef>
+                <a:spcPts val="0"/>
+              </a:spcBef>
+              <a:spcAft>
+                <a:spcPts val="0"/>
+              </a:spcAft>
+              <a:buClr>
+                <a:schemeClr val="dk1"/>
+              </a:buClr>
+              <a:buSzPts val="2800"/>
+              <a:buFont typeface="Arial"/>
+              <a:buNone/>
+              <a:defRPr sz="2800" b="0" i="0" u="none" strike="noStrike" cap="none">
+                <a:solidFill>
+                  <a:schemeClr val="dk1"/>
+                </a:solidFill>
+                <a:latin typeface="Arial"/>
+                <a:ea typeface="Arial"/>
+                <a:cs typeface="Arial"/>
+                <a:sym typeface="Arial"/>
+              </a:defRPr>
+            </a:lvl9pPr>
+          </a:lstStyle>
+          <a:p>
+            <a:pPr marL="285750" indent="-285750">
+              <a:buFontTx/>
+              <a:buChar char="-"/>
+            </a:pPr>
+            <a:r>
+              <a:rPr lang="en-US" sz="1800" dirty="0"/>
+              <a:t>Calculations run on GPU </a:t>
+            </a:r>
+          </a:p>
+          <a:p>
+            <a:pPr marL="285750" indent="-285750">
+              <a:buFontTx/>
+              <a:buChar char="-"/>
+            </a:pPr>
+            <a:r>
+              <a:rPr lang="en-US" sz="1800" dirty="0"/>
+              <a:t>Highly </a:t>
+            </a:r>
+            <a:r>
+              <a:rPr lang="en-US" sz="1800" dirty="0" err="1"/>
+              <a:t>parallelised</a:t>
+            </a:r>
+            <a:endParaRPr lang="en-US" sz="1800" dirty="0"/>
+          </a:p>
+          <a:p>
+            <a:pPr marL="285750" indent="-285750">
+              <a:buFontTx/>
+              <a:buChar char="-"/>
+            </a:pPr>
+            <a:r>
+              <a:rPr lang="en-US" sz="1800" dirty="0"/>
+              <a:t>Reduce batches</a:t>
+            </a:r>
+          </a:p>
+          <a:p>
+            <a:pPr marL="285750" indent="-285750">
+              <a:buFontTx/>
+              <a:buChar char="-"/>
+            </a:pPr>
+            <a:r>
+              <a:rPr lang="en-US" sz="1800" dirty="0"/>
+              <a:t>No layout invalidation</a:t>
+            </a:r>
+          </a:p>
+          <a:p>
+            <a:pPr marL="285750" indent="-285750">
+              <a:buFontTx/>
+              <a:buChar char="-"/>
+            </a:pPr>
+            <a:r>
+              <a:rPr lang="en-US" sz="1800" dirty="0"/>
+              <a:t>Reduce number of widgets used</a:t>
+            </a:r>
+          </a:p>
+          <a:p>
+            <a:pPr marL="285750" indent="-285750">
+              <a:buFontTx/>
+              <a:buChar char="-"/>
+            </a:pPr>
+            <a:endParaRPr lang="en-US" sz="1800" dirty="0"/>
+          </a:p>
+          <a:p>
+            <a:pPr marL="285750" indent="-285750">
+              <a:buFontTx/>
+              <a:buChar char="-"/>
+            </a:pPr>
+            <a:r>
+              <a:rPr lang="en-US" sz="1800" dirty="0">
+                <a:hlinkClick r:id="rId2"/>
+              </a:rPr>
+              <a:t>Unreal Fest 2024</a:t>
+            </a:r>
+            <a:endParaRPr lang="en-US" sz="1800" dirty="0"/>
+          </a:p>
+          <a:p>
+            <a:pPr marL="114300">
+              <a:buSzPts val="1800"/>
+            </a:pPr>
+            <a:endParaRPr lang="en-US" sz="1800" dirty="0"/>
+          </a:p>
+          <a:p>
+            <a:pPr marL="114300">
+              <a:buSzPts val="1800"/>
+            </a:pPr>
+            <a:endParaRPr lang="en-US" sz="1800" dirty="0"/>
+          </a:p>
+        </p:txBody>
+      </p:sp>
+    </p:spTree>
+    <p:extLst>
+      <p:ext uri="{BB962C8B-B14F-4D97-AF65-F5344CB8AC3E}">
+        <p14:creationId xmlns:p14="http://schemas.microsoft.com/office/powerpoint/2010/main" val="2280917369"/>
+      </p:ext>
+    </p:extLst>
+  </p:cSld>
+  <p:clrMapOvr>
+    <a:masterClrMapping/>
+  </p:clrMapOvr>
+</p:sld>
+</file>
+
 <file path=ppt/slides/slide2.xml><?xml version="1.0" encoding="utf-8"?>
 <p:sld xmlns:a="http://schemas.openxmlformats.org/drawingml/2006/main" xmlns:r="http://schemas.openxmlformats.org/officeDocument/2006/relationships" xmlns:p="http://schemas.openxmlformats.org/presentationml/2006/main">
   <p:cSld>
